--- a/results/mda5/MDA5_IFIH1_人脑与MS.pptx
+++ b/results/mda5/MDA5_IFIH1_人脑与MS.pptx
@@ -3894,45 +3894,6 @@
           </a:graphicData>
         </a:graphic>
       </p:graphicFrame>
-      <p:sp>
-        <p:nvSpPr>
-          <p:cNvPr id="5" name="Text 2"/>
-          <p:cNvSpPr txBox="1"/>
-          <p:nvPr/>
-        </p:nvSpPr>
-        <p:spPr>
-          <a:xfrm>
-            <a:off x="548640" y="4663440"/>
-            <a:ext cx="11064240" cy="365760"/>
-          </a:xfrm>
-          <a:prstGeom prst="rect">
-            <a:avLst/>
-          </a:prstGeom>
-          <a:noFill/>
-          <a:ln/>
-        </p:spPr>
-        <p:txBody>
-          <a:bodyPr wrap="square" lIns="0" tIns="0" rIns="0" bIns="0" rtlCol="0" anchor="ctr"/>
-          <a:lstStyle/>
-          <a:p>
-            <a:pPr indent="0" marL="0">
-              <a:buNone/>
-            </a:pPr>
-            <a:r>
-              <a:rPr lang="en-US" sz="1300" dirty="0">
-                <a:solidFill>
-                  <a:srgbClr val="6E6E6E"/>
-                </a:solidFill>
-                <a:latin typeface="Microsoft YaHei" pitchFamily="34" charset="0"/>
-                <a:ea typeface="Microsoft YaHei" pitchFamily="34" charset="-122"/>
-                <a:cs typeface="Microsoft YaHei" pitchFamily="34" charset="-120"/>
-              </a:rPr>
-              <a:t>灰质与白质分属不同研究：Macnair 2025 为唯一同时含两者的队列，存于 EGA 受控访问。</a:t>
-            </a:r>
-            <a:endParaRPr lang="en-US" sz="1300" dirty="0"/>
-          </a:p>
-        </p:txBody>
-      </p:sp>
     </p:spTree>
   </p:cSld>
   <p:clrMapOvr>

--- a/results/mda5/MDA5_IFIH1_人脑与MS.pptx
+++ b/results/mda5/MDA5_IFIH1_人脑与MS.pptx
@@ -1677,7 +1677,7 @@
         </p:nvSpPr>
         <p:spPr>
           <a:xfrm>
-            <a:off x="822960" y="2514600"/>
+            <a:off x="822960" y="2468880"/>
             <a:ext cx="10515600" cy="731520"/>
           </a:xfrm>
           <a:prstGeom prst="rect">
@@ -1694,7 +1694,7 @@
               <a:buNone/>
             </a:pPr>
             <a:r>
-              <a:rPr lang="en-US" sz="3600" b="1" dirty="0">
+              <a:rPr lang="en-US" sz="3400" b="1" dirty="0">
                 <a:solidFill>
                   <a:srgbClr val="000000"/>
                 </a:solidFill>
@@ -1704,7 +1704,7 @@
               </a:rPr>
               <a:t>MDA5（IFIH1）在人脑与多发性硬化中的表达</a:t>
             </a:r>
-            <a:endParaRPr lang="en-US" sz="3600" dirty="0"/>
+            <a:endParaRPr lang="en-US" sz="3400" dirty="0"/>
           </a:p>
         </p:txBody>
       </p:sp>
@@ -1716,8 +1716,8 @@
         </p:nvSpPr>
         <p:spPr>
           <a:xfrm>
-            <a:off x="822960" y="3429000"/>
-            <a:ext cx="10515600" cy="365760"/>
+            <a:off x="822960" y="3310128"/>
+            <a:ext cx="10515600" cy="457200"/>
           </a:xfrm>
           <a:prstGeom prst="rect">
             <a:avLst/>
@@ -1733,7 +1733,7 @@
               <a:buNone/>
             </a:pPr>
             <a:r>
-              <a:rPr lang="en-US" sz="1400" dirty="0">
+              <a:rPr lang="en-US" sz="2000" dirty="0">
                 <a:solidFill>
                   <a:srgbClr val="6E6E6E"/>
                 </a:solidFill>
@@ -1741,9 +1741,9 @@
                 <a:ea typeface="Microsoft YaHei" pitchFamily="34" charset="-122"/>
                 <a:cs typeface="Microsoft YaHei" pitchFamily="34" charset="-120"/>
               </a:rPr>
-              <a:t>CELLxGENE Census · GSE180759 · GSE279180 · GSE118257 · Schirmer 2019</a:t>
+              <a:t>正常与 MS ｜ 灰质与白质</a:t>
             </a:r>
-            <a:endParaRPr lang="en-US" sz="1400" dirty="0"/>
+            <a:endParaRPr lang="en-US" sz="2000" dirty="0"/>
           </a:p>
         </p:txBody>
       </p:sp>
@@ -1819,7 +1819,7 @@
         </p:nvSpPr>
         <p:spPr>
           <a:xfrm>
-            <a:off x="548640" y="329184"/>
+            <a:off x="548640" y="310896"/>
             <a:ext cx="11064240" cy="566928"/>
           </a:xfrm>
           <a:prstGeom prst="rect">
@@ -1836,7 +1836,7 @@
               <a:buNone/>
             </a:pPr>
             <a:r>
-              <a:rPr lang="en-US" sz="2700" b="1" dirty="0">
+              <a:rPr lang="en-US" sz="2600" b="1" dirty="0">
                 <a:solidFill>
                   <a:srgbClr val="000000"/>
                 </a:solidFill>
@@ -1846,7 +1846,7 @@
               </a:rPr>
               <a:t>限制</a:t>
             </a:r>
-            <a:endParaRPr lang="en-US" sz="2700" dirty="0"/>
+            <a:endParaRPr lang="en-US" sz="2600" dirty="0"/>
           </a:p>
         </p:txBody>
       </p:sp>
@@ -1858,8 +1858,251 @@
         </p:nvSpPr>
         <p:spPr>
           <a:xfrm>
-            <a:off x="548640" y="1325880"/>
-            <a:ext cx="3474720" cy="365760"/>
+            <a:off x="548640" y="1298448"/>
+            <a:ext cx="3931920" cy="384048"/>
+          </a:xfrm>
+          <a:prstGeom prst="rect">
+            <a:avLst/>
+          </a:prstGeom>
+          <a:noFill/>
+          <a:ln/>
+        </p:spPr>
+        <p:txBody>
+          <a:bodyPr wrap="square" lIns="0" tIns="0" rIns="0" bIns="0" rtlCol="0" anchor="ctr"/>
+          <a:lstStyle/>
+          <a:p>
+            <a:pPr indent="0" marL="0">
+              <a:buNone/>
+            </a:pPr>
+            <a:r>
+              <a:rPr lang="en-US" sz="1400" b="1" dirty="0">
+                <a:solidFill>
+                  <a:srgbClr val="000000"/>
+                </a:solidFill>
+                <a:latin typeface="Microsoft YaHei" pitchFamily="34" charset="0"/>
+                <a:ea typeface="Microsoft YaHei" pitchFamily="34" charset="-122"/>
+                <a:cs typeface="Microsoft YaHei" pitchFamily="34" charset="-120"/>
+              </a:rPr>
+              <a:t>灰质与白质来自不同研究</a:t>
+            </a:r>
+            <a:endParaRPr lang="en-US" sz="1400" dirty="0"/>
+          </a:p>
+        </p:txBody>
+      </p:sp>
+      <p:sp>
+        <p:nvSpPr>
+          <p:cNvPr id="5" name="Text 3"/>
+          <p:cNvSpPr txBox="1"/>
+          <p:nvPr/>
+        </p:nvSpPr>
+        <p:spPr>
+          <a:xfrm>
+            <a:off x="4572000" y="1298448"/>
+            <a:ext cx="7040880" cy="548640"/>
+          </a:xfrm>
+          <a:prstGeom prst="rect">
+            <a:avLst/>
+          </a:prstGeom>
+          <a:noFill/>
+          <a:ln/>
+        </p:spPr>
+        <p:txBody>
+          <a:bodyPr wrap="square" lIns="0" tIns="0" rIns="0" bIns="0" rtlCol="0" anchor="ctr"/>
+          <a:lstStyle/>
+          <a:p>
+            <a:pPr indent="0" marL="0">
+              <a:lnSpc>
+                <a:spcPts val="1700"/>
+              </a:lnSpc>
+              <a:buNone/>
+            </a:pPr>
+            <a:r>
+              <a:rPr lang="en-US" sz="1250" dirty="0">
+                <a:solidFill>
+                  <a:srgbClr val="6E6E6E"/>
+                </a:solidFill>
+                <a:latin typeface="Microsoft YaHei" pitchFamily="34" charset="0"/>
+                <a:ea typeface="Microsoft YaHei" pitchFamily="34" charset="-122"/>
+                <a:cs typeface="Microsoft YaHei" pitchFamily="34" charset="-120"/>
+              </a:rPr>
+              <a:t>无任何公开队列同时含两者；Macnair 2025 有，但在 EGA 受控访问</a:t>
+            </a:r>
+            <a:endParaRPr lang="en-US" sz="1250" dirty="0"/>
+          </a:p>
+        </p:txBody>
+      </p:sp>
+      <p:sp>
+        <p:nvSpPr>
+          <p:cNvPr id="6" name="Text 4"/>
+          <p:cNvSpPr txBox="1"/>
+          <p:nvPr/>
+        </p:nvSpPr>
+        <p:spPr>
+          <a:xfrm>
+            <a:off x="548640" y="2103120"/>
+            <a:ext cx="3931920" cy="384048"/>
+          </a:xfrm>
+          <a:prstGeom prst="rect">
+            <a:avLst/>
+          </a:prstGeom>
+          <a:noFill/>
+          <a:ln/>
+        </p:spPr>
+        <p:txBody>
+          <a:bodyPr wrap="square" lIns="0" tIns="0" rIns="0" bIns="0" rtlCol="0" anchor="ctr"/>
+          <a:lstStyle/>
+          <a:p>
+            <a:pPr indent="0" marL="0">
+              <a:buNone/>
+            </a:pPr>
+            <a:r>
+              <a:rPr lang="en-US" sz="1400" b="1" dirty="0">
+                <a:solidFill>
+                  <a:srgbClr val="000000"/>
+                </a:solidFill>
+                <a:latin typeface="Microsoft YaHei" pitchFamily="34" charset="0"/>
+                <a:ea typeface="Microsoft YaHei" pitchFamily="34" charset="-122"/>
+                <a:cs typeface="Microsoft YaHei" pitchFamily="34" charset="-120"/>
+              </a:rPr>
+              <a:t>正常灰质的小胶质仅 2 个供体</a:t>
+            </a:r>
+            <a:endParaRPr lang="en-US" sz="1400" dirty="0"/>
+          </a:p>
+        </p:txBody>
+      </p:sp>
+      <p:sp>
+        <p:nvSpPr>
+          <p:cNvPr id="7" name="Text 5"/>
+          <p:cNvSpPr txBox="1"/>
+          <p:nvPr/>
+        </p:nvSpPr>
+        <p:spPr>
+          <a:xfrm>
+            <a:off x="4572000" y="2103120"/>
+            <a:ext cx="7040880" cy="548640"/>
+          </a:xfrm>
+          <a:prstGeom prst="rect">
+            <a:avLst/>
+          </a:prstGeom>
+          <a:noFill/>
+          <a:ln/>
+        </p:spPr>
+        <p:txBody>
+          <a:bodyPr wrap="square" lIns="0" tIns="0" rIns="0" bIns="0" rtlCol="0" anchor="ctr"/>
+          <a:lstStyle/>
+          <a:p>
+            <a:pPr indent="0" marL="0">
+              <a:lnSpc>
+                <a:spcPts val="1700"/>
+              </a:lnSpc>
+              <a:buNone/>
+            </a:pPr>
+            <a:r>
+              <a:rPr lang="en-US" sz="1250" dirty="0">
+                <a:solidFill>
+                  <a:srgbClr val="6E6E6E"/>
+                </a:solidFill>
+                <a:latin typeface="Microsoft YaHei" pitchFamily="34" charset="0"/>
+                <a:ea typeface="Microsoft YaHei" pitchFamily="34" charset="-122"/>
+                <a:cs typeface="Microsoft YaHei" pitchFamily="34" charset="-120"/>
+              </a:rPr>
+              <a:t>因此“正常时两区室无差别”这一条在小胶质上无法判定</a:t>
+            </a:r>
+            <a:endParaRPr lang="en-US" sz="1250" dirty="0"/>
+          </a:p>
+        </p:txBody>
+      </p:sp>
+      <p:sp>
+        <p:nvSpPr>
+          <p:cNvPr id="8" name="Text 6"/>
+          <p:cNvSpPr txBox="1"/>
+          <p:nvPr/>
+        </p:nvSpPr>
+        <p:spPr>
+          <a:xfrm>
+            <a:off x="548640" y="2907792"/>
+            <a:ext cx="3931920" cy="384048"/>
+          </a:xfrm>
+          <a:prstGeom prst="rect">
+            <a:avLst/>
+          </a:prstGeom>
+          <a:noFill/>
+          <a:ln/>
+        </p:spPr>
+        <p:txBody>
+          <a:bodyPr wrap="square" lIns="0" tIns="0" rIns="0" bIns="0" rtlCol="0" anchor="ctr"/>
+          <a:lstStyle/>
+          <a:p>
+            <a:pPr indent="0" marL="0">
+              <a:buNone/>
+            </a:pPr>
+            <a:r>
+              <a:rPr lang="en-US" sz="1400" b="1" dirty="0">
+                <a:solidFill>
+                  <a:srgbClr val="000000"/>
+                </a:solidFill>
+                <a:latin typeface="Microsoft YaHei" pitchFamily="34" charset="0"/>
+                <a:ea typeface="Microsoft YaHei" pitchFamily="34" charset="-122"/>
+                <a:cs typeface="Microsoft YaHei" pitchFamily="34" charset="-120"/>
+              </a:rPr>
+              <a:t>两个白质队列存在系统偏移</a:t>
+            </a:r>
+            <a:endParaRPr lang="en-US" sz="1400" dirty="0"/>
+          </a:p>
+        </p:txBody>
+      </p:sp>
+      <p:sp>
+        <p:nvSpPr>
+          <p:cNvPr id="9" name="Text 7"/>
+          <p:cNvSpPr txBox="1"/>
+          <p:nvPr/>
+        </p:nvSpPr>
+        <p:spPr>
+          <a:xfrm>
+            <a:off x="4572000" y="2907792"/>
+            <a:ext cx="7040880" cy="548640"/>
+          </a:xfrm>
+          <a:prstGeom prst="rect">
+            <a:avLst/>
+          </a:prstGeom>
+          <a:noFill/>
+          <a:ln/>
+        </p:spPr>
+        <p:txBody>
+          <a:bodyPr wrap="square" lIns="0" tIns="0" rIns="0" bIns="0" rtlCol="0" anchor="ctr"/>
+          <a:lstStyle/>
+          <a:p>
+            <a:pPr indent="0" marL="0">
+              <a:lnSpc>
+                <a:spcPts val="1700"/>
+              </a:lnSpc>
+              <a:buNone/>
+            </a:pPr>
+            <a:r>
+              <a:rPr lang="en-US" sz="1250" dirty="0">
+                <a:solidFill>
+                  <a:srgbClr val="6E6E6E"/>
+                </a:solidFill>
+                <a:latin typeface="Microsoft YaHei" pitchFamily="34" charset="0"/>
+                <a:ea typeface="Microsoft YaHei" pitchFamily="34" charset="-122"/>
+                <a:cs typeface="Microsoft YaHei" pitchFamily="34" charset="-120"/>
+              </a:rPr>
+              <a:t>GSE180759 的绝对值约为 GSE279180 的一半，方向一致</a:t>
+            </a:r>
+            <a:endParaRPr lang="en-US" sz="1250" dirty="0"/>
+          </a:p>
+        </p:txBody>
+      </p:sp>
+      <p:sp>
+        <p:nvSpPr>
+          <p:cNvPr id="10" name="Text 8"/>
+          <p:cNvSpPr txBox="1"/>
+          <p:nvPr/>
+        </p:nvSpPr>
+        <p:spPr>
+          <a:xfrm>
+            <a:off x="548640" y="3712464"/>
+            <a:ext cx="3931920" cy="384048"/>
           </a:xfrm>
           <a:prstGeom prst="rect">
             <a:avLst/>
@@ -1891,14 +2134,14 @@
       </p:sp>
       <p:sp>
         <p:nvSpPr>
-          <p:cNvPr id="5" name="Text 3"/>
+          <p:cNvPr id="11" name="Text 9"/>
           <p:cNvSpPr txBox="1"/>
           <p:nvPr/>
         </p:nvSpPr>
         <p:spPr>
           <a:xfrm>
-            <a:off x="4114800" y="1325880"/>
-            <a:ext cx="7498080" cy="502920"/>
+            <a:off x="4572000" y="3712464"/>
+            <a:ext cx="7040880" cy="548640"/>
           </a:xfrm>
           <a:prstGeom prst="rect">
             <a:avLst/>
@@ -1925,7 +2168,7 @@
                 <a:ea typeface="Microsoft YaHei" pitchFamily="34" charset="-122"/>
                 <a:cs typeface="Microsoft YaHei" pitchFamily="34" charset="-120"/>
               </a:rPr>
-              <a:t>GSE279180 的 MS 小胶质深度为对照的 3.84 倍；配平后效应量由 4.13 降至 1.64</a:t>
+              <a:t>GSE279180 的 MS 小胶质深度为对照的 3.84 倍，已全程深度归一化</a:t>
             </a:r>
             <a:endParaRPr lang="en-US" sz="1250" dirty="0"/>
           </a:p>
@@ -1933,14 +2176,14 @@
       </p:sp>
       <p:sp>
         <p:nvSpPr>
-          <p:cNvPr id="6" name="Text 4"/>
+          <p:cNvPr id="12" name="Text 10"/>
           <p:cNvSpPr txBox="1"/>
           <p:nvPr/>
         </p:nvSpPr>
         <p:spPr>
           <a:xfrm>
-            <a:off x="548640" y="2121408"/>
-            <a:ext cx="3474720" cy="365760"/>
+            <a:off x="548640" y="4517136"/>
+            <a:ext cx="3931920" cy="384048"/>
           </a:xfrm>
           <a:prstGeom prst="rect">
             <a:avLst/>
@@ -1972,14 +2215,14 @@
       </p:sp>
       <p:sp>
         <p:nvSpPr>
-          <p:cNvPr id="7" name="Text 5"/>
+          <p:cNvPr id="13" name="Text 11"/>
           <p:cNvSpPr txBox="1"/>
           <p:nvPr/>
         </p:nvSpPr>
         <p:spPr>
           <a:xfrm>
-            <a:off x="4114800" y="2121408"/>
-            <a:ext cx="7498080" cy="502920"/>
+            <a:off x="4572000" y="4517136"/>
+            <a:ext cx="7040880" cy="548640"/>
           </a:xfrm>
           <a:prstGeom prst="rect">
             <a:avLst/>
@@ -2014,176 +2257,14 @@
       </p:sp>
       <p:sp>
         <p:nvSpPr>
-          <p:cNvPr id="8" name="Text 6"/>
+          <p:cNvPr id="14" name="Text 12"/>
           <p:cNvSpPr txBox="1"/>
           <p:nvPr/>
         </p:nvSpPr>
         <p:spPr>
           <a:xfrm>
-            <a:off x="548640" y="2916936"/>
-            <a:ext cx="3474720" cy="365760"/>
-          </a:xfrm>
-          <a:prstGeom prst="rect">
-            <a:avLst/>
-          </a:prstGeom>
-          <a:noFill/>
-          <a:ln/>
-        </p:spPr>
-        <p:txBody>
-          <a:bodyPr wrap="square" lIns="0" tIns="0" rIns="0" bIns="0" rtlCol="0" anchor="ctr"/>
-          <a:lstStyle/>
-          <a:p>
-            <a:pPr indent="0" marL="0">
-              <a:buNone/>
-            </a:pPr>
-            <a:r>
-              <a:rPr lang="en-US" sz="1400" b="1" dirty="0">
-                <a:solidFill>
-                  <a:srgbClr val="000000"/>
-                </a:solidFill>
-                <a:latin typeface="Microsoft YaHei" pitchFamily="34" charset="0"/>
-                <a:ea typeface="Microsoft YaHei" pitchFamily="34" charset="-122"/>
-                <a:cs typeface="Microsoft YaHei" pitchFamily="34" charset="-120"/>
-              </a:rPr>
-              <a:t>对照脑数量过少</a:t>
-            </a:r>
-            <a:endParaRPr lang="en-US" sz="1400" dirty="0"/>
-          </a:p>
-        </p:txBody>
-      </p:sp>
-      <p:sp>
-        <p:nvSpPr>
-          <p:cNvPr id="9" name="Text 7"/>
-          <p:cNvSpPr txBox="1"/>
-          <p:nvPr/>
-        </p:nvSpPr>
-        <p:spPr>
-          <a:xfrm>
-            <a:off x="4114800" y="2916936"/>
-            <a:ext cx="7498080" cy="502920"/>
-          </a:xfrm>
-          <a:prstGeom prst="rect">
-            <a:avLst/>
-          </a:prstGeom>
-          <a:noFill/>
-          <a:ln/>
-        </p:spPr>
-        <p:txBody>
-          <a:bodyPr wrap="square" lIns="0" tIns="0" rIns="0" bIns="0" rtlCol="0" anchor="ctr"/>
-          <a:lstStyle/>
-          <a:p>
-            <a:pPr indent="0" marL="0">
-              <a:lnSpc>
-                <a:spcPts val="1700"/>
-              </a:lnSpc>
-              <a:buNone/>
-            </a:pPr>
-            <a:r>
-              <a:rPr lang="en-US" sz="1250" dirty="0">
-                <a:solidFill>
-                  <a:srgbClr val="6E6E6E"/>
-                </a:solidFill>
-                <a:latin typeface="Microsoft YaHei" pitchFamily="34" charset="0"/>
-                <a:ea typeface="Microsoft YaHei" pitchFamily="34" charset="-122"/>
-                <a:cs typeface="Microsoft YaHei" pitchFamily="34" charset="-120"/>
-              </a:rPr>
-              <a:t>GSE180759 仅 3 个对照脑，可用于髓系检验者 2 个，p 值下限 0.095</a:t>
-            </a:r>
-            <a:endParaRPr lang="en-US" sz="1250" dirty="0"/>
-          </a:p>
-        </p:txBody>
-      </p:sp>
-      <p:sp>
-        <p:nvSpPr>
-          <p:cNvPr id="10" name="Text 8"/>
-          <p:cNvSpPr txBox="1"/>
-          <p:nvPr/>
-        </p:nvSpPr>
-        <p:spPr>
-          <a:xfrm>
-            <a:off x="548640" y="3712464"/>
-            <a:ext cx="3474720" cy="365760"/>
-          </a:xfrm>
-          <a:prstGeom prst="rect">
-            <a:avLst/>
-          </a:prstGeom>
-          <a:noFill/>
-          <a:ln/>
-        </p:spPr>
-        <p:txBody>
-          <a:bodyPr wrap="square" lIns="0" tIns="0" rIns="0" bIns="0" rtlCol="0" anchor="ctr"/>
-          <a:lstStyle/>
-          <a:p>
-            <a:pPr indent="0" marL="0">
-              <a:buNone/>
-            </a:pPr>
-            <a:r>
-              <a:rPr lang="en-US" sz="1400" b="1" dirty="0">
-                <a:solidFill>
-                  <a:srgbClr val="000000"/>
-                </a:solidFill>
-                <a:latin typeface="Microsoft YaHei" pitchFamily="34" charset="0"/>
-                <a:ea typeface="Microsoft YaHei" pitchFamily="34" charset="-122"/>
-                <a:cs typeface="Microsoft YaHei" pitchFamily="34" charset="-120"/>
-              </a:rPr>
-              <a:t>灰白质比较跨研究</a:t>
-            </a:r>
-            <a:endParaRPr lang="en-US" sz="1400" dirty="0"/>
-          </a:p>
-        </p:txBody>
-      </p:sp>
-      <p:sp>
-        <p:nvSpPr>
-          <p:cNvPr id="11" name="Text 9"/>
-          <p:cNvSpPr txBox="1"/>
-          <p:nvPr/>
-        </p:nvSpPr>
-        <p:spPr>
-          <a:xfrm>
-            <a:off x="4114800" y="3712464"/>
-            <a:ext cx="7498080" cy="502920"/>
-          </a:xfrm>
-          <a:prstGeom prst="rect">
-            <a:avLst/>
-          </a:prstGeom>
-          <a:noFill/>
-          <a:ln/>
-        </p:spPr>
-        <p:txBody>
-          <a:bodyPr wrap="square" lIns="0" tIns="0" rIns="0" bIns="0" rtlCol="0" anchor="ctr"/>
-          <a:lstStyle/>
-          <a:p>
-            <a:pPr indent="0" marL="0">
-              <a:lnSpc>
-                <a:spcPts val="1700"/>
-              </a:lnSpc>
-              <a:buNone/>
-            </a:pPr>
-            <a:r>
-              <a:rPr lang="en-US" sz="1250" dirty="0">
-                <a:solidFill>
-                  <a:srgbClr val="6E6E6E"/>
-                </a:solidFill>
-                <a:latin typeface="Microsoft YaHei" pitchFamily="34" charset="0"/>
-                <a:ea typeface="Microsoft YaHei" pitchFamily="34" charset="-122"/>
-                <a:cs typeface="Microsoft YaHei" pitchFamily="34" charset="-120"/>
-              </a:rPr>
-              <a:t>灰质来自 Schirmer，白质来自另外三项研究</a:t>
-            </a:r>
-            <a:endParaRPr lang="en-US" sz="1250" dirty="0"/>
-          </a:p>
-        </p:txBody>
-      </p:sp>
-      <p:sp>
-        <p:nvSpPr>
-          <p:cNvPr id="12" name="Text 10"/>
-          <p:cNvSpPr txBox="1"/>
-          <p:nvPr/>
-        </p:nvSpPr>
-        <p:spPr>
-          <a:xfrm>
-            <a:off x="548640" y="4507992"/>
-            <a:ext cx="3474720" cy="365760"/>
+            <a:off x="548640" y="5321808"/>
+            <a:ext cx="3931920" cy="384048"/>
           </a:xfrm>
           <a:prstGeom prst="rect">
             <a:avLst/>
@@ -2215,14 +2296,14 @@
       </p:sp>
       <p:sp>
         <p:nvSpPr>
-          <p:cNvPr id="13" name="Text 11"/>
+          <p:cNvPr id="15" name="Text 13"/>
           <p:cNvSpPr txBox="1"/>
           <p:nvPr/>
         </p:nvSpPr>
         <p:spPr>
           <a:xfrm>
-            <a:off x="4114800" y="4507992"/>
-            <a:ext cx="7498080" cy="502920"/>
+            <a:off x="4572000" y="5321808"/>
+            <a:ext cx="7040880" cy="548640"/>
           </a:xfrm>
           <a:prstGeom prst="rect">
             <a:avLst/>
@@ -2250,87 +2331,6 @@
                 <a:cs typeface="Microsoft YaHei" pitchFamily="34" charset="-120"/>
               </a:rPr>
               <a:t>人类 MS 脑组织无任何 MDA5 蛋白测量</a:t>
-            </a:r>
-            <a:endParaRPr lang="en-US" sz="1250" dirty="0"/>
-          </a:p>
-        </p:txBody>
-      </p:sp>
-      <p:sp>
-        <p:nvSpPr>
-          <p:cNvPr id="14" name="Text 12"/>
-          <p:cNvSpPr txBox="1"/>
-          <p:nvPr/>
-        </p:nvSpPr>
-        <p:spPr>
-          <a:xfrm>
-            <a:off x="548640" y="5303520"/>
-            <a:ext cx="3474720" cy="365760"/>
-          </a:xfrm>
-          <a:prstGeom prst="rect">
-            <a:avLst/>
-          </a:prstGeom>
-          <a:noFill/>
-          <a:ln/>
-        </p:spPr>
-        <p:txBody>
-          <a:bodyPr wrap="square" lIns="0" tIns="0" rIns="0" bIns="0" rtlCol="0" anchor="ctr"/>
-          <a:lstStyle/>
-          <a:p>
-            <a:pPr indent="0" marL="0">
-              <a:buNone/>
-            </a:pPr>
-            <a:r>
-              <a:rPr lang="en-US" sz="1400" b="1" dirty="0">
-                <a:solidFill>
-                  <a:srgbClr val="000000"/>
-                </a:solidFill>
-                <a:latin typeface="Microsoft YaHei" pitchFamily="34" charset="0"/>
-                <a:ea typeface="Microsoft YaHei" pitchFamily="34" charset="-122"/>
-                <a:cs typeface="Microsoft YaHei" pitchFamily="34" charset="-120"/>
-              </a:rPr>
-              <a:t>环境 RNA 未排除</a:t>
-            </a:r>
-            <a:endParaRPr lang="en-US" sz="1400" dirty="0"/>
-          </a:p>
-        </p:txBody>
-      </p:sp>
-      <p:sp>
-        <p:nvSpPr>
-          <p:cNvPr id="15" name="Text 13"/>
-          <p:cNvSpPr txBox="1"/>
-          <p:nvPr/>
-        </p:nvSpPr>
-        <p:spPr>
-          <a:xfrm>
-            <a:off x="4114800" y="5303520"/>
-            <a:ext cx="7498080" cy="502920"/>
-          </a:xfrm>
-          <a:prstGeom prst="rect">
-            <a:avLst/>
-          </a:prstGeom>
-          <a:noFill/>
-          <a:ln/>
-        </p:spPr>
-        <p:txBody>
-          <a:bodyPr wrap="square" lIns="0" tIns="0" rIns="0" bIns="0" rtlCol="0" anchor="ctr"/>
-          <a:lstStyle/>
-          <a:p>
-            <a:pPr indent="0" marL="0">
-              <a:lnSpc>
-                <a:spcPts val="1700"/>
-              </a:lnSpc>
-              <a:buNone/>
-            </a:pPr>
-            <a:r>
-              <a:rPr lang="en-US" sz="1250" dirty="0">
-                <a:solidFill>
-                  <a:srgbClr val="6E6E6E"/>
-                </a:solidFill>
-                <a:latin typeface="Microsoft YaHei" pitchFamily="34" charset="0"/>
-                <a:ea typeface="Microsoft YaHei" pitchFamily="34" charset="-122"/>
-                <a:cs typeface="Microsoft YaHei" pitchFamily="34" charset="-120"/>
-              </a:rPr>
-              <a:t>GSE180759 中小胶质与少突胶质的 IFIH1 检出率跨文库相关，Spearman ρ = 0.63</a:t>
             </a:r>
             <a:endParaRPr lang="en-US" sz="1250" dirty="0"/>
           </a:p>
@@ -2408,7 +2408,7 @@
         </p:nvSpPr>
         <p:spPr>
           <a:xfrm>
-            <a:off x="548640" y="329184"/>
+            <a:off x="548640" y="310896"/>
             <a:ext cx="11064240" cy="566928"/>
           </a:xfrm>
           <a:prstGeom prst="rect">
@@ -2425,7 +2425,7 @@
               <a:buNone/>
             </a:pPr>
             <a:r>
-              <a:rPr lang="en-US" sz="2700" b="1" dirty="0">
+              <a:rPr lang="en-US" sz="2600" b="1" dirty="0">
                 <a:solidFill>
                   <a:srgbClr val="000000"/>
                 </a:solidFill>
@@ -2433,9 +2433,87 @@
                 <a:ea typeface="Microsoft YaHei" pitchFamily="34" charset="-122"/>
                 <a:cs typeface="Microsoft YaHei" pitchFamily="34" charset="-120"/>
               </a:rPr>
-              <a:t>数据</a:t>
+              <a:t>两个问题</a:t>
             </a:r>
-            <a:endParaRPr lang="en-US" sz="2700" dirty="0"/>
+            <a:endParaRPr lang="en-US" sz="2600" dirty="0"/>
+          </a:p>
+        </p:txBody>
+      </p:sp>
+      <p:sp>
+        <p:nvSpPr>
+          <p:cNvPr id="4" name="Text 2"/>
+          <p:cNvSpPr txBox="1"/>
+          <p:nvPr/>
+        </p:nvSpPr>
+        <p:spPr>
+          <a:xfrm>
+            <a:off x="685800" y="1115568"/>
+            <a:ext cx="10972800" cy="402336"/>
+          </a:xfrm>
+          <a:prstGeom prst="rect">
+            <a:avLst/>
+          </a:prstGeom>
+          <a:noFill/>
+          <a:ln/>
+        </p:spPr>
+        <p:txBody>
+          <a:bodyPr wrap="square" lIns="0" tIns="0" rIns="0" bIns="0" rtlCol="0" anchor="ctr"/>
+          <a:lstStyle/>
+          <a:p>
+            <a:pPr indent="0" marL="0">
+              <a:buNone/>
+            </a:pPr>
+            <a:r>
+              <a:rPr lang="en-US" sz="1800" b="1" dirty="0">
+                <a:solidFill>
+                  <a:srgbClr val="000000"/>
+                </a:solidFill>
+                <a:latin typeface="Microsoft YaHei" pitchFamily="34" charset="0"/>
+                <a:ea typeface="Microsoft YaHei" pitchFamily="34" charset="-122"/>
+                <a:cs typeface="Microsoft YaHei" pitchFamily="34" charset="-120"/>
+              </a:rPr>
+              <a:t>一　正常人脑中 MDA5 由哪些细胞表达？灰质与白质是否不同？</a:t>
+            </a:r>
+            <a:endParaRPr lang="en-US" sz="1800" dirty="0"/>
+          </a:p>
+        </p:txBody>
+      </p:sp>
+      <p:sp>
+        <p:nvSpPr>
+          <p:cNvPr id="5" name="Text 3"/>
+          <p:cNvSpPr txBox="1"/>
+          <p:nvPr/>
+        </p:nvSpPr>
+        <p:spPr>
+          <a:xfrm>
+            <a:off x="685800" y="1645920"/>
+            <a:ext cx="10972800" cy="402336"/>
+          </a:xfrm>
+          <a:prstGeom prst="rect">
+            <a:avLst/>
+          </a:prstGeom>
+          <a:noFill/>
+          <a:ln/>
+        </p:spPr>
+        <p:txBody>
+          <a:bodyPr wrap="square" lIns="0" tIns="0" rIns="0" bIns="0" rtlCol="0" anchor="ctr"/>
+          <a:lstStyle/>
+          <a:p>
+            <a:pPr indent="0" marL="0">
+              <a:buNone/>
+            </a:pPr>
+            <a:r>
+              <a:rPr lang="en-US" sz="1800" b="1" dirty="0">
+                <a:solidFill>
+                  <a:srgbClr val="000000"/>
+                </a:solidFill>
+                <a:latin typeface="Microsoft YaHei" pitchFamily="34" charset="0"/>
+                <a:ea typeface="Microsoft YaHei" pitchFamily="34" charset="-122"/>
+                <a:cs typeface="Microsoft YaHei" pitchFamily="34" charset="-120"/>
+              </a:rPr>
+              <a:t>二　MS 中这一分布如何改变？灰质与白质的改变是否相同？</a:t>
+            </a:r>
+            <a:endParaRPr lang="en-US" sz="1800" dirty="0"/>
           </a:p>
         </p:txBody>
       </p:sp>
@@ -2454,7 +2532,7 @@
           </p:nvPr>
         </p:nvGraphicFramePr>
         <p:xfrm>
-          <a:off x="548640" y="1234440"/>
+          <a:off x="548640" y="2487168"/>
           <a:ext cx="11064240" cy="914400"/>
         </p:xfrm>
         <a:graphic>
@@ -2462,13 +2540,13 @@
             <a:tbl>
               <a:tblPr/>
               <a:tblGrid>
-                <a:gridCol w="3200400"/>
+                <a:gridCol w="3291840"/>
                 <a:gridCol w="2743200"/>
                 <a:gridCol w="1920240"/>
                 <a:gridCol w="1737360"/>
-                <a:gridCol w="1463040"/>
+                <a:gridCol w="1371600"/>
               </a:tblGrid>
-              <a:tr h="457200">
+              <a:tr h="420624">
                 <a:tc>
                   <a:txBody>
                     <a:bodyPr/>
@@ -2478,7 +2556,7 @@
                         <a:buNone/>
                       </a:pPr>
                       <a:r>
-                        <a:rPr lang="en-US" sz="1300" b="1" dirty="0">
+                        <a:rPr lang="en-US" sz="1250" b="1" dirty="0">
                           <a:solidFill>
                             <a:srgbClr val="000000"/>
                           </a:solidFill>
@@ -2488,7 +2566,7 @@
                         </a:rPr>
                         <a:t>队列</a:t>
                       </a:r>
-                      <a:endParaRPr lang="en-US" sz="1300" dirty="0">
+                      <a:endParaRPr lang="en-US" sz="1250" dirty="0">
                         <a:latin typeface="Microsoft YaHei" charset="0"/>
                         <a:ea typeface="Microsoft YaHei" charset="0"/>
                         <a:cs typeface="Microsoft YaHei" charset="0"/>
@@ -2525,7 +2603,7 @@
                         <a:buNone/>
                       </a:pPr>
                       <a:r>
-                        <a:rPr lang="en-US" sz="1300" b="1" dirty="0">
+                        <a:rPr lang="en-US" sz="1250" b="1" dirty="0">
                           <a:solidFill>
                             <a:srgbClr val="000000"/>
                           </a:solidFill>
@@ -2533,9 +2611,9 @@
                           <a:ea typeface="Microsoft YaHei" pitchFamily="34" charset="-122"/>
                           <a:cs typeface="Microsoft YaHei" pitchFamily="34" charset="-120"/>
                         </a:rPr>
-                        <a:t>组织</a:t>
+                        <a:t>区室</a:t>
                       </a:r>
-                      <a:endParaRPr lang="en-US" sz="1300" dirty="0">
+                      <a:endParaRPr lang="en-US" sz="1250" dirty="0">
                         <a:latin typeface="Microsoft YaHei" charset="0"/>
                         <a:ea typeface="Microsoft YaHei" charset="0"/>
                         <a:cs typeface="Microsoft YaHei" charset="0"/>
@@ -2572,7 +2650,7 @@
                         <a:buNone/>
                       </a:pPr>
                       <a:r>
-                        <a:rPr lang="en-US" sz="1300" b="1" dirty="0">
+                        <a:rPr lang="en-US" sz="1250" b="1" dirty="0">
                           <a:solidFill>
                             <a:srgbClr val="000000"/>
                           </a:solidFill>
@@ -2582,7 +2660,7 @@
                         </a:rPr>
                         <a:t>供体</a:t>
                       </a:r>
-                      <a:endParaRPr lang="en-US" sz="1300" dirty="0">
+                      <a:endParaRPr lang="en-US" sz="1250" dirty="0">
                         <a:latin typeface="Microsoft YaHei" charset="0"/>
                         <a:ea typeface="Microsoft YaHei" charset="0"/>
                         <a:cs typeface="Microsoft YaHei" charset="0"/>
@@ -2619,7 +2697,7 @@
                         <a:buNone/>
                       </a:pPr>
                       <a:r>
-                        <a:rPr lang="en-US" sz="1300" b="1" dirty="0">
+                        <a:rPr lang="en-US" sz="1250" b="1" dirty="0">
                           <a:solidFill>
                             <a:srgbClr val="000000"/>
                           </a:solidFill>
@@ -2629,7 +2707,7 @@
                         </a:rPr>
                         <a:t>核数</a:t>
                       </a:r>
-                      <a:endParaRPr lang="en-US" sz="1300" dirty="0">
+                      <a:endParaRPr lang="en-US" sz="1250" dirty="0">
                         <a:latin typeface="Microsoft YaHei" charset="0"/>
                         <a:ea typeface="Microsoft YaHei" charset="0"/>
                         <a:cs typeface="Microsoft YaHei" charset="0"/>
@@ -2666,7 +2744,7 @@
                         <a:buNone/>
                       </a:pPr>
                       <a:r>
-                        <a:rPr lang="en-US" sz="1300" b="1" dirty="0">
+                        <a:rPr lang="en-US" sz="1250" b="1" dirty="0">
                           <a:solidFill>
                             <a:srgbClr val="000000"/>
                           </a:solidFill>
@@ -2674,9 +2752,9 @@
                           <a:ea typeface="Microsoft YaHei" pitchFamily="34" charset="-122"/>
                           <a:cs typeface="Microsoft YaHei" pitchFamily="34" charset="-120"/>
                         </a:rPr>
-                        <a:t>用途</a:t>
+                        <a:t>承担</a:t>
                       </a:r>
-                      <a:endParaRPr lang="en-US" sz="1300" dirty="0">
+                      <a:endParaRPr lang="en-US" sz="1250" dirty="0">
                         <a:latin typeface="Microsoft YaHei" charset="0"/>
                         <a:ea typeface="Microsoft YaHei" charset="0"/>
                         <a:cs typeface="Microsoft YaHei" charset="0"/>
@@ -2705,7 +2783,7 @@
                   </a:tcPr>
                 </a:tc>
               </a:tr>
-              <a:tr h="457200">
+              <a:tr h="420624">
                 <a:tc>
                   <a:txBody>
                     <a:bodyPr/>
@@ -2715,7 +2793,7 @@
                         <a:buNone/>
                       </a:pPr>
                       <a:r>
-                        <a:rPr lang="en-US" sz="1300" dirty="0">
+                        <a:rPr lang="en-US" sz="1250" dirty="0">
                           <a:solidFill>
                             <a:srgbClr val="000000"/>
                           </a:solidFill>
@@ -2725,7 +2803,7 @@
                         </a:rPr>
                         <a:t>CELLxGENE Census</a:t>
                       </a:r>
-                      <a:endParaRPr lang="en-US" sz="1300" dirty="0">
+                      <a:endParaRPr lang="en-US" sz="1250" dirty="0">
                         <a:latin typeface="Microsoft YaHei" charset="0"/>
                         <a:ea typeface="Microsoft YaHei" charset="0"/>
                         <a:cs typeface="Microsoft YaHei" charset="0"/>
@@ -2762,7 +2840,7 @@
                         <a:buNone/>
                       </a:pPr>
                       <a:r>
-                        <a:rPr lang="en-US" sz="1300" dirty="0">
+                        <a:rPr lang="en-US" sz="1250" dirty="0">
                           <a:solidFill>
                             <a:srgbClr val="000000"/>
                           </a:solidFill>
@@ -2770,9 +2848,9 @@
                           <a:ea typeface="Microsoft YaHei" pitchFamily="34" charset="-122"/>
                           <a:cs typeface="Microsoft YaHei" pitchFamily="34" charset="-120"/>
                         </a:rPr>
-                        <a:t>正常人脑</a:t>
+                        <a:t>正常脑（灰质区域）</a:t>
                       </a:r>
-                      <a:endParaRPr lang="en-US" sz="1300" dirty="0">
+                      <a:endParaRPr lang="en-US" sz="1250" dirty="0">
                         <a:latin typeface="Microsoft YaHei" charset="0"/>
                         <a:ea typeface="Microsoft YaHei" charset="0"/>
                         <a:cs typeface="Microsoft YaHei" charset="0"/>
@@ -2809,7 +2887,7 @@
                         <a:buNone/>
                       </a:pPr>
                       <a:r>
-                        <a:rPr lang="en-US" sz="1300" dirty="0">
+                        <a:rPr lang="en-US" sz="1250" dirty="0">
                           <a:solidFill>
                             <a:srgbClr val="000000"/>
                           </a:solidFill>
@@ -2819,7 +2897,7 @@
                         </a:rPr>
                         <a:t>783</a:t>
                       </a:r>
-                      <a:endParaRPr lang="en-US" sz="1300" dirty="0">
+                      <a:endParaRPr lang="en-US" sz="1250" dirty="0">
                         <a:latin typeface="Microsoft YaHei" charset="0"/>
                         <a:ea typeface="Microsoft YaHei" charset="0"/>
                         <a:cs typeface="Microsoft YaHei" charset="0"/>
@@ -2856,7 +2934,7 @@
                         <a:buNone/>
                       </a:pPr>
                       <a:r>
-                        <a:rPr lang="en-US" sz="1300" dirty="0">
+                        <a:rPr lang="en-US" sz="1250" dirty="0">
                           <a:solidFill>
                             <a:srgbClr val="000000"/>
                           </a:solidFill>
@@ -2866,7 +2944,7 @@
                         </a:rPr>
                         <a:t>18 551 076</a:t>
                       </a:r>
-                      <a:endParaRPr lang="en-US" sz="1300" dirty="0">
+                      <a:endParaRPr lang="en-US" sz="1250" dirty="0">
                         <a:latin typeface="Microsoft YaHei" charset="0"/>
                         <a:ea typeface="Microsoft YaHei" charset="0"/>
                         <a:cs typeface="Microsoft YaHei" charset="0"/>
@@ -2903,7 +2981,7 @@
                         <a:buNone/>
                       </a:pPr>
                       <a:r>
-                        <a:rPr lang="en-US" sz="1300" dirty="0">
+                        <a:rPr lang="en-US" sz="1250" dirty="0">
                           <a:solidFill>
                             <a:srgbClr val="000000"/>
                           </a:solidFill>
@@ -2911,9 +2989,9 @@
                           <a:ea typeface="Microsoft YaHei" pitchFamily="34" charset="-122"/>
                           <a:cs typeface="Microsoft YaHei" pitchFamily="34" charset="-120"/>
                         </a:rPr>
-                        <a:t>基线</a:t>
+                        <a:t>细胞类型次序</a:t>
                       </a:r>
-                      <a:endParaRPr lang="en-US" sz="1300" dirty="0">
+                      <a:endParaRPr lang="en-US" sz="1250" dirty="0">
                         <a:latin typeface="Microsoft YaHei" charset="0"/>
                         <a:ea typeface="Microsoft YaHei" charset="0"/>
                         <a:cs typeface="Microsoft YaHei" charset="0"/>
@@ -2942,7 +3020,7 @@
                   </a:tcPr>
                 </a:tc>
               </a:tr>
-              <a:tr h="457200">
+              <a:tr h="420624">
                 <a:tc>
                   <a:txBody>
                     <a:bodyPr/>
@@ -2952,7 +3030,7 @@
                         <a:buNone/>
                       </a:pPr>
                       <a:r>
-                        <a:rPr lang="en-US" sz="1300" dirty="0">
+                        <a:rPr lang="en-US" sz="1250" dirty="0">
                           <a:solidFill>
                             <a:srgbClr val="000000"/>
                           </a:solidFill>
@@ -2962,7 +3040,7 @@
                         </a:rPr>
                         <a:t>GSE180759  Absinta 2021</a:t>
                       </a:r>
-                      <a:endParaRPr lang="en-US" sz="1300" dirty="0">
+                      <a:endParaRPr lang="en-US" sz="1250" dirty="0">
                         <a:latin typeface="Microsoft YaHei" charset="0"/>
                         <a:ea typeface="Microsoft YaHei" charset="0"/>
                         <a:cs typeface="Microsoft YaHei" charset="0"/>
@@ -2999,7 +3077,7 @@
                         <a:buNone/>
                       </a:pPr>
                       <a:r>
-                        <a:rPr lang="en-US" sz="1300" dirty="0">
+                        <a:rPr lang="en-US" sz="1250" dirty="0">
                           <a:solidFill>
                             <a:srgbClr val="000000"/>
                           </a:solidFill>
@@ -3007,9 +3085,9 @@
                           <a:ea typeface="Microsoft YaHei" pitchFamily="34" charset="-122"/>
                           <a:cs typeface="Microsoft YaHei" pitchFamily="34" charset="-120"/>
                         </a:rPr>
-                        <a:t>皮层下白质，MRI 分期</a:t>
+                        <a:t>皮层下白质</a:t>
                       </a:r>
-                      <a:endParaRPr lang="en-US" sz="1300" dirty="0">
+                      <a:endParaRPr lang="en-US" sz="1250" dirty="0">
                         <a:latin typeface="Microsoft YaHei" charset="0"/>
                         <a:ea typeface="Microsoft YaHei" charset="0"/>
                         <a:cs typeface="Microsoft YaHei" charset="0"/>
@@ -3046,7 +3124,7 @@
                         <a:buNone/>
                       </a:pPr>
                       <a:r>
-                        <a:rPr lang="en-US" sz="1300" dirty="0">
+                        <a:rPr lang="en-US" sz="1250" dirty="0">
                           <a:solidFill>
                             <a:srgbClr val="000000"/>
                           </a:solidFill>
@@ -3056,7 +3134,7 @@
                         </a:rPr>
                         <a:t>5 MS + 3 对照</a:t>
                       </a:r>
-                      <a:endParaRPr lang="en-US" sz="1300" dirty="0">
+                      <a:endParaRPr lang="en-US" sz="1250" dirty="0">
                         <a:latin typeface="Microsoft YaHei" charset="0"/>
                         <a:ea typeface="Microsoft YaHei" charset="0"/>
                         <a:cs typeface="Microsoft YaHei" charset="0"/>
@@ -3093,7 +3171,7 @@
                         <a:buNone/>
                       </a:pPr>
                       <a:r>
-                        <a:rPr lang="en-US" sz="1300" dirty="0">
+                        <a:rPr lang="en-US" sz="1250" dirty="0">
                           <a:solidFill>
                             <a:srgbClr val="000000"/>
                           </a:solidFill>
@@ -3103,7 +3181,7 @@
                         </a:rPr>
                         <a:t>66 432</a:t>
                       </a:r>
-                      <a:endParaRPr lang="en-US" sz="1300" dirty="0">
+                      <a:endParaRPr lang="en-US" sz="1250" dirty="0">
                         <a:latin typeface="Microsoft YaHei" charset="0"/>
                         <a:ea typeface="Microsoft YaHei" charset="0"/>
                         <a:cs typeface="Microsoft YaHei" charset="0"/>
@@ -3140,7 +3218,7 @@
                         <a:buNone/>
                       </a:pPr>
                       <a:r>
-                        <a:rPr lang="en-US" sz="1300" dirty="0">
+                        <a:rPr lang="en-US" sz="1250" dirty="0">
                           <a:solidFill>
                             <a:srgbClr val="000000"/>
                           </a:solidFill>
@@ -3148,9 +3226,9 @@
                           <a:ea typeface="Microsoft YaHei" pitchFamily="34" charset="-122"/>
                           <a:cs typeface="Microsoft YaHei" pitchFamily="34" charset="-120"/>
                         </a:rPr>
-                        <a:t>病灶分期</a:t>
+                        <a:t>白质 · 病灶分期</a:t>
                       </a:r>
-                      <a:endParaRPr lang="en-US" sz="1300" dirty="0">
+                      <a:endParaRPr lang="en-US" sz="1250" dirty="0">
                         <a:latin typeface="Microsoft YaHei" charset="0"/>
                         <a:ea typeface="Microsoft YaHei" charset="0"/>
                         <a:cs typeface="Microsoft YaHei" charset="0"/>
@@ -3179,7 +3257,7 @@
                   </a:tcPr>
                 </a:tc>
               </a:tr>
-              <a:tr h="457200">
+              <a:tr h="420624">
                 <a:tc>
                   <a:txBody>
                     <a:bodyPr/>
@@ -3189,7 +3267,7 @@
                         <a:buNone/>
                       </a:pPr>
                       <a:r>
-                        <a:rPr lang="en-US" sz="1300" dirty="0">
+                        <a:rPr lang="en-US" sz="1250" dirty="0">
                           <a:solidFill>
                             <a:srgbClr val="000000"/>
                           </a:solidFill>
@@ -3199,7 +3277,7 @@
                         </a:rPr>
                         <a:t>GSE279180  Lerma-Martin 2024</a:t>
                       </a:r>
-                      <a:endParaRPr lang="en-US" sz="1300" dirty="0">
+                      <a:endParaRPr lang="en-US" sz="1250" dirty="0">
                         <a:latin typeface="Microsoft YaHei" charset="0"/>
                         <a:ea typeface="Microsoft YaHei" charset="0"/>
                         <a:cs typeface="Microsoft YaHei" charset="0"/>
@@ -3236,7 +3314,7 @@
                         <a:buNone/>
                       </a:pPr>
                       <a:r>
-                        <a:rPr lang="en-US" sz="1300" dirty="0">
+                        <a:rPr lang="en-US" sz="1250" dirty="0">
                           <a:solidFill>
                             <a:srgbClr val="000000"/>
                           </a:solidFill>
@@ -3246,7 +3324,7 @@
                         </a:rPr>
                         <a:t>皮层下白质</a:t>
                       </a:r>
-                      <a:endParaRPr lang="en-US" sz="1300" dirty="0">
+                      <a:endParaRPr lang="en-US" sz="1250" dirty="0">
                         <a:latin typeface="Microsoft YaHei" charset="0"/>
                         <a:ea typeface="Microsoft YaHei" charset="0"/>
                         <a:cs typeface="Microsoft YaHei" charset="0"/>
@@ -3283,7 +3361,7 @@
                         <a:buNone/>
                       </a:pPr>
                       <a:r>
-                        <a:rPr lang="en-US" sz="1300" dirty="0">
+                        <a:rPr lang="en-US" sz="1250" dirty="0">
                           <a:solidFill>
                             <a:srgbClr val="000000"/>
                           </a:solidFill>
@@ -3293,7 +3371,7 @@
                         </a:rPr>
                         <a:t>7 MS + 6 对照</a:t>
                       </a:r>
-                      <a:endParaRPr lang="en-US" sz="1300" dirty="0">
+                      <a:endParaRPr lang="en-US" sz="1250" dirty="0">
                         <a:latin typeface="Microsoft YaHei" charset="0"/>
                         <a:ea typeface="Microsoft YaHei" charset="0"/>
                         <a:cs typeface="Microsoft YaHei" charset="0"/>
@@ -3330,7 +3408,7 @@
                         <a:buNone/>
                       </a:pPr>
                       <a:r>
-                        <a:rPr lang="en-US" sz="1300" dirty="0">
+                        <a:rPr lang="en-US" sz="1250" dirty="0">
                           <a:solidFill>
                             <a:srgbClr val="000000"/>
                           </a:solidFill>
@@ -3340,7 +3418,7 @@
                         </a:rPr>
                         <a:t>103 794</a:t>
                       </a:r>
-                      <a:endParaRPr lang="en-US" sz="1300" dirty="0">
+                      <a:endParaRPr lang="en-US" sz="1250" dirty="0">
                         <a:latin typeface="Microsoft YaHei" charset="0"/>
                         <a:ea typeface="Microsoft YaHei" charset="0"/>
                         <a:cs typeface="Microsoft YaHei" charset="0"/>
@@ -3377,7 +3455,7 @@
                         <a:buNone/>
                       </a:pPr>
                       <a:r>
-                        <a:rPr lang="en-US" sz="1300" dirty="0">
+                        <a:rPr lang="en-US" sz="1250" dirty="0">
                           <a:solidFill>
                             <a:srgbClr val="000000"/>
                           </a:solidFill>
@@ -3385,9 +3463,9 @@
                           <a:ea typeface="Microsoft YaHei" pitchFamily="34" charset="-122"/>
                           <a:cs typeface="Microsoft YaHei" pitchFamily="34" charset="-120"/>
                         </a:rPr>
-                        <a:t>主力队列</a:t>
+                        <a:t>白质 · 主力</a:t>
                       </a:r>
-                      <a:endParaRPr lang="en-US" sz="1300" dirty="0">
+                      <a:endParaRPr lang="en-US" sz="1250" dirty="0">
                         <a:latin typeface="Microsoft YaHei" charset="0"/>
                         <a:ea typeface="Microsoft YaHei" charset="0"/>
                         <a:cs typeface="Microsoft YaHei" charset="0"/>
@@ -3416,7 +3494,7 @@
                   </a:tcPr>
                 </a:tc>
               </a:tr>
-              <a:tr h="457200">
+              <a:tr h="420624">
                 <a:tc>
                   <a:txBody>
                     <a:bodyPr/>
@@ -3426,7 +3504,7 @@
                         <a:buNone/>
                       </a:pPr>
                       <a:r>
-                        <a:rPr lang="en-US" sz="1300" dirty="0">
+                        <a:rPr lang="en-US" sz="1250" dirty="0">
                           <a:solidFill>
                             <a:srgbClr val="000000"/>
                           </a:solidFill>
@@ -3436,7 +3514,7 @@
                         </a:rPr>
                         <a:t>GSE118257  Jäkel 2019</a:t>
                       </a:r>
-                      <a:endParaRPr lang="en-US" sz="1300" dirty="0">
+                      <a:endParaRPr lang="en-US" sz="1250" dirty="0">
                         <a:latin typeface="Microsoft YaHei" charset="0"/>
                         <a:ea typeface="Microsoft YaHei" charset="0"/>
                         <a:cs typeface="Microsoft YaHei" charset="0"/>
@@ -3473,7 +3551,7 @@
                         <a:buNone/>
                       </a:pPr>
                       <a:r>
-                        <a:rPr lang="en-US" sz="1300" dirty="0">
+                        <a:rPr lang="en-US" sz="1250" dirty="0">
                           <a:solidFill>
                             <a:srgbClr val="000000"/>
                           </a:solidFill>
@@ -3483,7 +3561,7 @@
                         </a:rPr>
                         <a:t>白质</a:t>
                       </a:r>
-                      <a:endParaRPr lang="en-US" sz="1300" dirty="0">
+                      <a:endParaRPr lang="en-US" sz="1250" dirty="0">
                         <a:latin typeface="Microsoft YaHei" charset="0"/>
                         <a:ea typeface="Microsoft YaHei" charset="0"/>
                         <a:cs typeface="Microsoft YaHei" charset="0"/>
@@ -3520,7 +3598,7 @@
                         <a:buNone/>
                       </a:pPr>
                       <a:r>
-                        <a:rPr lang="en-US" sz="1300" dirty="0">
+                        <a:rPr lang="en-US" sz="1250" dirty="0">
                           <a:solidFill>
                             <a:srgbClr val="000000"/>
                           </a:solidFill>
@@ -3530,7 +3608,7 @@
                         </a:rPr>
                         <a:t>4 MS + 5 对照</a:t>
                       </a:r>
-                      <a:endParaRPr lang="en-US" sz="1300" dirty="0">
+                      <a:endParaRPr lang="en-US" sz="1250" dirty="0">
                         <a:latin typeface="Microsoft YaHei" charset="0"/>
                         <a:ea typeface="Microsoft YaHei" charset="0"/>
                         <a:cs typeface="Microsoft YaHei" charset="0"/>
@@ -3567,7 +3645,7 @@
                         <a:buNone/>
                       </a:pPr>
                       <a:r>
-                        <a:rPr lang="en-US" sz="1300" dirty="0">
+                        <a:rPr lang="en-US" sz="1250" dirty="0">
                           <a:solidFill>
                             <a:srgbClr val="000000"/>
                           </a:solidFill>
@@ -3577,7 +3655,7 @@
                         </a:rPr>
                         <a:t>17 799</a:t>
                       </a:r>
-                      <a:endParaRPr lang="en-US" sz="1300" dirty="0">
+                      <a:endParaRPr lang="en-US" sz="1250" dirty="0">
                         <a:latin typeface="Microsoft YaHei" charset="0"/>
                         <a:ea typeface="Microsoft YaHei" charset="0"/>
                         <a:cs typeface="Microsoft YaHei" charset="0"/>
@@ -3614,7 +3692,7 @@
                         <a:buNone/>
                       </a:pPr>
                       <a:r>
-                        <a:rPr lang="en-US" sz="1300" dirty="0">
+                        <a:rPr lang="en-US" sz="1250" dirty="0">
                           <a:solidFill>
                             <a:srgbClr val="000000"/>
                           </a:solidFill>
@@ -3622,9 +3700,9 @@
                           <a:ea typeface="Microsoft YaHei" pitchFamily="34" charset="-122"/>
                           <a:cs typeface="Microsoft YaHei" pitchFamily="34" charset="-120"/>
                         </a:rPr>
-                        <a:t>方向验证</a:t>
+                        <a:t>白质 · 验证</a:t>
                       </a:r>
-                      <a:endParaRPr lang="en-US" sz="1300" dirty="0">
+                      <a:endParaRPr lang="en-US" sz="1250" dirty="0">
                         <a:latin typeface="Microsoft YaHei" charset="0"/>
                         <a:ea typeface="Microsoft YaHei" charset="0"/>
                         <a:cs typeface="Microsoft YaHei" charset="0"/>
@@ -3653,7 +3731,7 @@
                   </a:tcPr>
                 </a:tc>
               </a:tr>
-              <a:tr h="457200">
+              <a:tr h="420624">
                 <a:tc>
                   <a:txBody>
                     <a:bodyPr/>
@@ -3663,7 +3741,7 @@
                         <a:buNone/>
                       </a:pPr>
                       <a:r>
-                        <a:rPr lang="en-US" sz="1300" dirty="0">
+                        <a:rPr lang="en-US" sz="1250" dirty="0">
                           <a:solidFill>
                             <a:srgbClr val="000000"/>
                           </a:solidFill>
@@ -3673,7 +3751,7 @@
                         </a:rPr>
                         <a:t>Schirmer 2019</a:t>
                       </a:r>
-                      <a:endParaRPr lang="en-US" sz="1300" dirty="0">
+                      <a:endParaRPr lang="en-US" sz="1250" dirty="0">
                         <a:latin typeface="Microsoft YaHei" charset="0"/>
                         <a:ea typeface="Microsoft YaHei" charset="0"/>
                         <a:cs typeface="Microsoft YaHei" charset="0"/>
@@ -3710,7 +3788,7 @@
                         <a:buNone/>
                       </a:pPr>
                       <a:r>
-                        <a:rPr lang="en-US" sz="1300" dirty="0">
+                        <a:rPr lang="en-US" sz="1250" dirty="0">
                           <a:solidFill>
                             <a:srgbClr val="000000"/>
                           </a:solidFill>
@@ -3720,7 +3798,7 @@
                         </a:rPr>
                         <a:t>皮层灰质</a:t>
                       </a:r>
-                      <a:endParaRPr lang="en-US" sz="1300" dirty="0">
+                      <a:endParaRPr lang="en-US" sz="1250" dirty="0">
                         <a:latin typeface="Microsoft YaHei" charset="0"/>
                         <a:ea typeface="Microsoft YaHei" charset="0"/>
                         <a:cs typeface="Microsoft YaHei" charset="0"/>
@@ -3757,7 +3835,7 @@
                         <a:buNone/>
                       </a:pPr>
                       <a:r>
-                        <a:rPr lang="en-US" sz="1300" dirty="0">
+                        <a:rPr lang="en-US" sz="1250" dirty="0">
                           <a:solidFill>
                             <a:srgbClr val="000000"/>
                           </a:solidFill>
@@ -3767,7 +3845,7 @@
                         </a:rPr>
                         <a:t>12 MS + 9 对照</a:t>
                       </a:r>
-                      <a:endParaRPr lang="en-US" sz="1300" dirty="0">
+                      <a:endParaRPr lang="en-US" sz="1250" dirty="0">
                         <a:latin typeface="Microsoft YaHei" charset="0"/>
                         <a:ea typeface="Microsoft YaHei" charset="0"/>
                         <a:cs typeface="Microsoft YaHei" charset="0"/>
@@ -3804,7 +3882,7 @@
                         <a:buNone/>
                       </a:pPr>
                       <a:r>
-                        <a:rPr lang="en-US" sz="1300" dirty="0">
+                        <a:rPr lang="en-US" sz="1250" dirty="0">
                           <a:solidFill>
                             <a:srgbClr val="000000"/>
                           </a:solidFill>
@@ -3814,7 +3892,7 @@
                         </a:rPr>
                         <a:t>48 919</a:t>
                       </a:r>
-                      <a:endParaRPr lang="en-US" sz="1300" dirty="0">
+                      <a:endParaRPr lang="en-US" sz="1250" dirty="0">
                         <a:latin typeface="Microsoft YaHei" charset="0"/>
                         <a:ea typeface="Microsoft YaHei" charset="0"/>
                         <a:cs typeface="Microsoft YaHei" charset="0"/>
@@ -3851,7 +3929,7 @@
                         <a:buNone/>
                       </a:pPr>
                       <a:r>
-                        <a:rPr lang="en-US" sz="1300" dirty="0">
+                        <a:rPr lang="en-US" sz="1250" dirty="0">
                           <a:solidFill>
                             <a:srgbClr val="000000"/>
                           </a:solidFill>
@@ -3859,9 +3937,9 @@
                           <a:ea typeface="Microsoft YaHei" pitchFamily="34" charset="-122"/>
                           <a:cs typeface="Microsoft YaHei" pitchFamily="34" charset="-120"/>
                         </a:rPr>
-                        <a:t>灰质与神经元</a:t>
+                        <a:t>灰质</a:t>
                       </a:r>
-                      <a:endParaRPr lang="en-US" sz="1300" dirty="0">
+                      <a:endParaRPr lang="en-US" sz="1250" dirty="0">
                         <a:latin typeface="Microsoft YaHei" charset="0"/>
                         <a:ea typeface="Microsoft YaHei" charset="0"/>
                         <a:cs typeface="Microsoft YaHei" charset="0"/>
@@ -3966,7 +4044,7 @@
         </p:nvSpPr>
         <p:spPr>
           <a:xfrm>
-            <a:off x="548640" y="329184"/>
+            <a:off x="548640" y="310896"/>
             <a:ext cx="11064240" cy="566928"/>
           </a:xfrm>
           <a:prstGeom prst="rect">
@@ -3983,7 +4061,7 @@
               <a:buNone/>
             </a:pPr>
             <a:r>
-              <a:rPr lang="en-US" sz="2700" b="1" dirty="0">
+              <a:rPr lang="en-US" sz="2600" b="1" dirty="0">
                 <a:solidFill>
                   <a:srgbClr val="000000"/>
                 </a:solidFill>
@@ -3991,9 +4069,9 @@
                 <a:ea typeface="Microsoft YaHei" pitchFamily="34" charset="-122"/>
                 <a:cs typeface="Microsoft YaHei" pitchFamily="34" charset="-120"/>
               </a:rPr>
-              <a:t>基线：MDA5 在正常人脑各细胞类型中的分布</a:t>
+              <a:t>问题一：哪些细胞表达 MDA5</a:t>
             </a:r>
-            <a:endParaRPr lang="en-US" sz="2700" dirty="0"/>
+            <a:endParaRPr lang="en-US" sz="2600" dirty="0"/>
           </a:p>
         </p:txBody>
       </p:sp>
@@ -4013,7 +4091,7 @@
         </p:blipFill>
         <p:spPr>
           <a:xfrm>
-            <a:off x="411480" y="1708201"/>
+            <a:off x="411480" y="1694485"/>
             <a:ext cx="11384280" cy="4200550"/>
           </a:xfrm>
           <a:prstGeom prst="rect">
@@ -4093,7 +4171,7 @@
         </p:nvSpPr>
         <p:spPr>
           <a:xfrm>
-            <a:off x="548640" y="329184"/>
+            <a:off x="548640" y="310896"/>
             <a:ext cx="11064240" cy="566928"/>
           </a:xfrm>
           <a:prstGeom prst="rect">
@@ -4110,7 +4188,7 @@
               <a:buNone/>
             </a:pPr>
             <a:r>
-              <a:rPr lang="en-US" sz="2700" b="1" dirty="0">
+              <a:rPr lang="en-US" sz="2600" b="1" dirty="0">
                 <a:solidFill>
                   <a:srgbClr val="000000"/>
                 </a:solidFill>
@@ -4118,15 +4196,15 @@
                 <a:ea typeface="Microsoft YaHei" pitchFamily="34" charset="-122"/>
                 <a:cs typeface="Microsoft YaHei" pitchFamily="34" charset="-120"/>
               </a:rPr>
-              <a:t>GSE279180：细胞类型与 IFIH1 按病灶类型的分布</a:t>
+              <a:t>问题一与二：灰质与白质，先看正常人，再看病人</a:t>
             </a:r>
-            <a:endParaRPr lang="en-US" sz="2700" dirty="0"/>
+            <a:endParaRPr lang="en-US" sz="2600" dirty="0"/>
           </a:p>
         </p:txBody>
       </p:sp>
       <p:pic>
         <p:nvPicPr>
-          <p:cNvPr id="4" name="Image 0" descr="/home/user/aaa/results/mda5/figs/fig0_umap_atlas.png">    </p:cNvPr>
+          <p:cNvPr id="4" name="Image 0" descr="/home/user/aaa/results/mda5/figs/figA_2x2.png">    </p:cNvPr>
           <p:cNvPicPr>
             <a:picLocks noChangeAspect="1"/>
           </p:cNvPicPr>
@@ -4140,8 +4218,8 @@
         </p:blipFill>
         <p:spPr>
           <a:xfrm>
-            <a:off x="411480" y="1588951"/>
-            <a:ext cx="11384280" cy="4439050"/>
+            <a:off x="1194035" y="1115568"/>
+            <a:ext cx="9819171" cy="5358384"/>
           </a:xfrm>
           <a:prstGeom prst="rect">
             <a:avLst/>
@@ -4220,7 +4298,7 @@
         </p:nvSpPr>
         <p:spPr>
           <a:xfrm>
-            <a:off x="548640" y="329184"/>
+            <a:off x="548640" y="310896"/>
             <a:ext cx="11064240" cy="566928"/>
           </a:xfrm>
           <a:prstGeom prst="rect">
@@ -4237,7 +4315,7 @@
               <a:buNone/>
             </a:pPr>
             <a:r>
-              <a:rPr lang="en-US" sz="2700" b="1" dirty="0">
+              <a:rPr lang="en-US" sz="2600" b="1" dirty="0">
                 <a:solidFill>
                   <a:srgbClr val="000000"/>
                 </a:solidFill>
@@ -4245,15 +4323,15 @@
                 <a:ea typeface="Microsoft YaHei" pitchFamily="34" charset="-122"/>
                 <a:cs typeface="Microsoft YaHei" pitchFamily="34" charset="-120"/>
               </a:rPr>
-              <a:t>MS 与正常对照的差异</a:t>
+              <a:t>同一批数据的另一种读法：MS 相对对照，分区室</a:t>
             </a:r>
-            <a:endParaRPr lang="en-US" sz="2700" dirty="0"/>
+            <a:endParaRPr lang="en-US" sz="2600" dirty="0"/>
           </a:p>
         </p:txBody>
       </p:sp>
       <p:pic>
         <p:nvPicPr>
-          <p:cNvPr id="4" name="Image 0" descr="/home/user/aaa/results/mda5/figs/fig2_ms_vs_ctrl.png">    </p:cNvPr>
+          <p:cNvPr id="4" name="Image 0" descr="/home/user/aaa/results/mda5/figs/fig3_gm_vs_wm.png">    </p:cNvPr>
           <p:cNvPicPr>
             <a:picLocks noChangeAspect="1"/>
           </p:cNvPicPr>
@@ -4267,8 +4345,8 @@
         </p:blipFill>
         <p:spPr>
           <a:xfrm>
-            <a:off x="712494" y="1143000"/>
-            <a:ext cx="10782252" cy="5330952"/>
+            <a:off x="1780983" y="1115568"/>
+            <a:ext cx="8645274" cy="5358384"/>
           </a:xfrm>
           <a:prstGeom prst="rect">
             <a:avLst/>
@@ -4347,7 +4425,7 @@
         </p:nvSpPr>
         <p:spPr>
           <a:xfrm>
-            <a:off x="548640" y="329184"/>
+            <a:off x="548640" y="310896"/>
             <a:ext cx="11064240" cy="566928"/>
           </a:xfrm>
           <a:prstGeom prst="rect">
@@ -4364,7 +4442,7 @@
               <a:buNone/>
             </a:pPr>
             <a:r>
-              <a:rPr lang="en-US" sz="2700" b="1" dirty="0">
+              <a:rPr lang="en-US" sz="2600" b="1" dirty="0">
                 <a:solidFill>
                   <a:srgbClr val="000000"/>
                 </a:solidFill>
@@ -4372,15 +4450,15 @@
                 <a:ea typeface="Microsoft YaHei" pitchFamily="34" charset="-122"/>
                 <a:cs typeface="Microsoft YaHei" pitchFamily="34" charset="-120"/>
               </a:rPr>
-              <a:t>灰质与白质</a:t>
+              <a:t>白质中 IFIH1 的细胞分布</a:t>
             </a:r>
-            <a:endParaRPr lang="en-US" sz="2700" dirty="0"/>
+            <a:endParaRPr lang="en-US" sz="2600" dirty="0"/>
           </a:p>
         </p:txBody>
       </p:sp>
       <p:pic>
         <p:nvPicPr>
-          <p:cNvPr id="4" name="Image 0" descr="/home/user/aaa/results/mda5/figs/fig3_gm_vs_wm.png">    </p:cNvPr>
+          <p:cNvPr id="4" name="Image 0" descr="/home/user/aaa/results/mda5/figs/fig0_umap_atlas.png">    </p:cNvPr>
           <p:cNvPicPr>
             <a:picLocks noChangeAspect="1"/>
           </p:cNvPicPr>
@@ -4394,8 +4472,8 @@
         </p:blipFill>
         <p:spPr>
           <a:xfrm>
-            <a:off x="672285" y="1143000"/>
-            <a:ext cx="10862669" cy="5330952"/>
+            <a:off x="411480" y="1575235"/>
+            <a:ext cx="11384280" cy="4439050"/>
           </a:xfrm>
           <a:prstGeom prst="rect">
             <a:avLst/>
@@ -4474,7 +4552,7 @@
         </p:nvSpPr>
         <p:spPr>
           <a:xfrm>
-            <a:off x="548640" y="329184"/>
+            <a:off x="548640" y="310896"/>
             <a:ext cx="11064240" cy="566928"/>
           </a:xfrm>
           <a:prstGeom prst="rect">
@@ -4491,7 +4569,7 @@
               <a:buNone/>
             </a:pPr>
             <a:r>
-              <a:rPr lang="en-US" sz="2700" b="1" dirty="0">
+              <a:rPr lang="en-US" sz="2600" b="1" dirty="0">
                 <a:solidFill>
                   <a:srgbClr val="000000"/>
                 </a:solidFill>
@@ -4499,9 +4577,9 @@
                 <a:ea typeface="Microsoft YaHei" pitchFamily="34" charset="-122"/>
                 <a:cs typeface="Microsoft YaHei" pitchFamily="34" charset="-120"/>
               </a:rPr>
-              <a:t>病灶分期与小胶质状态</a:t>
+              <a:t>白质内部：病灶分期与小胶质状态</a:t>
             </a:r>
-            <a:endParaRPr lang="en-US" sz="2700" dirty="0"/>
+            <a:endParaRPr lang="en-US" sz="2600" dirty="0"/>
           </a:p>
         </p:txBody>
       </p:sp>
@@ -4521,7 +4599,7 @@
         </p:blipFill>
         <p:spPr>
           <a:xfrm>
-            <a:off x="411480" y="1354812"/>
+            <a:off x="411480" y="1341096"/>
             <a:ext cx="11384280" cy="4907328"/>
           </a:xfrm>
           <a:prstGeom prst="rect">
@@ -4601,7 +4679,7 @@
         </p:nvSpPr>
         <p:spPr>
           <a:xfrm>
-            <a:off x="548640" y="329184"/>
+            <a:off x="548640" y="310896"/>
             <a:ext cx="11064240" cy="566928"/>
           </a:xfrm>
           <a:prstGeom prst="rect">
@@ -4618,7 +4696,7 @@
               <a:buNone/>
             </a:pPr>
             <a:r>
-              <a:rPr lang="en-US" sz="2700" b="1" dirty="0">
+              <a:rPr lang="en-US" sz="2600" b="1" dirty="0">
                 <a:solidFill>
                   <a:srgbClr val="000000"/>
                 </a:solidFill>
@@ -4628,7 +4706,7 @@
               </a:rPr>
               <a:t>对照</a:t>
             </a:r>
-            <a:endParaRPr lang="en-US" sz="2700" dirty="0"/>
+            <a:endParaRPr lang="en-US" sz="2600" dirty="0"/>
           </a:p>
         </p:txBody>
       </p:sp>
@@ -4648,7 +4726,7 @@
         </p:blipFill>
         <p:spPr>
           <a:xfrm>
-            <a:off x="411480" y="1393419"/>
+            <a:off x="411480" y="1379703"/>
             <a:ext cx="11384280" cy="4830115"/>
           </a:xfrm>
           <a:prstGeom prst="rect">
@@ -4728,7 +4806,7 @@
         </p:nvSpPr>
         <p:spPr>
           <a:xfrm>
-            <a:off x="548640" y="329184"/>
+            <a:off x="548640" y="310896"/>
             <a:ext cx="11064240" cy="566928"/>
           </a:xfrm>
           <a:prstGeom prst="rect">
@@ -4745,7 +4823,7 @@
               <a:buNone/>
             </a:pPr>
             <a:r>
-              <a:rPr lang="en-US" sz="2700" b="1" dirty="0">
+              <a:rPr lang="en-US" sz="2600" b="1" dirty="0">
                 <a:solidFill>
                   <a:srgbClr val="000000"/>
                 </a:solidFill>
@@ -4755,7 +4833,7 @@
               </a:rPr>
               <a:t>与已发表结果的关系</a:t>
             </a:r>
-            <a:endParaRPr lang="en-US" sz="2700" dirty="0"/>
+            <a:endParaRPr lang="en-US" sz="2600" dirty="0"/>
           </a:p>
         </p:txBody>
       </p:sp>
@@ -4774,7 +4852,7 @@
           </p:nvPr>
         </p:nvGraphicFramePr>
         <p:xfrm>
-          <a:off x="548640" y="1234440"/>
+          <a:off x="548640" y="1188720"/>
           <a:ext cx="11064240" cy="914400"/>
         </p:xfrm>
         <a:graphic>
@@ -5187,7 +5265,7 @@
                           <a:ea typeface="Microsoft YaHei" pitchFamily="34" charset="-122"/>
                           <a:cs typeface="Microsoft YaHei" pitchFamily="34" charset="-120"/>
                         </a:rPr>
-                        <a:t>RIG-I 不随 MDA5 上升</a:t>
+                        <a:t>皮层灰质为阴性</a:t>
                       </a:r>
                       <a:endParaRPr lang="en-US" sz="1250" dirty="0">
                         <a:latin typeface="Microsoft YaHei" charset="0"/>
@@ -5234,7 +5312,7 @@
                           <a:ea typeface="Microsoft YaHei" pitchFamily="34" charset="-122"/>
                           <a:cs typeface="Microsoft YaHei" pitchFamily="34" charset="-120"/>
                         </a:rPr>
-                        <a:t>GSE138614 中 DDX58 与 DHX58 在任何病灶类型均未显著</a:t>
+                        <a:t>Schirmer 2019 补充表中 IFIH1 低于其检出阈值，本次为原创测量</a:t>
                       </a:r>
                       <a:endParaRPr lang="en-US" sz="1250" dirty="0">
                         <a:latin typeface="Microsoft YaHei" charset="0"/>
@@ -5379,7 +5457,7 @@
                           <a:ea typeface="Microsoft YaHei" pitchFamily="34" charset="-122"/>
                           <a:cs typeface="Microsoft YaHei" pitchFamily="34" charset="-120"/>
                         </a:rPr>
-                        <a:t>皮层灰质为阴性</a:t>
+                        <a:t>灰质与白质的直接对比</a:t>
                       </a:r>
                       <a:endParaRPr lang="en-US" sz="1250" dirty="0">
                         <a:latin typeface="Microsoft YaHei" charset="0"/>
@@ -5426,7 +5504,7 @@
                           <a:ea typeface="Microsoft YaHei" pitchFamily="34" charset="-122"/>
                           <a:cs typeface="Microsoft YaHei" pitchFamily="34" charset="-120"/>
                         </a:rPr>
-                        <a:t>Schirmer 2019 补充表中 IFIH1 低于其检出阈值</a:t>
+                        <a:t>未见任何已发表研究做过</a:t>
                       </a:r>
                       <a:endParaRPr lang="en-US" sz="1250" dirty="0">
                         <a:latin typeface="Microsoft YaHei" charset="0"/>

--- a/results/mda5/MDA5_IFIH1_人脑与MS.pptx
+++ b/results/mda5/MDA5_IFIH1_人脑与MS.pptx
@@ -15,9 +15,10 @@
     <p:sldId id="263" r:id="rId9"/>
     <p:sldId id="264" r:id="rId10"/>
     <p:sldId id="265" r:id="rId11"/>
+    <p:sldId id="266" r:id="rId12"/>
   </p:sldIdLst>
   <p:notesMasterIdLst>
-    <p:notesMasterId r:id="rId12"/>
+    <p:notesMasterId r:id="rId13"/>
   </p:notesMasterIdLst>
   <p:sldSz cx="12192000" cy="6858000"/>
   <p:notesSz cx="6858000" cy="12192000"/>
@@ -623,6 +624,94 @@
             <a:fld id="{F7021451-1387-4CA6-816F-3879F97B5CBC}" type="slidenum">
               <a:rPr lang="en-US"/>
               <a:t>10</a:t>
+            </a:fld>
+            <a:endParaRPr lang="en-US"/>
+          </a:p>
+        </p:txBody>
+      </p:sp>
+    </p:spTree>
+    <p:extLst>
+      <p:ext uri="{BB962C8B-B14F-4D97-AF65-F5344CB8AC3E}">
+        <p14:creationId xmlns:p14="http://schemas.microsoft.com/office/powerpoint/2010/main" val="1024086991"/>
+      </p:ext>
+    </p:extLst>
+  </p:cSld>
+  <p:clrMapOvr>
+    <a:masterClrMapping/>
+  </p:clrMapOvr>
+</p:notes>
+</file>
+
+<file path=ppt/notesSlides/notesSlide11.xml><?xml version="1.0" encoding="utf-8"?>
+<p:notes xmlns:a="http://schemas.openxmlformats.org/drawingml/2006/main" xmlns:r="http://schemas.openxmlformats.org/officeDocument/2006/relationships" xmlns:p="http://schemas.openxmlformats.org/presentationml/2006/main">
+  <p:cSld>
+    <p:spTree>
+      <p:nvGrpSpPr>
+        <p:cNvPr id="1" name=""/>
+        <p:cNvGrpSpPr/>
+        <p:nvPr/>
+      </p:nvGrpSpPr>
+      <p:grpSpPr>
+        <a:xfrm>
+          <a:off x="0" y="0"/>
+          <a:ext cx="0" cy="0"/>
+          <a:chOff x="0" y="0"/>
+          <a:chExt cx="0" cy="0"/>
+        </a:xfrm>
+      </p:grpSpPr>
+      <p:sp>
+        <p:nvSpPr>
+          <p:cNvPr id="2" name="Slide Image Placeholder 1"/>
+          <p:cNvSpPr>
+            <a:spLocks noGrp="1" noRot="1" noChangeAspect="1"/>
+          </p:cNvSpPr>
+          <p:nvPr>
+            <p:ph type="sldImg"/>
+          </p:nvPr>
+        </p:nvSpPr>
+        <p:spPr/>
+      </p:sp>
+      <p:sp>
+        <p:nvSpPr>
+          <p:cNvPr id="3" name="Notes Placeholder 2"/>
+          <p:cNvSpPr>
+            <a:spLocks noGrp="1"/>
+          </p:cNvSpPr>
+          <p:nvPr>
+            <p:ph type="body" idx="1"/>
+          </p:nvPr>
+        </p:nvSpPr>
+        <p:spPr/>
+        <p:txBody>
+          <a:bodyPr/>
+          <a:lstStyle/>
+          <a:p>
+            <a:r>
+              <a:rPr lang="en-US" dirty="0"/>
+              <a:t/>
+            </a:r>
+            <a:endParaRPr lang="en-US" dirty="0"/>
+          </a:p>
+        </p:txBody>
+      </p:sp>
+      <p:sp>
+        <p:nvSpPr>
+          <p:cNvPr id="4" name="Slide Number Placeholder 3"/>
+          <p:cNvSpPr>
+            <a:spLocks noGrp="1"/>
+          </p:cNvSpPr>
+          <p:nvPr>
+            <p:ph type="sldNum" sz="quarter" idx="10"/>
+          </p:nvPr>
+        </p:nvSpPr>
+        <p:spPr/>
+        <p:txBody>
+          <a:bodyPr/>
+          <a:lstStyle/>
+          <a:p>
+            <a:fld id="{F7021451-1387-4CA6-816F-3879F97B5CBC}" type="slidenum">
+              <a:rPr lang="en-US"/>
+              <a:t>11</a:t>
             </a:fld>
             <a:endParaRPr lang="en-US"/>
           </a:p>
@@ -1677,7 +1766,7 @@
         </p:nvSpPr>
         <p:spPr>
           <a:xfrm>
-            <a:off x="822960" y="2468880"/>
+            <a:off x="822960" y="2487168"/>
             <a:ext cx="10515600" cy="731520"/>
           </a:xfrm>
           <a:prstGeom prst="rect">
@@ -1716,7 +1805,7 @@
         </p:nvSpPr>
         <p:spPr>
           <a:xfrm>
-            <a:off x="822960" y="3310128"/>
+            <a:off x="822960" y="3328416"/>
             <a:ext cx="10515600" cy="457200"/>
           </a:xfrm>
           <a:prstGeom prst="rect">
@@ -1733,7 +1822,7 @@
               <a:buNone/>
             </a:pPr>
             <a:r>
-              <a:rPr lang="en-US" sz="2000" dirty="0">
+              <a:rPr lang="en-US" sz="1600" dirty="0">
                 <a:solidFill>
                   <a:srgbClr val="6E6E6E"/>
                 </a:solidFill>
@@ -1741,9 +1830,9 @@
                 <a:ea typeface="Microsoft YaHei" pitchFamily="34" charset="-122"/>
                 <a:cs typeface="Microsoft YaHei" pitchFamily="34" charset="-120"/>
               </a:rPr>
-              <a:t>正常与 MS ｜ 灰质与白质</a:t>
+              <a:t>全篇测量同一个量：IFIH1 的表达。细胞类型、灰质与白质、正常与 MS，只是分格的三条轴。</a:t>
             </a:r>
-            <a:endParaRPr lang="en-US" sz="2000" dirty="0"/>
+            <a:endParaRPr lang="en-US" sz="1600" dirty="0"/>
           </a:p>
         </p:txBody>
       </p:sp>
@@ -1819,8 +1908,8 @@
         </p:nvSpPr>
         <p:spPr>
           <a:xfrm>
-            <a:off x="548640" y="310896"/>
-            <a:ext cx="11064240" cy="566928"/>
+            <a:off x="548640" y="274320"/>
+            <a:ext cx="11064240" cy="475488"/>
           </a:xfrm>
           <a:prstGeom prst="rect">
             <a:avLst/>
@@ -1836,7 +1925,908 @@
               <a:buNone/>
             </a:pPr>
             <a:r>
-              <a:rPr lang="en-US" sz="2600" b="1" dirty="0">
+              <a:rPr lang="en-US" sz="2500" b="1" dirty="0">
+                <a:solidFill>
+                  <a:srgbClr val="000000"/>
+                </a:solidFill>
+                <a:latin typeface="Microsoft YaHei" pitchFamily="34" charset="0"/>
+                <a:ea typeface="Microsoft YaHei" pitchFamily="34" charset="-122"/>
+                <a:cs typeface="Microsoft YaHei" pitchFamily="34" charset="-120"/>
+              </a:rPr>
+              <a:t>与已发表结果的关系</a:t>
+            </a:r>
+            <a:endParaRPr lang="en-US" sz="2500" dirty="0"/>
+          </a:p>
+        </p:txBody>
+      </p:sp>
+      <p:graphicFrame>
+        <p:nvGraphicFramePr>
+          <p:cNvPr id="11" name="Table 0"/>
+          <p:cNvGraphicFramePr>
+            <a:graphicFrameLocks noGrp="1"/>
+          </p:cNvGraphicFramePr>
+          <p:nvPr>
+            <p:extLst>
+              <p:ext uri="{D42A27DB-BD31-4B8C-83A1-F6EECF244321}">
+                <p14:modId xmlns:p14="http://schemas.microsoft.com/office/powerpoint/2010/main" val="1579011935"/>
+              </p:ext>
+            </p:extLst>
+          </p:nvPr>
+        </p:nvGraphicFramePr>
+        <p:xfrm>
+          <a:off x="548640" y="1115568"/>
+          <a:ext cx="11064240" cy="914400"/>
+        </p:xfrm>
+        <a:graphic>
+          <a:graphicData uri="http://schemas.openxmlformats.org/drawingml/2006/table">
+            <a:tbl>
+              <a:tblPr/>
+              <a:tblGrid>
+                <a:gridCol w="3108960"/>
+                <a:gridCol w="7955280"/>
+              </a:tblGrid>
+              <a:tr h="640080">
+                <a:tc>
+                  <a:txBody>
+                    <a:bodyPr/>
+                    <a:lstStyle/>
+                    <a:p>
+                      <a:pPr indent="0" marL="0">
+                        <a:buNone/>
+                      </a:pPr>
+                      <a:r>
+                        <a:rPr lang="en-US" sz="1250" b="1" dirty="0">
+                          <a:solidFill>
+                            <a:srgbClr val="000000"/>
+                          </a:solidFill>
+                          <a:latin typeface="Microsoft YaHei" pitchFamily="34" charset="0"/>
+                          <a:ea typeface="Microsoft YaHei" pitchFamily="34" charset="-122"/>
+                          <a:cs typeface="Microsoft YaHei" pitchFamily="34" charset="-120"/>
+                        </a:rPr>
+                        <a:t>本次结果</a:t>
+                      </a:r>
+                      <a:endParaRPr lang="en-US" sz="1250" dirty="0">
+                        <a:latin typeface="Microsoft YaHei" charset="0"/>
+                        <a:ea typeface="Microsoft YaHei" charset="0"/>
+                        <a:cs typeface="Microsoft YaHei" charset="0"/>
+                      </a:endParaRPr>
+                    </a:p>
+                  </a:txBody>
+                  <a:tcPr marL="91440" marR="91440" marT="45720" marB="45720" anchor="ctr">
+                    <a:lnL w="0" cap="flat" cmpd="sng" algn="ctr">
+                      <a:noFill/>
+                    </a:lnL>
+                    <a:lnR w="0" cap="flat" cmpd="sng" algn="ctr">
+                      <a:noFill/>
+                    </a:lnR>
+                    <a:lnT w="0" cap="flat" cmpd="sng" algn="ctr">
+                      <a:noFill/>
+                    </a:lnT>
+                    <a:lnB w="12700" cap="flat" cmpd="sng" algn="ctr">
+                      <a:solidFill>
+                        <a:srgbClr val="C8CCD2"/>
+                      </a:solidFill>
+                      <a:prstDash val="solid"/>
+                      <a:round/>
+                      <a:headEnd type="none" w="med" len="med"/>
+                      <a:tailEnd type="none" w="med" len="med"/>
+                    </a:lnB>
+                  </a:tcPr>
+                </a:tc>
+                <a:tc>
+                  <a:txBody>
+                    <a:bodyPr/>
+                    <a:lstStyle/>
+                    <a:p>
+                      <a:pPr indent="0" marL="0">
+                        <a:buNone/>
+                      </a:pPr>
+                      <a:r>
+                        <a:rPr lang="en-US" sz="1250" b="1" dirty="0">
+                          <a:solidFill>
+                            <a:srgbClr val="000000"/>
+                          </a:solidFill>
+                          <a:latin typeface="Microsoft YaHei" pitchFamily="34" charset="0"/>
+                          <a:ea typeface="Microsoft YaHei" pitchFamily="34" charset="-122"/>
+                          <a:cs typeface="Microsoft YaHei" pitchFamily="34" charset="-120"/>
+                        </a:rPr>
+                        <a:t>文献状态</a:t>
+                      </a:r>
+                      <a:endParaRPr lang="en-US" sz="1250" dirty="0">
+                        <a:latin typeface="Microsoft YaHei" charset="0"/>
+                        <a:ea typeface="Microsoft YaHei" charset="0"/>
+                        <a:cs typeface="Microsoft YaHei" charset="0"/>
+                      </a:endParaRPr>
+                    </a:p>
+                  </a:txBody>
+                  <a:tcPr marL="91440" marR="91440" marT="45720" marB="45720" anchor="ctr">
+                    <a:lnL w="0" cap="flat" cmpd="sng" algn="ctr">
+                      <a:noFill/>
+                    </a:lnL>
+                    <a:lnR w="0" cap="flat" cmpd="sng" algn="ctr">
+                      <a:noFill/>
+                    </a:lnR>
+                    <a:lnT w="0" cap="flat" cmpd="sng" algn="ctr">
+                      <a:noFill/>
+                    </a:lnT>
+                    <a:lnB w="12700" cap="flat" cmpd="sng" algn="ctr">
+                      <a:solidFill>
+                        <a:srgbClr val="C8CCD2"/>
+                      </a:solidFill>
+                      <a:prstDash val="solid"/>
+                      <a:round/>
+                      <a:headEnd type="none" w="med" len="med"/>
+                      <a:tailEnd type="none" w="med" len="med"/>
+                    </a:lnB>
+                  </a:tcPr>
+                </a:tc>
+              </a:tr>
+              <a:tr h="640080">
+                <a:tc>
+                  <a:txBody>
+                    <a:bodyPr/>
+                    <a:lstStyle/>
+                    <a:p>
+                      <a:pPr indent="0" marL="0">
+                        <a:buNone/>
+                      </a:pPr>
+                      <a:r>
+                        <a:rPr lang="en-US" sz="1250" dirty="0">
+                          <a:solidFill>
+                            <a:srgbClr val="000000"/>
+                          </a:solidFill>
+                          <a:latin typeface="Microsoft YaHei" pitchFamily="34" charset="0"/>
+                          <a:ea typeface="Microsoft YaHei" pitchFamily="34" charset="-122"/>
+                          <a:cs typeface="Microsoft YaHei" pitchFamily="34" charset="-120"/>
+                        </a:rPr>
+                        <a:t>少突胶质在白质病灶上调</a:t>
+                      </a:r>
+                      <a:endParaRPr lang="en-US" sz="1250" dirty="0">
+                        <a:latin typeface="Microsoft YaHei" charset="0"/>
+                        <a:ea typeface="Microsoft YaHei" charset="0"/>
+                        <a:cs typeface="Microsoft YaHei" charset="0"/>
+                      </a:endParaRPr>
+                    </a:p>
+                  </a:txBody>
+                  <a:tcPr marL="91440" marR="91440" marT="45720" marB="45720" anchor="ctr">
+                    <a:lnL w="0" cap="flat" cmpd="sng" algn="ctr">
+                      <a:noFill/>
+                    </a:lnL>
+                    <a:lnR w="0" cap="flat" cmpd="sng" algn="ctr">
+                      <a:noFill/>
+                    </a:lnR>
+                    <a:lnT w="0" cap="flat" cmpd="sng" algn="ctr">
+                      <a:noFill/>
+                    </a:lnT>
+                    <a:lnB w="12700" cap="flat" cmpd="sng" algn="ctr">
+                      <a:solidFill>
+                        <a:srgbClr val="C8CCD2"/>
+                      </a:solidFill>
+                      <a:prstDash val="solid"/>
+                      <a:round/>
+                      <a:headEnd type="none" w="med" len="med"/>
+                      <a:tailEnd type="none" w="med" len="med"/>
+                    </a:lnB>
+                  </a:tcPr>
+                </a:tc>
+                <a:tc>
+                  <a:txBody>
+                    <a:bodyPr/>
+                    <a:lstStyle/>
+                    <a:p>
+                      <a:pPr indent="0" marL="0">
+                        <a:buNone/>
+                      </a:pPr>
+                      <a:r>
+                        <a:rPr lang="en-US" sz="1250" dirty="0">
+                          <a:solidFill>
+                            <a:srgbClr val="000000"/>
+                          </a:solidFill>
+                          <a:latin typeface="Microsoft YaHei" pitchFamily="34" charset="0"/>
+                          <a:ea typeface="Microsoft YaHei" pitchFamily="34" charset="-122"/>
+                          <a:cs typeface="Microsoft YaHei" pitchFamily="34" charset="-120"/>
+                        </a:rPr>
+                        <a:t>Lerma-Martin 2024 补充表 6 已报道：CA log2FC +0.905（padj 0.012），CI +1.095（padj 0.005）</a:t>
+                      </a:r>
+                      <a:endParaRPr lang="en-US" sz="1250" dirty="0">
+                        <a:latin typeface="Microsoft YaHei" charset="0"/>
+                        <a:ea typeface="Microsoft YaHei" charset="0"/>
+                        <a:cs typeface="Microsoft YaHei" charset="0"/>
+                      </a:endParaRPr>
+                    </a:p>
+                  </a:txBody>
+                  <a:tcPr marL="91440" marR="91440" marT="45720" marB="45720" anchor="ctr">
+                    <a:lnL w="0" cap="flat" cmpd="sng" algn="ctr">
+                      <a:noFill/>
+                    </a:lnL>
+                    <a:lnR w="0" cap="flat" cmpd="sng" algn="ctr">
+                      <a:noFill/>
+                    </a:lnR>
+                    <a:lnT w="0" cap="flat" cmpd="sng" algn="ctr">
+                      <a:noFill/>
+                    </a:lnT>
+                    <a:lnB w="12700" cap="flat" cmpd="sng" algn="ctr">
+                      <a:solidFill>
+                        <a:srgbClr val="C8CCD2"/>
+                      </a:solidFill>
+                      <a:prstDash val="solid"/>
+                      <a:round/>
+                      <a:headEnd type="none" w="med" len="med"/>
+                      <a:tailEnd type="none" w="med" len="med"/>
+                    </a:lnB>
+                  </a:tcPr>
+                </a:tc>
+              </a:tr>
+              <a:tr h="640080">
+                <a:tc>
+                  <a:txBody>
+                    <a:bodyPr/>
+                    <a:lstStyle/>
+                    <a:p>
+                      <a:pPr indent="0" marL="0">
+                        <a:buNone/>
+                      </a:pPr>
+                      <a:r>
+                        <a:rPr lang="en-US" sz="1250" dirty="0">
+                          <a:solidFill>
+                            <a:srgbClr val="000000"/>
+                          </a:solidFill>
+                          <a:latin typeface="Microsoft YaHei" pitchFamily="34" charset="0"/>
+                          <a:ea typeface="Microsoft YaHei" pitchFamily="34" charset="-122"/>
+                          <a:cs typeface="Microsoft YaHei" pitchFamily="34" charset="-120"/>
+                        </a:rPr>
+                        <a:t>同一队列髓系未达显著</a:t>
+                      </a:r>
+                      <a:endParaRPr lang="en-US" sz="1250" dirty="0">
+                        <a:latin typeface="Microsoft YaHei" charset="0"/>
+                        <a:ea typeface="Microsoft YaHei" charset="0"/>
+                        <a:cs typeface="Microsoft YaHei" charset="0"/>
+                      </a:endParaRPr>
+                    </a:p>
+                  </a:txBody>
+                  <a:tcPr marL="91440" marR="91440" marT="45720" marB="45720" anchor="ctr">
+                    <a:lnL w="0" cap="flat" cmpd="sng" algn="ctr">
+                      <a:noFill/>
+                    </a:lnL>
+                    <a:lnR w="0" cap="flat" cmpd="sng" algn="ctr">
+                      <a:noFill/>
+                    </a:lnR>
+                    <a:lnT w="0" cap="flat" cmpd="sng" algn="ctr">
+                      <a:noFill/>
+                    </a:lnT>
+                    <a:lnB w="12700" cap="flat" cmpd="sng" algn="ctr">
+                      <a:solidFill>
+                        <a:srgbClr val="C8CCD2"/>
+                      </a:solidFill>
+                      <a:prstDash val="solid"/>
+                      <a:round/>
+                      <a:headEnd type="none" w="med" len="med"/>
+                      <a:tailEnd type="none" w="med" len="med"/>
+                    </a:lnB>
+                  </a:tcPr>
+                </a:tc>
+                <a:tc>
+                  <a:txBody>
+                    <a:bodyPr/>
+                    <a:lstStyle/>
+                    <a:p>
+                      <a:pPr indent="0" marL="0">
+                        <a:buNone/>
+                      </a:pPr>
+                      <a:r>
+                        <a:rPr lang="en-US" sz="1250" dirty="0">
+                          <a:solidFill>
+                            <a:srgbClr val="000000"/>
+                          </a:solidFill>
+                          <a:latin typeface="Microsoft YaHei" pitchFamily="34" charset="0"/>
+                          <a:ea typeface="Microsoft YaHei" pitchFamily="34" charset="-122"/>
+                          <a:cs typeface="Microsoft YaHei" pitchFamily="34" charset="-120"/>
+                        </a:rPr>
+                        <a:t>与原作者一致，其补充表髓系 padj = 0.116</a:t>
+                      </a:r>
+                      <a:endParaRPr lang="en-US" sz="1250" dirty="0">
+                        <a:latin typeface="Microsoft YaHei" charset="0"/>
+                        <a:ea typeface="Microsoft YaHei" charset="0"/>
+                        <a:cs typeface="Microsoft YaHei" charset="0"/>
+                      </a:endParaRPr>
+                    </a:p>
+                  </a:txBody>
+                  <a:tcPr marL="91440" marR="91440" marT="45720" marB="45720" anchor="ctr">
+                    <a:lnL w="0" cap="flat" cmpd="sng" algn="ctr">
+                      <a:noFill/>
+                    </a:lnL>
+                    <a:lnR w="0" cap="flat" cmpd="sng" algn="ctr">
+                      <a:noFill/>
+                    </a:lnR>
+                    <a:lnT w="0" cap="flat" cmpd="sng" algn="ctr">
+                      <a:noFill/>
+                    </a:lnT>
+                    <a:lnB w="12700" cap="flat" cmpd="sng" algn="ctr">
+                      <a:solidFill>
+                        <a:srgbClr val="C8CCD2"/>
+                      </a:solidFill>
+                      <a:prstDash val="solid"/>
+                      <a:round/>
+                      <a:headEnd type="none" w="med" len="med"/>
+                      <a:tailEnd type="none" w="med" len="med"/>
+                    </a:lnB>
+                  </a:tcPr>
+                </a:tc>
+              </a:tr>
+              <a:tr h="640080">
+                <a:tc>
+                  <a:txBody>
+                    <a:bodyPr/>
+                    <a:lstStyle/>
+                    <a:p>
+                      <a:pPr indent="0" marL="0">
+                        <a:buNone/>
+                      </a:pPr>
+                      <a:r>
+                        <a:rPr lang="en-US" sz="1250" dirty="0">
+                          <a:solidFill>
+                            <a:srgbClr val="000000"/>
+                          </a:solidFill>
+                          <a:latin typeface="Microsoft YaHei" pitchFamily="34" charset="0"/>
+                          <a:ea typeface="Microsoft YaHei" pitchFamily="34" charset="-122"/>
+                          <a:cs typeface="Microsoft YaHei" pitchFamily="34" charset="-120"/>
+                        </a:rPr>
+                        <a:t>bulk 白质病灶同向上调</a:t>
+                      </a:r>
+                      <a:endParaRPr lang="en-US" sz="1250" dirty="0">
+                        <a:latin typeface="Microsoft YaHei" charset="0"/>
+                        <a:ea typeface="Microsoft YaHei" charset="0"/>
+                        <a:cs typeface="Microsoft YaHei" charset="0"/>
+                      </a:endParaRPr>
+                    </a:p>
+                  </a:txBody>
+                  <a:tcPr marL="91440" marR="91440" marT="45720" marB="45720" anchor="ctr">
+                    <a:lnL w="0" cap="flat" cmpd="sng" algn="ctr">
+                      <a:noFill/>
+                    </a:lnL>
+                    <a:lnR w="0" cap="flat" cmpd="sng" algn="ctr">
+                      <a:noFill/>
+                    </a:lnR>
+                    <a:lnT w="0" cap="flat" cmpd="sng" algn="ctr">
+                      <a:noFill/>
+                    </a:lnT>
+                    <a:lnB w="12700" cap="flat" cmpd="sng" algn="ctr">
+                      <a:solidFill>
+                        <a:srgbClr val="C8CCD2"/>
+                      </a:solidFill>
+                      <a:prstDash val="solid"/>
+                      <a:round/>
+                      <a:headEnd type="none" w="med" len="med"/>
+                      <a:tailEnd type="none" w="med" len="med"/>
+                    </a:lnB>
+                  </a:tcPr>
+                </a:tc>
+                <a:tc>
+                  <a:txBody>
+                    <a:bodyPr/>
+                    <a:lstStyle/>
+                    <a:p>
+                      <a:pPr indent="0" marL="0">
+                        <a:buNone/>
+                      </a:pPr>
+                      <a:r>
+                        <a:rPr lang="en-US" sz="1250" dirty="0">
+                          <a:solidFill>
+                            <a:srgbClr val="000000"/>
+                          </a:solidFill>
+                          <a:latin typeface="Microsoft YaHei" pitchFamily="34" charset="0"/>
+                          <a:ea typeface="Microsoft YaHei" pitchFamily="34" charset="-122"/>
+                          <a:cs typeface="Microsoft YaHei" pitchFamily="34" charset="-120"/>
+                        </a:rPr>
+                        <a:t>GSE138614 活动病灶 FDR 0.021、慢性活动 FDR 0.007；GSE283092 泡沫样活动病灶 1.79 倍</a:t>
+                      </a:r>
+                      <a:endParaRPr lang="en-US" sz="1250" dirty="0">
+                        <a:latin typeface="Microsoft YaHei" charset="0"/>
+                        <a:ea typeface="Microsoft YaHei" charset="0"/>
+                        <a:cs typeface="Microsoft YaHei" charset="0"/>
+                      </a:endParaRPr>
+                    </a:p>
+                  </a:txBody>
+                  <a:tcPr marL="91440" marR="91440" marT="45720" marB="45720" anchor="ctr">
+                    <a:lnL w="0" cap="flat" cmpd="sng" algn="ctr">
+                      <a:noFill/>
+                    </a:lnL>
+                    <a:lnR w="0" cap="flat" cmpd="sng" algn="ctr">
+                      <a:noFill/>
+                    </a:lnR>
+                    <a:lnT w="0" cap="flat" cmpd="sng" algn="ctr">
+                      <a:noFill/>
+                    </a:lnT>
+                    <a:lnB w="12700" cap="flat" cmpd="sng" algn="ctr">
+                      <a:solidFill>
+                        <a:srgbClr val="C8CCD2"/>
+                      </a:solidFill>
+                      <a:prstDash val="solid"/>
+                      <a:round/>
+                      <a:headEnd type="none" w="med" len="med"/>
+                      <a:tailEnd type="none" w="med" len="med"/>
+                    </a:lnB>
+                  </a:tcPr>
+                </a:tc>
+              </a:tr>
+              <a:tr h="640080">
+                <a:tc>
+                  <a:txBody>
+                    <a:bodyPr/>
+                    <a:lstStyle/>
+                    <a:p>
+                      <a:pPr indent="0" marL="0">
+                        <a:buNone/>
+                      </a:pPr>
+                      <a:r>
+                        <a:rPr lang="en-US" sz="1250" dirty="0">
+                          <a:solidFill>
+                            <a:srgbClr val="000000"/>
+                          </a:solidFill>
+                          <a:latin typeface="Microsoft YaHei" pitchFamily="34" charset="0"/>
+                          <a:ea typeface="Microsoft YaHei" pitchFamily="34" charset="-122"/>
+                          <a:cs typeface="Microsoft YaHei" pitchFamily="34" charset="-120"/>
+                        </a:rPr>
+                        <a:t>皮层灰质的 IFIH1</a:t>
+                      </a:r>
+                      <a:endParaRPr lang="en-US" sz="1250" dirty="0">
+                        <a:latin typeface="Microsoft YaHei" charset="0"/>
+                        <a:ea typeface="Microsoft YaHei" charset="0"/>
+                        <a:cs typeface="Microsoft YaHei" charset="0"/>
+                      </a:endParaRPr>
+                    </a:p>
+                  </a:txBody>
+                  <a:tcPr marL="91440" marR="91440" marT="45720" marB="45720" anchor="ctr">
+                    <a:lnL w="0" cap="flat" cmpd="sng" algn="ctr">
+                      <a:noFill/>
+                    </a:lnL>
+                    <a:lnR w="0" cap="flat" cmpd="sng" algn="ctr">
+                      <a:noFill/>
+                    </a:lnR>
+                    <a:lnT w="0" cap="flat" cmpd="sng" algn="ctr">
+                      <a:noFill/>
+                    </a:lnT>
+                    <a:lnB w="12700" cap="flat" cmpd="sng" algn="ctr">
+                      <a:solidFill>
+                        <a:srgbClr val="C8CCD2"/>
+                      </a:solidFill>
+                      <a:prstDash val="solid"/>
+                      <a:round/>
+                      <a:headEnd type="none" w="med" len="med"/>
+                      <a:tailEnd type="none" w="med" len="med"/>
+                    </a:lnB>
+                  </a:tcPr>
+                </a:tc>
+                <a:tc>
+                  <a:txBody>
+                    <a:bodyPr/>
+                    <a:lstStyle/>
+                    <a:p>
+                      <a:pPr indent="0" marL="0">
+                        <a:buNone/>
+                      </a:pPr>
+                      <a:r>
+                        <a:rPr lang="en-US" sz="1250" dirty="0">
+                          <a:solidFill>
+                            <a:srgbClr val="000000"/>
+                          </a:solidFill>
+                          <a:latin typeface="Microsoft YaHei" pitchFamily="34" charset="0"/>
+                          <a:ea typeface="Microsoft YaHei" pitchFamily="34" charset="-122"/>
+                          <a:cs typeface="Microsoft YaHei" pitchFamily="34" charset="-120"/>
+                        </a:rPr>
+                        <a:t>Schirmer 2019 补充表中 IFIH1 低于其检出阈值，本次为原创测量</a:t>
+                      </a:r>
+                      <a:endParaRPr lang="en-US" sz="1250" dirty="0">
+                        <a:latin typeface="Microsoft YaHei" charset="0"/>
+                        <a:ea typeface="Microsoft YaHei" charset="0"/>
+                        <a:cs typeface="Microsoft YaHei" charset="0"/>
+                      </a:endParaRPr>
+                    </a:p>
+                  </a:txBody>
+                  <a:tcPr marL="91440" marR="91440" marT="45720" marB="45720" anchor="ctr">
+                    <a:lnL w="0" cap="flat" cmpd="sng" algn="ctr">
+                      <a:noFill/>
+                    </a:lnL>
+                    <a:lnR w="0" cap="flat" cmpd="sng" algn="ctr">
+                      <a:noFill/>
+                    </a:lnR>
+                    <a:lnT w="0" cap="flat" cmpd="sng" algn="ctr">
+                      <a:noFill/>
+                    </a:lnT>
+                    <a:lnB w="12700" cap="flat" cmpd="sng" algn="ctr">
+                      <a:solidFill>
+                        <a:srgbClr val="C8CCD2"/>
+                      </a:solidFill>
+                      <a:prstDash val="solid"/>
+                      <a:round/>
+                      <a:headEnd type="none" w="med" len="med"/>
+                      <a:tailEnd type="none" w="med" len="med"/>
+                    </a:lnB>
+                  </a:tcPr>
+                </a:tc>
+              </a:tr>
+              <a:tr h="640080">
+                <a:tc>
+                  <a:txBody>
+                    <a:bodyPr/>
+                    <a:lstStyle/>
+                    <a:p>
+                      <a:pPr indent="0" marL="0">
+                        <a:buNone/>
+                      </a:pPr>
+                      <a:r>
+                        <a:rPr lang="en-US" sz="1250" dirty="0">
+                          <a:solidFill>
+                            <a:srgbClr val="000000"/>
+                          </a:solidFill>
+                          <a:latin typeface="Microsoft YaHei" pitchFamily="34" charset="0"/>
+                          <a:ea typeface="Microsoft YaHei" pitchFamily="34" charset="-122"/>
+                          <a:cs typeface="Microsoft YaHei" pitchFamily="34" charset="-120"/>
+                        </a:rPr>
+                        <a:t>GSE180759 中的 IFIH1</a:t>
+                      </a:r>
+                      <a:endParaRPr lang="en-US" sz="1250" dirty="0">
+                        <a:latin typeface="Microsoft YaHei" charset="0"/>
+                        <a:ea typeface="Microsoft YaHei" charset="0"/>
+                        <a:cs typeface="Microsoft YaHei" charset="0"/>
+                      </a:endParaRPr>
+                    </a:p>
+                  </a:txBody>
+                  <a:tcPr marL="91440" marR="91440" marT="45720" marB="45720" anchor="ctr">
+                    <a:lnL w="0" cap="flat" cmpd="sng" algn="ctr">
+                      <a:noFill/>
+                    </a:lnL>
+                    <a:lnR w="0" cap="flat" cmpd="sng" algn="ctr">
+                      <a:noFill/>
+                    </a:lnR>
+                    <a:lnT w="0" cap="flat" cmpd="sng" algn="ctr">
+                      <a:noFill/>
+                    </a:lnT>
+                    <a:lnB w="12700" cap="flat" cmpd="sng" algn="ctr">
+                      <a:solidFill>
+                        <a:srgbClr val="C8CCD2"/>
+                      </a:solidFill>
+                      <a:prstDash val="solid"/>
+                      <a:round/>
+                      <a:headEnd type="none" w="med" len="med"/>
+                      <a:tailEnd type="none" w="med" len="med"/>
+                    </a:lnB>
+                  </a:tcPr>
+                </a:tc>
+                <a:tc>
+                  <a:txBody>
+                    <a:bodyPr/>
+                    <a:lstStyle/>
+                    <a:p>
+                      <a:pPr indent="0" marL="0">
+                        <a:buNone/>
+                      </a:pPr>
+                      <a:r>
+                        <a:rPr lang="en-US" sz="1250" dirty="0">
+                          <a:solidFill>
+                            <a:srgbClr val="000000"/>
+                          </a:solidFill>
+                          <a:latin typeface="Microsoft YaHei" pitchFamily="34" charset="0"/>
+                          <a:ea typeface="Microsoft YaHei" pitchFamily="34" charset="-122"/>
+                          <a:cs typeface="Microsoft YaHei" pitchFamily="34" charset="-120"/>
+                        </a:rPr>
+                        <a:t>原文 13 个补充表中未出现</a:t>
+                      </a:r>
+                      <a:endParaRPr lang="en-US" sz="1250" dirty="0">
+                        <a:latin typeface="Microsoft YaHei" charset="0"/>
+                        <a:ea typeface="Microsoft YaHei" charset="0"/>
+                        <a:cs typeface="Microsoft YaHei" charset="0"/>
+                      </a:endParaRPr>
+                    </a:p>
+                  </a:txBody>
+                  <a:tcPr marL="91440" marR="91440" marT="45720" marB="45720" anchor="ctr">
+                    <a:lnL w="0" cap="flat" cmpd="sng" algn="ctr">
+                      <a:noFill/>
+                    </a:lnL>
+                    <a:lnR w="0" cap="flat" cmpd="sng" algn="ctr">
+                      <a:noFill/>
+                    </a:lnR>
+                    <a:lnT w="0" cap="flat" cmpd="sng" algn="ctr">
+                      <a:noFill/>
+                    </a:lnT>
+                    <a:lnB w="12700" cap="flat" cmpd="sng" algn="ctr">
+                      <a:solidFill>
+                        <a:srgbClr val="C8CCD2"/>
+                      </a:solidFill>
+                      <a:prstDash val="solid"/>
+                      <a:round/>
+                      <a:headEnd type="none" w="med" len="med"/>
+                      <a:tailEnd type="none" w="med" len="med"/>
+                    </a:lnB>
+                  </a:tcPr>
+                </a:tc>
+              </a:tr>
+              <a:tr h="640080">
+                <a:tc>
+                  <a:txBody>
+                    <a:bodyPr/>
+                    <a:lstStyle/>
+                    <a:p>
+                      <a:pPr indent="0" marL="0">
+                        <a:buNone/>
+                      </a:pPr>
+                      <a:r>
+                        <a:rPr lang="en-US" sz="1250" dirty="0">
+                          <a:solidFill>
+                            <a:srgbClr val="000000"/>
+                          </a:solidFill>
+                          <a:latin typeface="Microsoft YaHei" pitchFamily="34" charset="0"/>
+                          <a:ea typeface="Microsoft YaHei" pitchFamily="34" charset="-122"/>
+                          <a:cs typeface="Microsoft YaHei" pitchFamily="34" charset="-120"/>
+                        </a:rPr>
+                        <a:t>灰质与白质改变的直接对比</a:t>
+                      </a:r>
+                      <a:endParaRPr lang="en-US" sz="1250" dirty="0">
+                        <a:latin typeface="Microsoft YaHei" charset="0"/>
+                        <a:ea typeface="Microsoft YaHei" charset="0"/>
+                        <a:cs typeface="Microsoft YaHei" charset="0"/>
+                      </a:endParaRPr>
+                    </a:p>
+                  </a:txBody>
+                  <a:tcPr marL="91440" marR="91440" marT="45720" marB="45720" anchor="ctr">
+                    <a:lnL w="0" cap="flat" cmpd="sng" algn="ctr">
+                      <a:noFill/>
+                    </a:lnL>
+                    <a:lnR w="0" cap="flat" cmpd="sng" algn="ctr">
+                      <a:noFill/>
+                    </a:lnR>
+                    <a:lnT w="0" cap="flat" cmpd="sng" algn="ctr">
+                      <a:noFill/>
+                    </a:lnT>
+                    <a:lnB w="12700" cap="flat" cmpd="sng" algn="ctr">
+                      <a:solidFill>
+                        <a:srgbClr val="C8CCD2"/>
+                      </a:solidFill>
+                      <a:prstDash val="solid"/>
+                      <a:round/>
+                      <a:headEnd type="none" w="med" len="med"/>
+                      <a:tailEnd type="none" w="med" len="med"/>
+                    </a:lnB>
+                  </a:tcPr>
+                </a:tc>
+                <a:tc>
+                  <a:txBody>
+                    <a:bodyPr/>
+                    <a:lstStyle/>
+                    <a:p>
+                      <a:pPr indent="0" marL="0">
+                        <a:buNone/>
+                      </a:pPr>
+                      <a:r>
+                        <a:rPr lang="en-US" sz="1250" dirty="0">
+                          <a:solidFill>
+                            <a:srgbClr val="000000"/>
+                          </a:solidFill>
+                          <a:latin typeface="Microsoft YaHei" pitchFamily="34" charset="0"/>
+                          <a:ea typeface="Microsoft YaHei" pitchFamily="34" charset="-122"/>
+                          <a:cs typeface="Microsoft YaHei" pitchFamily="34" charset="-120"/>
+                        </a:rPr>
+                        <a:t>未见任何已发表研究做过</a:t>
+                      </a:r>
+                      <a:endParaRPr lang="en-US" sz="1250" dirty="0">
+                        <a:latin typeface="Microsoft YaHei" charset="0"/>
+                        <a:ea typeface="Microsoft YaHei" charset="0"/>
+                        <a:cs typeface="Microsoft YaHei" charset="0"/>
+                      </a:endParaRPr>
+                    </a:p>
+                  </a:txBody>
+                  <a:tcPr marL="91440" marR="91440" marT="45720" marB="45720" anchor="ctr">
+                    <a:lnL w="0" cap="flat" cmpd="sng" algn="ctr">
+                      <a:noFill/>
+                    </a:lnL>
+                    <a:lnR w="0" cap="flat" cmpd="sng" algn="ctr">
+                      <a:noFill/>
+                    </a:lnR>
+                    <a:lnT w="0" cap="flat" cmpd="sng" algn="ctr">
+                      <a:noFill/>
+                    </a:lnT>
+                    <a:lnB w="12700" cap="flat" cmpd="sng" algn="ctr">
+                      <a:solidFill>
+                        <a:srgbClr val="C8CCD2"/>
+                      </a:solidFill>
+                      <a:prstDash val="solid"/>
+                      <a:round/>
+                      <a:headEnd type="none" w="med" len="med"/>
+                      <a:tailEnd type="none" w="med" len="med"/>
+                    </a:lnB>
+                  </a:tcPr>
+                </a:tc>
+              </a:tr>
+              <a:tr h="640080">
+                <a:tc>
+                  <a:txBody>
+                    <a:bodyPr/>
+                    <a:lstStyle/>
+                    <a:p>
+                      <a:pPr indent="0" marL="0">
+                        <a:buNone/>
+                      </a:pPr>
+                      <a:r>
+                        <a:rPr lang="en-US" sz="1250" dirty="0">
+                          <a:solidFill>
+                            <a:srgbClr val="000000"/>
+                          </a:solidFill>
+                          <a:latin typeface="Microsoft YaHei" pitchFamily="34" charset="0"/>
+                          <a:ea typeface="Microsoft YaHei" pitchFamily="34" charset="-122"/>
+                          <a:cs typeface="Microsoft YaHei" pitchFamily="34" charset="-120"/>
+                        </a:rPr>
+                        <a:t>MDA5 蛋白</a:t>
+                      </a:r>
+                      <a:endParaRPr lang="en-US" sz="1250" dirty="0">
+                        <a:latin typeface="Microsoft YaHei" charset="0"/>
+                        <a:ea typeface="Microsoft YaHei" charset="0"/>
+                        <a:cs typeface="Microsoft YaHei" charset="0"/>
+                      </a:endParaRPr>
+                    </a:p>
+                  </a:txBody>
+                  <a:tcPr marL="91440" marR="91440" marT="45720" marB="45720" anchor="ctr">
+                    <a:lnL w="0" cap="flat" cmpd="sng" algn="ctr">
+                      <a:noFill/>
+                    </a:lnL>
+                    <a:lnR w="0" cap="flat" cmpd="sng" algn="ctr">
+                      <a:noFill/>
+                    </a:lnR>
+                    <a:lnT w="0" cap="flat" cmpd="sng" algn="ctr">
+                      <a:noFill/>
+                    </a:lnT>
+                    <a:lnB w="12700" cap="flat" cmpd="sng" algn="ctr">
+                      <a:solidFill>
+                        <a:srgbClr val="C8CCD2"/>
+                      </a:solidFill>
+                      <a:prstDash val="solid"/>
+                      <a:round/>
+                      <a:headEnd type="none" w="med" len="med"/>
+                      <a:tailEnd type="none" w="med" len="med"/>
+                    </a:lnB>
+                  </a:tcPr>
+                </a:tc>
+                <a:tc>
+                  <a:txBody>
+                    <a:bodyPr/>
+                    <a:lstStyle/>
+                    <a:p>
+                      <a:pPr indent="0" marL="0">
+                        <a:buNone/>
+                      </a:pPr>
+                      <a:r>
+                        <a:rPr lang="en-US" sz="1250" dirty="0">
+                          <a:solidFill>
+                            <a:srgbClr val="000000"/>
+                          </a:solidFill>
+                          <a:latin typeface="Microsoft YaHei" pitchFamily="34" charset="0"/>
+                          <a:ea typeface="Microsoft YaHei" pitchFamily="34" charset="-122"/>
+                          <a:cs typeface="Microsoft YaHei" pitchFamily="34" charset="-120"/>
+                        </a:rPr>
+                        <a:t>人类 MS 脑组织的免疫组化与蛋白质组测量为零篇</a:t>
+                      </a:r>
+                      <a:endParaRPr lang="en-US" sz="1250" dirty="0">
+                        <a:latin typeface="Microsoft YaHei" charset="0"/>
+                        <a:ea typeface="Microsoft YaHei" charset="0"/>
+                        <a:cs typeface="Microsoft YaHei" charset="0"/>
+                      </a:endParaRPr>
+                    </a:p>
+                  </a:txBody>
+                  <a:tcPr marL="91440" marR="91440" marT="45720" marB="45720" anchor="ctr">
+                    <a:lnL w="0" cap="flat" cmpd="sng" algn="ctr">
+                      <a:noFill/>
+                    </a:lnL>
+                    <a:lnR w="0" cap="flat" cmpd="sng" algn="ctr">
+                      <a:noFill/>
+                    </a:lnR>
+                    <a:lnT w="0" cap="flat" cmpd="sng" algn="ctr">
+                      <a:noFill/>
+                    </a:lnT>
+                    <a:lnB w="12700" cap="flat" cmpd="sng" algn="ctr">
+                      <a:solidFill>
+                        <a:srgbClr val="C8CCD2"/>
+                      </a:solidFill>
+                      <a:prstDash val="solid"/>
+                      <a:round/>
+                      <a:headEnd type="none" w="med" len="med"/>
+                      <a:tailEnd type="none" w="med" len="med"/>
+                    </a:lnB>
+                  </a:tcPr>
+                </a:tc>
+              </a:tr>
+            </a:tbl>
+          </a:graphicData>
+        </a:graphic>
+      </p:graphicFrame>
+    </p:spTree>
+  </p:cSld>
+  <p:clrMapOvr>
+    <a:masterClrMapping/>
+  </p:clrMapOvr>
+</p:sld>
+</file>
+
+<file path=ppt/slides/slide11.xml><?xml version="1.0" encoding="utf-8"?>
+<p:sld xmlns:a="http://schemas.openxmlformats.org/drawingml/2006/main" xmlns:r="http://schemas.openxmlformats.org/officeDocument/2006/relationships" xmlns:p="http://schemas.openxmlformats.org/presentationml/2006/main">
+  <p:cSld name="Slide 11">
+    <p:spTree>
+      <p:nvGrpSpPr>
+        <p:cNvPr id="1" name=""/>
+        <p:cNvGrpSpPr/>
+        <p:nvPr/>
+      </p:nvGrpSpPr>
+      <p:grpSpPr>
+        <a:xfrm>
+          <a:off x="0" y="0"/>
+          <a:ext cx="0" cy="0"/>
+          <a:chOff x="0" y="0"/>
+          <a:chExt cx="0" cy="0"/>
+        </a:xfrm>
+      </p:grpSpPr>
+      <p:sp>
+        <p:nvSpPr>
+          <p:cNvPr id="2" name="Text 0"/>
+          <p:cNvSpPr txBox="1"/>
+          <p:nvPr/>
+        </p:nvSpPr>
+        <p:spPr>
+          <a:xfrm>
+            <a:off x="11430000" y="6355080"/>
+            <a:ext cx="457200" cy="274320"/>
+          </a:xfrm>
+          <a:prstGeom prst="rect">
+            <a:avLst/>
+          </a:prstGeom>
+          <a:noFill/>
+          <a:ln/>
+        </p:spPr>
+        <p:txBody>
+          <a:bodyPr wrap="square" lIns="0" tIns="0" rIns="0" bIns="0" rtlCol="0" anchor="ctr"/>
+          <a:lstStyle/>
+          <a:p>
+            <a:pPr algn="r" indent="0" marL="0">
+              <a:buNone/>
+            </a:pPr>
+            <a:r>
+              <a:rPr lang="en-US" sz="1000" dirty="0">
+                <a:solidFill>
+                  <a:srgbClr val="6E6E6E"/>
+                </a:solidFill>
+                <a:latin typeface="Calibri" pitchFamily="34" charset="0"/>
+                <a:ea typeface="Calibri" pitchFamily="34" charset="-122"/>
+                <a:cs typeface="Calibri" pitchFamily="34" charset="-120"/>
+              </a:rPr>
+              <a:t>10</a:t>
+            </a:r>
+            <a:endParaRPr lang="en-US" sz="1000" dirty="0"/>
+          </a:p>
+        </p:txBody>
+      </p:sp>
+      <p:sp>
+        <p:nvSpPr>
+          <p:cNvPr id="3" name="Text 1"/>
+          <p:cNvSpPr txBox="1"/>
+          <p:nvPr/>
+        </p:nvSpPr>
+        <p:spPr>
+          <a:xfrm>
+            <a:off x="548640" y="274320"/>
+            <a:ext cx="11064240" cy="475488"/>
+          </a:xfrm>
+          <a:prstGeom prst="rect">
+            <a:avLst/>
+          </a:prstGeom>
+          <a:noFill/>
+          <a:ln/>
+        </p:spPr>
+        <p:txBody>
+          <a:bodyPr wrap="square" lIns="0" tIns="0" rIns="0" bIns="0" rtlCol="0" anchor="ctr"/>
+          <a:lstStyle/>
+          <a:p>
+            <a:pPr indent="0" marL="0">
+              <a:buNone/>
+            </a:pPr>
+            <a:r>
+              <a:rPr lang="en-US" sz="2500" b="1" dirty="0">
                 <a:solidFill>
                   <a:srgbClr val="000000"/>
                 </a:solidFill>
@@ -1846,7 +2836,7 @@
               </a:rPr>
               <a:t>限制</a:t>
             </a:r>
-            <a:endParaRPr lang="en-US" sz="2600" dirty="0"/>
+            <a:endParaRPr lang="en-US" sz="2500" dirty="0"/>
           </a:p>
         </p:txBody>
       </p:sp>
@@ -1858,8 +2848,8 @@
         </p:nvSpPr>
         <p:spPr>
           <a:xfrm>
-            <a:off x="548640" y="1298448"/>
-            <a:ext cx="3931920" cy="384048"/>
+            <a:off x="548640" y="1115568"/>
+            <a:ext cx="3566160" cy="365760"/>
           </a:xfrm>
           <a:prstGeom prst="rect">
             <a:avLst/>
@@ -1875,7 +2865,331 @@
               <a:buNone/>
             </a:pPr>
             <a:r>
-              <a:rPr lang="en-US" sz="1400" b="1" dirty="0">
+              <a:rPr lang="en-US" sz="1350" b="1" dirty="0">
+                <a:solidFill>
+                  <a:srgbClr val="000000"/>
+                </a:solidFill>
+                <a:latin typeface="Microsoft YaHei" pitchFamily="34" charset="0"/>
+                <a:ea typeface="Microsoft YaHei" pitchFamily="34" charset="-122"/>
+                <a:cs typeface="Microsoft YaHei" pitchFamily="34" charset="-120"/>
+              </a:rPr>
+              <a:t>交互项全部跨零</a:t>
+            </a:r>
+            <a:endParaRPr lang="en-US" sz="1350" dirty="0"/>
+          </a:p>
+        </p:txBody>
+      </p:sp>
+      <p:sp>
+        <p:nvSpPr>
+          <p:cNvPr id="5" name="Text 3"/>
+          <p:cNvSpPr txBox="1"/>
+          <p:nvPr/>
+        </p:nvSpPr>
+        <p:spPr>
+          <a:xfrm>
+            <a:off x="4251960" y="1115568"/>
+            <a:ext cx="7406640" cy="566928"/>
+          </a:xfrm>
+          <a:prstGeom prst="rect">
+            <a:avLst/>
+          </a:prstGeom>
+          <a:noFill/>
+          <a:ln/>
+        </p:spPr>
+        <p:txBody>
+          <a:bodyPr wrap="square" lIns="0" tIns="0" rIns="0" bIns="0" rtlCol="0" anchor="ctr"/>
+          <a:lstStyle/>
+          <a:p>
+            <a:pPr indent="0" marL="0">
+              <a:lnSpc>
+                <a:spcPts val="1600"/>
+              </a:lnSpc>
+              <a:buNone/>
+            </a:pPr>
+            <a:r>
+              <a:rPr lang="en-US" sz="1200" dirty="0">
+                <a:solidFill>
+                  <a:srgbClr val="6E6E6E"/>
+                </a:solidFill>
+                <a:latin typeface="Microsoft YaHei" pitchFamily="34" charset="0"/>
+                <a:ea typeface="Microsoft YaHei" pitchFamily="34" charset="-122"/>
+                <a:cs typeface="Microsoft YaHei" pitchFamily="34" charset="-120"/>
+              </a:rPr>
+              <a:t>现有供体数判不出灰白质的改变是否不同。这是功效不足，不是「两侧相同」。</a:t>
+            </a:r>
+            <a:endParaRPr lang="en-US" sz="1200" dirty="0"/>
+          </a:p>
+        </p:txBody>
+      </p:sp>
+      <p:sp>
+        <p:nvSpPr>
+          <p:cNvPr id="6" name="Text 4"/>
+          <p:cNvSpPr txBox="1"/>
+          <p:nvPr/>
+        </p:nvSpPr>
+        <p:spPr>
+          <a:xfrm>
+            <a:off x="548640" y="1847088"/>
+            <a:ext cx="3566160" cy="365760"/>
+          </a:xfrm>
+          <a:prstGeom prst="rect">
+            <a:avLst/>
+          </a:prstGeom>
+          <a:noFill/>
+          <a:ln/>
+        </p:spPr>
+        <p:txBody>
+          <a:bodyPr wrap="square" lIns="0" tIns="0" rIns="0" bIns="0" rtlCol="0" anchor="ctr"/>
+          <a:lstStyle/>
+          <a:p>
+            <a:pPr indent="0" marL="0">
+              <a:buNone/>
+            </a:pPr>
+            <a:r>
+              <a:rPr lang="en-US" sz="1350" b="1" dirty="0">
+                <a:solidFill>
+                  <a:srgbClr val="000000"/>
+                </a:solidFill>
+                <a:latin typeface="Microsoft YaHei" pitchFamily="34" charset="0"/>
+                <a:ea typeface="Microsoft YaHei" pitchFamily="34" charset="-122"/>
+                <a:cs typeface="Microsoft YaHei" pitchFamily="34" charset="-120"/>
+              </a:rPr>
+              <a:t>白质结论主要由一个队列承担</a:t>
+            </a:r>
+            <a:endParaRPr lang="en-US" sz="1350" dirty="0"/>
+          </a:p>
+        </p:txBody>
+      </p:sp>
+      <p:sp>
+        <p:nvSpPr>
+          <p:cNvPr id="7" name="Text 5"/>
+          <p:cNvSpPr txBox="1"/>
+          <p:nvPr/>
+        </p:nvSpPr>
+        <p:spPr>
+          <a:xfrm>
+            <a:off x="4251960" y="1847088"/>
+            <a:ext cx="7406640" cy="566928"/>
+          </a:xfrm>
+          <a:prstGeom prst="rect">
+            <a:avLst/>
+          </a:prstGeom>
+          <a:noFill/>
+          <a:ln/>
+        </p:spPr>
+        <p:txBody>
+          <a:bodyPr wrap="square" lIns="0" tIns="0" rIns="0" bIns="0" rtlCol="0" anchor="ctr"/>
+          <a:lstStyle/>
+          <a:p>
+            <a:pPr indent="0" marL="0">
+              <a:lnSpc>
+                <a:spcPts val="1600"/>
+              </a:lnSpc>
+              <a:buNone/>
+            </a:pPr>
+            <a:r>
+              <a:rPr lang="en-US" sz="1200" dirty="0">
+                <a:solidFill>
+                  <a:srgbClr val="6E6E6E"/>
+                </a:solidFill>
+                <a:latin typeface="Microsoft YaHei" pitchFamily="34" charset="0"/>
+                <a:ea typeface="Microsoft YaHei" pitchFamily="34" charset="-122"/>
+                <a:cs typeface="Microsoft YaHei" pitchFamily="34" charset="-120"/>
+              </a:rPr>
+              <a:t>GSE279180 十三位供体，留一法 +1.16 到 +1.41；GSE180759 仅三位对照，去掉一位即从 +1.09 降到 +0.25。</a:t>
+            </a:r>
+            <a:endParaRPr lang="en-US" sz="1200" dirty="0"/>
+          </a:p>
+        </p:txBody>
+      </p:sp>
+      <p:sp>
+        <p:nvSpPr>
+          <p:cNvPr id="8" name="Text 6"/>
+          <p:cNvSpPr txBox="1"/>
+          <p:nvPr/>
+        </p:nvSpPr>
+        <p:spPr>
+          <a:xfrm>
+            <a:off x="548640" y="2578608"/>
+            <a:ext cx="3566160" cy="365760"/>
+          </a:xfrm>
+          <a:prstGeom prst="rect">
+            <a:avLst/>
+          </a:prstGeom>
+          <a:noFill/>
+          <a:ln/>
+        </p:spPr>
+        <p:txBody>
+          <a:bodyPr wrap="square" lIns="0" tIns="0" rIns="0" bIns="0" rtlCol="0" anchor="ctr"/>
+          <a:lstStyle/>
+          <a:p>
+            <a:pPr indent="0" marL="0">
+              <a:buNone/>
+            </a:pPr>
+            <a:r>
+              <a:rPr lang="en-US" sz="1350" b="1" dirty="0">
+                <a:solidFill>
+                  <a:srgbClr val="000000"/>
+                </a:solidFill>
+                <a:latin typeface="Microsoft YaHei" pitchFamily="34" charset="0"/>
+                <a:ea typeface="Microsoft YaHei" pitchFamily="34" charset="-122"/>
+                <a:cs typeface="Microsoft YaHei" pitchFamily="34" charset="-120"/>
+              </a:rPr>
+              <a:t>灰质对照几乎没采到小胶质</a:t>
+            </a:r>
+            <a:endParaRPr lang="en-US" sz="1350" dirty="0"/>
+          </a:p>
+        </p:txBody>
+      </p:sp>
+      <p:sp>
+        <p:nvSpPr>
+          <p:cNvPr id="9" name="Text 7"/>
+          <p:cNvSpPr txBox="1"/>
+          <p:nvPr/>
+        </p:nvSpPr>
+        <p:spPr>
+          <a:xfrm>
+            <a:off x="4251960" y="2578608"/>
+            <a:ext cx="7406640" cy="566928"/>
+          </a:xfrm>
+          <a:prstGeom prst="rect">
+            <a:avLst/>
+          </a:prstGeom>
+          <a:noFill/>
+          <a:ln/>
+        </p:spPr>
+        <p:txBody>
+          <a:bodyPr wrap="square" lIns="0" tIns="0" rIns="0" bIns="0" rtlCol="0" anchor="ctr"/>
+          <a:lstStyle/>
+          <a:p>
+            <a:pPr indent="0" marL="0">
+              <a:lnSpc>
+                <a:spcPts val="1600"/>
+              </a:lnSpc>
+              <a:buNone/>
+            </a:pPr>
+            <a:r>
+              <a:rPr lang="en-US" sz="1200" dirty="0">
+                <a:solidFill>
+                  <a:srgbClr val="6E6E6E"/>
+                </a:solidFill>
+                <a:latin typeface="Microsoft YaHei" pitchFamily="34" charset="0"/>
+                <a:ea typeface="Microsoft YaHei" pitchFamily="34" charset="-122"/>
+                <a:cs typeface="Microsoft YaHei" pitchFamily="34" charset="-120"/>
+              </a:rPr>
+              <a:t>Schirmer 九位对照中七位的小胶质核数不超过 11 个，故小胶质的交互项无法计算。</a:t>
+            </a:r>
+            <a:endParaRPr lang="en-US" sz="1200" dirty="0"/>
+          </a:p>
+        </p:txBody>
+      </p:sp>
+      <p:sp>
+        <p:nvSpPr>
+          <p:cNvPr id="10" name="Text 8"/>
+          <p:cNvSpPr txBox="1"/>
+          <p:nvPr/>
+        </p:nvSpPr>
+        <p:spPr>
+          <a:xfrm>
+            <a:off x="548640" y="3310128"/>
+            <a:ext cx="3566160" cy="365760"/>
+          </a:xfrm>
+          <a:prstGeom prst="rect">
+            <a:avLst/>
+          </a:prstGeom>
+          <a:noFill/>
+          <a:ln/>
+        </p:spPr>
+        <p:txBody>
+          <a:bodyPr wrap="square" lIns="0" tIns="0" rIns="0" bIns="0" rtlCol="0" anchor="ctr"/>
+          <a:lstStyle/>
+          <a:p>
+            <a:pPr indent="0" marL="0">
+              <a:buNone/>
+            </a:pPr>
+            <a:r>
+              <a:rPr lang="en-US" sz="1350" b="1" dirty="0">
+                <a:solidFill>
+                  <a:srgbClr val="000000"/>
+                </a:solidFill>
+                <a:latin typeface="Microsoft YaHei" pitchFamily="34" charset="0"/>
+                <a:ea typeface="Microsoft YaHei" pitchFamily="34" charset="-122"/>
+                <a:cs typeface="Microsoft YaHei" pitchFamily="34" charset="-120"/>
+              </a:rPr>
+              <a:t>OPC 的灰质结果不稳</a:t>
+            </a:r>
+            <a:endParaRPr lang="en-US" sz="1350" dirty="0"/>
+          </a:p>
+        </p:txBody>
+      </p:sp>
+      <p:sp>
+        <p:nvSpPr>
+          <p:cNvPr id="11" name="Text 9"/>
+          <p:cNvSpPr txBox="1"/>
+          <p:nvPr/>
+        </p:nvSpPr>
+        <p:spPr>
+          <a:xfrm>
+            <a:off x="4251960" y="3310128"/>
+            <a:ext cx="7406640" cy="566928"/>
+          </a:xfrm>
+          <a:prstGeom prst="rect">
+            <a:avLst/>
+          </a:prstGeom>
+          <a:noFill/>
+          <a:ln/>
+        </p:spPr>
+        <p:txBody>
+          <a:bodyPr wrap="square" lIns="0" tIns="0" rIns="0" bIns="0" rtlCol="0" anchor="ctr"/>
+          <a:lstStyle/>
+          <a:p>
+            <a:pPr indent="0" marL="0">
+              <a:lnSpc>
+                <a:spcPts val="1600"/>
+              </a:lnSpc>
+              <a:buNone/>
+            </a:pPr>
+            <a:r>
+              <a:rPr lang="en-US" sz="1200" dirty="0">
+                <a:solidFill>
+                  <a:srgbClr val="6E6E6E"/>
+                </a:solidFill>
+                <a:latin typeface="Microsoft YaHei" pitchFamily="34" charset="0"/>
+                <a:ea typeface="Microsoft YaHei" pitchFamily="34" charset="-122"/>
+                <a:cs typeface="Microsoft YaHei" pitchFamily="34" charset="-120"/>
+              </a:rPr>
+              <a:t>对照中位仅 0.002 CP10k，倍数变化对伪计数敏感；置换检验与自助区间在此结论相反。</a:t>
+            </a:r>
+            <a:endParaRPr lang="en-US" sz="1200" dirty="0"/>
+          </a:p>
+        </p:txBody>
+      </p:sp>
+      <p:sp>
+        <p:nvSpPr>
+          <p:cNvPr id="12" name="Text 10"/>
+          <p:cNvSpPr txBox="1"/>
+          <p:nvPr/>
+        </p:nvSpPr>
+        <p:spPr>
+          <a:xfrm>
+            <a:off x="548640" y="4041648"/>
+            <a:ext cx="3566160" cy="365760"/>
+          </a:xfrm>
+          <a:prstGeom prst="rect">
+            <a:avLst/>
+          </a:prstGeom>
+          <a:noFill/>
+          <a:ln/>
+        </p:spPr>
+        <p:txBody>
+          <a:bodyPr wrap="square" lIns="0" tIns="0" rIns="0" bIns="0" rtlCol="0" anchor="ctr"/>
+          <a:lstStyle/>
+          <a:p>
+            <a:pPr indent="0" marL="0">
+              <a:buNone/>
+            </a:pPr>
+            <a:r>
+              <a:rPr lang="en-US" sz="1350" b="1" dirty="0">
                 <a:solidFill>
                   <a:srgbClr val="000000"/>
                 </a:solidFill>
@@ -1885,20 +3199,20 @@
               </a:rPr>
               <a:t>灰质与白质来自不同研究</a:t>
             </a:r>
-            <a:endParaRPr lang="en-US" sz="1400" dirty="0"/>
-          </a:p>
-        </p:txBody>
-      </p:sp>
-      <p:sp>
-        <p:nvSpPr>
-          <p:cNvPr id="5" name="Text 3"/>
+            <a:endParaRPr lang="en-US" sz="1350" dirty="0"/>
+          </a:p>
+        </p:txBody>
+      </p:sp>
+      <p:sp>
+        <p:nvSpPr>
+          <p:cNvPr id="13" name="Text 11"/>
           <p:cNvSpPr txBox="1"/>
           <p:nvPr/>
         </p:nvSpPr>
         <p:spPr>
           <a:xfrm>
-            <a:off x="4572000" y="1298448"/>
-            <a:ext cx="7040880" cy="548640"/>
+            <a:off x="4251960" y="4041648"/>
+            <a:ext cx="7406640" cy="566928"/>
           </a:xfrm>
           <a:prstGeom prst="rect">
             <a:avLst/>
@@ -1912,12 +3226,12 @@
           <a:p>
             <a:pPr indent="0" marL="0">
               <a:lnSpc>
-                <a:spcPts val="1700"/>
+                <a:spcPts val="1600"/>
               </a:lnSpc>
               <a:buNone/>
             </a:pPr>
             <a:r>
-              <a:rPr lang="en-US" sz="1250" dirty="0">
+              <a:rPr lang="en-US" sz="1200" dirty="0">
                 <a:solidFill>
                   <a:srgbClr val="6E6E6E"/>
                 </a:solidFill>
@@ -1925,22 +3239,22 @@
                 <a:ea typeface="Microsoft YaHei" pitchFamily="34" charset="-122"/>
                 <a:cs typeface="Microsoft YaHei" pitchFamily="34" charset="-120"/>
               </a:rPr>
-              <a:t>无任何公开队列同时含两者；Macnair 2025 有，但在 EGA 受控访问</a:t>
+              <a:t>影响第一问的区域对比，已用全基因组分布作对照；不影响第二问的研究内相减。</a:t>
             </a:r>
-            <a:endParaRPr lang="en-US" sz="1250" dirty="0"/>
-          </a:p>
-        </p:txBody>
-      </p:sp>
-      <p:sp>
-        <p:nvSpPr>
-          <p:cNvPr id="6" name="Text 4"/>
+            <a:endParaRPr lang="en-US" sz="1200" dirty="0"/>
+          </a:p>
+        </p:txBody>
+      </p:sp>
+      <p:sp>
+        <p:nvSpPr>
+          <p:cNvPr id="14" name="Text 12"/>
           <p:cNvSpPr txBox="1"/>
           <p:nvPr/>
         </p:nvSpPr>
         <p:spPr>
           <a:xfrm>
-            <a:off x="548640" y="2103120"/>
-            <a:ext cx="3931920" cy="384048"/>
+            <a:off x="548640" y="4773168"/>
+            <a:ext cx="3566160" cy="365760"/>
           </a:xfrm>
           <a:prstGeom prst="rect">
             <a:avLst/>
@@ -1956,7 +3270,7 @@
               <a:buNone/>
             </a:pPr>
             <a:r>
-              <a:rPr lang="en-US" sz="1400" b="1" dirty="0">
+              <a:rPr lang="en-US" sz="1350" b="1" dirty="0">
                 <a:solidFill>
                   <a:srgbClr val="000000"/>
                 </a:solidFill>
@@ -1964,22 +3278,22 @@
                 <a:ea typeface="Microsoft YaHei" pitchFamily="34" charset="-122"/>
                 <a:cs typeface="Microsoft YaHei" pitchFamily="34" charset="-120"/>
               </a:rPr>
-              <a:t>正常灰质的小胶质仅 2 个供体</a:t>
+              <a:t>GSE180759 存在文库批次</a:t>
             </a:r>
-            <a:endParaRPr lang="en-US" sz="1400" dirty="0"/>
-          </a:p>
-        </p:txBody>
-      </p:sp>
-      <p:sp>
-        <p:nvSpPr>
-          <p:cNvPr id="7" name="Text 5"/>
+            <a:endParaRPr lang="en-US" sz="1350" dirty="0"/>
+          </a:p>
+        </p:txBody>
+      </p:sp>
+      <p:sp>
+        <p:nvSpPr>
+          <p:cNvPr id="15" name="Text 13"/>
           <p:cNvSpPr txBox="1"/>
           <p:nvPr/>
         </p:nvSpPr>
         <p:spPr>
           <a:xfrm>
-            <a:off x="4572000" y="2103120"/>
-            <a:ext cx="7040880" cy="548640"/>
+            <a:off x="4251960" y="4773168"/>
+            <a:ext cx="7406640" cy="566928"/>
           </a:xfrm>
           <a:prstGeom prst="rect">
             <a:avLst/>
@@ -1993,12 +3307,12 @@
           <a:p>
             <a:pPr indent="0" marL="0">
               <a:lnSpc>
-                <a:spcPts val="1700"/>
+                <a:spcPts val="1600"/>
               </a:lnSpc>
               <a:buNone/>
             </a:pPr>
             <a:r>
-              <a:rPr lang="en-US" sz="1250" dirty="0">
+              <a:rPr lang="en-US" sz="1200" dirty="0">
                 <a:solidFill>
                   <a:srgbClr val="6E6E6E"/>
                 </a:solidFill>
@@ -2006,22 +3320,22 @@
                 <a:ea typeface="Microsoft YaHei" pitchFamily="34" charset="-122"/>
                 <a:cs typeface="Microsoft YaHei" pitchFamily="34" charset="-120"/>
               </a:rPr>
-              <a:t>因此“正常时两区室无差别”这一条在小胶质上无法判定</a:t>
+              <a:t>文库 18 单独形成少突胶质孤岛，其检出率为其余少突胶质的三倍；图谱已做 Harmony 整合。</a:t>
             </a:r>
-            <a:endParaRPr lang="en-US" sz="1250" dirty="0"/>
-          </a:p>
-        </p:txBody>
-      </p:sp>
-      <p:sp>
-        <p:nvSpPr>
-          <p:cNvPr id="8" name="Text 6"/>
+            <a:endParaRPr lang="en-US" sz="1200" dirty="0"/>
+          </a:p>
+        </p:txBody>
+      </p:sp>
+      <p:sp>
+        <p:nvSpPr>
+          <p:cNvPr id="16" name="Text 14"/>
           <p:cNvSpPr txBox="1"/>
           <p:nvPr/>
         </p:nvSpPr>
         <p:spPr>
           <a:xfrm>
-            <a:off x="548640" y="2907792"/>
-            <a:ext cx="3931920" cy="384048"/>
+            <a:off x="548640" y="5504688"/>
+            <a:ext cx="3566160" cy="365760"/>
           </a:xfrm>
           <a:prstGeom prst="rect">
             <a:avLst/>
@@ -2037,250 +3351,7 @@
               <a:buNone/>
             </a:pPr>
             <a:r>
-              <a:rPr lang="en-US" sz="1400" b="1" dirty="0">
-                <a:solidFill>
-                  <a:srgbClr val="000000"/>
-                </a:solidFill>
-                <a:latin typeface="Microsoft YaHei" pitchFamily="34" charset="0"/>
-                <a:ea typeface="Microsoft YaHei" pitchFamily="34" charset="-122"/>
-                <a:cs typeface="Microsoft YaHei" pitchFamily="34" charset="-120"/>
-              </a:rPr>
-              <a:t>两个白质队列存在系统偏移</a:t>
-            </a:r>
-            <a:endParaRPr lang="en-US" sz="1400" dirty="0"/>
-          </a:p>
-        </p:txBody>
-      </p:sp>
-      <p:sp>
-        <p:nvSpPr>
-          <p:cNvPr id="9" name="Text 7"/>
-          <p:cNvSpPr txBox="1"/>
-          <p:nvPr/>
-        </p:nvSpPr>
-        <p:spPr>
-          <a:xfrm>
-            <a:off x="4572000" y="2907792"/>
-            <a:ext cx="7040880" cy="548640"/>
-          </a:xfrm>
-          <a:prstGeom prst="rect">
-            <a:avLst/>
-          </a:prstGeom>
-          <a:noFill/>
-          <a:ln/>
-        </p:spPr>
-        <p:txBody>
-          <a:bodyPr wrap="square" lIns="0" tIns="0" rIns="0" bIns="0" rtlCol="0" anchor="ctr"/>
-          <a:lstStyle/>
-          <a:p>
-            <a:pPr indent="0" marL="0">
-              <a:lnSpc>
-                <a:spcPts val="1700"/>
-              </a:lnSpc>
-              <a:buNone/>
-            </a:pPr>
-            <a:r>
-              <a:rPr lang="en-US" sz="1250" dirty="0">
-                <a:solidFill>
-                  <a:srgbClr val="6E6E6E"/>
-                </a:solidFill>
-                <a:latin typeface="Microsoft YaHei" pitchFamily="34" charset="0"/>
-                <a:ea typeface="Microsoft YaHei" pitchFamily="34" charset="-122"/>
-                <a:cs typeface="Microsoft YaHei" pitchFamily="34" charset="-120"/>
-              </a:rPr>
-              <a:t>GSE180759 的绝对值约为 GSE279180 的一半，方向一致</a:t>
-            </a:r>
-            <a:endParaRPr lang="en-US" sz="1250" dirty="0"/>
-          </a:p>
-        </p:txBody>
-      </p:sp>
-      <p:sp>
-        <p:nvSpPr>
-          <p:cNvPr id="10" name="Text 8"/>
-          <p:cNvSpPr txBox="1"/>
-          <p:nvPr/>
-        </p:nvSpPr>
-        <p:spPr>
-          <a:xfrm>
-            <a:off x="548640" y="3712464"/>
-            <a:ext cx="3931920" cy="384048"/>
-          </a:xfrm>
-          <a:prstGeom prst="rect">
-            <a:avLst/>
-          </a:prstGeom>
-          <a:noFill/>
-          <a:ln/>
-        </p:spPr>
-        <p:txBody>
-          <a:bodyPr wrap="square" lIns="0" tIns="0" rIns="0" bIns="0" rtlCol="0" anchor="ctr"/>
-          <a:lstStyle/>
-          <a:p>
-            <a:pPr indent="0" marL="0">
-              <a:buNone/>
-            </a:pPr>
-            <a:r>
-              <a:rPr lang="en-US" sz="1400" b="1" dirty="0">
-                <a:solidFill>
-                  <a:srgbClr val="000000"/>
-                </a:solidFill>
-                <a:latin typeface="Microsoft YaHei" pitchFamily="34" charset="0"/>
-                <a:ea typeface="Microsoft YaHei" pitchFamily="34" charset="-122"/>
-                <a:cs typeface="Microsoft YaHei" pitchFamily="34" charset="-120"/>
-              </a:rPr>
-              <a:t>测序深度与疾病状态混杂</a:t>
-            </a:r>
-            <a:endParaRPr lang="en-US" sz="1400" dirty="0"/>
-          </a:p>
-        </p:txBody>
-      </p:sp>
-      <p:sp>
-        <p:nvSpPr>
-          <p:cNvPr id="11" name="Text 9"/>
-          <p:cNvSpPr txBox="1"/>
-          <p:nvPr/>
-        </p:nvSpPr>
-        <p:spPr>
-          <a:xfrm>
-            <a:off x="4572000" y="3712464"/>
-            <a:ext cx="7040880" cy="548640"/>
-          </a:xfrm>
-          <a:prstGeom prst="rect">
-            <a:avLst/>
-          </a:prstGeom>
-          <a:noFill/>
-          <a:ln/>
-        </p:spPr>
-        <p:txBody>
-          <a:bodyPr wrap="square" lIns="0" tIns="0" rIns="0" bIns="0" rtlCol="0" anchor="ctr"/>
-          <a:lstStyle/>
-          <a:p>
-            <a:pPr indent="0" marL="0">
-              <a:lnSpc>
-                <a:spcPts val="1700"/>
-              </a:lnSpc>
-              <a:buNone/>
-            </a:pPr>
-            <a:r>
-              <a:rPr lang="en-US" sz="1250" dirty="0">
-                <a:solidFill>
-                  <a:srgbClr val="6E6E6E"/>
-                </a:solidFill>
-                <a:latin typeface="Microsoft YaHei" pitchFamily="34" charset="0"/>
-                <a:ea typeface="Microsoft YaHei" pitchFamily="34" charset="-122"/>
-                <a:cs typeface="Microsoft YaHei" pitchFamily="34" charset="-120"/>
-              </a:rPr>
-              <a:t>GSE279180 的 MS 小胶质深度为对照的 3.84 倍，已全程深度归一化</a:t>
-            </a:r>
-            <a:endParaRPr lang="en-US" sz="1250" dirty="0"/>
-          </a:p>
-        </p:txBody>
-      </p:sp>
-      <p:sp>
-        <p:nvSpPr>
-          <p:cNvPr id="12" name="Text 10"/>
-          <p:cNvSpPr txBox="1"/>
-          <p:nvPr/>
-        </p:nvSpPr>
-        <p:spPr>
-          <a:xfrm>
-            <a:off x="548640" y="4517136"/>
-            <a:ext cx="3931920" cy="384048"/>
-          </a:xfrm>
-          <a:prstGeom prst="rect">
-            <a:avLst/>
-          </a:prstGeom>
-          <a:noFill/>
-          <a:ln/>
-        </p:spPr>
-        <p:txBody>
-          <a:bodyPr wrap="square" lIns="0" tIns="0" rIns="0" bIns="0" rtlCol="0" anchor="ctr"/>
-          <a:lstStyle/>
-          <a:p>
-            <a:pPr indent="0" marL="0">
-              <a:buNone/>
-            </a:pPr>
-            <a:r>
-              <a:rPr lang="en-US" sz="1400" b="1" dirty="0">
-                <a:solidFill>
-                  <a:srgbClr val="000000"/>
-                </a:solidFill>
-                <a:latin typeface="Microsoft YaHei" pitchFamily="34" charset="0"/>
-                <a:ea typeface="Microsoft YaHei" pitchFamily="34" charset="-122"/>
-                <a:cs typeface="Microsoft YaHei" pitchFamily="34" charset="-120"/>
-              </a:rPr>
-              <a:t>GSE180759 平台完全混杂</a:t>
-            </a:r>
-            <a:endParaRPr lang="en-US" sz="1400" dirty="0"/>
-          </a:p>
-        </p:txBody>
-      </p:sp>
-      <p:sp>
-        <p:nvSpPr>
-          <p:cNvPr id="13" name="Text 11"/>
-          <p:cNvSpPr txBox="1"/>
-          <p:nvPr/>
-        </p:nvSpPr>
-        <p:spPr>
-          <a:xfrm>
-            <a:off x="4572000" y="4517136"/>
-            <a:ext cx="7040880" cy="548640"/>
-          </a:xfrm>
-          <a:prstGeom prst="rect">
-            <a:avLst/>
-          </a:prstGeom>
-          <a:noFill/>
-          <a:ln/>
-        </p:spPr>
-        <p:txBody>
-          <a:bodyPr wrap="square" lIns="0" tIns="0" rIns="0" bIns="0" rtlCol="0" anchor="ctr"/>
-          <a:lstStyle/>
-          <a:p>
-            <a:pPr indent="0" marL="0">
-              <a:lnSpc>
-                <a:spcPts val="1700"/>
-              </a:lnSpc>
-              <a:buNone/>
-            </a:pPr>
-            <a:r>
-              <a:rPr lang="en-US" sz="1250" dirty="0">
-                <a:solidFill>
-                  <a:srgbClr val="6E6E6E"/>
-                </a:solidFill>
-                <a:latin typeface="Microsoft YaHei" pitchFamily="34" charset="0"/>
-                <a:ea typeface="Microsoft YaHei" pitchFamily="34" charset="-122"/>
-                <a:cs typeface="Microsoft YaHei" pitchFamily="34" charset="-120"/>
-              </a:rPr>
-              <a:t>4 个斑块周围文库全为 NovaSeq，11 个病灶边缘文库全为 HiSeq</a:t>
-            </a:r>
-            <a:endParaRPr lang="en-US" sz="1250" dirty="0"/>
-          </a:p>
-        </p:txBody>
-      </p:sp>
-      <p:sp>
-        <p:nvSpPr>
-          <p:cNvPr id="14" name="Text 12"/>
-          <p:cNvSpPr txBox="1"/>
-          <p:nvPr/>
-        </p:nvSpPr>
-        <p:spPr>
-          <a:xfrm>
-            <a:off x="548640" y="5321808"/>
-            <a:ext cx="3931920" cy="384048"/>
-          </a:xfrm>
-          <a:prstGeom prst="rect">
-            <a:avLst/>
-          </a:prstGeom>
-          <a:noFill/>
-          <a:ln/>
-        </p:spPr>
-        <p:txBody>
-          <a:bodyPr wrap="square" lIns="0" tIns="0" rIns="0" bIns="0" rtlCol="0" anchor="ctr"/>
-          <a:lstStyle/>
-          <a:p>
-            <a:pPr indent="0" marL="0">
-              <a:buNone/>
-            </a:pPr>
-            <a:r>
-              <a:rPr lang="en-US" sz="1400" b="1" dirty="0">
+              <a:rPr lang="en-US" sz="1350" b="1" dirty="0">
                 <a:solidFill>
                   <a:srgbClr val="000000"/>
                 </a:solidFill>
@@ -2290,20 +3361,20 @@
               </a:rPr>
               <a:t>全部为转录本层面</a:t>
             </a:r>
-            <a:endParaRPr lang="en-US" sz="1400" dirty="0"/>
-          </a:p>
-        </p:txBody>
-      </p:sp>
-      <p:sp>
-        <p:nvSpPr>
-          <p:cNvPr id="15" name="Text 13"/>
+            <a:endParaRPr lang="en-US" sz="1350" dirty="0"/>
+          </a:p>
+        </p:txBody>
+      </p:sp>
+      <p:sp>
+        <p:nvSpPr>
+          <p:cNvPr id="17" name="Text 15"/>
           <p:cNvSpPr txBox="1"/>
           <p:nvPr/>
         </p:nvSpPr>
         <p:spPr>
           <a:xfrm>
-            <a:off x="4572000" y="5321808"/>
-            <a:ext cx="7040880" cy="548640"/>
+            <a:off x="4251960" y="5504688"/>
+            <a:ext cx="7406640" cy="566928"/>
           </a:xfrm>
           <a:prstGeom prst="rect">
             <a:avLst/>
@@ -2317,12 +3388,12 @@
           <a:p>
             <a:pPr indent="0" marL="0">
               <a:lnSpc>
-                <a:spcPts val="1700"/>
+                <a:spcPts val="1600"/>
               </a:lnSpc>
               <a:buNone/>
             </a:pPr>
             <a:r>
-              <a:rPr lang="en-US" sz="1250" dirty="0">
+              <a:rPr lang="en-US" sz="1200" dirty="0">
                 <a:solidFill>
                   <a:srgbClr val="6E6E6E"/>
                 </a:solidFill>
@@ -2330,9 +3401,9 @@
                 <a:ea typeface="Microsoft YaHei" pitchFamily="34" charset="-122"/>
                 <a:cs typeface="Microsoft YaHei" pitchFamily="34" charset="-120"/>
               </a:rPr>
-              <a:t>人类 MS 脑组织无任何 MDA5 蛋白测量</a:t>
+              <a:t>人类 MS 脑组织无任何 MDA5 蛋白测量。</a:t>
             </a:r>
-            <a:endParaRPr lang="en-US" sz="1250" dirty="0"/>
+            <a:endParaRPr lang="en-US" sz="1200" dirty="0"/>
           </a:p>
         </p:txBody>
       </p:sp>
@@ -2408,8 +3479,8 @@
         </p:nvSpPr>
         <p:spPr>
           <a:xfrm>
-            <a:off x="548640" y="310896"/>
-            <a:ext cx="11064240" cy="566928"/>
+            <a:off x="548640" y="274320"/>
+            <a:ext cx="11064240" cy="475488"/>
           </a:xfrm>
           <a:prstGeom prst="rect">
             <a:avLst/>
@@ -2425,7 +3496,7 @@
               <a:buNone/>
             </a:pPr>
             <a:r>
-              <a:rPr lang="en-US" sz="2600" b="1" dirty="0">
+              <a:rPr lang="en-US" sz="2500" b="1" dirty="0">
                 <a:solidFill>
                   <a:srgbClr val="000000"/>
                 </a:solidFill>
@@ -2435,7 +3506,7 @@
               </a:rPr>
               <a:t>两个问题</a:t>
             </a:r>
-            <a:endParaRPr lang="en-US" sz="2600" dirty="0"/>
+            <a:endParaRPr lang="en-US" sz="2500" dirty="0"/>
           </a:p>
         </p:txBody>
       </p:sp>
@@ -2447,8 +3518,8 @@
         </p:nvSpPr>
         <p:spPr>
           <a:xfrm>
-            <a:off x="685800" y="1115568"/>
-            <a:ext cx="10972800" cy="402336"/>
+            <a:off x="685800" y="969264"/>
+            <a:ext cx="10972800" cy="365760"/>
           </a:xfrm>
           <a:prstGeom prst="rect">
             <a:avLst/>
@@ -2464,7 +3535,7 @@
               <a:buNone/>
             </a:pPr>
             <a:r>
-              <a:rPr lang="en-US" sz="1800" b="1" dirty="0">
+              <a:rPr lang="en-US" sz="1700" b="1" dirty="0">
                 <a:solidFill>
                   <a:srgbClr val="000000"/>
                 </a:solidFill>
@@ -2472,9 +3543,9 @@
                 <a:ea typeface="Microsoft YaHei" pitchFamily="34" charset="-122"/>
                 <a:cs typeface="Microsoft YaHei" pitchFamily="34" charset="-120"/>
               </a:rPr>
-              <a:t>一　正常人脑中 MDA5 由哪些细胞表达？灰质与白质是否不同？</a:t>
+              <a:t>一　正常人脑中 IFIH1 由哪些细胞表达？灰质与白质是否不同？</a:t>
             </a:r>
-            <a:endParaRPr lang="en-US" sz="1800" dirty="0"/>
+            <a:endParaRPr lang="en-US" sz="1700" dirty="0"/>
           </a:p>
         </p:txBody>
       </p:sp>
@@ -2486,8 +3557,8 @@
         </p:nvSpPr>
         <p:spPr>
           <a:xfrm>
-            <a:off x="685800" y="1645920"/>
-            <a:ext cx="10972800" cy="402336"/>
+            <a:off x="685800" y="1426464"/>
+            <a:ext cx="10972800" cy="365760"/>
           </a:xfrm>
           <a:prstGeom prst="rect">
             <a:avLst/>
@@ -2503,7 +3574,7 @@
               <a:buNone/>
             </a:pPr>
             <a:r>
-              <a:rPr lang="en-US" sz="1800" b="1" dirty="0">
+              <a:rPr lang="en-US" sz="1700" b="1" dirty="0">
                 <a:solidFill>
                   <a:srgbClr val="000000"/>
                 </a:solidFill>
@@ -2511,9 +3582,48 @@
                 <a:ea typeface="Microsoft YaHei" pitchFamily="34" charset="-122"/>
                 <a:cs typeface="Microsoft YaHei" pitchFamily="34" charset="-120"/>
               </a:rPr>
-              <a:t>二　MS 中这一分布如何改变？灰质与白质的改变是否相同？</a:t>
+              <a:t>二　MS 中 IFIH1 的分布如何改变？灰质与白质的改变是否相同？</a:t>
             </a:r>
-            <a:endParaRPr lang="en-US" sz="1800" dirty="0"/>
+            <a:endParaRPr lang="en-US" sz="1700" dirty="0"/>
+          </a:p>
+        </p:txBody>
+      </p:sp>
+      <p:sp>
+        <p:nvSpPr>
+          <p:cNvPr id="6" name="Text 4"/>
+          <p:cNvSpPr txBox="1"/>
+          <p:nvPr/>
+        </p:nvSpPr>
+        <p:spPr>
+          <a:xfrm>
+            <a:off x="685800" y="1883664"/>
+            <a:ext cx="10972800" cy="329184"/>
+          </a:xfrm>
+          <a:prstGeom prst="rect">
+            <a:avLst/>
+          </a:prstGeom>
+          <a:noFill/>
+          <a:ln/>
+        </p:spPr>
+        <p:txBody>
+          <a:bodyPr wrap="square" lIns="0" tIns="0" rIns="0" bIns="0" rtlCol="0" anchor="ctr"/>
+          <a:lstStyle/>
+          <a:p>
+            <a:pPr indent="0" marL="0">
+              <a:buNone/>
+            </a:pPr>
+            <a:r>
+              <a:rPr lang="en-US" sz="1300" dirty="0">
+                <a:solidFill>
+                  <a:srgbClr val="6E6E6E"/>
+                </a:solidFill>
+                <a:latin typeface="Microsoft YaHei" pitchFamily="34" charset="0"/>
+                <a:ea typeface="Microsoft YaHei" pitchFamily="34" charset="-122"/>
+                <a:cs typeface="Microsoft YaHei" pitchFamily="34" charset="-120"/>
+              </a:rPr>
+              <a:t>第一问的区域对比跨研究，需要批次对照；第二问的「改变」在各研究内部相减，批次自行抵消。</a:t>
+            </a:r>
+            <a:endParaRPr lang="en-US" sz="1300" dirty="0"/>
           </a:p>
         </p:txBody>
       </p:sp>
@@ -2532,7 +3642,7 @@
           </p:nvPr>
         </p:nvGraphicFramePr>
         <p:xfrm>
-          <a:off x="548640" y="2487168"/>
+          <a:off x="548640" y="2395728"/>
           <a:ext cx="11064240" cy="914400"/>
         </p:xfrm>
         <a:graphic>
@@ -2540,13 +3650,13 @@
             <a:tbl>
               <a:tblPr/>
               <a:tblGrid>
-                <a:gridCol w="3291840"/>
-                <a:gridCol w="2743200"/>
-                <a:gridCol w="1920240"/>
-                <a:gridCol w="1737360"/>
-                <a:gridCol w="1371600"/>
+                <a:gridCol w="3200400"/>
+                <a:gridCol w="1828800"/>
+                <a:gridCol w="2103120"/>
+                <a:gridCol w="1554480"/>
+                <a:gridCol w="2377440"/>
               </a:tblGrid>
-              <a:tr h="420624">
+              <a:tr h="566928">
                 <a:tc>
                   <a:txBody>
                     <a:bodyPr/>
@@ -2783,7 +3893,7 @@
                   </a:tcPr>
                 </a:tc>
               </a:tr>
-              <a:tr h="420624">
+              <a:tr h="566928">
                 <a:tc>
                   <a:txBody>
                     <a:bodyPr/>
@@ -2848,7 +3958,7 @@
                           <a:ea typeface="Microsoft YaHei" pitchFamily="34" charset="-122"/>
                           <a:cs typeface="Microsoft YaHei" pitchFamily="34" charset="-120"/>
                         </a:rPr>
-                        <a:t>正常脑（灰质区域）</a:t>
+                        <a:t>正常脑</a:t>
                       </a:r>
                       <a:endParaRPr lang="en-US" sz="1250" dirty="0">
                         <a:latin typeface="Microsoft YaHei" charset="0"/>
@@ -2989,7 +4099,7 @@
                           <a:ea typeface="Microsoft YaHei" pitchFamily="34" charset="-122"/>
                           <a:cs typeface="Microsoft YaHei" pitchFamily="34" charset="-120"/>
                         </a:rPr>
-                        <a:t>细胞类型次序</a:t>
+                        <a:t>问题一：细胞类型次序</a:t>
                       </a:r>
                       <a:endParaRPr lang="en-US" sz="1250" dirty="0">
                         <a:latin typeface="Microsoft YaHei" charset="0"/>
@@ -3020,7 +4130,7 @@
                   </a:tcPr>
                 </a:tc>
               </a:tr>
-              <a:tr h="420624">
+              <a:tr h="566928">
                 <a:tc>
                   <a:txBody>
                     <a:bodyPr/>
@@ -3132,7 +4242,7 @@
                           <a:ea typeface="Microsoft YaHei" pitchFamily="34" charset="-122"/>
                           <a:cs typeface="Microsoft YaHei" pitchFamily="34" charset="-120"/>
                         </a:rPr>
-                        <a:t>5 MS + 3 对照</a:t>
+                        <a:t>3 对照 + 5 MS</a:t>
                       </a:r>
                       <a:endParaRPr lang="en-US" sz="1250" dirty="0">
                         <a:latin typeface="Microsoft YaHei" charset="0"/>
@@ -3226,7 +4336,7 @@
                           <a:ea typeface="Microsoft YaHei" pitchFamily="34" charset="-122"/>
                           <a:cs typeface="Microsoft YaHei" pitchFamily="34" charset="-120"/>
                         </a:rPr>
-                        <a:t>白质 · 病灶分期</a:t>
+                        <a:t>白质基线与改变</a:t>
                       </a:r>
                       <a:endParaRPr lang="en-US" sz="1250" dirty="0">
                         <a:latin typeface="Microsoft YaHei" charset="0"/>
@@ -3257,7 +4367,7 @@
                   </a:tcPr>
                 </a:tc>
               </a:tr>
-              <a:tr h="420624">
+              <a:tr h="566928">
                 <a:tc>
                   <a:txBody>
                     <a:bodyPr/>
@@ -3369,7 +4479,7 @@
                           <a:ea typeface="Microsoft YaHei" pitchFamily="34" charset="-122"/>
                           <a:cs typeface="Microsoft YaHei" pitchFamily="34" charset="-120"/>
                         </a:rPr>
-                        <a:t>7 MS + 6 对照</a:t>
+                        <a:t>6 对照 + 7 MS</a:t>
                       </a:r>
                       <a:endParaRPr lang="en-US" sz="1250" dirty="0">
                         <a:latin typeface="Microsoft YaHei" charset="0"/>
@@ -3416,7 +4526,7 @@
                           <a:ea typeface="Microsoft YaHei" pitchFamily="34" charset="-122"/>
                           <a:cs typeface="Microsoft YaHei" pitchFamily="34" charset="-120"/>
                         </a:rPr>
-                        <a:t>103 794</a:t>
+                        <a:t>103 780</a:t>
                       </a:r>
                       <a:endParaRPr lang="en-US" sz="1250" dirty="0">
                         <a:latin typeface="Microsoft YaHei" charset="0"/>
@@ -3463,7 +4573,7 @@
                           <a:ea typeface="Microsoft YaHei" pitchFamily="34" charset="-122"/>
                           <a:cs typeface="Microsoft YaHei" pitchFamily="34" charset="-120"/>
                         </a:rPr>
-                        <a:t>白质 · 主力</a:t>
+                        <a:t>白质基线与改变（主力）</a:t>
                       </a:r>
                       <a:endParaRPr lang="en-US" sz="1250" dirty="0">
                         <a:latin typeface="Microsoft YaHei" charset="0"/>
@@ -3494,7 +4604,244 @@
                   </a:tcPr>
                 </a:tc>
               </a:tr>
-              <a:tr h="420624">
+              <a:tr h="566928">
+                <a:tc>
+                  <a:txBody>
+                    <a:bodyPr/>
+                    <a:lstStyle/>
+                    <a:p>
+                      <a:pPr indent="0" marL="0">
+                        <a:buNone/>
+                      </a:pPr>
+                      <a:r>
+                        <a:rPr lang="en-US" sz="1250" dirty="0">
+                          <a:solidFill>
+                            <a:srgbClr val="000000"/>
+                          </a:solidFill>
+                          <a:latin typeface="Microsoft YaHei" pitchFamily="34" charset="0"/>
+                          <a:ea typeface="Microsoft YaHei" pitchFamily="34" charset="-122"/>
+                          <a:cs typeface="Microsoft YaHei" pitchFamily="34" charset="-120"/>
+                        </a:rPr>
+                        <a:t>Schirmer 2019</a:t>
+                      </a:r>
+                      <a:endParaRPr lang="en-US" sz="1250" dirty="0">
+                        <a:latin typeface="Microsoft YaHei" charset="0"/>
+                        <a:ea typeface="Microsoft YaHei" charset="0"/>
+                        <a:cs typeface="Microsoft YaHei" charset="0"/>
+                      </a:endParaRPr>
+                    </a:p>
+                  </a:txBody>
+                  <a:tcPr marL="91440" marR="91440" marT="45720" marB="45720" anchor="ctr">
+                    <a:lnL w="0" cap="flat" cmpd="sng" algn="ctr">
+                      <a:noFill/>
+                    </a:lnL>
+                    <a:lnR w="0" cap="flat" cmpd="sng" algn="ctr">
+                      <a:noFill/>
+                    </a:lnR>
+                    <a:lnT w="0" cap="flat" cmpd="sng" algn="ctr">
+                      <a:noFill/>
+                    </a:lnT>
+                    <a:lnB w="12700" cap="flat" cmpd="sng" algn="ctr">
+                      <a:solidFill>
+                        <a:srgbClr val="C8CCD2"/>
+                      </a:solidFill>
+                      <a:prstDash val="solid"/>
+                      <a:round/>
+                      <a:headEnd type="none" w="med" len="med"/>
+                      <a:tailEnd type="none" w="med" len="med"/>
+                    </a:lnB>
+                  </a:tcPr>
+                </a:tc>
+                <a:tc>
+                  <a:txBody>
+                    <a:bodyPr/>
+                    <a:lstStyle/>
+                    <a:p>
+                      <a:pPr indent="0" marL="0">
+                        <a:buNone/>
+                      </a:pPr>
+                      <a:r>
+                        <a:rPr lang="en-US" sz="1250" dirty="0">
+                          <a:solidFill>
+                            <a:srgbClr val="000000"/>
+                          </a:solidFill>
+                          <a:latin typeface="Microsoft YaHei" pitchFamily="34" charset="0"/>
+                          <a:ea typeface="Microsoft YaHei" pitchFamily="34" charset="-122"/>
+                          <a:cs typeface="Microsoft YaHei" pitchFamily="34" charset="-120"/>
+                        </a:rPr>
+                        <a:t>皮层灰质</a:t>
+                      </a:r>
+                      <a:endParaRPr lang="en-US" sz="1250" dirty="0">
+                        <a:latin typeface="Microsoft YaHei" charset="0"/>
+                        <a:ea typeface="Microsoft YaHei" charset="0"/>
+                        <a:cs typeface="Microsoft YaHei" charset="0"/>
+                      </a:endParaRPr>
+                    </a:p>
+                  </a:txBody>
+                  <a:tcPr marL="91440" marR="91440" marT="45720" marB="45720" anchor="ctr">
+                    <a:lnL w="0" cap="flat" cmpd="sng" algn="ctr">
+                      <a:noFill/>
+                    </a:lnL>
+                    <a:lnR w="0" cap="flat" cmpd="sng" algn="ctr">
+                      <a:noFill/>
+                    </a:lnR>
+                    <a:lnT w="0" cap="flat" cmpd="sng" algn="ctr">
+                      <a:noFill/>
+                    </a:lnT>
+                    <a:lnB w="12700" cap="flat" cmpd="sng" algn="ctr">
+                      <a:solidFill>
+                        <a:srgbClr val="C8CCD2"/>
+                      </a:solidFill>
+                      <a:prstDash val="solid"/>
+                      <a:round/>
+                      <a:headEnd type="none" w="med" len="med"/>
+                      <a:tailEnd type="none" w="med" len="med"/>
+                    </a:lnB>
+                  </a:tcPr>
+                </a:tc>
+                <a:tc>
+                  <a:txBody>
+                    <a:bodyPr/>
+                    <a:lstStyle/>
+                    <a:p>
+                      <a:pPr indent="0" marL="0">
+                        <a:buNone/>
+                      </a:pPr>
+                      <a:r>
+                        <a:rPr lang="en-US" sz="1250" dirty="0">
+                          <a:solidFill>
+                            <a:srgbClr val="000000"/>
+                          </a:solidFill>
+                          <a:latin typeface="Microsoft YaHei" pitchFamily="34" charset="0"/>
+                          <a:ea typeface="Microsoft YaHei" pitchFamily="34" charset="-122"/>
+                          <a:cs typeface="Microsoft YaHei" pitchFamily="34" charset="-120"/>
+                        </a:rPr>
+                        <a:t>9 对照 + 12 MS</a:t>
+                      </a:r>
+                      <a:endParaRPr lang="en-US" sz="1250" dirty="0">
+                        <a:latin typeface="Microsoft YaHei" charset="0"/>
+                        <a:ea typeface="Microsoft YaHei" charset="0"/>
+                        <a:cs typeface="Microsoft YaHei" charset="0"/>
+                      </a:endParaRPr>
+                    </a:p>
+                  </a:txBody>
+                  <a:tcPr marL="91440" marR="91440" marT="45720" marB="45720" anchor="ctr">
+                    <a:lnL w="0" cap="flat" cmpd="sng" algn="ctr">
+                      <a:noFill/>
+                    </a:lnL>
+                    <a:lnR w="0" cap="flat" cmpd="sng" algn="ctr">
+                      <a:noFill/>
+                    </a:lnR>
+                    <a:lnT w="0" cap="flat" cmpd="sng" algn="ctr">
+                      <a:noFill/>
+                    </a:lnT>
+                    <a:lnB w="12700" cap="flat" cmpd="sng" algn="ctr">
+                      <a:solidFill>
+                        <a:srgbClr val="C8CCD2"/>
+                      </a:solidFill>
+                      <a:prstDash val="solid"/>
+                      <a:round/>
+                      <a:headEnd type="none" w="med" len="med"/>
+                      <a:tailEnd type="none" w="med" len="med"/>
+                    </a:lnB>
+                  </a:tcPr>
+                </a:tc>
+                <a:tc>
+                  <a:txBody>
+                    <a:bodyPr/>
+                    <a:lstStyle/>
+                    <a:p>
+                      <a:pPr indent="0" marL="0">
+                        <a:buNone/>
+                      </a:pPr>
+                      <a:r>
+                        <a:rPr lang="en-US" sz="1250" dirty="0">
+                          <a:solidFill>
+                            <a:srgbClr val="000000"/>
+                          </a:solidFill>
+                          <a:latin typeface="Microsoft YaHei" pitchFamily="34" charset="0"/>
+                          <a:ea typeface="Microsoft YaHei" pitchFamily="34" charset="-122"/>
+                          <a:cs typeface="Microsoft YaHei" pitchFamily="34" charset="-120"/>
+                        </a:rPr>
+                        <a:t>48 919</a:t>
+                      </a:r>
+                      <a:endParaRPr lang="en-US" sz="1250" dirty="0">
+                        <a:latin typeface="Microsoft YaHei" charset="0"/>
+                        <a:ea typeface="Microsoft YaHei" charset="0"/>
+                        <a:cs typeface="Microsoft YaHei" charset="0"/>
+                      </a:endParaRPr>
+                    </a:p>
+                  </a:txBody>
+                  <a:tcPr marL="91440" marR="91440" marT="45720" marB="45720" anchor="ctr">
+                    <a:lnL w="0" cap="flat" cmpd="sng" algn="ctr">
+                      <a:noFill/>
+                    </a:lnL>
+                    <a:lnR w="0" cap="flat" cmpd="sng" algn="ctr">
+                      <a:noFill/>
+                    </a:lnR>
+                    <a:lnT w="0" cap="flat" cmpd="sng" algn="ctr">
+                      <a:noFill/>
+                    </a:lnT>
+                    <a:lnB w="12700" cap="flat" cmpd="sng" algn="ctr">
+                      <a:solidFill>
+                        <a:srgbClr val="C8CCD2"/>
+                      </a:solidFill>
+                      <a:prstDash val="solid"/>
+                      <a:round/>
+                      <a:headEnd type="none" w="med" len="med"/>
+                      <a:tailEnd type="none" w="med" len="med"/>
+                    </a:lnB>
+                  </a:tcPr>
+                </a:tc>
+                <a:tc>
+                  <a:txBody>
+                    <a:bodyPr/>
+                    <a:lstStyle/>
+                    <a:p>
+                      <a:pPr indent="0" marL="0">
+                        <a:buNone/>
+                      </a:pPr>
+                      <a:r>
+                        <a:rPr lang="en-US" sz="1250" dirty="0">
+                          <a:solidFill>
+                            <a:srgbClr val="000000"/>
+                          </a:solidFill>
+                          <a:latin typeface="Microsoft YaHei" pitchFamily="34" charset="0"/>
+                          <a:ea typeface="Microsoft YaHei" pitchFamily="34" charset="-122"/>
+                          <a:cs typeface="Microsoft YaHei" pitchFamily="34" charset="-120"/>
+                        </a:rPr>
+                        <a:t>灰质基线与改变</a:t>
+                      </a:r>
+                      <a:endParaRPr lang="en-US" sz="1250" dirty="0">
+                        <a:latin typeface="Microsoft YaHei" charset="0"/>
+                        <a:ea typeface="Microsoft YaHei" charset="0"/>
+                        <a:cs typeface="Microsoft YaHei" charset="0"/>
+                      </a:endParaRPr>
+                    </a:p>
+                  </a:txBody>
+                  <a:tcPr marL="91440" marR="91440" marT="45720" marB="45720" anchor="ctr">
+                    <a:lnL w="0" cap="flat" cmpd="sng" algn="ctr">
+                      <a:noFill/>
+                    </a:lnL>
+                    <a:lnR w="0" cap="flat" cmpd="sng" algn="ctr">
+                      <a:noFill/>
+                    </a:lnR>
+                    <a:lnT w="0" cap="flat" cmpd="sng" algn="ctr">
+                      <a:noFill/>
+                    </a:lnT>
+                    <a:lnB w="12700" cap="flat" cmpd="sng" algn="ctr">
+                      <a:solidFill>
+                        <a:srgbClr val="C8CCD2"/>
+                      </a:solidFill>
+                      <a:prstDash val="solid"/>
+                      <a:round/>
+                      <a:headEnd type="none" w="med" len="med"/>
+                      <a:tailEnd type="none" w="med" len="med"/>
+                    </a:lnB>
+                  </a:tcPr>
+                </a:tc>
+              </a:tr>
+              <a:tr h="566928">
                 <a:tc>
                   <a:txBody>
                     <a:bodyPr/>
@@ -3606,7 +4953,7 @@
                           <a:ea typeface="Microsoft YaHei" pitchFamily="34" charset="-122"/>
                           <a:cs typeface="Microsoft YaHei" pitchFamily="34" charset="-120"/>
                         </a:rPr>
-                        <a:t>4 MS + 5 对照</a:t>
+                        <a:t>5 对照 + 4 MS</a:t>
                       </a:r>
                       <a:endParaRPr lang="en-US" sz="1250" dirty="0">
                         <a:latin typeface="Microsoft YaHei" charset="0"/>
@@ -3700,244 +5047,7 @@
                           <a:ea typeface="Microsoft YaHei" pitchFamily="34" charset="-122"/>
                           <a:cs typeface="Microsoft YaHei" pitchFamily="34" charset="-120"/>
                         </a:rPr>
-                        <a:t>白质 · 验证</a:t>
-                      </a:r>
-                      <a:endParaRPr lang="en-US" sz="1250" dirty="0">
-                        <a:latin typeface="Microsoft YaHei" charset="0"/>
-                        <a:ea typeface="Microsoft YaHei" charset="0"/>
-                        <a:cs typeface="Microsoft YaHei" charset="0"/>
-                      </a:endParaRPr>
-                    </a:p>
-                  </a:txBody>
-                  <a:tcPr marL="91440" marR="91440" marT="45720" marB="45720" anchor="ctr">
-                    <a:lnL w="0" cap="flat" cmpd="sng" algn="ctr">
-                      <a:noFill/>
-                    </a:lnL>
-                    <a:lnR w="0" cap="flat" cmpd="sng" algn="ctr">
-                      <a:noFill/>
-                    </a:lnR>
-                    <a:lnT w="0" cap="flat" cmpd="sng" algn="ctr">
-                      <a:noFill/>
-                    </a:lnT>
-                    <a:lnB w="12700" cap="flat" cmpd="sng" algn="ctr">
-                      <a:solidFill>
-                        <a:srgbClr val="C8CCD2"/>
-                      </a:solidFill>
-                      <a:prstDash val="solid"/>
-                      <a:round/>
-                      <a:headEnd type="none" w="med" len="med"/>
-                      <a:tailEnd type="none" w="med" len="med"/>
-                    </a:lnB>
-                  </a:tcPr>
-                </a:tc>
-              </a:tr>
-              <a:tr h="420624">
-                <a:tc>
-                  <a:txBody>
-                    <a:bodyPr/>
-                    <a:lstStyle/>
-                    <a:p>
-                      <a:pPr indent="0" marL="0">
-                        <a:buNone/>
-                      </a:pPr>
-                      <a:r>
-                        <a:rPr lang="en-US" sz="1250" dirty="0">
-                          <a:solidFill>
-                            <a:srgbClr val="000000"/>
-                          </a:solidFill>
-                          <a:latin typeface="Microsoft YaHei" pitchFamily="34" charset="0"/>
-                          <a:ea typeface="Microsoft YaHei" pitchFamily="34" charset="-122"/>
-                          <a:cs typeface="Microsoft YaHei" pitchFamily="34" charset="-120"/>
-                        </a:rPr>
-                        <a:t>Schirmer 2019</a:t>
-                      </a:r>
-                      <a:endParaRPr lang="en-US" sz="1250" dirty="0">
-                        <a:latin typeface="Microsoft YaHei" charset="0"/>
-                        <a:ea typeface="Microsoft YaHei" charset="0"/>
-                        <a:cs typeface="Microsoft YaHei" charset="0"/>
-                      </a:endParaRPr>
-                    </a:p>
-                  </a:txBody>
-                  <a:tcPr marL="91440" marR="91440" marT="45720" marB="45720" anchor="ctr">
-                    <a:lnL w="0" cap="flat" cmpd="sng" algn="ctr">
-                      <a:noFill/>
-                    </a:lnL>
-                    <a:lnR w="0" cap="flat" cmpd="sng" algn="ctr">
-                      <a:noFill/>
-                    </a:lnR>
-                    <a:lnT w="0" cap="flat" cmpd="sng" algn="ctr">
-                      <a:noFill/>
-                    </a:lnT>
-                    <a:lnB w="12700" cap="flat" cmpd="sng" algn="ctr">
-                      <a:solidFill>
-                        <a:srgbClr val="C8CCD2"/>
-                      </a:solidFill>
-                      <a:prstDash val="solid"/>
-                      <a:round/>
-                      <a:headEnd type="none" w="med" len="med"/>
-                      <a:tailEnd type="none" w="med" len="med"/>
-                    </a:lnB>
-                  </a:tcPr>
-                </a:tc>
-                <a:tc>
-                  <a:txBody>
-                    <a:bodyPr/>
-                    <a:lstStyle/>
-                    <a:p>
-                      <a:pPr indent="0" marL="0">
-                        <a:buNone/>
-                      </a:pPr>
-                      <a:r>
-                        <a:rPr lang="en-US" sz="1250" dirty="0">
-                          <a:solidFill>
-                            <a:srgbClr val="000000"/>
-                          </a:solidFill>
-                          <a:latin typeface="Microsoft YaHei" pitchFamily="34" charset="0"/>
-                          <a:ea typeface="Microsoft YaHei" pitchFamily="34" charset="-122"/>
-                          <a:cs typeface="Microsoft YaHei" pitchFamily="34" charset="-120"/>
-                        </a:rPr>
-                        <a:t>皮层灰质</a:t>
-                      </a:r>
-                      <a:endParaRPr lang="en-US" sz="1250" dirty="0">
-                        <a:latin typeface="Microsoft YaHei" charset="0"/>
-                        <a:ea typeface="Microsoft YaHei" charset="0"/>
-                        <a:cs typeface="Microsoft YaHei" charset="0"/>
-                      </a:endParaRPr>
-                    </a:p>
-                  </a:txBody>
-                  <a:tcPr marL="91440" marR="91440" marT="45720" marB="45720" anchor="ctr">
-                    <a:lnL w="0" cap="flat" cmpd="sng" algn="ctr">
-                      <a:noFill/>
-                    </a:lnL>
-                    <a:lnR w="0" cap="flat" cmpd="sng" algn="ctr">
-                      <a:noFill/>
-                    </a:lnR>
-                    <a:lnT w="0" cap="flat" cmpd="sng" algn="ctr">
-                      <a:noFill/>
-                    </a:lnT>
-                    <a:lnB w="12700" cap="flat" cmpd="sng" algn="ctr">
-                      <a:solidFill>
-                        <a:srgbClr val="C8CCD2"/>
-                      </a:solidFill>
-                      <a:prstDash val="solid"/>
-                      <a:round/>
-                      <a:headEnd type="none" w="med" len="med"/>
-                      <a:tailEnd type="none" w="med" len="med"/>
-                    </a:lnB>
-                  </a:tcPr>
-                </a:tc>
-                <a:tc>
-                  <a:txBody>
-                    <a:bodyPr/>
-                    <a:lstStyle/>
-                    <a:p>
-                      <a:pPr indent="0" marL="0">
-                        <a:buNone/>
-                      </a:pPr>
-                      <a:r>
-                        <a:rPr lang="en-US" sz="1250" dirty="0">
-                          <a:solidFill>
-                            <a:srgbClr val="000000"/>
-                          </a:solidFill>
-                          <a:latin typeface="Microsoft YaHei" pitchFamily="34" charset="0"/>
-                          <a:ea typeface="Microsoft YaHei" pitchFamily="34" charset="-122"/>
-                          <a:cs typeface="Microsoft YaHei" pitchFamily="34" charset="-120"/>
-                        </a:rPr>
-                        <a:t>12 MS + 9 对照</a:t>
-                      </a:r>
-                      <a:endParaRPr lang="en-US" sz="1250" dirty="0">
-                        <a:latin typeface="Microsoft YaHei" charset="0"/>
-                        <a:ea typeface="Microsoft YaHei" charset="0"/>
-                        <a:cs typeface="Microsoft YaHei" charset="0"/>
-                      </a:endParaRPr>
-                    </a:p>
-                  </a:txBody>
-                  <a:tcPr marL="91440" marR="91440" marT="45720" marB="45720" anchor="ctr">
-                    <a:lnL w="0" cap="flat" cmpd="sng" algn="ctr">
-                      <a:noFill/>
-                    </a:lnL>
-                    <a:lnR w="0" cap="flat" cmpd="sng" algn="ctr">
-                      <a:noFill/>
-                    </a:lnR>
-                    <a:lnT w="0" cap="flat" cmpd="sng" algn="ctr">
-                      <a:noFill/>
-                    </a:lnT>
-                    <a:lnB w="12700" cap="flat" cmpd="sng" algn="ctr">
-                      <a:solidFill>
-                        <a:srgbClr val="C8CCD2"/>
-                      </a:solidFill>
-                      <a:prstDash val="solid"/>
-                      <a:round/>
-                      <a:headEnd type="none" w="med" len="med"/>
-                      <a:tailEnd type="none" w="med" len="med"/>
-                    </a:lnB>
-                  </a:tcPr>
-                </a:tc>
-                <a:tc>
-                  <a:txBody>
-                    <a:bodyPr/>
-                    <a:lstStyle/>
-                    <a:p>
-                      <a:pPr indent="0" marL="0">
-                        <a:buNone/>
-                      </a:pPr>
-                      <a:r>
-                        <a:rPr lang="en-US" sz="1250" dirty="0">
-                          <a:solidFill>
-                            <a:srgbClr val="000000"/>
-                          </a:solidFill>
-                          <a:latin typeface="Microsoft YaHei" pitchFamily="34" charset="0"/>
-                          <a:ea typeface="Microsoft YaHei" pitchFamily="34" charset="-122"/>
-                          <a:cs typeface="Microsoft YaHei" pitchFamily="34" charset="-120"/>
-                        </a:rPr>
-                        <a:t>48 919</a:t>
-                      </a:r>
-                      <a:endParaRPr lang="en-US" sz="1250" dirty="0">
-                        <a:latin typeface="Microsoft YaHei" charset="0"/>
-                        <a:ea typeface="Microsoft YaHei" charset="0"/>
-                        <a:cs typeface="Microsoft YaHei" charset="0"/>
-                      </a:endParaRPr>
-                    </a:p>
-                  </a:txBody>
-                  <a:tcPr marL="91440" marR="91440" marT="45720" marB="45720" anchor="ctr">
-                    <a:lnL w="0" cap="flat" cmpd="sng" algn="ctr">
-                      <a:noFill/>
-                    </a:lnL>
-                    <a:lnR w="0" cap="flat" cmpd="sng" algn="ctr">
-                      <a:noFill/>
-                    </a:lnR>
-                    <a:lnT w="0" cap="flat" cmpd="sng" algn="ctr">
-                      <a:noFill/>
-                    </a:lnT>
-                    <a:lnB w="12700" cap="flat" cmpd="sng" algn="ctr">
-                      <a:solidFill>
-                        <a:srgbClr val="C8CCD2"/>
-                      </a:solidFill>
-                      <a:prstDash val="solid"/>
-                      <a:round/>
-                      <a:headEnd type="none" w="med" len="med"/>
-                      <a:tailEnd type="none" w="med" len="med"/>
-                    </a:lnB>
-                  </a:tcPr>
-                </a:tc>
-                <a:tc>
-                  <a:txBody>
-                    <a:bodyPr/>
-                    <a:lstStyle/>
-                    <a:p>
-                      <a:pPr indent="0" marL="0">
-                        <a:buNone/>
-                      </a:pPr>
-                      <a:r>
-                        <a:rPr lang="en-US" sz="1250" dirty="0">
-                          <a:solidFill>
-                            <a:srgbClr val="000000"/>
-                          </a:solidFill>
-                          <a:latin typeface="Microsoft YaHei" pitchFamily="34" charset="0"/>
-                          <a:ea typeface="Microsoft YaHei" pitchFamily="34" charset="-122"/>
-                          <a:cs typeface="Microsoft YaHei" pitchFamily="34" charset="-120"/>
-                        </a:rPr>
-                        <a:t>灰质</a:t>
+                        <a:t>白质验证</a:t>
                       </a:r>
                       <a:endParaRPr lang="en-US" sz="1250" dirty="0">
                         <a:latin typeface="Microsoft YaHei" charset="0"/>
@@ -4044,8 +5154,8 @@
         </p:nvSpPr>
         <p:spPr>
           <a:xfrm>
-            <a:off x="548640" y="310896"/>
-            <a:ext cx="11064240" cy="566928"/>
+            <a:off x="548640" y="274320"/>
+            <a:ext cx="11064240" cy="475488"/>
           </a:xfrm>
           <a:prstGeom prst="rect">
             <a:avLst/>
@@ -4061,7 +5171,7 @@
               <a:buNone/>
             </a:pPr>
             <a:r>
-              <a:rPr lang="en-US" sz="2600" b="1" dirty="0">
+              <a:rPr lang="en-US" sz="2500" b="1" dirty="0">
                 <a:solidFill>
                   <a:srgbClr val="000000"/>
                 </a:solidFill>
@@ -4069,15 +5179,54 @@
                 <a:ea typeface="Microsoft YaHei" pitchFamily="34" charset="-122"/>
                 <a:cs typeface="Microsoft YaHei" pitchFamily="34" charset="-120"/>
               </a:rPr>
-              <a:t>问题一：哪些细胞表达 MDA5</a:t>
+              <a:t>问题一：IFIH1 由哪些细胞表达</a:t>
             </a:r>
-            <a:endParaRPr lang="en-US" sz="2600" dirty="0"/>
+            <a:endParaRPr lang="en-US" sz="2500" dirty="0"/>
+          </a:p>
+        </p:txBody>
+      </p:sp>
+      <p:sp>
+        <p:nvSpPr>
+          <p:cNvPr id="4" name="Text 2"/>
+          <p:cNvSpPr txBox="1"/>
+          <p:nvPr/>
+        </p:nvSpPr>
+        <p:spPr>
+          <a:xfrm>
+            <a:off x="548640" y="786384"/>
+            <a:ext cx="11064240" cy="329184"/>
+          </a:xfrm>
+          <a:prstGeom prst="rect">
+            <a:avLst/>
+          </a:prstGeom>
+          <a:noFill/>
+          <a:ln/>
+        </p:spPr>
+        <p:txBody>
+          <a:bodyPr wrap="square" lIns="0" tIns="0" rIns="0" bIns="0" rtlCol="0" anchor="ctr"/>
+          <a:lstStyle/>
+          <a:p>
+            <a:pPr indent="0" marL="0">
+              <a:buNone/>
+            </a:pPr>
+            <a:r>
+              <a:rPr lang="en-US" sz="1350" dirty="0">
+                <a:solidFill>
+                  <a:srgbClr val="6E6E6E"/>
+                </a:solidFill>
+                <a:latin typeface="Microsoft YaHei" pitchFamily="34" charset="0"/>
+                <a:ea typeface="Microsoft YaHei" pitchFamily="34" charset="-122"/>
+                <a:cs typeface="Microsoft YaHei" pitchFamily="34" charset="-120"/>
+              </a:rPr>
+              <a:t>正常脑内 IFIH1 最高的是内皮，其次小胶质；神经元最低。左为 783 位供体的伪整体排序，右为白质单核层面的检出。</a:t>
+            </a:r>
+            <a:endParaRPr lang="en-US" sz="1350" dirty="0"/>
           </a:p>
         </p:txBody>
       </p:sp>
       <p:pic>
         <p:nvPicPr>
-          <p:cNvPr id="4" name="Image 0" descr="/home/user/aaa/results/mda5/figs/fig1_baseline.png">    </p:cNvPr>
+          <p:cNvPr id="5" name="Image 0" descr="/home/user/aaa/results/mda5/figs/fig_q1_celltype.png">    </p:cNvPr>
           <p:cNvPicPr>
             <a:picLocks noChangeAspect="1"/>
           </p:cNvPicPr>
@@ -4091,8 +5240,8 @@
         </p:blipFill>
         <p:spPr>
           <a:xfrm>
-            <a:off x="411480" y="1694485"/>
-            <a:ext cx="11384280" cy="4200550"/>
+            <a:off x="411480" y="1489179"/>
+            <a:ext cx="11384280" cy="4684314"/>
           </a:xfrm>
           <a:prstGeom prst="rect">
             <a:avLst/>
@@ -4171,8 +5320,8 @@
         </p:nvSpPr>
         <p:spPr>
           <a:xfrm>
-            <a:off x="548640" y="310896"/>
-            <a:ext cx="11064240" cy="566928"/>
+            <a:off x="548640" y="274320"/>
+            <a:ext cx="11064240" cy="475488"/>
           </a:xfrm>
           <a:prstGeom prst="rect">
             <a:avLst/>
@@ -4188,7 +5337,7 @@
               <a:buNone/>
             </a:pPr>
             <a:r>
-              <a:rPr lang="en-US" sz="2600" b="1" dirty="0">
+              <a:rPr lang="en-US" sz="2500" b="1" dirty="0">
                 <a:solidFill>
                   <a:srgbClr val="000000"/>
                 </a:solidFill>
@@ -4196,15 +5345,54 @@
                 <a:ea typeface="Microsoft YaHei" pitchFamily="34" charset="-122"/>
                 <a:cs typeface="Microsoft YaHei" pitchFamily="34" charset="-120"/>
               </a:rPr>
-              <a:t>问题一与二：灰质与白质，先看正常人，再看病人</a:t>
+              <a:t>问题一：正常人的灰质与白质</a:t>
             </a:r>
-            <a:endParaRPr lang="en-US" sz="2600" dirty="0"/>
+            <a:endParaRPr lang="en-US" sz="2500" dirty="0"/>
+          </a:p>
+        </p:txBody>
+      </p:sp>
+      <p:sp>
+        <p:nvSpPr>
+          <p:cNvPr id="4" name="Text 2"/>
+          <p:cNvSpPr txBox="1"/>
+          <p:nvPr/>
+        </p:nvSpPr>
+        <p:spPr>
+          <a:xfrm>
+            <a:off x="548640" y="786384"/>
+            <a:ext cx="11064240" cy="329184"/>
+          </a:xfrm>
+          <a:prstGeom prst="rect">
+            <a:avLst/>
+          </a:prstGeom>
+          <a:noFill/>
+          <a:ln/>
+        </p:spPr>
+        <p:txBody>
+          <a:bodyPr wrap="square" lIns="0" tIns="0" rIns="0" bIns="0" rtlCol="0" anchor="ctr"/>
+          <a:lstStyle/>
+          <a:p>
+            <a:pPr indent="0" marL="0">
+              <a:buNone/>
+            </a:pPr>
+            <a:r>
+              <a:rPr lang="en-US" sz="1350" dirty="0">
+                <a:solidFill>
+                  <a:srgbClr val="6E6E6E"/>
+                </a:solidFill>
+                <a:latin typeface="Microsoft YaHei" pitchFamily="34" charset="0"/>
+                <a:ea typeface="Microsoft YaHei" pitchFamily="34" charset="-122"/>
+                <a:cs typeface="Microsoft YaHei" pitchFamily="34" charset="-120"/>
+              </a:rPr>
+              <a:t>只取对照供体。星形胶质在白质高于灰质，其余细胞类型无差别；小胶质与内皮因灰质对照供体不足而无法判定。</a:t>
+            </a:r>
+            <a:endParaRPr lang="en-US" sz="1350" dirty="0"/>
           </a:p>
         </p:txBody>
       </p:sp>
       <p:pic>
         <p:nvPicPr>
-          <p:cNvPr id="4" name="Image 0" descr="/home/user/aaa/results/mda5/figs/figA_2x2.png">    </p:cNvPr>
+          <p:cNvPr id="5" name="Image 0" descr="/home/user/aaa/results/mda5/figs/fig_q1_region.png">    </p:cNvPr>
           <p:cNvPicPr>
             <a:picLocks noChangeAspect="1"/>
           </p:cNvPicPr>
@@ -4218,8 +5406,8 @@
         </p:blipFill>
         <p:spPr>
           <a:xfrm>
-            <a:off x="1194035" y="1115568"/>
-            <a:ext cx="9819171" cy="5358384"/>
+            <a:off x="939741" y="1188720"/>
+            <a:ext cx="10327758" cy="5285232"/>
           </a:xfrm>
           <a:prstGeom prst="rect">
             <a:avLst/>
@@ -4298,8 +5486,8 @@
         </p:nvSpPr>
         <p:spPr>
           <a:xfrm>
-            <a:off x="548640" y="310896"/>
-            <a:ext cx="11064240" cy="566928"/>
+            <a:off x="548640" y="274320"/>
+            <a:ext cx="11064240" cy="475488"/>
           </a:xfrm>
           <a:prstGeom prst="rect">
             <a:avLst/>
@@ -4315,7 +5503,7 @@
               <a:buNone/>
             </a:pPr>
             <a:r>
-              <a:rPr lang="en-US" sz="2600" b="1" dirty="0">
+              <a:rPr lang="en-US" sz="2500" b="1" dirty="0">
                 <a:solidFill>
                   <a:srgbClr val="000000"/>
                 </a:solidFill>
@@ -4323,15 +5511,54 @@
                 <a:ea typeface="Microsoft YaHei" pitchFamily="34" charset="-122"/>
                 <a:cs typeface="Microsoft YaHei" pitchFamily="34" charset="-120"/>
               </a:rPr>
-              <a:t>同一批数据的另一种读法：MS 相对对照，分区室</a:t>
+              <a:t>第 4 页的批次对照：把跨研究偏移扣掉</a:t>
             </a:r>
-            <a:endParaRPr lang="en-US" sz="2600" dirty="0"/>
+            <a:endParaRPr lang="en-US" sz="2500" dirty="0"/>
+          </a:p>
+        </p:txBody>
+      </p:sp>
+      <p:sp>
+        <p:nvSpPr>
+          <p:cNvPr id="4" name="Text 2"/>
+          <p:cNvSpPr txBox="1"/>
+          <p:nvPr/>
+        </p:nvSpPr>
+        <p:spPr>
+          <a:xfrm>
+            <a:off x="548640" y="786384"/>
+            <a:ext cx="11064240" cy="329184"/>
+          </a:xfrm>
+          <a:prstGeom prst="rect">
+            <a:avLst/>
+          </a:prstGeom>
+          <a:noFill/>
+          <a:ln/>
+        </p:spPr>
+        <p:txBody>
+          <a:bodyPr wrap="square" lIns="0" tIns="0" rIns="0" bIns="0" rtlCol="0" anchor="ctr"/>
+          <a:lstStyle/>
+          <a:p>
+            <a:pPr indent="0" marL="0">
+              <a:buNone/>
+            </a:pPr>
+            <a:r>
+              <a:rPr lang="en-US" sz="1350" dirty="0">
+                <a:solidFill>
+                  <a:srgbClr val="6E6E6E"/>
+                </a:solidFill>
+                <a:latin typeface="Microsoft YaHei" pitchFamily="34" charset="0"/>
+                <a:ea typeface="Microsoft YaHei" pitchFamily="34" charset="-122"/>
+                <a:cs typeface="Microsoft YaHei" pitchFamily="34" charset="-120"/>
+              </a:rPr>
+              <a:t>偏移同等作用于所有基因，故全基因组 log2（白质/灰质）的中位即偏移量。扣掉它之后，只有星形胶质在两个白质队列中都高于中位。</a:t>
+            </a:r>
+            <a:endParaRPr lang="en-US" sz="1350" dirty="0"/>
           </a:p>
         </p:txBody>
       </p:sp>
       <p:pic>
         <p:nvPicPr>
-          <p:cNvPr id="4" name="Image 0" descr="/home/user/aaa/results/mda5/figs/fig3_gm_vs_wm.png">    </p:cNvPr>
+          <p:cNvPr id="5" name="Image 0" descr="/home/user/aaa/results/mda5/figs/figB_null.png">    </p:cNvPr>
           <p:cNvPicPr>
             <a:picLocks noChangeAspect="1"/>
           </p:cNvPicPr>
@@ -4345,8 +5572,8 @@
         </p:blipFill>
         <p:spPr>
           <a:xfrm>
-            <a:off x="1780983" y="1115568"/>
-            <a:ext cx="8645274" cy="5358384"/>
+            <a:off x="803887" y="1316736"/>
+            <a:ext cx="10599466" cy="5157216"/>
           </a:xfrm>
           <a:prstGeom prst="rect">
             <a:avLst/>
@@ -4425,8 +5652,8 @@
         </p:nvSpPr>
         <p:spPr>
           <a:xfrm>
-            <a:off x="548640" y="310896"/>
-            <a:ext cx="11064240" cy="566928"/>
+            <a:off x="548640" y="274320"/>
+            <a:ext cx="11064240" cy="475488"/>
           </a:xfrm>
           <a:prstGeom prst="rect">
             <a:avLst/>
@@ -4442,7 +5669,7 @@
               <a:buNone/>
             </a:pPr>
             <a:r>
-              <a:rPr lang="en-US" sz="2600" b="1" dirty="0">
+              <a:rPr lang="en-US" sz="2500" b="1" dirty="0">
                 <a:solidFill>
                   <a:srgbClr val="000000"/>
                 </a:solidFill>
@@ -4450,15 +5677,54 @@
                 <a:ea typeface="Microsoft YaHei" pitchFamily="34" charset="-122"/>
                 <a:cs typeface="Microsoft YaHei" pitchFamily="34" charset="-120"/>
               </a:rPr>
-              <a:t>白质中 IFIH1 的细胞分布</a:t>
+              <a:t>问题二：白质中，MS 相对对照的改变</a:t>
             </a:r>
-            <a:endParaRPr lang="en-US" sz="2600" dirty="0"/>
+            <a:endParaRPr lang="en-US" sz="2500" dirty="0"/>
+          </a:p>
+        </p:txBody>
+      </p:sp>
+      <p:sp>
+        <p:nvSpPr>
+          <p:cNvPr id="4" name="Text 2"/>
+          <p:cNvSpPr txBox="1"/>
+          <p:nvPr/>
+        </p:nvSpPr>
+        <p:spPr>
+          <a:xfrm>
+            <a:off x="548640" y="786384"/>
+            <a:ext cx="11064240" cy="329184"/>
+          </a:xfrm>
+          <a:prstGeom prst="rect">
+            <a:avLst/>
+          </a:prstGeom>
+          <a:noFill/>
+          <a:ln/>
+        </p:spPr>
+        <p:txBody>
+          <a:bodyPr wrap="square" lIns="0" tIns="0" rIns="0" bIns="0" rtlCol="0" anchor="ctr"/>
+          <a:lstStyle/>
+          <a:p>
+            <a:pPr indent="0" marL="0">
+              <a:buNone/>
+            </a:pPr>
+            <a:r>
+              <a:rPr lang="en-US" sz="1350" dirty="0">
+                <a:solidFill>
+                  <a:srgbClr val="6E6E6E"/>
+                </a:solidFill>
+                <a:latin typeface="Microsoft YaHei" pitchFamily="34" charset="0"/>
+                <a:ea typeface="Microsoft YaHei" pitchFamily="34" charset="-122"/>
+                <a:cs typeface="Microsoft YaHei" pitchFamily="34" charset="-120"/>
+              </a:rPr>
+              <a:t>两个白质队列分开计算，每点一位供体。少突胶质在两队列同向升高，但区间不跨零的只有 GSE279180。</a:t>
+            </a:r>
+            <a:endParaRPr lang="en-US" sz="1350" dirty="0"/>
           </a:p>
         </p:txBody>
       </p:sp>
       <p:pic>
         <p:nvPicPr>
-          <p:cNvPr id="4" name="Image 0" descr="/home/user/aaa/results/mda5/figs/fig0_umap_atlas.png">    </p:cNvPr>
+          <p:cNvPr id="5" name="Image 0" descr="/home/user/aaa/results/mda5/figs/fig_q2_wm.png">    </p:cNvPr>
           <p:cNvPicPr>
             <a:picLocks noChangeAspect="1"/>
           </p:cNvPicPr>
@@ -4472,8 +5738,8 @@
         </p:blipFill>
         <p:spPr>
           <a:xfrm>
-            <a:off x="411480" y="1575235"/>
-            <a:ext cx="11384280" cy="4439050"/>
+            <a:off x="871820" y="1188720"/>
+            <a:ext cx="10463599" cy="5285232"/>
           </a:xfrm>
           <a:prstGeom prst="rect">
             <a:avLst/>
@@ -4552,8 +5818,8 @@
         </p:nvSpPr>
         <p:spPr>
           <a:xfrm>
-            <a:off x="548640" y="310896"/>
-            <a:ext cx="11064240" cy="566928"/>
+            <a:off x="548640" y="274320"/>
+            <a:ext cx="11064240" cy="475488"/>
           </a:xfrm>
           <a:prstGeom prst="rect">
             <a:avLst/>
@@ -4569,7 +5835,7 @@
               <a:buNone/>
             </a:pPr>
             <a:r>
-              <a:rPr lang="en-US" sz="2600" b="1" dirty="0">
+              <a:rPr lang="en-US" sz="2500" b="1" dirty="0">
                 <a:solidFill>
                   <a:srgbClr val="000000"/>
                 </a:solidFill>
@@ -4577,15 +5843,54 @@
                 <a:ea typeface="Microsoft YaHei" pitchFamily="34" charset="-122"/>
                 <a:cs typeface="Microsoft YaHei" pitchFamily="34" charset="-120"/>
               </a:rPr>
-              <a:t>白质内部：病灶分期与小胶质状态</a:t>
+              <a:t>问题二：灰质中，MS 相对对照的改变</a:t>
             </a:r>
-            <a:endParaRPr lang="en-US" sz="2600" dirty="0"/>
+            <a:endParaRPr lang="en-US" sz="2500" dirty="0"/>
+          </a:p>
+        </p:txBody>
+      </p:sp>
+      <p:sp>
+        <p:nvSpPr>
+          <p:cNvPr id="4" name="Text 2"/>
+          <p:cNvSpPr txBox="1"/>
+          <p:nvPr/>
+        </p:nvSpPr>
+        <p:spPr>
+          <a:xfrm>
+            <a:off x="548640" y="786384"/>
+            <a:ext cx="11064240" cy="329184"/>
+          </a:xfrm>
+          <a:prstGeom prst="rect">
+            <a:avLst/>
+          </a:prstGeom>
+          <a:noFill/>
+          <a:ln/>
+        </p:spPr>
+        <p:txBody>
+          <a:bodyPr wrap="square" lIns="0" tIns="0" rIns="0" bIns="0" rtlCol="0" anchor="ctr"/>
+          <a:lstStyle/>
+          <a:p>
+            <a:pPr indent="0" marL="0">
+              <a:buNone/>
+            </a:pPr>
+            <a:r>
+              <a:rPr lang="en-US" sz="1350" dirty="0">
+                <a:solidFill>
+                  <a:srgbClr val="6E6E6E"/>
+                </a:solidFill>
+                <a:latin typeface="Microsoft YaHei" pitchFamily="34" charset="0"/>
+                <a:ea typeface="Microsoft YaHei" pitchFamily="34" charset="-122"/>
+                <a:cs typeface="Microsoft YaHei" pitchFamily="34" charset="-120"/>
+              </a:rPr>
+              <a:t>皮层，Schirmer 队列。少突胶质与星形胶质的区间跨零。OPC 区间不跨零，但对照中位贴近零，倍数变化在此不稳。</a:t>
+            </a:r>
+            <a:endParaRPr lang="en-US" sz="1350" dirty="0"/>
           </a:p>
         </p:txBody>
       </p:sp>
       <p:pic>
         <p:nvPicPr>
-          <p:cNvPr id="4" name="Image 0" descr="/home/user/aaa/results/mda5/figs/fig4_lesion_stage.png">    </p:cNvPr>
+          <p:cNvPr id="5" name="Image 0" descr="/home/user/aaa/results/mda5/figs/fig_q2_gm.png">    </p:cNvPr>
           <p:cNvPicPr>
             <a:picLocks noChangeAspect="1"/>
           </p:cNvPicPr>
@@ -4599,8 +5904,8 @@
         </p:blipFill>
         <p:spPr>
           <a:xfrm>
-            <a:off x="411480" y="1341096"/>
-            <a:ext cx="11384280" cy="4907328"/>
+            <a:off x="1561719" y="1188720"/>
+            <a:ext cx="9083803" cy="5285232"/>
           </a:xfrm>
           <a:prstGeom prst="rect">
             <a:avLst/>
@@ -4679,8 +5984,8 @@
         </p:nvSpPr>
         <p:spPr>
           <a:xfrm>
-            <a:off x="548640" y="310896"/>
-            <a:ext cx="11064240" cy="566928"/>
+            <a:off x="548640" y="274320"/>
+            <a:ext cx="11064240" cy="475488"/>
           </a:xfrm>
           <a:prstGeom prst="rect">
             <a:avLst/>
@@ -4696,7 +6001,7 @@
               <a:buNone/>
             </a:pPr>
             <a:r>
-              <a:rPr lang="en-US" sz="2600" b="1" dirty="0">
+              <a:rPr lang="en-US" sz="2500" b="1" dirty="0">
                 <a:solidFill>
                   <a:srgbClr val="000000"/>
                 </a:solidFill>
@@ -4704,15 +6009,54 @@
                 <a:ea typeface="Microsoft YaHei" pitchFamily="34" charset="-122"/>
                 <a:cs typeface="Microsoft YaHei" pitchFamily="34" charset="-120"/>
               </a:rPr>
-              <a:t>对照</a:t>
+              <a:t>问题二：两个区室的改变是否相同</a:t>
             </a:r>
-            <a:endParaRPr lang="en-US" sz="2600" dirty="0"/>
+            <a:endParaRPr lang="en-US" sz="2500" dirty="0"/>
+          </a:p>
+        </p:txBody>
+      </p:sp>
+      <p:sp>
+        <p:nvSpPr>
+          <p:cNvPr id="4" name="Text 2"/>
+          <p:cNvSpPr txBox="1"/>
+          <p:nvPr/>
+        </p:nvSpPr>
+        <p:spPr>
+          <a:xfrm>
+            <a:off x="548640" y="786384"/>
+            <a:ext cx="11064240" cy="329184"/>
+          </a:xfrm>
+          <a:prstGeom prst="rect">
+            <a:avLst/>
+          </a:prstGeom>
+          <a:noFill/>
+          <a:ln/>
+        </p:spPr>
+        <p:txBody>
+          <a:bodyPr wrap="square" lIns="0" tIns="0" rIns="0" bIns="0" rtlCol="0" anchor="ctr"/>
+          <a:lstStyle/>
+          <a:p>
+            <a:pPr indent="0" marL="0">
+              <a:buNone/>
+            </a:pPr>
+            <a:r>
+              <a:rPr lang="en-US" sz="1350" dirty="0">
+                <a:solidFill>
+                  <a:srgbClr val="6E6E6E"/>
+                </a:solidFill>
+                <a:latin typeface="Microsoft YaHei" pitchFamily="34" charset="0"/>
+                <a:ea typeface="Microsoft YaHei" pitchFamily="34" charset="-122"/>
+                <a:cs typeface="Microsoft YaHei" pitchFamily="34" charset="-120"/>
+              </a:rPr>
+              <a:t>画的是自助 95% 区间，不是显著性星号。区间跨零意味着判不出，而不是两侧相同。</a:t>
+            </a:r>
+            <a:endParaRPr lang="en-US" sz="1350" dirty="0"/>
           </a:p>
         </p:txBody>
       </p:sp>
       <p:pic>
         <p:nvPicPr>
-          <p:cNvPr id="4" name="Image 0" descr="/home/user/aaa/results/mda5/figs/fig5_controls.png">    </p:cNvPr>
+          <p:cNvPr id="5" name="Image 0" descr="/home/user/aaa/results/mda5/figs/fig_q2_interaction.png">    </p:cNvPr>
           <p:cNvPicPr>
             <a:picLocks noChangeAspect="1"/>
           </p:cNvPicPr>
@@ -4726,8 +6070,8 @@
         </p:blipFill>
         <p:spPr>
           <a:xfrm>
-            <a:off x="411480" y="1379703"/>
-            <a:ext cx="11384280" cy="4830115"/>
+            <a:off x="411480" y="1246742"/>
+            <a:ext cx="11384280" cy="5169187"/>
           </a:xfrm>
           <a:prstGeom prst="rect">
             <a:avLst/>
@@ -4806,8 +6150,8 @@
         </p:nvSpPr>
         <p:spPr>
           <a:xfrm>
-            <a:off x="548640" y="310896"/>
-            <a:ext cx="11064240" cy="566928"/>
+            <a:off x="548640" y="274320"/>
+            <a:ext cx="11064240" cy="475488"/>
           </a:xfrm>
           <a:prstGeom prst="rect">
             <a:avLst/>
@@ -4823,7 +6167,7 @@
               <a:buNone/>
             </a:pPr>
             <a:r>
-              <a:rPr lang="en-US" sz="2600" b="1" dirty="0">
+              <a:rPr lang="en-US" sz="2500" b="1" dirty="0">
                 <a:solidFill>
                   <a:srgbClr val="000000"/>
                 </a:solidFill>
@@ -4831,810 +6175,75 @@
                 <a:ea typeface="Microsoft YaHei" pitchFamily="34" charset="-122"/>
                 <a:cs typeface="Microsoft YaHei" pitchFamily="34" charset="-120"/>
               </a:rPr>
-              <a:t>与已发表结果的关系</a:t>
+              <a:t>白质内部：细胞图谱与病灶分期</a:t>
             </a:r>
-            <a:endParaRPr lang="en-US" sz="2600" dirty="0"/>
-          </a:p>
-        </p:txBody>
-      </p:sp>
-      <p:graphicFrame>
-        <p:nvGraphicFramePr>
-          <p:cNvPr id="10" name="Table 0"/>
-          <p:cNvGraphicFramePr>
-            <a:graphicFrameLocks noGrp="1"/>
-          </p:cNvGraphicFramePr>
-          <p:nvPr>
-            <p:extLst>
-              <p:ext uri="{D42A27DB-BD31-4B8C-83A1-F6EECF244321}">
-                <p14:modId xmlns:p14="http://schemas.microsoft.com/office/powerpoint/2010/main" val="1579011935"/>
-              </p:ext>
-            </p:extLst>
-          </p:nvPr>
-        </p:nvGraphicFramePr>
-        <p:xfrm>
-          <a:off x="548640" y="1188720"/>
-          <a:ext cx="11064240" cy="914400"/>
-        </p:xfrm>
-        <a:graphic>
-          <a:graphicData uri="http://schemas.openxmlformats.org/drawingml/2006/table">
-            <a:tbl>
-              <a:tblPr/>
-              <a:tblGrid>
-                <a:gridCol w="3291840"/>
-                <a:gridCol w="7772400"/>
-              </a:tblGrid>
-              <a:tr h="438912">
-                <a:tc>
-                  <a:txBody>
-                    <a:bodyPr/>
-                    <a:lstStyle/>
-                    <a:p>
-                      <a:pPr indent="0" marL="0">
-                        <a:buNone/>
-                      </a:pPr>
-                      <a:r>
-                        <a:rPr lang="en-US" sz="1250" b="1" dirty="0">
-                          <a:solidFill>
-                            <a:srgbClr val="000000"/>
-                          </a:solidFill>
-                          <a:latin typeface="Microsoft YaHei" pitchFamily="34" charset="0"/>
-                          <a:ea typeface="Microsoft YaHei" pitchFamily="34" charset="-122"/>
-                          <a:cs typeface="Microsoft YaHei" pitchFamily="34" charset="-120"/>
-                        </a:rPr>
-                        <a:t>结果</a:t>
-                      </a:r>
-                      <a:endParaRPr lang="en-US" sz="1250" dirty="0">
-                        <a:latin typeface="Microsoft YaHei" charset="0"/>
-                        <a:ea typeface="Microsoft YaHei" charset="0"/>
-                        <a:cs typeface="Microsoft YaHei" charset="0"/>
-                      </a:endParaRPr>
-                    </a:p>
-                  </a:txBody>
-                  <a:tcPr marL="91440" marR="91440" marT="45720" marB="45720" anchor="ctr">
-                    <a:lnL w="0" cap="flat" cmpd="sng" algn="ctr">
-                      <a:noFill/>
-                    </a:lnL>
-                    <a:lnR w="0" cap="flat" cmpd="sng" algn="ctr">
-                      <a:noFill/>
-                    </a:lnR>
-                    <a:lnT w="0" cap="flat" cmpd="sng" algn="ctr">
-                      <a:noFill/>
-                    </a:lnT>
-                    <a:lnB w="12700" cap="flat" cmpd="sng" algn="ctr">
-                      <a:solidFill>
-                        <a:srgbClr val="C8CCD2"/>
-                      </a:solidFill>
-                      <a:prstDash val="solid"/>
-                      <a:round/>
-                      <a:headEnd type="none" w="med" len="med"/>
-                      <a:tailEnd type="none" w="med" len="med"/>
-                    </a:lnB>
-                  </a:tcPr>
-                </a:tc>
-                <a:tc>
-                  <a:txBody>
-                    <a:bodyPr/>
-                    <a:lstStyle/>
-                    <a:p>
-                      <a:pPr indent="0" marL="0">
-                        <a:buNone/>
-                      </a:pPr>
-                      <a:r>
-                        <a:rPr lang="en-US" sz="1250" b="1" dirty="0">
-                          <a:solidFill>
-                            <a:srgbClr val="000000"/>
-                          </a:solidFill>
-                          <a:latin typeface="Microsoft YaHei" pitchFamily="34" charset="0"/>
-                          <a:ea typeface="Microsoft YaHei" pitchFamily="34" charset="-122"/>
-                          <a:cs typeface="Microsoft YaHei" pitchFamily="34" charset="-120"/>
-                        </a:rPr>
-                        <a:t>文献状态</a:t>
-                      </a:r>
-                      <a:endParaRPr lang="en-US" sz="1250" dirty="0">
-                        <a:latin typeface="Microsoft YaHei" charset="0"/>
-                        <a:ea typeface="Microsoft YaHei" charset="0"/>
-                        <a:cs typeface="Microsoft YaHei" charset="0"/>
-                      </a:endParaRPr>
-                    </a:p>
-                  </a:txBody>
-                  <a:tcPr marL="91440" marR="91440" marT="45720" marB="45720" anchor="ctr">
-                    <a:lnL w="0" cap="flat" cmpd="sng" algn="ctr">
-                      <a:noFill/>
-                    </a:lnL>
-                    <a:lnR w="0" cap="flat" cmpd="sng" algn="ctr">
-                      <a:noFill/>
-                    </a:lnR>
-                    <a:lnT w="0" cap="flat" cmpd="sng" algn="ctr">
-                      <a:noFill/>
-                    </a:lnT>
-                    <a:lnB w="12700" cap="flat" cmpd="sng" algn="ctr">
-                      <a:solidFill>
-                        <a:srgbClr val="C8CCD2"/>
-                      </a:solidFill>
-                      <a:prstDash val="solid"/>
-                      <a:round/>
-                      <a:headEnd type="none" w="med" len="med"/>
-                      <a:tailEnd type="none" w="med" len="med"/>
-                    </a:lnB>
-                  </a:tcPr>
-                </a:tc>
-              </a:tr>
-              <a:tr h="438912">
-                <a:tc>
-                  <a:txBody>
-                    <a:bodyPr/>
-                    <a:lstStyle/>
-                    <a:p>
-                      <a:pPr indent="0" marL="0">
-                        <a:buNone/>
-                      </a:pPr>
-                      <a:r>
-                        <a:rPr lang="en-US" sz="1250" dirty="0">
-                          <a:solidFill>
-                            <a:srgbClr val="000000"/>
-                          </a:solidFill>
-                          <a:latin typeface="Microsoft YaHei" pitchFamily="34" charset="0"/>
-                          <a:ea typeface="Microsoft YaHei" pitchFamily="34" charset="-122"/>
-                          <a:cs typeface="Microsoft YaHei" pitchFamily="34" charset="-120"/>
-                        </a:rPr>
-                        <a:t>少突胶质在白质病灶上调</a:t>
-                      </a:r>
-                      <a:endParaRPr lang="en-US" sz="1250" dirty="0">
-                        <a:latin typeface="Microsoft YaHei" charset="0"/>
-                        <a:ea typeface="Microsoft YaHei" charset="0"/>
-                        <a:cs typeface="Microsoft YaHei" charset="0"/>
-                      </a:endParaRPr>
-                    </a:p>
-                  </a:txBody>
-                  <a:tcPr marL="91440" marR="91440" marT="45720" marB="45720" anchor="ctr">
-                    <a:lnL w="0" cap="flat" cmpd="sng" algn="ctr">
-                      <a:noFill/>
-                    </a:lnL>
-                    <a:lnR w="0" cap="flat" cmpd="sng" algn="ctr">
-                      <a:noFill/>
-                    </a:lnR>
-                    <a:lnT w="0" cap="flat" cmpd="sng" algn="ctr">
-                      <a:noFill/>
-                    </a:lnT>
-                    <a:lnB w="12700" cap="flat" cmpd="sng" algn="ctr">
-                      <a:solidFill>
-                        <a:srgbClr val="C8CCD2"/>
-                      </a:solidFill>
-                      <a:prstDash val="solid"/>
-                      <a:round/>
-                      <a:headEnd type="none" w="med" len="med"/>
-                      <a:tailEnd type="none" w="med" len="med"/>
-                    </a:lnB>
-                  </a:tcPr>
-                </a:tc>
-                <a:tc>
-                  <a:txBody>
-                    <a:bodyPr/>
-                    <a:lstStyle/>
-                    <a:p>
-                      <a:pPr indent="0" marL="0">
-                        <a:buNone/>
-                      </a:pPr>
-                      <a:r>
-                        <a:rPr lang="en-US" sz="1250" dirty="0">
-                          <a:solidFill>
-                            <a:srgbClr val="000000"/>
-                          </a:solidFill>
-                          <a:latin typeface="Microsoft YaHei" pitchFamily="34" charset="0"/>
-                          <a:ea typeface="Microsoft YaHei" pitchFamily="34" charset="-122"/>
-                          <a:cs typeface="Microsoft YaHei" pitchFamily="34" charset="-120"/>
-                        </a:rPr>
-                        <a:t>Lerma-Martin 2024 补充表 6 已报道：CA log2FC +0.905（padj 0.012），CI +1.095（padj 0.005）</a:t>
-                      </a:r>
-                      <a:endParaRPr lang="en-US" sz="1250" dirty="0">
-                        <a:latin typeface="Microsoft YaHei" charset="0"/>
-                        <a:ea typeface="Microsoft YaHei" charset="0"/>
-                        <a:cs typeface="Microsoft YaHei" charset="0"/>
-                      </a:endParaRPr>
-                    </a:p>
-                  </a:txBody>
-                  <a:tcPr marL="91440" marR="91440" marT="45720" marB="45720" anchor="ctr">
-                    <a:lnL w="0" cap="flat" cmpd="sng" algn="ctr">
-                      <a:noFill/>
-                    </a:lnL>
-                    <a:lnR w="0" cap="flat" cmpd="sng" algn="ctr">
-                      <a:noFill/>
-                    </a:lnR>
-                    <a:lnT w="0" cap="flat" cmpd="sng" algn="ctr">
-                      <a:noFill/>
-                    </a:lnT>
-                    <a:lnB w="12700" cap="flat" cmpd="sng" algn="ctr">
-                      <a:solidFill>
-                        <a:srgbClr val="C8CCD2"/>
-                      </a:solidFill>
-                      <a:prstDash val="solid"/>
-                      <a:round/>
-                      <a:headEnd type="none" w="med" len="med"/>
-                      <a:tailEnd type="none" w="med" len="med"/>
-                    </a:lnB>
-                  </a:tcPr>
-                </a:tc>
-              </a:tr>
-              <a:tr h="438912">
-                <a:tc>
-                  <a:txBody>
-                    <a:bodyPr/>
-                    <a:lstStyle/>
-                    <a:p>
-                      <a:pPr indent="0" marL="0">
-                        <a:buNone/>
-                      </a:pPr>
-                      <a:r>
-                        <a:rPr lang="en-US" sz="1250" dirty="0">
-                          <a:solidFill>
-                            <a:srgbClr val="000000"/>
-                          </a:solidFill>
-                          <a:latin typeface="Microsoft YaHei" pitchFamily="34" charset="0"/>
-                          <a:ea typeface="Microsoft YaHei" pitchFamily="34" charset="-122"/>
-                          <a:cs typeface="Microsoft YaHei" pitchFamily="34" charset="-120"/>
-                        </a:rPr>
-                        <a:t>同一队列髓系未达显著</a:t>
-                      </a:r>
-                      <a:endParaRPr lang="en-US" sz="1250" dirty="0">
-                        <a:latin typeface="Microsoft YaHei" charset="0"/>
-                        <a:ea typeface="Microsoft YaHei" charset="0"/>
-                        <a:cs typeface="Microsoft YaHei" charset="0"/>
-                      </a:endParaRPr>
-                    </a:p>
-                  </a:txBody>
-                  <a:tcPr marL="91440" marR="91440" marT="45720" marB="45720" anchor="ctr">
-                    <a:lnL w="0" cap="flat" cmpd="sng" algn="ctr">
-                      <a:noFill/>
-                    </a:lnL>
-                    <a:lnR w="0" cap="flat" cmpd="sng" algn="ctr">
-                      <a:noFill/>
-                    </a:lnR>
-                    <a:lnT w="0" cap="flat" cmpd="sng" algn="ctr">
-                      <a:noFill/>
-                    </a:lnT>
-                    <a:lnB w="12700" cap="flat" cmpd="sng" algn="ctr">
-                      <a:solidFill>
-                        <a:srgbClr val="C8CCD2"/>
-                      </a:solidFill>
-                      <a:prstDash val="solid"/>
-                      <a:round/>
-                      <a:headEnd type="none" w="med" len="med"/>
-                      <a:tailEnd type="none" w="med" len="med"/>
-                    </a:lnB>
-                  </a:tcPr>
-                </a:tc>
-                <a:tc>
-                  <a:txBody>
-                    <a:bodyPr/>
-                    <a:lstStyle/>
-                    <a:p>
-                      <a:pPr indent="0" marL="0">
-                        <a:buNone/>
-                      </a:pPr>
-                      <a:r>
-                        <a:rPr lang="en-US" sz="1250" dirty="0">
-                          <a:solidFill>
-                            <a:srgbClr val="000000"/>
-                          </a:solidFill>
-                          <a:latin typeface="Microsoft YaHei" pitchFamily="34" charset="0"/>
-                          <a:ea typeface="Microsoft YaHei" pitchFamily="34" charset="-122"/>
-                          <a:cs typeface="Microsoft YaHei" pitchFamily="34" charset="-120"/>
-                        </a:rPr>
-                        <a:t>与原作者一致，其补充表髓系 padj = 0.116</a:t>
-                      </a:r>
-                      <a:endParaRPr lang="en-US" sz="1250" dirty="0">
-                        <a:latin typeface="Microsoft YaHei" charset="0"/>
-                        <a:ea typeface="Microsoft YaHei" charset="0"/>
-                        <a:cs typeface="Microsoft YaHei" charset="0"/>
-                      </a:endParaRPr>
-                    </a:p>
-                  </a:txBody>
-                  <a:tcPr marL="91440" marR="91440" marT="45720" marB="45720" anchor="ctr">
-                    <a:lnL w="0" cap="flat" cmpd="sng" algn="ctr">
-                      <a:noFill/>
-                    </a:lnL>
-                    <a:lnR w="0" cap="flat" cmpd="sng" algn="ctr">
-                      <a:noFill/>
-                    </a:lnR>
-                    <a:lnT w="0" cap="flat" cmpd="sng" algn="ctr">
-                      <a:noFill/>
-                    </a:lnT>
-                    <a:lnB w="12700" cap="flat" cmpd="sng" algn="ctr">
-                      <a:solidFill>
-                        <a:srgbClr val="C8CCD2"/>
-                      </a:solidFill>
-                      <a:prstDash val="solid"/>
-                      <a:round/>
-                      <a:headEnd type="none" w="med" len="med"/>
-                      <a:tailEnd type="none" w="med" len="med"/>
-                    </a:lnB>
-                  </a:tcPr>
-                </a:tc>
-              </a:tr>
-              <a:tr h="438912">
-                <a:tc>
-                  <a:txBody>
-                    <a:bodyPr/>
-                    <a:lstStyle/>
-                    <a:p>
-                      <a:pPr indent="0" marL="0">
-                        <a:buNone/>
-                      </a:pPr>
-                      <a:r>
-                        <a:rPr lang="en-US" sz="1250" dirty="0">
-                          <a:solidFill>
-                            <a:srgbClr val="000000"/>
-                          </a:solidFill>
-                          <a:latin typeface="Microsoft YaHei" pitchFamily="34" charset="0"/>
-                          <a:ea typeface="Microsoft YaHei" pitchFamily="34" charset="-122"/>
-                          <a:cs typeface="Microsoft YaHei" pitchFamily="34" charset="-120"/>
-                        </a:rPr>
-                        <a:t>bulk 白质病灶同向上调</a:t>
-                      </a:r>
-                      <a:endParaRPr lang="en-US" sz="1250" dirty="0">
-                        <a:latin typeface="Microsoft YaHei" charset="0"/>
-                        <a:ea typeface="Microsoft YaHei" charset="0"/>
-                        <a:cs typeface="Microsoft YaHei" charset="0"/>
-                      </a:endParaRPr>
-                    </a:p>
-                  </a:txBody>
-                  <a:tcPr marL="91440" marR="91440" marT="45720" marB="45720" anchor="ctr">
-                    <a:lnL w="0" cap="flat" cmpd="sng" algn="ctr">
-                      <a:noFill/>
-                    </a:lnL>
-                    <a:lnR w="0" cap="flat" cmpd="sng" algn="ctr">
-                      <a:noFill/>
-                    </a:lnR>
-                    <a:lnT w="0" cap="flat" cmpd="sng" algn="ctr">
-                      <a:noFill/>
-                    </a:lnT>
-                    <a:lnB w="12700" cap="flat" cmpd="sng" algn="ctr">
-                      <a:solidFill>
-                        <a:srgbClr val="C8CCD2"/>
-                      </a:solidFill>
-                      <a:prstDash val="solid"/>
-                      <a:round/>
-                      <a:headEnd type="none" w="med" len="med"/>
-                      <a:tailEnd type="none" w="med" len="med"/>
-                    </a:lnB>
-                  </a:tcPr>
-                </a:tc>
-                <a:tc>
-                  <a:txBody>
-                    <a:bodyPr/>
-                    <a:lstStyle/>
-                    <a:p>
-                      <a:pPr indent="0" marL="0">
-                        <a:buNone/>
-                      </a:pPr>
-                      <a:r>
-                        <a:rPr lang="en-US" sz="1250" dirty="0">
-                          <a:solidFill>
-                            <a:srgbClr val="000000"/>
-                          </a:solidFill>
-                          <a:latin typeface="Microsoft YaHei" pitchFamily="34" charset="0"/>
-                          <a:ea typeface="Microsoft YaHei" pitchFamily="34" charset="-122"/>
-                          <a:cs typeface="Microsoft YaHei" pitchFamily="34" charset="-120"/>
-                        </a:rPr>
-                        <a:t>GSE138614 活动病灶 FDR 0.021、慢性活动 FDR 0.007；GSE283092 泡沫样活动病灶 1.79 倍</a:t>
-                      </a:r>
-                      <a:endParaRPr lang="en-US" sz="1250" dirty="0">
-                        <a:latin typeface="Microsoft YaHei" charset="0"/>
-                        <a:ea typeface="Microsoft YaHei" charset="0"/>
-                        <a:cs typeface="Microsoft YaHei" charset="0"/>
-                      </a:endParaRPr>
-                    </a:p>
-                  </a:txBody>
-                  <a:tcPr marL="91440" marR="91440" marT="45720" marB="45720" anchor="ctr">
-                    <a:lnL w="0" cap="flat" cmpd="sng" algn="ctr">
-                      <a:noFill/>
-                    </a:lnL>
-                    <a:lnR w="0" cap="flat" cmpd="sng" algn="ctr">
-                      <a:noFill/>
-                    </a:lnR>
-                    <a:lnT w="0" cap="flat" cmpd="sng" algn="ctr">
-                      <a:noFill/>
-                    </a:lnT>
-                    <a:lnB w="12700" cap="flat" cmpd="sng" algn="ctr">
-                      <a:solidFill>
-                        <a:srgbClr val="C8CCD2"/>
-                      </a:solidFill>
-                      <a:prstDash val="solid"/>
-                      <a:round/>
-                      <a:headEnd type="none" w="med" len="med"/>
-                      <a:tailEnd type="none" w="med" len="med"/>
-                    </a:lnB>
-                  </a:tcPr>
-                </a:tc>
-              </a:tr>
-              <a:tr h="438912">
-                <a:tc>
-                  <a:txBody>
-                    <a:bodyPr/>
-                    <a:lstStyle/>
-                    <a:p>
-                      <a:pPr indent="0" marL="0">
-                        <a:buNone/>
-                      </a:pPr>
-                      <a:r>
-                        <a:rPr lang="en-US" sz="1250" dirty="0">
-                          <a:solidFill>
-                            <a:srgbClr val="000000"/>
-                          </a:solidFill>
-                          <a:latin typeface="Microsoft YaHei" pitchFamily="34" charset="0"/>
-                          <a:ea typeface="Microsoft YaHei" pitchFamily="34" charset="-122"/>
-                          <a:cs typeface="Microsoft YaHei" pitchFamily="34" charset="-120"/>
-                        </a:rPr>
-                        <a:t>皮层灰质为阴性</a:t>
-                      </a:r>
-                      <a:endParaRPr lang="en-US" sz="1250" dirty="0">
-                        <a:latin typeface="Microsoft YaHei" charset="0"/>
-                        <a:ea typeface="Microsoft YaHei" charset="0"/>
-                        <a:cs typeface="Microsoft YaHei" charset="0"/>
-                      </a:endParaRPr>
-                    </a:p>
-                  </a:txBody>
-                  <a:tcPr marL="91440" marR="91440" marT="45720" marB="45720" anchor="ctr">
-                    <a:lnL w="0" cap="flat" cmpd="sng" algn="ctr">
-                      <a:noFill/>
-                    </a:lnL>
-                    <a:lnR w="0" cap="flat" cmpd="sng" algn="ctr">
-                      <a:noFill/>
-                    </a:lnR>
-                    <a:lnT w="0" cap="flat" cmpd="sng" algn="ctr">
-                      <a:noFill/>
-                    </a:lnT>
-                    <a:lnB w="12700" cap="flat" cmpd="sng" algn="ctr">
-                      <a:solidFill>
-                        <a:srgbClr val="C8CCD2"/>
-                      </a:solidFill>
-                      <a:prstDash val="solid"/>
-                      <a:round/>
-                      <a:headEnd type="none" w="med" len="med"/>
-                      <a:tailEnd type="none" w="med" len="med"/>
-                    </a:lnB>
-                  </a:tcPr>
-                </a:tc>
-                <a:tc>
-                  <a:txBody>
-                    <a:bodyPr/>
-                    <a:lstStyle/>
-                    <a:p>
-                      <a:pPr indent="0" marL="0">
-                        <a:buNone/>
-                      </a:pPr>
-                      <a:r>
-                        <a:rPr lang="en-US" sz="1250" dirty="0">
-                          <a:solidFill>
-                            <a:srgbClr val="000000"/>
-                          </a:solidFill>
-                          <a:latin typeface="Microsoft YaHei" pitchFamily="34" charset="0"/>
-                          <a:ea typeface="Microsoft YaHei" pitchFamily="34" charset="-122"/>
-                          <a:cs typeface="Microsoft YaHei" pitchFamily="34" charset="-120"/>
-                        </a:rPr>
-                        <a:t>Schirmer 2019 补充表中 IFIH1 低于其检出阈值，本次为原创测量</a:t>
-                      </a:r>
-                      <a:endParaRPr lang="en-US" sz="1250" dirty="0">
-                        <a:latin typeface="Microsoft YaHei" charset="0"/>
-                        <a:ea typeface="Microsoft YaHei" charset="0"/>
-                        <a:cs typeface="Microsoft YaHei" charset="0"/>
-                      </a:endParaRPr>
-                    </a:p>
-                  </a:txBody>
-                  <a:tcPr marL="91440" marR="91440" marT="45720" marB="45720" anchor="ctr">
-                    <a:lnL w="0" cap="flat" cmpd="sng" algn="ctr">
-                      <a:noFill/>
-                    </a:lnL>
-                    <a:lnR w="0" cap="flat" cmpd="sng" algn="ctr">
-                      <a:noFill/>
-                    </a:lnR>
-                    <a:lnT w="0" cap="flat" cmpd="sng" algn="ctr">
-                      <a:noFill/>
-                    </a:lnT>
-                    <a:lnB w="12700" cap="flat" cmpd="sng" algn="ctr">
-                      <a:solidFill>
-                        <a:srgbClr val="C8CCD2"/>
-                      </a:solidFill>
-                      <a:prstDash val="solid"/>
-                      <a:round/>
-                      <a:headEnd type="none" w="med" len="med"/>
-                      <a:tailEnd type="none" w="med" len="med"/>
-                    </a:lnB>
-                  </a:tcPr>
-                </a:tc>
-              </a:tr>
-              <a:tr h="438912">
-                <a:tc>
-                  <a:txBody>
-                    <a:bodyPr/>
-                    <a:lstStyle/>
-                    <a:p>
-                      <a:pPr indent="0" marL="0">
-                        <a:buNone/>
-                      </a:pPr>
-                      <a:r>
-                        <a:rPr lang="en-US" sz="1250" dirty="0">
-                          <a:solidFill>
-                            <a:srgbClr val="000000"/>
-                          </a:solidFill>
-                          <a:latin typeface="Microsoft YaHei" pitchFamily="34" charset="0"/>
-                          <a:ea typeface="Microsoft YaHei" pitchFamily="34" charset="-122"/>
-                          <a:cs typeface="Microsoft YaHei" pitchFamily="34" charset="-120"/>
-                        </a:rPr>
-                        <a:t>GSE180759 中的 IFIH1</a:t>
-                      </a:r>
-                      <a:endParaRPr lang="en-US" sz="1250" dirty="0">
-                        <a:latin typeface="Microsoft YaHei" charset="0"/>
-                        <a:ea typeface="Microsoft YaHei" charset="0"/>
-                        <a:cs typeface="Microsoft YaHei" charset="0"/>
-                      </a:endParaRPr>
-                    </a:p>
-                  </a:txBody>
-                  <a:tcPr marL="91440" marR="91440" marT="45720" marB="45720" anchor="ctr">
-                    <a:lnL w="0" cap="flat" cmpd="sng" algn="ctr">
-                      <a:noFill/>
-                    </a:lnL>
-                    <a:lnR w="0" cap="flat" cmpd="sng" algn="ctr">
-                      <a:noFill/>
-                    </a:lnR>
-                    <a:lnT w="0" cap="flat" cmpd="sng" algn="ctr">
-                      <a:noFill/>
-                    </a:lnT>
-                    <a:lnB w="12700" cap="flat" cmpd="sng" algn="ctr">
-                      <a:solidFill>
-                        <a:srgbClr val="C8CCD2"/>
-                      </a:solidFill>
-                      <a:prstDash val="solid"/>
-                      <a:round/>
-                      <a:headEnd type="none" w="med" len="med"/>
-                      <a:tailEnd type="none" w="med" len="med"/>
-                    </a:lnB>
-                  </a:tcPr>
-                </a:tc>
-                <a:tc>
-                  <a:txBody>
-                    <a:bodyPr/>
-                    <a:lstStyle/>
-                    <a:p>
-                      <a:pPr indent="0" marL="0">
-                        <a:buNone/>
-                      </a:pPr>
-                      <a:r>
-                        <a:rPr lang="en-US" sz="1250" dirty="0">
-                          <a:solidFill>
-                            <a:srgbClr val="000000"/>
-                          </a:solidFill>
-                          <a:latin typeface="Microsoft YaHei" pitchFamily="34" charset="0"/>
-                          <a:ea typeface="Microsoft YaHei" pitchFamily="34" charset="-122"/>
-                          <a:cs typeface="Microsoft YaHei" pitchFamily="34" charset="-120"/>
-                        </a:rPr>
-                        <a:t>原文 13 个补充表中未出现</a:t>
-                      </a:r>
-                      <a:endParaRPr lang="en-US" sz="1250" dirty="0">
-                        <a:latin typeface="Microsoft YaHei" charset="0"/>
-                        <a:ea typeface="Microsoft YaHei" charset="0"/>
-                        <a:cs typeface="Microsoft YaHei" charset="0"/>
-                      </a:endParaRPr>
-                    </a:p>
-                  </a:txBody>
-                  <a:tcPr marL="91440" marR="91440" marT="45720" marB="45720" anchor="ctr">
-                    <a:lnL w="0" cap="flat" cmpd="sng" algn="ctr">
-                      <a:noFill/>
-                    </a:lnL>
-                    <a:lnR w="0" cap="flat" cmpd="sng" algn="ctr">
-                      <a:noFill/>
-                    </a:lnR>
-                    <a:lnT w="0" cap="flat" cmpd="sng" algn="ctr">
-                      <a:noFill/>
-                    </a:lnT>
-                    <a:lnB w="12700" cap="flat" cmpd="sng" algn="ctr">
-                      <a:solidFill>
-                        <a:srgbClr val="C8CCD2"/>
-                      </a:solidFill>
-                      <a:prstDash val="solid"/>
-                      <a:round/>
-                      <a:headEnd type="none" w="med" len="med"/>
-                      <a:tailEnd type="none" w="med" len="med"/>
-                    </a:lnB>
-                  </a:tcPr>
-                </a:tc>
-              </a:tr>
-              <a:tr h="438912">
-                <a:tc>
-                  <a:txBody>
-                    <a:bodyPr/>
-                    <a:lstStyle/>
-                    <a:p>
-                      <a:pPr indent="0" marL="0">
-                        <a:buNone/>
-                      </a:pPr>
-                      <a:r>
-                        <a:rPr lang="en-US" sz="1250" dirty="0">
-                          <a:solidFill>
-                            <a:srgbClr val="000000"/>
-                          </a:solidFill>
-                          <a:latin typeface="Microsoft YaHei" pitchFamily="34" charset="0"/>
-                          <a:ea typeface="Microsoft YaHei" pitchFamily="34" charset="-122"/>
-                          <a:cs typeface="Microsoft YaHei" pitchFamily="34" charset="-120"/>
-                        </a:rPr>
-                        <a:t>灰质与白质的直接对比</a:t>
-                      </a:r>
-                      <a:endParaRPr lang="en-US" sz="1250" dirty="0">
-                        <a:latin typeface="Microsoft YaHei" charset="0"/>
-                        <a:ea typeface="Microsoft YaHei" charset="0"/>
-                        <a:cs typeface="Microsoft YaHei" charset="0"/>
-                      </a:endParaRPr>
-                    </a:p>
-                  </a:txBody>
-                  <a:tcPr marL="91440" marR="91440" marT="45720" marB="45720" anchor="ctr">
-                    <a:lnL w="0" cap="flat" cmpd="sng" algn="ctr">
-                      <a:noFill/>
-                    </a:lnL>
-                    <a:lnR w="0" cap="flat" cmpd="sng" algn="ctr">
-                      <a:noFill/>
-                    </a:lnR>
-                    <a:lnT w="0" cap="flat" cmpd="sng" algn="ctr">
-                      <a:noFill/>
-                    </a:lnT>
-                    <a:lnB w="12700" cap="flat" cmpd="sng" algn="ctr">
-                      <a:solidFill>
-                        <a:srgbClr val="C8CCD2"/>
-                      </a:solidFill>
-                      <a:prstDash val="solid"/>
-                      <a:round/>
-                      <a:headEnd type="none" w="med" len="med"/>
-                      <a:tailEnd type="none" w="med" len="med"/>
-                    </a:lnB>
-                  </a:tcPr>
-                </a:tc>
-                <a:tc>
-                  <a:txBody>
-                    <a:bodyPr/>
-                    <a:lstStyle/>
-                    <a:p>
-                      <a:pPr indent="0" marL="0">
-                        <a:buNone/>
-                      </a:pPr>
-                      <a:r>
-                        <a:rPr lang="en-US" sz="1250" dirty="0">
-                          <a:solidFill>
-                            <a:srgbClr val="000000"/>
-                          </a:solidFill>
-                          <a:latin typeface="Microsoft YaHei" pitchFamily="34" charset="0"/>
-                          <a:ea typeface="Microsoft YaHei" pitchFamily="34" charset="-122"/>
-                          <a:cs typeface="Microsoft YaHei" pitchFamily="34" charset="-120"/>
-                        </a:rPr>
-                        <a:t>未见任何已发表研究做过</a:t>
-                      </a:r>
-                      <a:endParaRPr lang="en-US" sz="1250" dirty="0">
-                        <a:latin typeface="Microsoft YaHei" charset="0"/>
-                        <a:ea typeface="Microsoft YaHei" charset="0"/>
-                        <a:cs typeface="Microsoft YaHei" charset="0"/>
-                      </a:endParaRPr>
-                    </a:p>
-                  </a:txBody>
-                  <a:tcPr marL="91440" marR="91440" marT="45720" marB="45720" anchor="ctr">
-                    <a:lnL w="0" cap="flat" cmpd="sng" algn="ctr">
-                      <a:noFill/>
-                    </a:lnL>
-                    <a:lnR w="0" cap="flat" cmpd="sng" algn="ctr">
-                      <a:noFill/>
-                    </a:lnR>
-                    <a:lnT w="0" cap="flat" cmpd="sng" algn="ctr">
-                      <a:noFill/>
-                    </a:lnT>
-                    <a:lnB w="12700" cap="flat" cmpd="sng" algn="ctr">
-                      <a:solidFill>
-                        <a:srgbClr val="C8CCD2"/>
-                      </a:solidFill>
-                      <a:prstDash val="solid"/>
-                      <a:round/>
-                      <a:headEnd type="none" w="med" len="med"/>
-                      <a:tailEnd type="none" w="med" len="med"/>
-                    </a:lnB>
-                  </a:tcPr>
-                </a:tc>
-              </a:tr>
-              <a:tr h="438912">
-                <a:tc>
-                  <a:txBody>
-                    <a:bodyPr/>
-                    <a:lstStyle/>
-                    <a:p>
-                      <a:pPr indent="0" marL="0">
-                        <a:buNone/>
-                      </a:pPr>
-                      <a:r>
-                        <a:rPr lang="en-US" sz="1250" dirty="0">
-                          <a:solidFill>
-                            <a:srgbClr val="000000"/>
-                          </a:solidFill>
-                          <a:latin typeface="Microsoft YaHei" pitchFamily="34" charset="0"/>
-                          <a:ea typeface="Microsoft YaHei" pitchFamily="34" charset="-122"/>
-                          <a:cs typeface="Microsoft YaHei" pitchFamily="34" charset="-120"/>
-                        </a:rPr>
-                        <a:t>MDA5 蛋白</a:t>
-                      </a:r>
-                      <a:endParaRPr lang="en-US" sz="1250" dirty="0">
-                        <a:latin typeface="Microsoft YaHei" charset="0"/>
-                        <a:ea typeface="Microsoft YaHei" charset="0"/>
-                        <a:cs typeface="Microsoft YaHei" charset="0"/>
-                      </a:endParaRPr>
-                    </a:p>
-                  </a:txBody>
-                  <a:tcPr marL="91440" marR="91440" marT="45720" marB="45720" anchor="ctr">
-                    <a:lnL w="0" cap="flat" cmpd="sng" algn="ctr">
-                      <a:noFill/>
-                    </a:lnL>
-                    <a:lnR w="0" cap="flat" cmpd="sng" algn="ctr">
-                      <a:noFill/>
-                    </a:lnR>
-                    <a:lnT w="0" cap="flat" cmpd="sng" algn="ctr">
-                      <a:noFill/>
-                    </a:lnT>
-                    <a:lnB w="12700" cap="flat" cmpd="sng" algn="ctr">
-                      <a:solidFill>
-                        <a:srgbClr val="C8CCD2"/>
-                      </a:solidFill>
-                      <a:prstDash val="solid"/>
-                      <a:round/>
-                      <a:headEnd type="none" w="med" len="med"/>
-                      <a:tailEnd type="none" w="med" len="med"/>
-                    </a:lnB>
-                  </a:tcPr>
-                </a:tc>
-                <a:tc>
-                  <a:txBody>
-                    <a:bodyPr/>
-                    <a:lstStyle/>
-                    <a:p>
-                      <a:pPr indent="0" marL="0">
-                        <a:buNone/>
-                      </a:pPr>
-                      <a:r>
-                        <a:rPr lang="en-US" sz="1250" dirty="0">
-                          <a:solidFill>
-                            <a:srgbClr val="000000"/>
-                          </a:solidFill>
-                          <a:latin typeface="Microsoft YaHei" pitchFamily="34" charset="0"/>
-                          <a:ea typeface="Microsoft YaHei" pitchFamily="34" charset="-122"/>
-                          <a:cs typeface="Microsoft YaHei" pitchFamily="34" charset="-120"/>
-                        </a:rPr>
-                        <a:t>人类 MS 脑组织的免疫组化与蛋白质组测量为零篇</a:t>
-                      </a:r>
-                      <a:endParaRPr lang="en-US" sz="1250" dirty="0">
-                        <a:latin typeface="Microsoft YaHei" charset="0"/>
-                        <a:ea typeface="Microsoft YaHei" charset="0"/>
-                        <a:cs typeface="Microsoft YaHei" charset="0"/>
-                      </a:endParaRPr>
-                    </a:p>
-                  </a:txBody>
-                  <a:tcPr marL="91440" marR="91440" marT="45720" marB="45720" anchor="ctr">
-                    <a:lnL w="0" cap="flat" cmpd="sng" algn="ctr">
-                      <a:noFill/>
-                    </a:lnL>
-                    <a:lnR w="0" cap="flat" cmpd="sng" algn="ctr">
-                      <a:noFill/>
-                    </a:lnR>
-                    <a:lnT w="0" cap="flat" cmpd="sng" algn="ctr">
-                      <a:noFill/>
-                    </a:lnT>
-                    <a:lnB w="12700" cap="flat" cmpd="sng" algn="ctr">
-                      <a:solidFill>
-                        <a:srgbClr val="C8CCD2"/>
-                      </a:solidFill>
-                      <a:prstDash val="solid"/>
-                      <a:round/>
-                      <a:headEnd type="none" w="med" len="med"/>
-                      <a:tailEnd type="none" w="med" len="med"/>
-                    </a:lnB>
-                  </a:tcPr>
-                </a:tc>
-              </a:tr>
-            </a:tbl>
-          </a:graphicData>
-        </a:graphic>
-      </p:graphicFrame>
+            <a:endParaRPr lang="en-US" sz="2500" dirty="0"/>
+          </a:p>
+        </p:txBody>
+      </p:sp>
+      <p:sp>
+        <p:nvSpPr>
+          <p:cNvPr id="4" name="Text 2"/>
+          <p:cNvSpPr txBox="1"/>
+          <p:nvPr/>
+        </p:nvSpPr>
+        <p:spPr>
+          <a:xfrm>
+            <a:off x="548640" y="786384"/>
+            <a:ext cx="11064240" cy="329184"/>
+          </a:xfrm>
+          <a:prstGeom prst="rect">
+            <a:avLst/>
+          </a:prstGeom>
+          <a:noFill/>
+          <a:ln/>
+        </p:spPr>
+        <p:txBody>
+          <a:bodyPr wrap="square" lIns="0" tIns="0" rIns="0" bIns="0" rtlCol="0" anchor="ctr"/>
+          <a:lstStyle/>
+          <a:p>
+            <a:pPr indent="0" marL="0">
+              <a:buNone/>
+            </a:pPr>
+            <a:r>
+              <a:rPr lang="en-US" sz="1350" dirty="0">
+                <a:solidFill>
+                  <a:srgbClr val="6E6E6E"/>
+                </a:solidFill>
+                <a:latin typeface="Microsoft YaHei" pitchFamily="34" charset="0"/>
+                <a:ea typeface="Microsoft YaHei" pitchFamily="34" charset="-122"/>
+                <a:cs typeface="Microsoft YaHei" pitchFamily="34" charset="-120"/>
+              </a:rPr>
+              <a:t>GSE180759，66 432 个核，已按文库做 Harmony 整合。对照白质几乎不表达，慢性活动边缘在小胶质与少突胶质上点亮。</a:t>
+            </a:r>
+            <a:endParaRPr lang="en-US" sz="1350" dirty="0"/>
+          </a:p>
+        </p:txBody>
+      </p:sp>
+      <p:pic>
+        <p:nvPicPr>
+          <p:cNvPr id="5" name="Image 0" descr="/home/user/aaa/results/mda5/figs/fig_umap_wm.png">    </p:cNvPr>
+          <p:cNvPicPr>
+            <a:picLocks noChangeAspect="1"/>
+          </p:cNvPicPr>
+          <p:nvPr/>
+        </p:nvPicPr>
+        <p:blipFill>
+          <a:blip r:embed="rId1"/>
+          <a:stretch>
+            <a:fillRect/>
+          </a:stretch>
+        </p:blipFill>
+        <p:spPr>
+          <a:xfrm>
+            <a:off x="426951" y="1188720"/>
+            <a:ext cx="11353339" cy="5285232"/>
+          </a:xfrm>
+          <a:prstGeom prst="rect">
+            <a:avLst/>
+          </a:prstGeom>
+        </p:spPr>
+      </p:pic>
     </p:spTree>
   </p:cSld>
   <p:clrMapOvr>

--- a/results/mda5/MDA5_IFIH1_人脑与MS.pptx
+++ b/results/mda5/MDA5_IFIH1_人脑与MS.pptx
@@ -16,9 +16,10 @@
     <p:sldId id="264" r:id="rId10"/>
     <p:sldId id="265" r:id="rId11"/>
     <p:sldId id="266" r:id="rId12"/>
+    <p:sldId id="267" r:id="rId13"/>
   </p:sldIdLst>
   <p:notesMasterIdLst>
-    <p:notesMasterId r:id="rId13"/>
+    <p:notesMasterId r:id="rId14"/>
   </p:notesMasterIdLst>
   <p:sldSz cx="12192000" cy="6858000"/>
   <p:notesSz cx="6858000" cy="12192000"/>
@@ -712,6 +713,94 @@
             <a:fld id="{F7021451-1387-4CA6-816F-3879F97B5CBC}" type="slidenum">
               <a:rPr lang="en-US"/>
               <a:t>11</a:t>
+            </a:fld>
+            <a:endParaRPr lang="en-US"/>
+          </a:p>
+        </p:txBody>
+      </p:sp>
+    </p:spTree>
+    <p:extLst>
+      <p:ext uri="{BB962C8B-B14F-4D97-AF65-F5344CB8AC3E}">
+        <p14:creationId xmlns:p14="http://schemas.microsoft.com/office/powerpoint/2010/main" val="1024086991"/>
+      </p:ext>
+    </p:extLst>
+  </p:cSld>
+  <p:clrMapOvr>
+    <a:masterClrMapping/>
+  </p:clrMapOvr>
+</p:notes>
+</file>
+
+<file path=ppt/notesSlides/notesSlide12.xml><?xml version="1.0" encoding="utf-8"?>
+<p:notes xmlns:a="http://schemas.openxmlformats.org/drawingml/2006/main" xmlns:r="http://schemas.openxmlformats.org/officeDocument/2006/relationships" xmlns:p="http://schemas.openxmlformats.org/presentationml/2006/main">
+  <p:cSld>
+    <p:spTree>
+      <p:nvGrpSpPr>
+        <p:cNvPr id="1" name=""/>
+        <p:cNvGrpSpPr/>
+        <p:nvPr/>
+      </p:nvGrpSpPr>
+      <p:grpSpPr>
+        <a:xfrm>
+          <a:off x="0" y="0"/>
+          <a:ext cx="0" cy="0"/>
+          <a:chOff x="0" y="0"/>
+          <a:chExt cx="0" cy="0"/>
+        </a:xfrm>
+      </p:grpSpPr>
+      <p:sp>
+        <p:nvSpPr>
+          <p:cNvPr id="2" name="Slide Image Placeholder 1"/>
+          <p:cNvSpPr>
+            <a:spLocks noGrp="1" noRot="1" noChangeAspect="1"/>
+          </p:cNvSpPr>
+          <p:nvPr>
+            <p:ph type="sldImg"/>
+          </p:nvPr>
+        </p:nvSpPr>
+        <p:spPr/>
+      </p:sp>
+      <p:sp>
+        <p:nvSpPr>
+          <p:cNvPr id="3" name="Notes Placeholder 2"/>
+          <p:cNvSpPr>
+            <a:spLocks noGrp="1"/>
+          </p:cNvSpPr>
+          <p:nvPr>
+            <p:ph type="body" idx="1"/>
+          </p:nvPr>
+        </p:nvSpPr>
+        <p:spPr/>
+        <p:txBody>
+          <a:bodyPr/>
+          <a:lstStyle/>
+          <a:p>
+            <a:r>
+              <a:rPr lang="en-US" dirty="0"/>
+              <a:t/>
+            </a:r>
+            <a:endParaRPr lang="en-US" dirty="0"/>
+          </a:p>
+        </p:txBody>
+      </p:sp>
+      <p:sp>
+        <p:nvSpPr>
+          <p:cNvPr id="4" name="Slide Number Placeholder 3"/>
+          <p:cNvSpPr>
+            <a:spLocks noGrp="1"/>
+          </p:cNvSpPr>
+          <p:nvPr>
+            <p:ph type="sldNum" sz="quarter" idx="10"/>
+          </p:nvPr>
+        </p:nvSpPr>
+        <p:spPr/>
+        <p:txBody>
+          <a:bodyPr/>
+          <a:lstStyle/>
+          <a:p>
+            <a:fld id="{F7021451-1387-4CA6-816F-3879F97B5CBC}" type="slidenum">
+              <a:rPr lang="en-US"/>
+              <a:t>12</a:t>
             </a:fld>
             <a:endParaRPr lang="en-US"/>
           </a:p>
@@ -1830,7 +1919,7 @@
                 <a:ea typeface="Microsoft YaHei" pitchFamily="34" charset="-122"/>
                 <a:cs typeface="Microsoft YaHei" pitchFamily="34" charset="-120"/>
               </a:rPr>
-              <a:t>全篇测量同一个量：IFIH1 的表达。细胞类型、灰质与白质、正常与 MS，只是分格的三条轴。</a:t>
+              <a:t>全篇测量同一个量：单个核是否检出 IFIH1。细胞类型、区室、正常与 MS，只是分格的三条轴。</a:t>
             </a:r>
             <a:endParaRPr lang="en-US" sz="1600" dirty="0"/>
           </a:p>
@@ -1933,6 +2022,172 @@
                 <a:ea typeface="Microsoft YaHei" pitchFamily="34" charset="-122"/>
                 <a:cs typeface="Microsoft YaHei" pitchFamily="34" charset="-120"/>
               </a:rPr>
+              <a:t>白质内部：细胞图谱与病灶分期</a:t>
+            </a:r>
+            <a:endParaRPr lang="en-US" sz="2500" dirty="0"/>
+          </a:p>
+        </p:txBody>
+      </p:sp>
+      <p:sp>
+        <p:nvSpPr>
+          <p:cNvPr id="4" name="Text 2"/>
+          <p:cNvSpPr txBox="1"/>
+          <p:nvPr/>
+        </p:nvSpPr>
+        <p:spPr>
+          <a:xfrm>
+            <a:off x="548640" y="786384"/>
+            <a:ext cx="11064240" cy="329184"/>
+          </a:xfrm>
+          <a:prstGeom prst="rect">
+            <a:avLst/>
+          </a:prstGeom>
+          <a:noFill/>
+          <a:ln/>
+        </p:spPr>
+        <p:txBody>
+          <a:bodyPr wrap="square" lIns="0" tIns="0" rIns="0" bIns="0" rtlCol="0" anchor="ctr"/>
+          <a:lstStyle/>
+          <a:p>
+            <a:pPr indent="0" marL="0">
+              <a:buNone/>
+            </a:pPr>
+            <a:r>
+              <a:rPr lang="en-US" sz="1350" dirty="0">
+                <a:solidFill>
+                  <a:srgbClr val="6E6E6E"/>
+                </a:solidFill>
+                <a:latin typeface="Microsoft YaHei" pitchFamily="34" charset="0"/>
+                <a:ea typeface="Microsoft YaHei" pitchFamily="34" charset="-122"/>
+                <a:cs typeface="Microsoft YaHei" pitchFamily="34" charset="-120"/>
+              </a:rPr>
+              <a:t>GSE180759，66 432 个核，已按文库做 Harmony 整合。对照白质几乎不表达，慢性活动边缘在小胶质与少突胶质上点亮。</a:t>
+            </a:r>
+            <a:endParaRPr lang="en-US" sz="1350" dirty="0"/>
+          </a:p>
+        </p:txBody>
+      </p:sp>
+      <p:pic>
+        <p:nvPicPr>
+          <p:cNvPr id="5" name="Image 0" descr="/home/user/aaa/results/mda5/figs/fig_umap_wm.png">    </p:cNvPr>
+          <p:cNvPicPr>
+            <a:picLocks noChangeAspect="1"/>
+          </p:cNvPicPr>
+          <p:nvPr/>
+        </p:nvPicPr>
+        <p:blipFill>
+          <a:blip r:embed="rId1"/>
+          <a:stretch>
+            <a:fillRect/>
+          </a:stretch>
+        </p:blipFill>
+        <p:spPr>
+          <a:xfrm>
+            <a:off x="426951" y="1188720"/>
+            <a:ext cx="11353339" cy="5285232"/>
+          </a:xfrm>
+          <a:prstGeom prst="rect">
+            <a:avLst/>
+          </a:prstGeom>
+        </p:spPr>
+      </p:pic>
+    </p:spTree>
+  </p:cSld>
+  <p:clrMapOvr>
+    <a:masterClrMapping/>
+  </p:clrMapOvr>
+</p:sld>
+</file>
+
+<file path=ppt/slides/slide11.xml><?xml version="1.0" encoding="utf-8"?>
+<p:sld xmlns:a="http://schemas.openxmlformats.org/drawingml/2006/main" xmlns:r="http://schemas.openxmlformats.org/officeDocument/2006/relationships" xmlns:p="http://schemas.openxmlformats.org/presentationml/2006/main">
+  <p:cSld name="Slide 11">
+    <p:spTree>
+      <p:nvGrpSpPr>
+        <p:cNvPr id="1" name=""/>
+        <p:cNvGrpSpPr/>
+        <p:nvPr/>
+      </p:nvGrpSpPr>
+      <p:grpSpPr>
+        <a:xfrm>
+          <a:off x="0" y="0"/>
+          <a:ext cx="0" cy="0"/>
+          <a:chOff x="0" y="0"/>
+          <a:chExt cx="0" cy="0"/>
+        </a:xfrm>
+      </p:grpSpPr>
+      <p:sp>
+        <p:nvSpPr>
+          <p:cNvPr id="2" name="Text 0"/>
+          <p:cNvSpPr txBox="1"/>
+          <p:nvPr/>
+        </p:nvSpPr>
+        <p:spPr>
+          <a:xfrm>
+            <a:off x="11430000" y="6355080"/>
+            <a:ext cx="457200" cy="274320"/>
+          </a:xfrm>
+          <a:prstGeom prst="rect">
+            <a:avLst/>
+          </a:prstGeom>
+          <a:noFill/>
+          <a:ln/>
+        </p:spPr>
+        <p:txBody>
+          <a:bodyPr wrap="square" lIns="0" tIns="0" rIns="0" bIns="0" rtlCol="0" anchor="ctr"/>
+          <a:lstStyle/>
+          <a:p>
+            <a:pPr algn="r" indent="0" marL="0">
+              <a:buNone/>
+            </a:pPr>
+            <a:r>
+              <a:rPr lang="en-US" sz="1000" dirty="0">
+                <a:solidFill>
+                  <a:srgbClr val="6E6E6E"/>
+                </a:solidFill>
+                <a:latin typeface="Calibri" pitchFamily="34" charset="0"/>
+                <a:ea typeface="Calibri" pitchFamily="34" charset="-122"/>
+                <a:cs typeface="Calibri" pitchFamily="34" charset="-120"/>
+              </a:rPr>
+              <a:t>10</a:t>
+            </a:r>
+            <a:endParaRPr lang="en-US" sz="1000" dirty="0"/>
+          </a:p>
+        </p:txBody>
+      </p:sp>
+      <p:sp>
+        <p:nvSpPr>
+          <p:cNvPr id="3" name="Text 1"/>
+          <p:cNvSpPr txBox="1"/>
+          <p:nvPr/>
+        </p:nvSpPr>
+        <p:spPr>
+          <a:xfrm>
+            <a:off x="548640" y="274320"/>
+            <a:ext cx="11064240" cy="475488"/>
+          </a:xfrm>
+          <a:prstGeom prst="rect">
+            <a:avLst/>
+          </a:prstGeom>
+          <a:noFill/>
+          <a:ln/>
+        </p:spPr>
+        <p:txBody>
+          <a:bodyPr wrap="square" lIns="0" tIns="0" rIns="0" bIns="0" rtlCol="0" anchor="ctr"/>
+          <a:lstStyle/>
+          <a:p>
+            <a:pPr indent="0" marL="0">
+              <a:buNone/>
+            </a:pPr>
+            <a:r>
+              <a:rPr lang="en-US" sz="2500" b="1" dirty="0">
+                <a:solidFill>
+                  <a:srgbClr val="000000"/>
+                </a:solidFill>
+                <a:latin typeface="Microsoft YaHei" pitchFamily="34" charset="0"/>
+                <a:ea typeface="Microsoft YaHei" pitchFamily="34" charset="-122"/>
+                <a:cs typeface="Microsoft YaHei" pitchFamily="34" charset="-120"/>
+              </a:rPr>
               <a:t>与已发表结果的关系</a:t>
             </a:r>
             <a:endParaRPr lang="en-US" sz="2500" dirty="0"/>
@@ -1941,7 +2196,7 @@
       </p:sp>
       <p:graphicFrame>
         <p:nvGraphicFramePr>
-          <p:cNvPr id="11" name="Table 0"/>
+          <p:cNvPr id="12" name="Table 0"/>
           <p:cNvGraphicFramePr>
             <a:graphicFrameLocks noGrp="1"/>
           </p:cNvGraphicFramePr>
@@ -2367,7 +2622,7 @@
                           <a:ea typeface="Microsoft YaHei" pitchFamily="34" charset="-122"/>
                           <a:cs typeface="Microsoft YaHei" pitchFamily="34" charset="-120"/>
                         </a:rPr>
-                        <a:t>皮层灰质的 IFIH1</a:t>
+                        <a:t>皮层组织块的 IFIH1</a:t>
                       </a:r>
                       <a:endParaRPr lang="en-US" sz="1250" dirty="0">
                         <a:latin typeface="Microsoft YaHei" charset="0"/>
@@ -2559,7 +2814,7 @@
                           <a:ea typeface="Microsoft YaHei" pitchFamily="34" charset="-122"/>
                           <a:cs typeface="Microsoft YaHei" pitchFamily="34" charset="-120"/>
                         </a:rPr>
-                        <a:t>灰质与白质改变的直接对比</a:t>
+                        <a:t>两个区室改变的直接对比</a:t>
                       </a:r>
                       <a:endParaRPr lang="en-US" sz="1250" dirty="0">
                         <a:latin typeface="Microsoft YaHei" charset="0"/>
@@ -2745,9 +3000,9 @@
 </p:sld>
 </file>
 
-<file path=ppt/slides/slide11.xml><?xml version="1.0" encoding="utf-8"?>
+<file path=ppt/slides/slide12.xml><?xml version="1.0" encoding="utf-8"?>
 <p:sld xmlns:a="http://schemas.openxmlformats.org/drawingml/2006/main" xmlns:r="http://schemas.openxmlformats.org/officeDocument/2006/relationships" xmlns:p="http://schemas.openxmlformats.org/presentationml/2006/main">
-  <p:cSld name="Slide 11">
+  <p:cSld name="Slide 12">
     <p:spTree>
       <p:nvGrpSpPr>
         <p:cNvPr id="1" name=""/>
@@ -2795,7 +3050,7 @@
                 <a:ea typeface="Calibri" pitchFamily="34" charset="-122"/>
                 <a:cs typeface="Calibri" pitchFamily="34" charset="-120"/>
               </a:rPr>
-              <a:t>10</a:t>
+              <a:t>11</a:t>
             </a:r>
             <a:endParaRPr lang="en-US" sz="1000" dirty="0"/>
           </a:p>
@@ -2873,7 +3128,7 @@
                 <a:ea typeface="Microsoft YaHei" pitchFamily="34" charset="-122"/>
                 <a:cs typeface="Microsoft YaHei" pitchFamily="34" charset="-120"/>
               </a:rPr>
-              <a:t>交互项全部跨零</a:t>
+              <a:t>皮层侧不是纯灰质</a:t>
             </a:r>
             <a:endParaRPr lang="en-US" sz="1350" dirty="0"/>
           </a:p>
@@ -2915,7 +3170,7 @@
                 <a:ea typeface="Microsoft YaHei" pitchFamily="34" charset="-122"/>
                 <a:cs typeface="Microsoft YaHei" pitchFamily="34" charset="-120"/>
               </a:rPr>
-              <a:t>现有供体数判不出灰白质的改变是否不同。这是功效不足，不是「两侧相同」。</a:t>
+              <a:t>Schirmer 组织块含皮层下白质，且 MS 块的白质成分显著多于对照块，该侧的疾病对比与解剖深度混杂。</a:t>
             </a:r>
             <a:endParaRPr lang="en-US" sz="1200" dirty="0"/>
           </a:p>
@@ -2930,6 +3185,87 @@
         <p:spPr>
           <a:xfrm>
             <a:off x="548640" y="1847088"/>
+            <a:ext cx="3566160" cy="365760"/>
+          </a:xfrm>
+          <a:prstGeom prst="rect">
+            <a:avLst/>
+          </a:prstGeom>
+          <a:noFill/>
+          <a:ln/>
+        </p:spPr>
+        <p:txBody>
+          <a:bodyPr wrap="square" lIns="0" tIns="0" rIns="0" bIns="0" rtlCol="0" anchor="ctr"/>
+          <a:lstStyle/>
+          <a:p>
+            <a:pPr indent="0" marL="0">
+              <a:buNone/>
+            </a:pPr>
+            <a:r>
+              <a:rPr lang="en-US" sz="1350" b="1" dirty="0">
+                <a:solidFill>
+                  <a:srgbClr val="000000"/>
+                </a:solidFill>
+                <a:latin typeface="Microsoft YaHei" pitchFamily="34" charset="0"/>
+                <a:ea typeface="Microsoft YaHei" pitchFamily="34" charset="-122"/>
+                <a:cs typeface="Microsoft YaHei" pitchFamily="34" charset="-120"/>
+              </a:rPr>
+              <a:t>交互项只有两类可估计</a:t>
+            </a:r>
+            <a:endParaRPr lang="en-US" sz="1350" dirty="0"/>
+          </a:p>
+        </p:txBody>
+      </p:sp>
+      <p:sp>
+        <p:nvSpPr>
+          <p:cNvPr id="7" name="Text 5"/>
+          <p:cNvSpPr txBox="1"/>
+          <p:nvPr/>
+        </p:nvSpPr>
+        <p:spPr>
+          <a:xfrm>
+            <a:off x="4251960" y="1847088"/>
+            <a:ext cx="7406640" cy="566928"/>
+          </a:xfrm>
+          <a:prstGeom prst="rect">
+            <a:avLst/>
+          </a:prstGeom>
+          <a:noFill/>
+          <a:ln/>
+        </p:spPr>
+        <p:txBody>
+          <a:bodyPr wrap="square" lIns="0" tIns="0" rIns="0" bIns="0" rtlCol="0" anchor="ctr"/>
+          <a:lstStyle/>
+          <a:p>
+            <a:pPr indent="0" marL="0">
+              <a:lnSpc>
+                <a:spcPts val="1600"/>
+              </a:lnSpc>
+              <a:buNone/>
+            </a:pPr>
+            <a:r>
+              <a:rPr lang="en-US" sz="1200" dirty="0">
+                <a:solidFill>
+                  <a:srgbClr val="6E6E6E"/>
+                </a:solidFill>
+                <a:latin typeface="Microsoft YaHei" pitchFamily="34" charset="0"/>
+                <a:ea typeface="Microsoft YaHei" pitchFamily="34" charset="-122"/>
+                <a:cs typeface="Microsoft YaHei" pitchFamily="34" charset="-120"/>
+              </a:rPr>
+              <a:t>小胶质、神经元、内皮因一侧供体不足，OPC 因对照中位为零。两类可估计者区间均触及零。</a:t>
+            </a:r>
+            <a:endParaRPr lang="en-US" sz="1200" dirty="0"/>
+          </a:p>
+        </p:txBody>
+      </p:sp>
+      <p:sp>
+        <p:nvSpPr>
+          <p:cNvPr id="8" name="Text 6"/>
+          <p:cNvSpPr txBox="1"/>
+          <p:nvPr/>
+        </p:nvSpPr>
+        <p:spPr>
+          <a:xfrm>
+            <a:off x="548640" y="2578608"/>
             <a:ext cx="3566160" cy="365760"/>
           </a:xfrm>
           <a:prstGeom prst="rect">
@@ -2962,13 +3298,13 @@
       </p:sp>
       <p:sp>
         <p:nvSpPr>
-          <p:cNvPr id="7" name="Text 5"/>
+          <p:cNvPr id="9" name="Text 7"/>
           <p:cNvSpPr txBox="1"/>
           <p:nvPr/>
         </p:nvSpPr>
         <p:spPr>
           <a:xfrm>
-            <a:off x="4251960" y="1847088"/>
+            <a:off x="4251960" y="2578608"/>
             <a:ext cx="7406640" cy="566928"/>
           </a:xfrm>
           <a:prstGeom prst="rect">
@@ -2996,7 +3332,7 @@
                 <a:ea typeface="Microsoft YaHei" pitchFamily="34" charset="-122"/>
                 <a:cs typeface="Microsoft YaHei" pitchFamily="34" charset="-120"/>
               </a:rPr>
-              <a:t>GSE279180 十三位供体，留一法 +1.16 到 +1.41；GSE180759 仅三位对照，去掉一位即从 +1.09 降到 +0.25。</a:t>
+              <a:t>GSE279180 十三位供体，3.5 倍，区间 [1.5, 4.9]；GSE180759 仅三位对照，1.5 倍，区间跨 1。</a:t>
             </a:r>
             <a:endParaRPr lang="en-US" sz="1200" dirty="0"/>
           </a:p>
@@ -3004,13 +3340,13 @@
       </p:sp>
       <p:sp>
         <p:nvSpPr>
-          <p:cNvPr id="8" name="Text 6"/>
+          <p:cNvPr id="10" name="Text 8"/>
           <p:cNvSpPr txBox="1"/>
           <p:nvPr/>
         </p:nvSpPr>
         <p:spPr>
           <a:xfrm>
-            <a:off x="548640" y="2578608"/>
+            <a:off x="548640" y="3310128"/>
             <a:ext cx="3566160" cy="365760"/>
           </a:xfrm>
           <a:prstGeom prst="rect">
@@ -3035,7 +3371,7 @@
                 <a:ea typeface="Microsoft YaHei" pitchFamily="34" charset="-122"/>
                 <a:cs typeface="Microsoft YaHei" pitchFamily="34" charset="-120"/>
               </a:rPr>
-              <a:t>灰质对照几乎没采到小胶质</a:t>
+              <a:t>检出率仍随深度变化</a:t>
             </a:r>
             <a:endParaRPr lang="en-US" sz="1350" dirty="0"/>
           </a:p>
@@ -3043,13 +3379,13 @@
       </p:sp>
       <p:sp>
         <p:nvSpPr>
-          <p:cNvPr id="9" name="Text 7"/>
+          <p:cNvPr id="11" name="Text 9"/>
           <p:cNvSpPr txBox="1"/>
           <p:nvPr/>
         </p:nvSpPr>
         <p:spPr>
           <a:xfrm>
-            <a:off x="4251960" y="2578608"/>
+            <a:off x="4251960" y="3310128"/>
             <a:ext cx="7406640" cy="566928"/>
           </a:xfrm>
           <a:prstGeom prst="rect">
@@ -3077,7 +3413,7 @@
                 <a:ea typeface="Microsoft YaHei" pitchFamily="34" charset="-122"/>
                 <a:cs typeface="Microsoft YaHei" pitchFamily="34" charset="-120"/>
               </a:rPr>
-              <a:t>Schirmer 九位对照中七位的小胶质核数不超过 11 个，故小胶质的交互项无法计算。</a:t>
+              <a:t>已限定在每核 1500 至 5000 UMI 的共同区间内比较，但区间内仍有残余深度差异。</a:t>
             </a:r>
             <a:endParaRPr lang="en-US" sz="1200" dirty="0"/>
           </a:p>
@@ -3085,13 +3421,13 @@
       </p:sp>
       <p:sp>
         <p:nvSpPr>
-          <p:cNvPr id="10" name="Text 8"/>
+          <p:cNvPr id="12" name="Text 10"/>
           <p:cNvSpPr txBox="1"/>
           <p:nvPr/>
         </p:nvSpPr>
         <p:spPr>
           <a:xfrm>
-            <a:off x="548640" y="3310128"/>
+            <a:off x="548640" y="4041648"/>
             <a:ext cx="3566160" cy="365760"/>
           </a:xfrm>
           <a:prstGeom prst="rect">
@@ -3116,7 +3452,7 @@
                 <a:ea typeface="Microsoft YaHei" pitchFamily="34" charset="-122"/>
                 <a:cs typeface="Microsoft YaHei" pitchFamily="34" charset="-120"/>
               </a:rPr>
-              <a:t>OPC 的灰质结果不稳</a:t>
+              <a:t>GSE180759 存在平台混杂</a:t>
             </a:r>
             <a:endParaRPr lang="en-US" sz="1350" dirty="0"/>
           </a:p>
@@ -3124,13 +3460,13 @@
       </p:sp>
       <p:sp>
         <p:nvSpPr>
-          <p:cNvPr id="11" name="Text 9"/>
+          <p:cNvPr id="13" name="Text 11"/>
           <p:cNvSpPr txBox="1"/>
           <p:nvPr/>
         </p:nvSpPr>
         <p:spPr>
           <a:xfrm>
-            <a:off x="4251960" y="3310128"/>
+            <a:off x="4251960" y="4041648"/>
             <a:ext cx="7406640" cy="566928"/>
           </a:xfrm>
           <a:prstGeom prst="rect">
@@ -3158,7 +3494,7 @@
                 <a:ea typeface="Microsoft YaHei" pitchFamily="34" charset="-122"/>
                 <a:cs typeface="Microsoft YaHei" pitchFamily="34" charset="-120"/>
               </a:rPr>
-              <a:t>对照中位仅 0.002 CP10k，倍数变化对伪计数敏感；置换检验与自助区间在此结论相反。</a:t>
+              <a:t>斑块周围文库全为 NovaSeq，病灶边缘文库全为 HiSeq；图谱已按文库做 Harmony 整合。</a:t>
             </a:r>
             <a:endParaRPr lang="en-US" sz="1200" dirty="0"/>
           </a:p>
@@ -3166,13 +3502,13 @@
       </p:sp>
       <p:sp>
         <p:nvSpPr>
-          <p:cNvPr id="12" name="Text 10"/>
+          <p:cNvPr id="14" name="Text 12"/>
           <p:cNvSpPr txBox="1"/>
           <p:nvPr/>
         </p:nvSpPr>
         <p:spPr>
           <a:xfrm>
-            <a:off x="548640" y="4041648"/>
+            <a:off x="548640" y="4773168"/>
             <a:ext cx="3566160" cy="365760"/>
           </a:xfrm>
           <a:prstGeom prst="rect">
@@ -3197,7 +3533,7 @@
                 <a:ea typeface="Microsoft YaHei" pitchFamily="34" charset="-122"/>
                 <a:cs typeface="Microsoft YaHei" pitchFamily="34" charset="-120"/>
               </a:rPr>
-              <a:t>灰质与白质来自不同研究</a:t>
+              <a:t>不用表达量而用检出率</a:t>
             </a:r>
             <a:endParaRPr lang="en-US" sz="1350" dirty="0"/>
           </a:p>
@@ -3205,13 +3541,13 @@
       </p:sp>
       <p:sp>
         <p:nvSpPr>
-          <p:cNvPr id="13" name="Text 11"/>
+          <p:cNvPr id="15" name="Text 13"/>
           <p:cNvSpPr txBox="1"/>
           <p:nvPr/>
         </p:nvSpPr>
         <p:spPr>
           <a:xfrm>
-            <a:off x="4251960" y="4041648"/>
+            <a:off x="4251960" y="4773168"/>
             <a:ext cx="7406640" cy="566928"/>
           </a:xfrm>
           <a:prstGeom prst="rect">
@@ -3239,88 +3575,7 @@
                 <a:ea typeface="Microsoft YaHei" pitchFamily="34" charset="-122"/>
                 <a:cs typeface="Microsoft YaHei" pitchFamily="34" charset="-120"/>
               </a:rPr>
-              <a:t>影响第一问的区域对比，已用全基因组分布作对照；不影响第二问的研究内相减。</a:t>
-            </a:r>
-            <a:endParaRPr lang="en-US" sz="1200" dirty="0"/>
-          </a:p>
-        </p:txBody>
-      </p:sp>
-      <p:sp>
-        <p:nvSpPr>
-          <p:cNvPr id="14" name="Text 12"/>
-          <p:cNvSpPr txBox="1"/>
-          <p:nvPr/>
-        </p:nvSpPr>
-        <p:spPr>
-          <a:xfrm>
-            <a:off x="548640" y="4773168"/>
-            <a:ext cx="3566160" cy="365760"/>
-          </a:xfrm>
-          <a:prstGeom prst="rect">
-            <a:avLst/>
-          </a:prstGeom>
-          <a:noFill/>
-          <a:ln/>
-        </p:spPr>
-        <p:txBody>
-          <a:bodyPr wrap="square" lIns="0" tIns="0" rIns="0" bIns="0" rtlCol="0" anchor="ctr"/>
-          <a:lstStyle/>
-          <a:p>
-            <a:pPr indent="0" marL="0">
-              <a:buNone/>
-            </a:pPr>
-            <a:r>
-              <a:rPr lang="en-US" sz="1350" b="1" dirty="0">
-                <a:solidFill>
-                  <a:srgbClr val="000000"/>
-                </a:solidFill>
-                <a:latin typeface="Microsoft YaHei" pitchFamily="34" charset="0"/>
-                <a:ea typeface="Microsoft YaHei" pitchFamily="34" charset="-122"/>
-                <a:cs typeface="Microsoft YaHei" pitchFamily="34" charset="-120"/>
-              </a:rPr>
-              <a:t>GSE180759 存在文库批次</a:t>
-            </a:r>
-            <a:endParaRPr lang="en-US" sz="1350" dirty="0"/>
-          </a:p>
-        </p:txBody>
-      </p:sp>
-      <p:sp>
-        <p:nvSpPr>
-          <p:cNvPr id="15" name="Text 13"/>
-          <p:cNvSpPr txBox="1"/>
-          <p:nvPr/>
-        </p:nvSpPr>
-        <p:spPr>
-          <a:xfrm>
-            <a:off x="4251960" y="4773168"/>
-            <a:ext cx="7406640" cy="566928"/>
-          </a:xfrm>
-          <a:prstGeom prst="rect">
-            <a:avLst/>
-          </a:prstGeom>
-          <a:noFill/>
-          <a:ln/>
-        </p:spPr>
-        <p:txBody>
-          <a:bodyPr wrap="square" lIns="0" tIns="0" rIns="0" bIns="0" rtlCol="0" anchor="ctr"/>
-          <a:lstStyle/>
-          <a:p>
-            <a:pPr indent="0" marL="0">
-              <a:lnSpc>
-                <a:spcPts val="1600"/>
-              </a:lnSpc>
-              <a:buNone/>
-            </a:pPr>
-            <a:r>
-              <a:rPr lang="en-US" sz="1200" dirty="0">
-                <a:solidFill>
-                  <a:srgbClr val="6E6E6E"/>
-                </a:solidFill>
-                <a:latin typeface="Microsoft YaHei" pitchFamily="34" charset="0"/>
-                <a:ea typeface="Microsoft YaHei" pitchFamily="34" charset="-122"/>
-                <a:cs typeface="Microsoft YaHei" pitchFamily="34" charset="-120"/>
-              </a:rPr>
-              <a:t>文库 18 单独形成少突胶质孤岛，其检出率为其余少突胶质的三倍；图谱已做 Harmony 整合。</a:t>
+              <a:t>Schirmer 仅有对数归一化矩阵，尺度因子无法反解，跨队列的表达量不可比；检出与否不受归一化影响。</a:t>
             </a:r>
             <a:endParaRPr lang="en-US" sz="1200" dirty="0"/>
           </a:p>
@@ -3621,7 +3876,7 @@
                 <a:ea typeface="Microsoft YaHei" pitchFamily="34" charset="-122"/>
                 <a:cs typeface="Microsoft YaHei" pitchFamily="34" charset="-120"/>
               </a:rPr>
-              <a:t>第一问的区域对比跨研究，需要批次对照；第二问的「改变」在各研究内部相减，批次自行抵消。</a:t>
+              <a:t>口径：每核是否检出 IFIH1，限定在三队列共有的测序深度区间（每核 1500 至 5000 UMI）内比较。该量在任何归一化下都精确，故三队列可比。</a:t>
             </a:r>
             <a:endParaRPr lang="en-US" sz="1300" dirty="0"/>
           </a:p>
@@ -3650,11 +3905,11 @@
             <a:tbl>
               <a:tblPr/>
               <a:tblGrid>
-                <a:gridCol w="3200400"/>
+                <a:gridCol w="3017520"/>
+                <a:gridCol w="2834640"/>
+                <a:gridCol w="1920240"/>
+                <a:gridCol w="1463040"/>
                 <a:gridCol w="1828800"/>
-                <a:gridCol w="2103120"/>
-                <a:gridCol w="1554480"/>
-                <a:gridCol w="2377440"/>
               </a:tblGrid>
               <a:tr h="566928">
                 <a:tc>
@@ -4669,7 +4924,7 @@
                           <a:ea typeface="Microsoft YaHei" pitchFamily="34" charset="-122"/>
                           <a:cs typeface="Microsoft YaHei" pitchFamily="34" charset="-120"/>
                         </a:rPr>
-                        <a:t>皮层灰质</a:t>
+                        <a:t>皮层组织块（含皮层下白质）</a:t>
                       </a:r>
                       <a:endParaRPr lang="en-US" sz="1250" dirty="0">
                         <a:latin typeface="Microsoft YaHei" charset="0"/>
@@ -4810,7 +5065,7 @@
                           <a:ea typeface="Microsoft YaHei" pitchFamily="34" charset="-122"/>
                           <a:cs typeface="Microsoft YaHei" pitchFamily="34" charset="-120"/>
                         </a:rPr>
-                        <a:t>灰质基线与改变</a:t>
+                        <a:t>皮层侧基线与改变</a:t>
                       </a:r>
                       <a:endParaRPr lang="en-US" sz="1250" dirty="0">
                         <a:latin typeface="Microsoft YaHei" charset="0"/>
@@ -5345,7 +5600,7 @@
                 <a:ea typeface="Microsoft YaHei" pitchFamily="34" charset="-122"/>
                 <a:cs typeface="Microsoft YaHei" pitchFamily="34" charset="-120"/>
               </a:rPr>
-              <a:t>问题一：正常人的灰质与白质</a:t>
+              <a:t>问题一：正常人的两个区室</a:t>
             </a:r>
             <a:endParaRPr lang="en-US" sz="2500" dirty="0"/>
           </a:p>
@@ -5384,7 +5639,7 @@
                 <a:ea typeface="Microsoft YaHei" pitchFamily="34" charset="-122"/>
                 <a:cs typeface="Microsoft YaHei" pitchFamily="34" charset="-120"/>
               </a:rPr>
-              <a:t>只取对照供体。星形胶质在白质高于灰质，其余细胞类型无差别；小胶质与内皮因灰质对照供体不足而无法判定。</a:t>
+              <a:t>只取对照供体。六类细胞在皮层下白质与皮层组织块之间均无显著差别。</a:t>
             </a:r>
             <a:endParaRPr lang="en-US" sz="1350" dirty="0"/>
           </a:p>
@@ -5406,8 +5661,8 @@
         </p:blipFill>
         <p:spPr>
           <a:xfrm>
-            <a:off x="939741" y="1188720"/>
-            <a:ext cx="10327758" cy="5285232"/>
+            <a:off x="1061602" y="1188720"/>
+            <a:ext cx="10084036" cy="5285232"/>
           </a:xfrm>
           <a:prstGeom prst="rect">
             <a:avLst/>
@@ -5677,7 +5932,7 @@
                 <a:ea typeface="Microsoft YaHei" pitchFamily="34" charset="-122"/>
                 <a:cs typeface="Microsoft YaHei" pitchFamily="34" charset="-120"/>
               </a:rPr>
-              <a:t>问题二：白质中，MS 相对对照的改变</a:t>
+              <a:t>问题二：皮层下白质中，MS 相对对照的改变</a:t>
             </a:r>
             <a:endParaRPr lang="en-US" sz="2500" dirty="0"/>
           </a:p>
@@ -5716,7 +5971,7 @@
                 <a:ea typeface="Microsoft YaHei" pitchFamily="34" charset="-122"/>
                 <a:cs typeface="Microsoft YaHei" pitchFamily="34" charset="-120"/>
               </a:rPr>
-              <a:t>两个白质队列分开计算，每点一位供体。少突胶质在两队列同向升高，但区间不跨零的只有 GSE279180。</a:t>
+              <a:t>两个队列分开计算，每点一位供体，括号内为倍数变化的自助 95% 区间。少突胶质两队列同向升高，GSE279180 达 3.5 倍且区间不跨 1。</a:t>
             </a:r>
             <a:endParaRPr lang="en-US" sz="1350" dirty="0"/>
           </a:p>
@@ -5738,8 +5993,8 @@
         </p:blipFill>
         <p:spPr>
           <a:xfrm>
-            <a:off x="871820" y="1188720"/>
-            <a:ext cx="10463599" cy="5285232"/>
+            <a:off x="877927" y="1188720"/>
+            <a:ext cx="10451386" cy="5285232"/>
           </a:xfrm>
           <a:prstGeom prst="rect">
             <a:avLst/>
@@ -5843,7 +6098,7 @@
                 <a:ea typeface="Microsoft YaHei" pitchFamily="34" charset="-122"/>
                 <a:cs typeface="Microsoft YaHei" pitchFamily="34" charset="-120"/>
               </a:rPr>
-              <a:t>问题二：灰质中，MS 相对对照的改变</a:t>
+              <a:t>问题二：皮层组织块中，MS 相对对照的改变</a:t>
             </a:r>
             <a:endParaRPr lang="en-US" sz="2500" dirty="0"/>
           </a:p>
@@ -5882,7 +6137,7 @@
                 <a:ea typeface="Microsoft YaHei" pitchFamily="34" charset="-122"/>
                 <a:cs typeface="Microsoft YaHei" pitchFamily="34" charset="-120"/>
               </a:rPr>
-              <a:t>皮层，Schirmer 队列。少突胶质与星形胶质的区间跨零。OPC 区间不跨零，但对照中位贴近零，倍数变化在此不稳。</a:t>
+              <a:t>Schirmer 队列。六类细胞的倍数变化区间全部跨 1，无一类达到白质中少突胶质的幅度。</a:t>
             </a:r>
             <a:endParaRPr lang="en-US" sz="1350" dirty="0"/>
           </a:p>
@@ -5904,8 +6159,8 @@
         </p:blipFill>
         <p:spPr>
           <a:xfrm>
-            <a:off x="1561719" y="1188720"/>
-            <a:ext cx="9083803" cy="5285232"/>
+            <a:off x="1639086" y="1188720"/>
+            <a:ext cx="8929069" cy="5285232"/>
           </a:xfrm>
           <a:prstGeom prst="rect">
             <a:avLst/>
@@ -6048,7 +6303,7 @@
                 <a:ea typeface="Microsoft YaHei" pitchFamily="34" charset="-122"/>
                 <a:cs typeface="Microsoft YaHei" pitchFamily="34" charset="-120"/>
               </a:rPr>
-              <a:t>画的是自助 95% 区间，不是显著性星号。区间跨零意味着判不出，而不是两侧相同。</a:t>
+              <a:t>画的是自助 95% 区间，不是显著性星号。六类中只有两类两侧都可估计，其余因供体不足或对照中位为零而不可判定。</a:t>
             </a:r>
             <a:endParaRPr lang="en-US" sz="1350" dirty="0"/>
           </a:p>
@@ -6175,7 +6430,7 @@
                 <a:ea typeface="Microsoft YaHei" pitchFamily="34" charset="-122"/>
                 <a:cs typeface="Microsoft YaHei" pitchFamily="34" charset="-120"/>
               </a:rPr>
-              <a:t>白质内部：细胞图谱与病灶分期</a:t>
+              <a:t>为什么皮层那一侧只能说到这里</a:t>
             </a:r>
             <a:endParaRPr lang="en-US" sz="2500" dirty="0"/>
           </a:p>
@@ -6214,7 +6469,7 @@
                 <a:ea typeface="Microsoft YaHei" pitchFamily="34" charset="-122"/>
                 <a:cs typeface="Microsoft YaHei" pitchFamily="34" charset="-120"/>
               </a:rPr>
-              <a:t>GSE180759，66 432 个核，已按文库做 Harmony 整合。对照白质几乎不表达，慢性活动边缘在小胶质与少突胶质上点亮。</a:t>
+              <a:t>Schirmer 的组织块按原文方法跨越整个皮层并带有其下的皮层下白质。MS 块取得更深，白质成分显著多于对照块，故该侧的疾病对比与解剖深度混杂。</a:t>
             </a:r>
             <a:endParaRPr lang="en-US" sz="1350" dirty="0"/>
           </a:p>
@@ -6222,7 +6477,7 @@
       </p:sp>
       <p:pic>
         <p:nvPicPr>
-          <p:cNvPr id="5" name="Image 0" descr="/home/user/aaa/results/mda5/figs/fig_umap_wm.png">    </p:cNvPr>
+          <p:cNvPr id="5" name="Image 0" descr="/home/user/aaa/results/mda5/figs/fig_confound.png">    </p:cNvPr>
           <p:cNvPicPr>
             <a:picLocks noChangeAspect="1"/>
           </p:cNvPicPr>
@@ -6236,8 +6491,8 @@
         </p:blipFill>
         <p:spPr>
           <a:xfrm>
-            <a:off x="426951" y="1188720"/>
-            <a:ext cx="11353339" cy="5285232"/>
+            <a:off x="1064298" y="1316736"/>
+            <a:ext cx="10078645" cy="5157216"/>
           </a:xfrm>
           <a:prstGeom prst="rect">
             <a:avLst/>

--- a/results/mda5/MDA5_IFIH1_人脑与MS.pptx
+++ b/results/mda5/MDA5_IFIH1_人脑与MS.pptx
@@ -1911,7 +1911,7 @@
               <a:buNone/>
             </a:pPr>
             <a:r>
-              <a:rPr lang="en-US" sz="1600" dirty="0">
+              <a:rPr lang="en-US" sz="1700" dirty="0">
                 <a:solidFill>
                   <a:srgbClr val="6E6E6E"/>
                 </a:solidFill>
@@ -1919,9 +1919,9 @@
                 <a:ea typeface="Microsoft YaHei" pitchFamily="34" charset="-122"/>
                 <a:cs typeface="Microsoft YaHei" pitchFamily="34" charset="-120"/>
               </a:rPr>
-              <a:t>全篇测量同一个量：单个核是否检出 IFIH1。细胞类型、区室、正常与 MS，只是分格的三条轴。</a:t>
+              <a:t>单核转录组水平的细胞类型特异性分析</a:t>
             </a:r>
-            <a:endParaRPr lang="en-US" sz="1600" dirty="0"/>
+            <a:endParaRPr lang="en-US" sz="1700" dirty="0"/>
           </a:p>
         </p:txBody>
       </p:sp>
@@ -2022,54 +2022,15 @@
                 <a:ea typeface="Microsoft YaHei" pitchFamily="34" charset="-122"/>
                 <a:cs typeface="Microsoft YaHei" pitchFamily="34" charset="-120"/>
               </a:rPr>
-              <a:t>白质内部：细胞图谱与病灶分期</a:t>
+              <a:t>白质单核图谱与脱髓鞘病灶分期</a:t>
             </a:r>
             <a:endParaRPr lang="en-US" sz="2500" dirty="0"/>
           </a:p>
         </p:txBody>
       </p:sp>
-      <p:sp>
-        <p:nvSpPr>
-          <p:cNvPr id="4" name="Text 2"/>
-          <p:cNvSpPr txBox="1"/>
-          <p:nvPr/>
-        </p:nvSpPr>
-        <p:spPr>
-          <a:xfrm>
-            <a:off x="548640" y="786384"/>
-            <a:ext cx="11064240" cy="329184"/>
-          </a:xfrm>
-          <a:prstGeom prst="rect">
-            <a:avLst/>
-          </a:prstGeom>
-          <a:noFill/>
-          <a:ln/>
-        </p:spPr>
-        <p:txBody>
-          <a:bodyPr wrap="square" lIns="0" tIns="0" rIns="0" bIns="0" rtlCol="0" anchor="ctr"/>
-          <a:lstStyle/>
-          <a:p>
-            <a:pPr indent="0" marL="0">
-              <a:buNone/>
-            </a:pPr>
-            <a:r>
-              <a:rPr lang="en-US" sz="1350" dirty="0">
-                <a:solidFill>
-                  <a:srgbClr val="6E6E6E"/>
-                </a:solidFill>
-                <a:latin typeface="Microsoft YaHei" pitchFamily="34" charset="0"/>
-                <a:ea typeface="Microsoft YaHei" pitchFamily="34" charset="-122"/>
-                <a:cs typeface="Microsoft YaHei" pitchFamily="34" charset="-120"/>
-              </a:rPr>
-              <a:t>GSE180759，66 432 个核，已按文库做 Harmony 整合。对照白质几乎不表达，慢性活动边缘在小胶质与少突胶质上点亮。</a:t>
-            </a:r>
-            <a:endParaRPr lang="en-US" sz="1350" dirty="0"/>
-          </a:p>
-        </p:txBody>
-      </p:sp>
       <p:pic>
         <p:nvPicPr>
-          <p:cNvPr id="5" name="Image 0" descr="/home/user/aaa/results/mda5/figs/fig_umap_wm.png">    </p:cNvPr>
+          <p:cNvPr id="4" name="Image 0" descr="/home/user/aaa/results/mda5/figs/fig_umap_wm.png">    </p:cNvPr>
           <p:cNvPicPr>
             <a:picLocks noChangeAspect="1"/>
           </p:cNvPicPr>
@@ -2083,8 +2044,8 @@
         </p:blipFill>
         <p:spPr>
           <a:xfrm>
-            <a:off x="426951" y="1188720"/>
-            <a:ext cx="11353339" cy="5285232"/>
+            <a:off x="411480" y="1067218"/>
+            <a:ext cx="11384280" cy="5299636"/>
           </a:xfrm>
           <a:prstGeom prst="rect">
             <a:avLst/>
@@ -2209,7 +2170,7 @@
           </p:nvPr>
         </p:nvGraphicFramePr>
         <p:xfrm>
-          <a:off x="548640" y="1115568"/>
+          <a:off x="548640" y="960120"/>
           <a:ext cx="11064240" cy="914400"/>
         </p:xfrm>
         <a:graphic>
@@ -2220,7 +2181,7 @@
                 <a:gridCol w="3108960"/>
                 <a:gridCol w="7955280"/>
               </a:tblGrid>
-              <a:tr h="640080">
+              <a:tr h="658368">
                 <a:tc>
                   <a:txBody>
                     <a:bodyPr/>
@@ -2238,7 +2199,7 @@
                           <a:ea typeface="Microsoft YaHei" pitchFamily="34" charset="-122"/>
                           <a:cs typeface="Microsoft YaHei" pitchFamily="34" charset="-120"/>
                         </a:rPr>
-                        <a:t>本次结果</a:t>
+                        <a:t>本研究结果</a:t>
                       </a:r>
                       <a:endParaRPr lang="en-US" sz="1250" dirty="0">
                         <a:latin typeface="Microsoft YaHei" charset="0"/>
@@ -2316,7 +2277,7 @@
                   </a:tcPr>
                 </a:tc>
               </a:tr>
-              <a:tr h="640080">
+              <a:tr h="658368">
                 <a:tc>
                   <a:txBody>
                     <a:bodyPr/>
@@ -2412,7 +2373,7 @@
                   </a:tcPr>
                 </a:tc>
               </a:tr>
-              <a:tr h="640080">
+              <a:tr h="658368">
                 <a:tc>
                   <a:txBody>
                     <a:bodyPr/>
@@ -2508,7 +2469,7 @@
                   </a:tcPr>
                 </a:tc>
               </a:tr>
-              <a:tr h="640080">
+              <a:tr h="658368">
                 <a:tc>
                   <a:txBody>
                     <a:bodyPr/>
@@ -2604,7 +2565,7 @@
                   </a:tcPr>
                 </a:tc>
               </a:tr>
-              <a:tr h="640080">
+              <a:tr h="658368">
                 <a:tc>
                   <a:txBody>
                     <a:bodyPr/>
@@ -2700,7 +2661,7 @@
                   </a:tcPr>
                 </a:tc>
               </a:tr>
-              <a:tr h="640080">
+              <a:tr h="658368">
                 <a:tc>
                   <a:txBody>
                     <a:bodyPr/>
@@ -2796,7 +2757,7 @@
                   </a:tcPr>
                 </a:tc>
               </a:tr>
-              <a:tr h="640080">
+              <a:tr h="658368">
                 <a:tc>
                   <a:txBody>
                     <a:bodyPr/>
@@ -2892,7 +2853,7 @@
                   </a:tcPr>
                 </a:tc>
               </a:tr>
-              <a:tr h="640080">
+              <a:tr h="658368">
                 <a:tc>
                   <a:txBody>
                     <a:bodyPr/>
@@ -3089,7 +3050,7 @@
                 <a:ea typeface="Microsoft YaHei" pitchFamily="34" charset="-122"/>
                 <a:cs typeface="Microsoft YaHei" pitchFamily="34" charset="-120"/>
               </a:rPr>
-              <a:t>限制</a:t>
+              <a:t>局限</a:t>
             </a:r>
             <a:endParaRPr lang="en-US" sz="2500" dirty="0"/>
           </a:p>
@@ -3103,7 +3064,7 @@
         </p:nvSpPr>
         <p:spPr>
           <a:xfrm>
-            <a:off x="548640" y="1115568"/>
+            <a:off x="548640" y="1005840"/>
             <a:ext cx="3566160" cy="365760"/>
           </a:xfrm>
           <a:prstGeom prst="rect">
@@ -3128,7 +3089,7 @@
                 <a:ea typeface="Microsoft YaHei" pitchFamily="34" charset="-122"/>
                 <a:cs typeface="Microsoft YaHei" pitchFamily="34" charset="-120"/>
               </a:rPr>
-              <a:t>皮层侧不是纯灰质</a:t>
+              <a:t>皮层标本含白质成分</a:t>
             </a:r>
             <a:endParaRPr lang="en-US" sz="1350" dirty="0"/>
           </a:p>
@@ -3142,7 +3103,7 @@
         </p:nvSpPr>
         <p:spPr>
           <a:xfrm>
-            <a:off x="4251960" y="1115568"/>
+            <a:off x="4251960" y="1005840"/>
             <a:ext cx="7406640" cy="566928"/>
           </a:xfrm>
           <a:prstGeom prst="rect">
@@ -3170,7 +3131,7 @@
                 <a:ea typeface="Microsoft YaHei" pitchFamily="34" charset="-122"/>
                 <a:cs typeface="Microsoft YaHei" pitchFamily="34" charset="-120"/>
               </a:rPr>
-              <a:t>Schirmer 组织块含皮层下白质，且 MS 块的白质成分显著多于对照块，该侧的疾病对比与解剖深度混杂。</a:t>
+              <a:t>Schirmer 取材跨越皮层全层并带有其下的皮层下白质，MS 标本取材更深，疾病对比与取材部位混杂。</a:t>
             </a:r>
             <a:endParaRPr lang="en-US" sz="1200" dirty="0"/>
           </a:p>
@@ -3184,7 +3145,7 @@
         </p:nvSpPr>
         <p:spPr>
           <a:xfrm>
-            <a:off x="548640" y="1847088"/>
+            <a:off x="548640" y="1737360"/>
             <a:ext cx="3566160" cy="365760"/>
           </a:xfrm>
           <a:prstGeom prst="rect">
@@ -3209,7 +3170,7 @@
                 <a:ea typeface="Microsoft YaHei" pitchFamily="34" charset="-122"/>
                 <a:cs typeface="Microsoft YaHei" pitchFamily="34" charset="-120"/>
               </a:rPr>
-              <a:t>交互项只有两类可估计</a:t>
+              <a:t>区域交互仅两类可估计</a:t>
             </a:r>
             <a:endParaRPr lang="en-US" sz="1350" dirty="0"/>
           </a:p>
@@ -3223,7 +3184,7 @@
         </p:nvSpPr>
         <p:spPr>
           <a:xfrm>
-            <a:off x="4251960" y="1847088"/>
+            <a:off x="4251960" y="1737360"/>
             <a:ext cx="7406640" cy="566928"/>
           </a:xfrm>
           <a:prstGeom prst="rect">
@@ -3251,7 +3212,7 @@
                 <a:ea typeface="Microsoft YaHei" pitchFamily="34" charset="-122"/>
                 <a:cs typeface="Microsoft YaHei" pitchFamily="34" charset="-120"/>
               </a:rPr>
-              <a:t>小胶质、神经元、内皮因一侧供体不足，OPC 因对照中位为零。两类可估计者区间均触及零。</a:t>
+              <a:t>小胶质细胞、神经元、内皮细胞因一侧样本量不足，少突胶质前体细胞因对照组未检出。</a:t>
             </a:r>
             <a:endParaRPr lang="en-US" sz="1200" dirty="0"/>
           </a:p>
@@ -3265,7 +3226,7 @@
         </p:nvSpPr>
         <p:spPr>
           <a:xfrm>
-            <a:off x="548640" y="2578608"/>
+            <a:off x="548640" y="2468880"/>
             <a:ext cx="3566160" cy="365760"/>
           </a:xfrm>
           <a:prstGeom prst="rect">
@@ -3290,7 +3251,7 @@
                 <a:ea typeface="Microsoft YaHei" pitchFamily="34" charset="-122"/>
                 <a:cs typeface="Microsoft YaHei" pitchFamily="34" charset="-120"/>
               </a:rPr>
-              <a:t>白质结论主要由一个队列承担</a:t>
+              <a:t>白质结论主要由一个队列支持</a:t>
             </a:r>
             <a:endParaRPr lang="en-US" sz="1350" dirty="0"/>
           </a:p>
@@ -3304,7 +3265,7 @@
         </p:nvSpPr>
         <p:spPr>
           <a:xfrm>
-            <a:off x="4251960" y="2578608"/>
+            <a:off x="4251960" y="2468880"/>
             <a:ext cx="7406640" cy="566928"/>
           </a:xfrm>
           <a:prstGeom prst="rect">
@@ -3332,7 +3293,7 @@
                 <a:ea typeface="Microsoft YaHei" pitchFamily="34" charset="-122"/>
                 <a:cs typeface="Microsoft YaHei" pitchFamily="34" charset="-120"/>
               </a:rPr>
-              <a:t>GSE279180 十三位供体，3.5 倍，区间 [1.5, 4.9]；GSE180759 仅三位对照，1.5 倍，区间跨 1。</a:t>
+              <a:t>GSE279180 十三例供体，3.5 倍，区间 [1.5, 4.9]；GSE180759 仅三例对照，1.5 倍，区间包含 1。</a:t>
             </a:r>
             <a:endParaRPr lang="en-US" sz="1200" dirty="0"/>
           </a:p>
@@ -3346,7 +3307,7 @@
         </p:nvSpPr>
         <p:spPr>
           <a:xfrm>
-            <a:off x="548640" y="3310128"/>
+            <a:off x="548640" y="3200400"/>
             <a:ext cx="3566160" cy="365760"/>
           </a:xfrm>
           <a:prstGeom prst="rect">
@@ -3371,7 +3332,7 @@
                 <a:ea typeface="Microsoft YaHei" pitchFamily="34" charset="-122"/>
                 <a:cs typeface="Microsoft YaHei" pitchFamily="34" charset="-120"/>
               </a:rPr>
-              <a:t>检出率仍随深度变化</a:t>
+              <a:t>测序深度残余影响</a:t>
             </a:r>
             <a:endParaRPr lang="en-US" sz="1350" dirty="0"/>
           </a:p>
@@ -3385,7 +3346,7 @@
         </p:nvSpPr>
         <p:spPr>
           <a:xfrm>
-            <a:off x="4251960" y="3310128"/>
+            <a:off x="4251960" y="3200400"/>
             <a:ext cx="7406640" cy="566928"/>
           </a:xfrm>
           <a:prstGeom prst="rect">
@@ -3413,7 +3374,7 @@
                 <a:ea typeface="Microsoft YaHei" pitchFamily="34" charset="-122"/>
                 <a:cs typeface="Microsoft YaHei" pitchFamily="34" charset="-120"/>
               </a:rPr>
-              <a:t>已限定在每核 1500 至 5000 UMI 的共同区间内比较，但区间内仍有残余深度差异。</a:t>
+              <a:t>已限定在每核 1500 至 5000 UMI 的共同深度区间内比较，区间内仍存在残余差异。</a:t>
             </a:r>
             <a:endParaRPr lang="en-US" sz="1200" dirty="0"/>
           </a:p>
@@ -3427,7 +3388,7 @@
         </p:nvSpPr>
         <p:spPr>
           <a:xfrm>
-            <a:off x="548640" y="4041648"/>
+            <a:off x="548640" y="3931920"/>
             <a:ext cx="3566160" cy="365760"/>
           </a:xfrm>
           <a:prstGeom prst="rect">
@@ -3466,7 +3427,7 @@
         </p:nvSpPr>
         <p:spPr>
           <a:xfrm>
-            <a:off x="4251960" y="4041648"/>
+            <a:off x="4251960" y="3931920"/>
             <a:ext cx="7406640" cy="566928"/>
           </a:xfrm>
           <a:prstGeom prst="rect">
@@ -3494,7 +3455,7 @@
                 <a:ea typeface="Microsoft YaHei" pitchFamily="34" charset="-122"/>
                 <a:cs typeface="Microsoft YaHei" pitchFamily="34" charset="-120"/>
               </a:rPr>
-              <a:t>斑块周围文库全为 NovaSeq，病灶边缘文库全为 HiSeq；图谱已按文库做 Harmony 整合。</a:t>
+              <a:t>病灶周围白质文库全为 NovaSeq，病灶边缘文库全为 HiSeq；图谱已按文库做 Harmony 整合。</a:t>
             </a:r>
             <a:endParaRPr lang="en-US" sz="1200" dirty="0"/>
           </a:p>
@@ -3508,7 +3469,7 @@
         </p:nvSpPr>
         <p:spPr>
           <a:xfrm>
-            <a:off x="548640" y="4773168"/>
+            <a:off x="548640" y="4663440"/>
             <a:ext cx="3566160" cy="365760"/>
           </a:xfrm>
           <a:prstGeom prst="rect">
@@ -3533,7 +3494,7 @@
                 <a:ea typeface="Microsoft YaHei" pitchFamily="34" charset="-122"/>
                 <a:cs typeface="Microsoft YaHei" pitchFamily="34" charset="-120"/>
               </a:rPr>
-              <a:t>不用表达量而用检出率</a:t>
+              <a:t>以阳性核比例而非表达量</a:t>
             </a:r>
             <a:endParaRPr lang="en-US" sz="1350" dirty="0"/>
           </a:p>
@@ -3547,7 +3508,7 @@
         </p:nvSpPr>
         <p:spPr>
           <a:xfrm>
-            <a:off x="4251960" y="4773168"/>
+            <a:off x="4251960" y="4663440"/>
             <a:ext cx="7406640" cy="566928"/>
           </a:xfrm>
           <a:prstGeom prst="rect">
@@ -3575,7 +3536,7 @@
                 <a:ea typeface="Microsoft YaHei" pitchFamily="34" charset="-122"/>
                 <a:cs typeface="Microsoft YaHei" pitchFamily="34" charset="-120"/>
               </a:rPr>
-              <a:t>Schirmer 仅有对数归一化矩阵，尺度因子无法反解，跨队列的表达量不可比；检出与否不受归一化影响。</a:t>
+              <a:t>Schirmer 仅提供对数归一化矩阵，标度因子不可恢复，跨队列表达量不可比。</a:t>
             </a:r>
             <a:endParaRPr lang="en-US" sz="1200" dirty="0"/>
           </a:p>
@@ -3589,7 +3550,7 @@
         </p:nvSpPr>
         <p:spPr>
           <a:xfrm>
-            <a:off x="548640" y="5504688"/>
+            <a:off x="548640" y="5394960"/>
             <a:ext cx="3566160" cy="365760"/>
           </a:xfrm>
           <a:prstGeom prst="rect">
@@ -3614,7 +3575,7 @@
                 <a:ea typeface="Microsoft YaHei" pitchFamily="34" charset="-122"/>
                 <a:cs typeface="Microsoft YaHei" pitchFamily="34" charset="-120"/>
               </a:rPr>
-              <a:t>全部为转录本层面</a:t>
+              <a:t>仅限转录本水平</a:t>
             </a:r>
             <a:endParaRPr lang="en-US" sz="1350" dirty="0"/>
           </a:p>
@@ -3628,7 +3589,7 @@
         </p:nvSpPr>
         <p:spPr>
           <a:xfrm>
-            <a:off x="4251960" y="5504688"/>
+            <a:off x="4251960" y="5394960"/>
             <a:ext cx="7406640" cy="566928"/>
           </a:xfrm>
           <a:prstGeom prst="rect">
@@ -3656,7 +3617,7 @@
                 <a:ea typeface="Microsoft YaHei" pitchFamily="34" charset="-122"/>
                 <a:cs typeface="Microsoft YaHei" pitchFamily="34" charset="-120"/>
               </a:rPr>
-              <a:t>人类 MS 脑组织无任何 MDA5 蛋白测量。</a:t>
+              <a:t>人类 MS 脑组织尚无 MDA5 蛋白水平的测量。</a:t>
             </a:r>
             <a:endParaRPr lang="en-US" sz="1200" dirty="0"/>
           </a:p>
@@ -3798,7 +3759,7 @@
                 <a:ea typeface="Microsoft YaHei" pitchFamily="34" charset="-122"/>
                 <a:cs typeface="Microsoft YaHei" pitchFamily="34" charset="-120"/>
               </a:rPr>
-              <a:t>一　正常人脑中 IFIH1 由哪些细胞表达？灰质与白质是否不同？</a:t>
+              <a:t>一　正常人脑中 IFIH1 由哪些细胞类型表达？两个解剖区域是否不同？</a:t>
             </a:r>
             <a:endParaRPr lang="en-US" sz="1700" dirty="0"/>
           </a:p>
@@ -3837,48 +3798,9 @@
                 <a:ea typeface="Microsoft YaHei" pitchFamily="34" charset="-122"/>
                 <a:cs typeface="Microsoft YaHei" pitchFamily="34" charset="-120"/>
               </a:rPr>
-              <a:t>二　MS 中 IFIH1 的分布如何改变？灰质与白质的改变是否相同？</a:t>
+              <a:t>二　MS 病变中 IFIH1 的细胞分布如何改变？两个区域的改变是否相同？</a:t>
             </a:r>
             <a:endParaRPr lang="en-US" sz="1700" dirty="0"/>
-          </a:p>
-        </p:txBody>
-      </p:sp>
-      <p:sp>
-        <p:nvSpPr>
-          <p:cNvPr id="6" name="Text 4"/>
-          <p:cNvSpPr txBox="1"/>
-          <p:nvPr/>
-        </p:nvSpPr>
-        <p:spPr>
-          <a:xfrm>
-            <a:off x="685800" y="1883664"/>
-            <a:ext cx="10972800" cy="329184"/>
-          </a:xfrm>
-          <a:prstGeom prst="rect">
-            <a:avLst/>
-          </a:prstGeom>
-          <a:noFill/>
-          <a:ln/>
-        </p:spPr>
-        <p:txBody>
-          <a:bodyPr wrap="square" lIns="0" tIns="0" rIns="0" bIns="0" rtlCol="0" anchor="ctr"/>
-          <a:lstStyle/>
-          <a:p>
-            <a:pPr indent="0" marL="0">
-              <a:buNone/>
-            </a:pPr>
-            <a:r>
-              <a:rPr lang="en-US" sz="1300" dirty="0">
-                <a:solidFill>
-                  <a:srgbClr val="6E6E6E"/>
-                </a:solidFill>
-                <a:latin typeface="Microsoft YaHei" pitchFamily="34" charset="0"/>
-                <a:ea typeface="Microsoft YaHei" pitchFamily="34" charset="-122"/>
-                <a:cs typeface="Microsoft YaHei" pitchFamily="34" charset="-120"/>
-              </a:rPr>
-              <a:t>口径：每核是否检出 IFIH1，限定在三队列共有的测序深度区间（每核 1500 至 5000 UMI）内比较。该量在任何归一化下都精确，故三队列可比。</a:t>
-            </a:r>
-            <a:endParaRPr lang="en-US" sz="1300" dirty="0"/>
           </a:p>
         </p:txBody>
       </p:sp>
@@ -3897,7 +3819,7 @@
           </p:nvPr>
         </p:nvGraphicFramePr>
         <p:xfrm>
-          <a:off x="548640" y="2395728"/>
+          <a:off x="548640" y="2011680"/>
           <a:ext cx="11064240" cy="914400"/>
         </p:xfrm>
         <a:graphic>
@@ -3911,7 +3833,7 @@
                 <a:gridCol w="1463040"/>
                 <a:gridCol w="1828800"/>
               </a:tblGrid>
-              <a:tr h="566928">
+              <a:tr h="585216">
                 <a:tc>
                   <a:txBody>
                     <a:bodyPr/>
@@ -4148,7 +4070,7 @@
                   </a:tcPr>
                 </a:tc>
               </a:tr>
-              <a:tr h="566928">
+              <a:tr h="585216">
                 <a:tc>
                   <a:txBody>
                     <a:bodyPr/>
@@ -4354,7 +4276,7 @@
                           <a:ea typeface="Microsoft YaHei" pitchFamily="34" charset="-122"/>
                           <a:cs typeface="Microsoft YaHei" pitchFamily="34" charset="-120"/>
                         </a:rPr>
-                        <a:t>问题一：细胞类型次序</a:t>
+                        <a:t>细胞类型表达谱</a:t>
                       </a:r>
                       <a:endParaRPr lang="en-US" sz="1250" dirty="0">
                         <a:latin typeface="Microsoft YaHei" charset="0"/>
@@ -4385,7 +4307,7 @@
                   </a:tcPr>
                 </a:tc>
               </a:tr>
-              <a:tr h="566928">
+              <a:tr h="585216">
                 <a:tc>
                   <a:txBody>
                     <a:bodyPr/>
@@ -4591,7 +4513,7 @@
                           <a:ea typeface="Microsoft YaHei" pitchFamily="34" charset="-122"/>
                           <a:cs typeface="Microsoft YaHei" pitchFamily="34" charset="-120"/>
                         </a:rPr>
-                        <a:t>白质基线与改变</a:t>
+                        <a:t>白质，含病灶分期</a:t>
                       </a:r>
                       <a:endParaRPr lang="en-US" sz="1250" dirty="0">
                         <a:latin typeface="Microsoft YaHei" charset="0"/>
@@ -4622,7 +4544,7 @@
                   </a:tcPr>
                 </a:tc>
               </a:tr>
-              <a:tr h="566928">
+              <a:tr h="585216">
                 <a:tc>
                   <a:txBody>
                     <a:bodyPr/>
@@ -4828,7 +4750,7 @@
                           <a:ea typeface="Microsoft YaHei" pitchFamily="34" charset="-122"/>
                           <a:cs typeface="Microsoft YaHei" pitchFamily="34" charset="-120"/>
                         </a:rPr>
-                        <a:t>白质基线与改变（主力）</a:t>
+                        <a:t>白质，主队列</a:t>
                       </a:r>
                       <a:endParaRPr lang="en-US" sz="1250" dirty="0">
                         <a:latin typeface="Microsoft YaHei" charset="0"/>
@@ -4859,7 +4781,7 @@
                   </a:tcPr>
                 </a:tc>
               </a:tr>
-              <a:tr h="566928">
+              <a:tr h="585216">
                 <a:tc>
                   <a:txBody>
                     <a:bodyPr/>
@@ -4924,7 +4846,7 @@
                           <a:ea typeface="Microsoft YaHei" pitchFamily="34" charset="-122"/>
                           <a:cs typeface="Microsoft YaHei" pitchFamily="34" charset="-120"/>
                         </a:rPr>
-                        <a:t>皮层组织块（含皮层下白质）</a:t>
+                        <a:t>皮层标本</a:t>
                       </a:r>
                       <a:endParaRPr lang="en-US" sz="1250" dirty="0">
                         <a:latin typeface="Microsoft YaHei" charset="0"/>
@@ -5065,7 +4987,7 @@
                           <a:ea typeface="Microsoft YaHei" pitchFamily="34" charset="-122"/>
                           <a:cs typeface="Microsoft YaHei" pitchFamily="34" charset="-120"/>
                         </a:rPr>
-                        <a:t>皮层侧基线与改变</a:t>
+                        <a:t>皮层</a:t>
                       </a:r>
                       <a:endParaRPr lang="en-US" sz="1250" dirty="0">
                         <a:latin typeface="Microsoft YaHei" charset="0"/>
@@ -5096,7 +5018,7 @@
                   </a:tcPr>
                 </a:tc>
               </a:tr>
-              <a:tr h="566928">
+              <a:tr h="585216">
                 <a:tc>
                   <a:txBody>
                     <a:bodyPr/>
@@ -5302,7 +5224,7 @@
                           <a:ea typeface="Microsoft YaHei" pitchFamily="34" charset="-122"/>
                           <a:cs typeface="Microsoft YaHei" pitchFamily="34" charset="-120"/>
                         </a:rPr>
-                        <a:t>白质验证</a:t>
+                        <a:t>白质，验证</a:t>
                       </a:r>
                       <a:endParaRPr lang="en-US" sz="1250" dirty="0">
                         <a:latin typeface="Microsoft YaHei" charset="0"/>
@@ -5434,54 +5356,15 @@
                 <a:ea typeface="Microsoft YaHei" pitchFamily="34" charset="-122"/>
                 <a:cs typeface="Microsoft YaHei" pitchFamily="34" charset="-120"/>
               </a:rPr>
-              <a:t>问题一：IFIH1 由哪些细胞表达</a:t>
+              <a:t>IFIH1 在人脑各类细胞中的表达</a:t>
             </a:r>
             <a:endParaRPr lang="en-US" sz="2500" dirty="0"/>
           </a:p>
         </p:txBody>
       </p:sp>
-      <p:sp>
-        <p:nvSpPr>
-          <p:cNvPr id="4" name="Text 2"/>
-          <p:cNvSpPr txBox="1"/>
-          <p:nvPr/>
-        </p:nvSpPr>
-        <p:spPr>
-          <a:xfrm>
-            <a:off x="548640" y="786384"/>
-            <a:ext cx="11064240" cy="329184"/>
-          </a:xfrm>
-          <a:prstGeom prst="rect">
-            <a:avLst/>
-          </a:prstGeom>
-          <a:noFill/>
-          <a:ln/>
-        </p:spPr>
-        <p:txBody>
-          <a:bodyPr wrap="square" lIns="0" tIns="0" rIns="0" bIns="0" rtlCol="0" anchor="ctr"/>
-          <a:lstStyle/>
-          <a:p>
-            <a:pPr indent="0" marL="0">
-              <a:buNone/>
-            </a:pPr>
-            <a:r>
-              <a:rPr lang="en-US" sz="1350" dirty="0">
-                <a:solidFill>
-                  <a:srgbClr val="6E6E6E"/>
-                </a:solidFill>
-                <a:latin typeface="Microsoft YaHei" pitchFamily="34" charset="0"/>
-                <a:ea typeface="Microsoft YaHei" pitchFamily="34" charset="-122"/>
-                <a:cs typeface="Microsoft YaHei" pitchFamily="34" charset="-120"/>
-              </a:rPr>
-              <a:t>正常脑内 IFIH1 最高的是内皮，其次小胶质；神经元最低。左为 783 位供体的伪整体排序，右为白质单核层面的检出。</a:t>
-            </a:r>
-            <a:endParaRPr lang="en-US" sz="1350" dirty="0"/>
-          </a:p>
-        </p:txBody>
-      </p:sp>
       <p:pic>
         <p:nvPicPr>
-          <p:cNvPr id="5" name="Image 0" descr="/home/user/aaa/results/mda5/figs/fig_q1_celltype.png">    </p:cNvPr>
+          <p:cNvPr id="4" name="Image 0" descr="/home/user/aaa/results/mda5/figs/fig_q1_celltype.png">    </p:cNvPr>
           <p:cNvPicPr>
             <a:picLocks noChangeAspect="1"/>
           </p:cNvPicPr>
@@ -5495,8 +5378,8 @@
         </p:blipFill>
         <p:spPr>
           <a:xfrm>
-            <a:off x="411480" y="1489179"/>
-            <a:ext cx="11384280" cy="4684314"/>
+            <a:off x="411480" y="1429127"/>
+            <a:ext cx="11384280" cy="4575817"/>
           </a:xfrm>
           <a:prstGeom prst="rect">
             <a:avLst/>
@@ -5600,54 +5483,15 @@
                 <a:ea typeface="Microsoft YaHei" pitchFamily="34" charset="-122"/>
                 <a:cs typeface="Microsoft YaHei" pitchFamily="34" charset="-120"/>
               </a:rPr>
-              <a:t>问题一：正常人的两个区室</a:t>
+              <a:t>正常脑：两个解剖区域无差异</a:t>
             </a:r>
             <a:endParaRPr lang="en-US" sz="2500" dirty="0"/>
           </a:p>
         </p:txBody>
       </p:sp>
-      <p:sp>
-        <p:nvSpPr>
-          <p:cNvPr id="4" name="Text 2"/>
-          <p:cNvSpPr txBox="1"/>
-          <p:nvPr/>
-        </p:nvSpPr>
-        <p:spPr>
-          <a:xfrm>
-            <a:off x="548640" y="786384"/>
-            <a:ext cx="11064240" cy="329184"/>
-          </a:xfrm>
-          <a:prstGeom prst="rect">
-            <a:avLst/>
-          </a:prstGeom>
-          <a:noFill/>
-          <a:ln/>
-        </p:spPr>
-        <p:txBody>
-          <a:bodyPr wrap="square" lIns="0" tIns="0" rIns="0" bIns="0" rtlCol="0" anchor="ctr"/>
-          <a:lstStyle/>
-          <a:p>
-            <a:pPr indent="0" marL="0">
-              <a:buNone/>
-            </a:pPr>
-            <a:r>
-              <a:rPr lang="en-US" sz="1350" dirty="0">
-                <a:solidFill>
-                  <a:srgbClr val="6E6E6E"/>
-                </a:solidFill>
-                <a:latin typeface="Microsoft YaHei" pitchFamily="34" charset="0"/>
-                <a:ea typeface="Microsoft YaHei" pitchFamily="34" charset="-122"/>
-                <a:cs typeface="Microsoft YaHei" pitchFamily="34" charset="-120"/>
-              </a:rPr>
-              <a:t>只取对照供体。六类细胞在皮层下白质与皮层组织块之间均无显著差别。</a:t>
-            </a:r>
-            <a:endParaRPr lang="en-US" sz="1350" dirty="0"/>
-          </a:p>
-        </p:txBody>
-      </p:sp>
       <p:pic>
         <p:nvPicPr>
-          <p:cNvPr id="5" name="Image 0" descr="/home/user/aaa/results/mda5/figs/fig_q1_region.png">    </p:cNvPr>
+          <p:cNvPr id="4" name="Image 0" descr="/home/user/aaa/results/mda5/figs/fig_q1_region.png">    </p:cNvPr>
           <p:cNvPicPr>
             <a:picLocks noChangeAspect="1"/>
           </p:cNvPicPr>
@@ -5661,8 +5505,8 @@
         </p:blipFill>
         <p:spPr>
           <a:xfrm>
-            <a:off x="1061602" y="1188720"/>
-            <a:ext cx="10084036" cy="5285232"/>
+            <a:off x="841895" y="960120"/>
+            <a:ext cx="10523449" cy="5513832"/>
           </a:xfrm>
           <a:prstGeom prst="rect">
             <a:avLst/>
@@ -5766,54 +5610,15 @@
                 <a:ea typeface="Microsoft YaHei" pitchFamily="34" charset="-122"/>
                 <a:cs typeface="Microsoft YaHei" pitchFamily="34" charset="-120"/>
               </a:rPr>
-              <a:t>第 4 页的批次对照：把跨研究偏移扣掉</a:t>
+              <a:t>跨研究偏移的稳健性检验</a:t>
             </a:r>
             <a:endParaRPr lang="en-US" sz="2500" dirty="0"/>
           </a:p>
         </p:txBody>
       </p:sp>
-      <p:sp>
-        <p:nvSpPr>
-          <p:cNvPr id="4" name="Text 2"/>
-          <p:cNvSpPr txBox="1"/>
-          <p:nvPr/>
-        </p:nvSpPr>
-        <p:spPr>
-          <a:xfrm>
-            <a:off x="548640" y="786384"/>
-            <a:ext cx="11064240" cy="329184"/>
-          </a:xfrm>
-          <a:prstGeom prst="rect">
-            <a:avLst/>
-          </a:prstGeom>
-          <a:noFill/>
-          <a:ln/>
-        </p:spPr>
-        <p:txBody>
-          <a:bodyPr wrap="square" lIns="0" tIns="0" rIns="0" bIns="0" rtlCol="0" anchor="ctr"/>
-          <a:lstStyle/>
-          <a:p>
-            <a:pPr indent="0" marL="0">
-              <a:buNone/>
-            </a:pPr>
-            <a:r>
-              <a:rPr lang="en-US" sz="1350" dirty="0">
-                <a:solidFill>
-                  <a:srgbClr val="6E6E6E"/>
-                </a:solidFill>
-                <a:latin typeface="Microsoft YaHei" pitchFamily="34" charset="0"/>
-                <a:ea typeface="Microsoft YaHei" pitchFamily="34" charset="-122"/>
-                <a:cs typeface="Microsoft YaHei" pitchFamily="34" charset="-120"/>
-              </a:rPr>
-              <a:t>偏移同等作用于所有基因，故全基因组 log2（白质/灰质）的中位即偏移量。扣掉它之后，只有星形胶质在两个白质队列中都高于中位。</a:t>
-            </a:r>
-            <a:endParaRPr lang="en-US" sz="1350" dirty="0"/>
-          </a:p>
-        </p:txBody>
-      </p:sp>
       <p:pic>
         <p:nvPicPr>
-          <p:cNvPr id="5" name="Image 0" descr="/home/user/aaa/results/mda5/figs/figB_null.png">    </p:cNvPr>
+          <p:cNvPr id="4" name="Image 0" descr="/home/user/aaa/results/mda5/figs/figB_null.png">    </p:cNvPr>
           <p:cNvPicPr>
             <a:picLocks noChangeAspect="1"/>
           </p:cNvPicPr>
@@ -5827,8 +5632,8 @@
         </p:blipFill>
         <p:spPr>
           <a:xfrm>
-            <a:off x="803887" y="1316736"/>
-            <a:ext cx="10599466" cy="5157216"/>
+            <a:off x="963367" y="960120"/>
+            <a:ext cx="10280507" cy="5513832"/>
           </a:xfrm>
           <a:prstGeom prst="rect">
             <a:avLst/>
@@ -5932,54 +5737,15 @@
                 <a:ea typeface="Microsoft YaHei" pitchFamily="34" charset="-122"/>
                 <a:cs typeface="Microsoft YaHei" pitchFamily="34" charset="-120"/>
               </a:rPr>
-              <a:t>问题二：皮层下白质中，MS 相对对照的改变</a:t>
+              <a:t>MS 白质：少突胶质细胞 IFIH1 阳性率升高</a:t>
             </a:r>
             <a:endParaRPr lang="en-US" sz="2500" dirty="0"/>
           </a:p>
         </p:txBody>
       </p:sp>
-      <p:sp>
-        <p:nvSpPr>
-          <p:cNvPr id="4" name="Text 2"/>
-          <p:cNvSpPr txBox="1"/>
-          <p:nvPr/>
-        </p:nvSpPr>
-        <p:spPr>
-          <a:xfrm>
-            <a:off x="548640" y="786384"/>
-            <a:ext cx="11064240" cy="329184"/>
-          </a:xfrm>
-          <a:prstGeom prst="rect">
-            <a:avLst/>
-          </a:prstGeom>
-          <a:noFill/>
-          <a:ln/>
-        </p:spPr>
-        <p:txBody>
-          <a:bodyPr wrap="square" lIns="0" tIns="0" rIns="0" bIns="0" rtlCol="0" anchor="ctr"/>
-          <a:lstStyle/>
-          <a:p>
-            <a:pPr indent="0" marL="0">
-              <a:buNone/>
-            </a:pPr>
-            <a:r>
-              <a:rPr lang="en-US" sz="1350" dirty="0">
-                <a:solidFill>
-                  <a:srgbClr val="6E6E6E"/>
-                </a:solidFill>
-                <a:latin typeface="Microsoft YaHei" pitchFamily="34" charset="0"/>
-                <a:ea typeface="Microsoft YaHei" pitchFamily="34" charset="-122"/>
-                <a:cs typeface="Microsoft YaHei" pitchFamily="34" charset="-120"/>
-              </a:rPr>
-              <a:t>两个队列分开计算，每点一位供体，括号内为倍数变化的自助 95% 区间。少突胶质两队列同向升高，GSE279180 达 3.5 倍且区间不跨 1。</a:t>
-            </a:r>
-            <a:endParaRPr lang="en-US" sz="1350" dirty="0"/>
-          </a:p>
-        </p:txBody>
-      </p:sp>
       <p:pic>
         <p:nvPicPr>
-          <p:cNvPr id="5" name="Image 0" descr="/home/user/aaa/results/mda5/figs/fig_q2_wm.png">    </p:cNvPr>
+          <p:cNvPr id="4" name="Image 0" descr="/home/user/aaa/results/mda5/figs/fig_q2_wm.png">    </p:cNvPr>
           <p:cNvPicPr>
             <a:picLocks noChangeAspect="1"/>
           </p:cNvPicPr>
@@ -5993,8 +5759,8 @@
         </p:blipFill>
         <p:spPr>
           <a:xfrm>
-            <a:off x="877927" y="1188720"/>
-            <a:ext cx="10451386" cy="5285232"/>
+            <a:off x="650310" y="960120"/>
+            <a:ext cx="10906621" cy="5513832"/>
           </a:xfrm>
           <a:prstGeom prst="rect">
             <a:avLst/>
@@ -6098,54 +5864,15 @@
                 <a:ea typeface="Microsoft YaHei" pitchFamily="34" charset="-122"/>
                 <a:cs typeface="Microsoft YaHei" pitchFamily="34" charset="-120"/>
               </a:rPr>
-              <a:t>问题二：皮层组织块中，MS 相对对照的改变</a:t>
+              <a:t>MS 皮层：未见同等幅度的变化</a:t>
             </a:r>
             <a:endParaRPr lang="en-US" sz="2500" dirty="0"/>
           </a:p>
         </p:txBody>
       </p:sp>
-      <p:sp>
-        <p:nvSpPr>
-          <p:cNvPr id="4" name="Text 2"/>
-          <p:cNvSpPr txBox="1"/>
-          <p:nvPr/>
-        </p:nvSpPr>
-        <p:spPr>
-          <a:xfrm>
-            <a:off x="548640" y="786384"/>
-            <a:ext cx="11064240" cy="329184"/>
-          </a:xfrm>
-          <a:prstGeom prst="rect">
-            <a:avLst/>
-          </a:prstGeom>
-          <a:noFill/>
-          <a:ln/>
-        </p:spPr>
-        <p:txBody>
-          <a:bodyPr wrap="square" lIns="0" tIns="0" rIns="0" bIns="0" rtlCol="0" anchor="ctr"/>
-          <a:lstStyle/>
-          <a:p>
-            <a:pPr indent="0" marL="0">
-              <a:buNone/>
-            </a:pPr>
-            <a:r>
-              <a:rPr lang="en-US" sz="1350" dirty="0">
-                <a:solidFill>
-                  <a:srgbClr val="6E6E6E"/>
-                </a:solidFill>
-                <a:latin typeface="Microsoft YaHei" pitchFamily="34" charset="0"/>
-                <a:ea typeface="Microsoft YaHei" pitchFamily="34" charset="-122"/>
-                <a:cs typeface="Microsoft YaHei" pitchFamily="34" charset="-120"/>
-              </a:rPr>
-              <a:t>Schirmer 队列。六类细胞的倍数变化区间全部跨 1，无一类达到白质中少突胶质的幅度。</a:t>
-            </a:r>
-            <a:endParaRPr lang="en-US" sz="1350" dirty="0"/>
-          </a:p>
-        </p:txBody>
-      </p:sp>
       <p:pic>
         <p:nvPicPr>
-          <p:cNvPr id="5" name="Image 0" descr="/home/user/aaa/results/mda5/figs/fig_q2_gm.png">    </p:cNvPr>
+          <p:cNvPr id="4" name="Image 0" descr="/home/user/aaa/results/mda5/figs/fig_q2_gm.png">    </p:cNvPr>
           <p:cNvPicPr>
             <a:picLocks noChangeAspect="1"/>
           </p:cNvPicPr>
@@ -6159,8 +5886,8 @@
         </p:blipFill>
         <p:spPr>
           <a:xfrm>
-            <a:off x="1639086" y="1188720"/>
-            <a:ext cx="8929069" cy="5285232"/>
+            <a:off x="1444400" y="960120"/>
+            <a:ext cx="9318439" cy="5513832"/>
           </a:xfrm>
           <a:prstGeom prst="rect">
             <a:avLst/>
@@ -6264,54 +5991,15 @@
                 <a:ea typeface="Microsoft YaHei" pitchFamily="34" charset="-122"/>
                 <a:cs typeface="Microsoft YaHei" pitchFamily="34" charset="-120"/>
               </a:rPr>
-              <a:t>问题二：两个区室的改变是否相同</a:t>
+              <a:t>两个区域变化幅度之差</a:t>
             </a:r>
             <a:endParaRPr lang="en-US" sz="2500" dirty="0"/>
           </a:p>
         </p:txBody>
       </p:sp>
-      <p:sp>
-        <p:nvSpPr>
-          <p:cNvPr id="4" name="Text 2"/>
-          <p:cNvSpPr txBox="1"/>
-          <p:nvPr/>
-        </p:nvSpPr>
-        <p:spPr>
-          <a:xfrm>
-            <a:off x="548640" y="786384"/>
-            <a:ext cx="11064240" cy="329184"/>
-          </a:xfrm>
-          <a:prstGeom prst="rect">
-            <a:avLst/>
-          </a:prstGeom>
-          <a:noFill/>
-          <a:ln/>
-        </p:spPr>
-        <p:txBody>
-          <a:bodyPr wrap="square" lIns="0" tIns="0" rIns="0" bIns="0" rtlCol="0" anchor="ctr"/>
-          <a:lstStyle/>
-          <a:p>
-            <a:pPr indent="0" marL="0">
-              <a:buNone/>
-            </a:pPr>
-            <a:r>
-              <a:rPr lang="en-US" sz="1350" dirty="0">
-                <a:solidFill>
-                  <a:srgbClr val="6E6E6E"/>
-                </a:solidFill>
-                <a:latin typeface="Microsoft YaHei" pitchFamily="34" charset="0"/>
-                <a:ea typeface="Microsoft YaHei" pitchFamily="34" charset="-122"/>
-                <a:cs typeface="Microsoft YaHei" pitchFamily="34" charset="-120"/>
-              </a:rPr>
-              <a:t>画的是自助 95% 区间，不是显著性星号。六类中只有两类两侧都可估计，其余因供体不足或对照中位为零而不可判定。</a:t>
-            </a:r>
-            <a:endParaRPr lang="en-US" sz="1350" dirty="0"/>
-          </a:p>
-        </p:txBody>
-      </p:sp>
       <p:pic>
         <p:nvPicPr>
-          <p:cNvPr id="5" name="Image 0" descr="/home/user/aaa/results/mda5/figs/fig_q2_interaction.png">    </p:cNvPr>
+          <p:cNvPr id="4" name="Image 0" descr="/home/user/aaa/results/mda5/figs/fig_q2_interaction.png">    </p:cNvPr>
           <p:cNvPicPr>
             <a:picLocks noChangeAspect="1"/>
           </p:cNvPicPr>
@@ -6325,8 +6013,8 @@
         </p:blipFill>
         <p:spPr>
           <a:xfrm>
-            <a:off x="411480" y="1246742"/>
-            <a:ext cx="11384280" cy="5169187"/>
+            <a:off x="411480" y="1213819"/>
+            <a:ext cx="11384280" cy="5006434"/>
           </a:xfrm>
           <a:prstGeom prst="rect">
             <a:avLst/>
@@ -6430,54 +6118,15 @@
                 <a:ea typeface="Microsoft YaHei" pitchFamily="34" charset="-122"/>
                 <a:cs typeface="Microsoft YaHei" pitchFamily="34" charset="-120"/>
               </a:rPr>
-              <a:t>为什么皮层那一侧只能说到这里</a:t>
+              <a:t>皮层标本含皮层下白质，MS 取材更深</a:t>
             </a:r>
             <a:endParaRPr lang="en-US" sz="2500" dirty="0"/>
           </a:p>
         </p:txBody>
       </p:sp>
-      <p:sp>
-        <p:nvSpPr>
-          <p:cNvPr id="4" name="Text 2"/>
-          <p:cNvSpPr txBox="1"/>
-          <p:nvPr/>
-        </p:nvSpPr>
-        <p:spPr>
-          <a:xfrm>
-            <a:off x="548640" y="786384"/>
-            <a:ext cx="11064240" cy="329184"/>
-          </a:xfrm>
-          <a:prstGeom prst="rect">
-            <a:avLst/>
-          </a:prstGeom>
-          <a:noFill/>
-          <a:ln/>
-        </p:spPr>
-        <p:txBody>
-          <a:bodyPr wrap="square" lIns="0" tIns="0" rIns="0" bIns="0" rtlCol="0" anchor="ctr"/>
-          <a:lstStyle/>
-          <a:p>
-            <a:pPr indent="0" marL="0">
-              <a:buNone/>
-            </a:pPr>
-            <a:r>
-              <a:rPr lang="en-US" sz="1350" dirty="0">
-                <a:solidFill>
-                  <a:srgbClr val="6E6E6E"/>
-                </a:solidFill>
-                <a:latin typeface="Microsoft YaHei" pitchFamily="34" charset="0"/>
-                <a:ea typeface="Microsoft YaHei" pitchFamily="34" charset="-122"/>
-                <a:cs typeface="Microsoft YaHei" pitchFamily="34" charset="-120"/>
-              </a:rPr>
-              <a:t>Schirmer 的组织块按原文方法跨越整个皮层并带有其下的皮层下白质。MS 块取得更深，白质成分显著多于对照块，故该侧的疾病对比与解剖深度混杂。</a:t>
-            </a:r>
-            <a:endParaRPr lang="en-US" sz="1350" dirty="0"/>
-          </a:p>
-        </p:txBody>
-      </p:sp>
       <p:pic>
         <p:nvPicPr>
-          <p:cNvPr id="5" name="Image 0" descr="/home/user/aaa/results/mda5/figs/fig_confound.png">    </p:cNvPr>
+          <p:cNvPr id="4" name="Image 0" descr="/home/user/aaa/results/mda5/figs/fig_confound.png">    </p:cNvPr>
           <p:cNvPicPr>
             <a:picLocks noChangeAspect="1"/>
           </p:cNvPicPr>
@@ -6491,8 +6140,8 @@
         </p:blipFill>
         <p:spPr>
           <a:xfrm>
-            <a:off x="1064298" y="1316736"/>
-            <a:ext cx="10078645" cy="5157216"/>
+            <a:off x="715834" y="960120"/>
+            <a:ext cx="10775572" cy="5513832"/>
           </a:xfrm>
           <a:prstGeom prst="rect">
             <a:avLst/>

--- a/results/mda5/MDA5_IFIH1_人脑与MS.pptx
+++ b/results/mda5/MDA5_IFIH1_人脑与MS.pptx
@@ -2044,8 +2044,8 @@
         </p:blipFill>
         <p:spPr>
           <a:xfrm>
-            <a:off x="411480" y="1067218"/>
-            <a:ext cx="11384280" cy="5299636"/>
+            <a:off x="411480" y="1067989"/>
+            <a:ext cx="11384280" cy="5298094"/>
           </a:xfrm>
           <a:prstGeom prst="rect">
             <a:avLst/>
@@ -5378,8 +5378,8 @@
         </p:blipFill>
         <p:spPr>
           <a:xfrm>
-            <a:off x="411480" y="1429127"/>
-            <a:ext cx="11384280" cy="4575817"/>
+            <a:off x="411480" y="1560792"/>
+            <a:ext cx="11384280" cy="4312488"/>
           </a:xfrm>
           <a:prstGeom prst="rect">
             <a:avLst/>

--- a/results/mda5/MDA5_IFIH1_人脑与MS.pptx
+++ b/results/mda5/MDA5_IFIH1_人脑与MS.pptx
@@ -14,12 +14,9 @@
     <p:sldId id="262" r:id="rId8"/>
     <p:sldId id="263" r:id="rId9"/>
     <p:sldId id="264" r:id="rId10"/>
-    <p:sldId id="265" r:id="rId11"/>
-    <p:sldId id="266" r:id="rId12"/>
-    <p:sldId id="267" r:id="rId13"/>
   </p:sldIdLst>
   <p:notesMasterIdLst>
-    <p:notesMasterId r:id="rId14"/>
+    <p:notesMasterId r:id="rId11"/>
   </p:notesMasterIdLst>
   <p:sldSz cx="12192000" cy="6858000"/>
   <p:notesSz cx="6858000" cy="12192000"/>
@@ -537,270 +534,6 @@
             <a:fld id="{F7021451-1387-4CA6-816F-3879F97B5CBC}" type="slidenum">
               <a:rPr lang="en-US"/>
               <a:t>1</a:t>
-            </a:fld>
-            <a:endParaRPr lang="en-US"/>
-          </a:p>
-        </p:txBody>
-      </p:sp>
-    </p:spTree>
-    <p:extLst>
-      <p:ext uri="{BB962C8B-B14F-4D97-AF65-F5344CB8AC3E}">
-        <p14:creationId xmlns:p14="http://schemas.microsoft.com/office/powerpoint/2010/main" val="1024086991"/>
-      </p:ext>
-    </p:extLst>
-  </p:cSld>
-  <p:clrMapOvr>
-    <a:masterClrMapping/>
-  </p:clrMapOvr>
-</p:notes>
-</file>
-
-<file path=ppt/notesSlides/notesSlide10.xml><?xml version="1.0" encoding="utf-8"?>
-<p:notes xmlns:a="http://schemas.openxmlformats.org/drawingml/2006/main" xmlns:r="http://schemas.openxmlformats.org/officeDocument/2006/relationships" xmlns:p="http://schemas.openxmlformats.org/presentationml/2006/main">
-  <p:cSld>
-    <p:spTree>
-      <p:nvGrpSpPr>
-        <p:cNvPr id="1" name=""/>
-        <p:cNvGrpSpPr/>
-        <p:nvPr/>
-      </p:nvGrpSpPr>
-      <p:grpSpPr>
-        <a:xfrm>
-          <a:off x="0" y="0"/>
-          <a:ext cx="0" cy="0"/>
-          <a:chOff x="0" y="0"/>
-          <a:chExt cx="0" cy="0"/>
-        </a:xfrm>
-      </p:grpSpPr>
-      <p:sp>
-        <p:nvSpPr>
-          <p:cNvPr id="2" name="Slide Image Placeholder 1"/>
-          <p:cNvSpPr>
-            <a:spLocks noGrp="1" noRot="1" noChangeAspect="1"/>
-          </p:cNvSpPr>
-          <p:nvPr>
-            <p:ph type="sldImg"/>
-          </p:nvPr>
-        </p:nvSpPr>
-        <p:spPr/>
-      </p:sp>
-      <p:sp>
-        <p:nvSpPr>
-          <p:cNvPr id="3" name="Notes Placeholder 2"/>
-          <p:cNvSpPr>
-            <a:spLocks noGrp="1"/>
-          </p:cNvSpPr>
-          <p:nvPr>
-            <p:ph type="body" idx="1"/>
-          </p:nvPr>
-        </p:nvSpPr>
-        <p:spPr/>
-        <p:txBody>
-          <a:bodyPr/>
-          <a:lstStyle/>
-          <a:p>
-            <a:r>
-              <a:rPr lang="en-US" dirty="0"/>
-              <a:t/>
-            </a:r>
-            <a:endParaRPr lang="en-US" dirty="0"/>
-          </a:p>
-        </p:txBody>
-      </p:sp>
-      <p:sp>
-        <p:nvSpPr>
-          <p:cNvPr id="4" name="Slide Number Placeholder 3"/>
-          <p:cNvSpPr>
-            <a:spLocks noGrp="1"/>
-          </p:cNvSpPr>
-          <p:nvPr>
-            <p:ph type="sldNum" sz="quarter" idx="10"/>
-          </p:nvPr>
-        </p:nvSpPr>
-        <p:spPr/>
-        <p:txBody>
-          <a:bodyPr/>
-          <a:lstStyle/>
-          <a:p>
-            <a:fld id="{F7021451-1387-4CA6-816F-3879F97B5CBC}" type="slidenum">
-              <a:rPr lang="en-US"/>
-              <a:t>10</a:t>
-            </a:fld>
-            <a:endParaRPr lang="en-US"/>
-          </a:p>
-        </p:txBody>
-      </p:sp>
-    </p:spTree>
-    <p:extLst>
-      <p:ext uri="{BB962C8B-B14F-4D97-AF65-F5344CB8AC3E}">
-        <p14:creationId xmlns:p14="http://schemas.microsoft.com/office/powerpoint/2010/main" val="1024086991"/>
-      </p:ext>
-    </p:extLst>
-  </p:cSld>
-  <p:clrMapOvr>
-    <a:masterClrMapping/>
-  </p:clrMapOvr>
-</p:notes>
-</file>
-
-<file path=ppt/notesSlides/notesSlide11.xml><?xml version="1.0" encoding="utf-8"?>
-<p:notes xmlns:a="http://schemas.openxmlformats.org/drawingml/2006/main" xmlns:r="http://schemas.openxmlformats.org/officeDocument/2006/relationships" xmlns:p="http://schemas.openxmlformats.org/presentationml/2006/main">
-  <p:cSld>
-    <p:spTree>
-      <p:nvGrpSpPr>
-        <p:cNvPr id="1" name=""/>
-        <p:cNvGrpSpPr/>
-        <p:nvPr/>
-      </p:nvGrpSpPr>
-      <p:grpSpPr>
-        <a:xfrm>
-          <a:off x="0" y="0"/>
-          <a:ext cx="0" cy="0"/>
-          <a:chOff x="0" y="0"/>
-          <a:chExt cx="0" cy="0"/>
-        </a:xfrm>
-      </p:grpSpPr>
-      <p:sp>
-        <p:nvSpPr>
-          <p:cNvPr id="2" name="Slide Image Placeholder 1"/>
-          <p:cNvSpPr>
-            <a:spLocks noGrp="1" noRot="1" noChangeAspect="1"/>
-          </p:cNvSpPr>
-          <p:nvPr>
-            <p:ph type="sldImg"/>
-          </p:nvPr>
-        </p:nvSpPr>
-        <p:spPr/>
-      </p:sp>
-      <p:sp>
-        <p:nvSpPr>
-          <p:cNvPr id="3" name="Notes Placeholder 2"/>
-          <p:cNvSpPr>
-            <a:spLocks noGrp="1"/>
-          </p:cNvSpPr>
-          <p:nvPr>
-            <p:ph type="body" idx="1"/>
-          </p:nvPr>
-        </p:nvSpPr>
-        <p:spPr/>
-        <p:txBody>
-          <a:bodyPr/>
-          <a:lstStyle/>
-          <a:p>
-            <a:r>
-              <a:rPr lang="en-US" dirty="0"/>
-              <a:t/>
-            </a:r>
-            <a:endParaRPr lang="en-US" dirty="0"/>
-          </a:p>
-        </p:txBody>
-      </p:sp>
-      <p:sp>
-        <p:nvSpPr>
-          <p:cNvPr id="4" name="Slide Number Placeholder 3"/>
-          <p:cNvSpPr>
-            <a:spLocks noGrp="1"/>
-          </p:cNvSpPr>
-          <p:nvPr>
-            <p:ph type="sldNum" sz="quarter" idx="10"/>
-          </p:nvPr>
-        </p:nvSpPr>
-        <p:spPr/>
-        <p:txBody>
-          <a:bodyPr/>
-          <a:lstStyle/>
-          <a:p>
-            <a:fld id="{F7021451-1387-4CA6-816F-3879F97B5CBC}" type="slidenum">
-              <a:rPr lang="en-US"/>
-              <a:t>11</a:t>
-            </a:fld>
-            <a:endParaRPr lang="en-US"/>
-          </a:p>
-        </p:txBody>
-      </p:sp>
-    </p:spTree>
-    <p:extLst>
-      <p:ext uri="{BB962C8B-B14F-4D97-AF65-F5344CB8AC3E}">
-        <p14:creationId xmlns:p14="http://schemas.microsoft.com/office/powerpoint/2010/main" val="1024086991"/>
-      </p:ext>
-    </p:extLst>
-  </p:cSld>
-  <p:clrMapOvr>
-    <a:masterClrMapping/>
-  </p:clrMapOvr>
-</p:notes>
-</file>
-
-<file path=ppt/notesSlides/notesSlide12.xml><?xml version="1.0" encoding="utf-8"?>
-<p:notes xmlns:a="http://schemas.openxmlformats.org/drawingml/2006/main" xmlns:r="http://schemas.openxmlformats.org/officeDocument/2006/relationships" xmlns:p="http://schemas.openxmlformats.org/presentationml/2006/main">
-  <p:cSld>
-    <p:spTree>
-      <p:nvGrpSpPr>
-        <p:cNvPr id="1" name=""/>
-        <p:cNvGrpSpPr/>
-        <p:nvPr/>
-      </p:nvGrpSpPr>
-      <p:grpSpPr>
-        <a:xfrm>
-          <a:off x="0" y="0"/>
-          <a:ext cx="0" cy="0"/>
-          <a:chOff x="0" y="0"/>
-          <a:chExt cx="0" cy="0"/>
-        </a:xfrm>
-      </p:grpSpPr>
-      <p:sp>
-        <p:nvSpPr>
-          <p:cNvPr id="2" name="Slide Image Placeholder 1"/>
-          <p:cNvSpPr>
-            <a:spLocks noGrp="1" noRot="1" noChangeAspect="1"/>
-          </p:cNvSpPr>
-          <p:nvPr>
-            <p:ph type="sldImg"/>
-          </p:nvPr>
-        </p:nvSpPr>
-        <p:spPr/>
-      </p:sp>
-      <p:sp>
-        <p:nvSpPr>
-          <p:cNvPr id="3" name="Notes Placeholder 2"/>
-          <p:cNvSpPr>
-            <a:spLocks noGrp="1"/>
-          </p:cNvSpPr>
-          <p:nvPr>
-            <p:ph type="body" idx="1"/>
-          </p:nvPr>
-        </p:nvSpPr>
-        <p:spPr/>
-        <p:txBody>
-          <a:bodyPr/>
-          <a:lstStyle/>
-          <a:p>
-            <a:r>
-              <a:rPr lang="en-US" dirty="0"/>
-              <a:t/>
-            </a:r>
-            <a:endParaRPr lang="en-US" dirty="0"/>
-          </a:p>
-        </p:txBody>
-      </p:sp>
-      <p:sp>
-        <p:nvSpPr>
-          <p:cNvPr id="4" name="Slide Number Placeholder 3"/>
-          <p:cNvSpPr>
-            <a:spLocks noGrp="1"/>
-          </p:cNvSpPr>
-          <p:nvPr>
-            <p:ph type="sldNum" sz="quarter" idx="10"/>
-          </p:nvPr>
-        </p:nvSpPr>
-        <p:spPr/>
-        <p:txBody>
-          <a:bodyPr/>
-          <a:lstStyle/>
-          <a:p>
-            <a:fld id="{F7021451-1387-4CA6-816F-3879F97B5CBC}" type="slidenum">
-              <a:rPr lang="en-US"/>
-              <a:t>12</a:t>
             </a:fld>
             <a:endParaRPr lang="en-US"/>
           </a:p>
@@ -1933,1704 +1666,6 @@
 </p:sld>
 </file>
 
-<file path=ppt/slides/slide10.xml><?xml version="1.0" encoding="utf-8"?>
-<p:sld xmlns:a="http://schemas.openxmlformats.org/drawingml/2006/main" xmlns:r="http://schemas.openxmlformats.org/officeDocument/2006/relationships" xmlns:p="http://schemas.openxmlformats.org/presentationml/2006/main">
-  <p:cSld name="Slide 10">
-    <p:spTree>
-      <p:nvGrpSpPr>
-        <p:cNvPr id="1" name=""/>
-        <p:cNvGrpSpPr/>
-        <p:nvPr/>
-      </p:nvGrpSpPr>
-      <p:grpSpPr>
-        <a:xfrm>
-          <a:off x="0" y="0"/>
-          <a:ext cx="0" cy="0"/>
-          <a:chOff x="0" y="0"/>
-          <a:chExt cx="0" cy="0"/>
-        </a:xfrm>
-      </p:grpSpPr>
-      <p:sp>
-        <p:nvSpPr>
-          <p:cNvPr id="2" name="Text 0"/>
-          <p:cNvSpPr txBox="1"/>
-          <p:nvPr/>
-        </p:nvSpPr>
-        <p:spPr>
-          <a:xfrm>
-            <a:off x="11430000" y="6355080"/>
-            <a:ext cx="457200" cy="274320"/>
-          </a:xfrm>
-          <a:prstGeom prst="rect">
-            <a:avLst/>
-          </a:prstGeom>
-          <a:noFill/>
-          <a:ln/>
-        </p:spPr>
-        <p:txBody>
-          <a:bodyPr wrap="square" lIns="0" tIns="0" rIns="0" bIns="0" rtlCol="0" anchor="ctr"/>
-          <a:lstStyle/>
-          <a:p>
-            <a:pPr algn="r" indent="0" marL="0">
-              <a:buNone/>
-            </a:pPr>
-            <a:r>
-              <a:rPr lang="en-US" sz="1000" dirty="0">
-                <a:solidFill>
-                  <a:srgbClr val="6E6E6E"/>
-                </a:solidFill>
-                <a:latin typeface="Calibri" pitchFamily="34" charset="0"/>
-                <a:ea typeface="Calibri" pitchFamily="34" charset="-122"/>
-                <a:cs typeface="Calibri" pitchFamily="34" charset="-120"/>
-              </a:rPr>
-              <a:t>9</a:t>
-            </a:r>
-            <a:endParaRPr lang="en-US" sz="1000" dirty="0"/>
-          </a:p>
-        </p:txBody>
-      </p:sp>
-      <p:sp>
-        <p:nvSpPr>
-          <p:cNvPr id="3" name="Text 1"/>
-          <p:cNvSpPr txBox="1"/>
-          <p:nvPr/>
-        </p:nvSpPr>
-        <p:spPr>
-          <a:xfrm>
-            <a:off x="548640" y="274320"/>
-            <a:ext cx="11064240" cy="475488"/>
-          </a:xfrm>
-          <a:prstGeom prst="rect">
-            <a:avLst/>
-          </a:prstGeom>
-          <a:noFill/>
-          <a:ln/>
-        </p:spPr>
-        <p:txBody>
-          <a:bodyPr wrap="square" lIns="0" tIns="0" rIns="0" bIns="0" rtlCol="0" anchor="ctr"/>
-          <a:lstStyle/>
-          <a:p>
-            <a:pPr indent="0" marL="0">
-              <a:buNone/>
-            </a:pPr>
-            <a:r>
-              <a:rPr lang="en-US" sz="2500" b="1" dirty="0">
-                <a:solidFill>
-                  <a:srgbClr val="000000"/>
-                </a:solidFill>
-                <a:latin typeface="Microsoft YaHei" pitchFamily="34" charset="0"/>
-                <a:ea typeface="Microsoft YaHei" pitchFamily="34" charset="-122"/>
-                <a:cs typeface="Microsoft YaHei" pitchFamily="34" charset="-120"/>
-              </a:rPr>
-              <a:t>白质单核图谱与脱髓鞘病灶分期</a:t>
-            </a:r>
-            <a:endParaRPr lang="en-US" sz="2500" dirty="0"/>
-          </a:p>
-        </p:txBody>
-      </p:sp>
-      <p:pic>
-        <p:nvPicPr>
-          <p:cNvPr id="4" name="Image 0" descr="/home/user/aaa/results/mda5/figs/fig_umap_wm.png">    </p:cNvPr>
-          <p:cNvPicPr>
-            <a:picLocks noChangeAspect="1"/>
-          </p:cNvPicPr>
-          <p:nvPr/>
-        </p:nvPicPr>
-        <p:blipFill>
-          <a:blip r:embed="rId1"/>
-          <a:stretch>
-            <a:fillRect/>
-          </a:stretch>
-        </p:blipFill>
-        <p:spPr>
-          <a:xfrm>
-            <a:off x="411480" y="1067989"/>
-            <a:ext cx="11384280" cy="5298094"/>
-          </a:xfrm>
-          <a:prstGeom prst="rect">
-            <a:avLst/>
-          </a:prstGeom>
-        </p:spPr>
-      </p:pic>
-    </p:spTree>
-  </p:cSld>
-  <p:clrMapOvr>
-    <a:masterClrMapping/>
-  </p:clrMapOvr>
-</p:sld>
-</file>
-
-<file path=ppt/slides/slide11.xml><?xml version="1.0" encoding="utf-8"?>
-<p:sld xmlns:a="http://schemas.openxmlformats.org/drawingml/2006/main" xmlns:r="http://schemas.openxmlformats.org/officeDocument/2006/relationships" xmlns:p="http://schemas.openxmlformats.org/presentationml/2006/main">
-  <p:cSld name="Slide 11">
-    <p:spTree>
-      <p:nvGrpSpPr>
-        <p:cNvPr id="1" name=""/>
-        <p:cNvGrpSpPr/>
-        <p:nvPr/>
-      </p:nvGrpSpPr>
-      <p:grpSpPr>
-        <a:xfrm>
-          <a:off x="0" y="0"/>
-          <a:ext cx="0" cy="0"/>
-          <a:chOff x="0" y="0"/>
-          <a:chExt cx="0" cy="0"/>
-        </a:xfrm>
-      </p:grpSpPr>
-      <p:sp>
-        <p:nvSpPr>
-          <p:cNvPr id="2" name="Text 0"/>
-          <p:cNvSpPr txBox="1"/>
-          <p:nvPr/>
-        </p:nvSpPr>
-        <p:spPr>
-          <a:xfrm>
-            <a:off x="11430000" y="6355080"/>
-            <a:ext cx="457200" cy="274320"/>
-          </a:xfrm>
-          <a:prstGeom prst="rect">
-            <a:avLst/>
-          </a:prstGeom>
-          <a:noFill/>
-          <a:ln/>
-        </p:spPr>
-        <p:txBody>
-          <a:bodyPr wrap="square" lIns="0" tIns="0" rIns="0" bIns="0" rtlCol="0" anchor="ctr"/>
-          <a:lstStyle/>
-          <a:p>
-            <a:pPr algn="r" indent="0" marL="0">
-              <a:buNone/>
-            </a:pPr>
-            <a:r>
-              <a:rPr lang="en-US" sz="1000" dirty="0">
-                <a:solidFill>
-                  <a:srgbClr val="6E6E6E"/>
-                </a:solidFill>
-                <a:latin typeface="Calibri" pitchFamily="34" charset="0"/>
-                <a:ea typeface="Calibri" pitchFamily="34" charset="-122"/>
-                <a:cs typeface="Calibri" pitchFamily="34" charset="-120"/>
-              </a:rPr>
-              <a:t>10</a:t>
-            </a:r>
-            <a:endParaRPr lang="en-US" sz="1000" dirty="0"/>
-          </a:p>
-        </p:txBody>
-      </p:sp>
-      <p:sp>
-        <p:nvSpPr>
-          <p:cNvPr id="3" name="Text 1"/>
-          <p:cNvSpPr txBox="1"/>
-          <p:nvPr/>
-        </p:nvSpPr>
-        <p:spPr>
-          <a:xfrm>
-            <a:off x="548640" y="274320"/>
-            <a:ext cx="11064240" cy="475488"/>
-          </a:xfrm>
-          <a:prstGeom prst="rect">
-            <a:avLst/>
-          </a:prstGeom>
-          <a:noFill/>
-          <a:ln/>
-        </p:spPr>
-        <p:txBody>
-          <a:bodyPr wrap="square" lIns="0" tIns="0" rIns="0" bIns="0" rtlCol="0" anchor="ctr"/>
-          <a:lstStyle/>
-          <a:p>
-            <a:pPr indent="0" marL="0">
-              <a:buNone/>
-            </a:pPr>
-            <a:r>
-              <a:rPr lang="en-US" sz="2500" b="1" dirty="0">
-                <a:solidFill>
-                  <a:srgbClr val="000000"/>
-                </a:solidFill>
-                <a:latin typeface="Microsoft YaHei" pitchFamily="34" charset="0"/>
-                <a:ea typeface="Microsoft YaHei" pitchFamily="34" charset="-122"/>
-                <a:cs typeface="Microsoft YaHei" pitchFamily="34" charset="-120"/>
-              </a:rPr>
-              <a:t>与已发表结果的关系</a:t>
-            </a:r>
-            <a:endParaRPr lang="en-US" sz="2500" dirty="0"/>
-          </a:p>
-        </p:txBody>
-      </p:sp>
-      <p:graphicFrame>
-        <p:nvGraphicFramePr>
-          <p:cNvPr id="12" name="Table 0"/>
-          <p:cNvGraphicFramePr>
-            <a:graphicFrameLocks noGrp="1"/>
-          </p:cNvGraphicFramePr>
-          <p:nvPr>
-            <p:extLst>
-              <p:ext uri="{D42A27DB-BD31-4B8C-83A1-F6EECF244321}">
-                <p14:modId xmlns:p14="http://schemas.microsoft.com/office/powerpoint/2010/main" val="1579011935"/>
-              </p:ext>
-            </p:extLst>
-          </p:nvPr>
-        </p:nvGraphicFramePr>
-        <p:xfrm>
-          <a:off x="548640" y="960120"/>
-          <a:ext cx="11064240" cy="914400"/>
-        </p:xfrm>
-        <a:graphic>
-          <a:graphicData uri="http://schemas.openxmlformats.org/drawingml/2006/table">
-            <a:tbl>
-              <a:tblPr/>
-              <a:tblGrid>
-                <a:gridCol w="3108960"/>
-                <a:gridCol w="7955280"/>
-              </a:tblGrid>
-              <a:tr h="658368">
-                <a:tc>
-                  <a:txBody>
-                    <a:bodyPr/>
-                    <a:lstStyle/>
-                    <a:p>
-                      <a:pPr indent="0" marL="0">
-                        <a:buNone/>
-                      </a:pPr>
-                      <a:r>
-                        <a:rPr lang="en-US" sz="1250" b="1" dirty="0">
-                          <a:solidFill>
-                            <a:srgbClr val="000000"/>
-                          </a:solidFill>
-                          <a:latin typeface="Microsoft YaHei" pitchFamily="34" charset="0"/>
-                          <a:ea typeface="Microsoft YaHei" pitchFamily="34" charset="-122"/>
-                          <a:cs typeface="Microsoft YaHei" pitchFamily="34" charset="-120"/>
-                        </a:rPr>
-                        <a:t>本研究结果</a:t>
-                      </a:r>
-                      <a:endParaRPr lang="en-US" sz="1250" dirty="0">
-                        <a:latin typeface="Microsoft YaHei" charset="0"/>
-                        <a:ea typeface="Microsoft YaHei" charset="0"/>
-                        <a:cs typeface="Microsoft YaHei" charset="0"/>
-                      </a:endParaRPr>
-                    </a:p>
-                  </a:txBody>
-                  <a:tcPr marL="91440" marR="91440" marT="45720" marB="45720" anchor="ctr">
-                    <a:lnL w="0" cap="flat" cmpd="sng" algn="ctr">
-                      <a:noFill/>
-                    </a:lnL>
-                    <a:lnR w="0" cap="flat" cmpd="sng" algn="ctr">
-                      <a:noFill/>
-                    </a:lnR>
-                    <a:lnT w="0" cap="flat" cmpd="sng" algn="ctr">
-                      <a:noFill/>
-                    </a:lnT>
-                    <a:lnB w="12700" cap="flat" cmpd="sng" algn="ctr">
-                      <a:solidFill>
-                        <a:srgbClr val="C8CCD2"/>
-                      </a:solidFill>
-                      <a:prstDash val="solid"/>
-                      <a:round/>
-                      <a:headEnd type="none" w="med" len="med"/>
-                      <a:tailEnd type="none" w="med" len="med"/>
-                    </a:lnB>
-                  </a:tcPr>
-                </a:tc>
-                <a:tc>
-                  <a:txBody>
-                    <a:bodyPr/>
-                    <a:lstStyle/>
-                    <a:p>
-                      <a:pPr indent="0" marL="0">
-                        <a:buNone/>
-                      </a:pPr>
-                      <a:r>
-                        <a:rPr lang="en-US" sz="1250" b="1" dirty="0">
-                          <a:solidFill>
-                            <a:srgbClr val="000000"/>
-                          </a:solidFill>
-                          <a:latin typeface="Microsoft YaHei" pitchFamily="34" charset="0"/>
-                          <a:ea typeface="Microsoft YaHei" pitchFamily="34" charset="-122"/>
-                          <a:cs typeface="Microsoft YaHei" pitchFamily="34" charset="-120"/>
-                        </a:rPr>
-                        <a:t>文献状态</a:t>
-                      </a:r>
-                      <a:endParaRPr lang="en-US" sz="1250" dirty="0">
-                        <a:latin typeface="Microsoft YaHei" charset="0"/>
-                        <a:ea typeface="Microsoft YaHei" charset="0"/>
-                        <a:cs typeface="Microsoft YaHei" charset="0"/>
-                      </a:endParaRPr>
-                    </a:p>
-                  </a:txBody>
-                  <a:tcPr marL="91440" marR="91440" marT="45720" marB="45720" anchor="ctr">
-                    <a:lnL w="0" cap="flat" cmpd="sng" algn="ctr">
-                      <a:noFill/>
-                    </a:lnL>
-                    <a:lnR w="0" cap="flat" cmpd="sng" algn="ctr">
-                      <a:noFill/>
-                    </a:lnR>
-                    <a:lnT w="0" cap="flat" cmpd="sng" algn="ctr">
-                      <a:noFill/>
-                    </a:lnT>
-                    <a:lnB w="12700" cap="flat" cmpd="sng" algn="ctr">
-                      <a:solidFill>
-                        <a:srgbClr val="C8CCD2"/>
-                      </a:solidFill>
-                      <a:prstDash val="solid"/>
-                      <a:round/>
-                      <a:headEnd type="none" w="med" len="med"/>
-                      <a:tailEnd type="none" w="med" len="med"/>
-                    </a:lnB>
-                  </a:tcPr>
-                </a:tc>
-              </a:tr>
-              <a:tr h="658368">
-                <a:tc>
-                  <a:txBody>
-                    <a:bodyPr/>
-                    <a:lstStyle/>
-                    <a:p>
-                      <a:pPr indent="0" marL="0">
-                        <a:buNone/>
-                      </a:pPr>
-                      <a:r>
-                        <a:rPr lang="en-US" sz="1250" dirty="0">
-                          <a:solidFill>
-                            <a:srgbClr val="000000"/>
-                          </a:solidFill>
-                          <a:latin typeface="Microsoft YaHei" pitchFamily="34" charset="0"/>
-                          <a:ea typeface="Microsoft YaHei" pitchFamily="34" charset="-122"/>
-                          <a:cs typeface="Microsoft YaHei" pitchFamily="34" charset="-120"/>
-                        </a:rPr>
-                        <a:t>少突胶质在白质病灶上调</a:t>
-                      </a:r>
-                      <a:endParaRPr lang="en-US" sz="1250" dirty="0">
-                        <a:latin typeface="Microsoft YaHei" charset="0"/>
-                        <a:ea typeface="Microsoft YaHei" charset="0"/>
-                        <a:cs typeface="Microsoft YaHei" charset="0"/>
-                      </a:endParaRPr>
-                    </a:p>
-                  </a:txBody>
-                  <a:tcPr marL="91440" marR="91440" marT="45720" marB="45720" anchor="ctr">
-                    <a:lnL w="0" cap="flat" cmpd="sng" algn="ctr">
-                      <a:noFill/>
-                    </a:lnL>
-                    <a:lnR w="0" cap="flat" cmpd="sng" algn="ctr">
-                      <a:noFill/>
-                    </a:lnR>
-                    <a:lnT w="0" cap="flat" cmpd="sng" algn="ctr">
-                      <a:noFill/>
-                    </a:lnT>
-                    <a:lnB w="12700" cap="flat" cmpd="sng" algn="ctr">
-                      <a:solidFill>
-                        <a:srgbClr val="C8CCD2"/>
-                      </a:solidFill>
-                      <a:prstDash val="solid"/>
-                      <a:round/>
-                      <a:headEnd type="none" w="med" len="med"/>
-                      <a:tailEnd type="none" w="med" len="med"/>
-                    </a:lnB>
-                  </a:tcPr>
-                </a:tc>
-                <a:tc>
-                  <a:txBody>
-                    <a:bodyPr/>
-                    <a:lstStyle/>
-                    <a:p>
-                      <a:pPr indent="0" marL="0">
-                        <a:buNone/>
-                      </a:pPr>
-                      <a:r>
-                        <a:rPr lang="en-US" sz="1250" dirty="0">
-                          <a:solidFill>
-                            <a:srgbClr val="000000"/>
-                          </a:solidFill>
-                          <a:latin typeface="Microsoft YaHei" pitchFamily="34" charset="0"/>
-                          <a:ea typeface="Microsoft YaHei" pitchFamily="34" charset="-122"/>
-                          <a:cs typeface="Microsoft YaHei" pitchFamily="34" charset="-120"/>
-                        </a:rPr>
-                        <a:t>Lerma-Martin 2024 补充表 6 已报道：CA log2FC +0.905（padj 0.012），CI +1.095（padj 0.005）</a:t>
-                      </a:r>
-                      <a:endParaRPr lang="en-US" sz="1250" dirty="0">
-                        <a:latin typeface="Microsoft YaHei" charset="0"/>
-                        <a:ea typeface="Microsoft YaHei" charset="0"/>
-                        <a:cs typeface="Microsoft YaHei" charset="0"/>
-                      </a:endParaRPr>
-                    </a:p>
-                  </a:txBody>
-                  <a:tcPr marL="91440" marR="91440" marT="45720" marB="45720" anchor="ctr">
-                    <a:lnL w="0" cap="flat" cmpd="sng" algn="ctr">
-                      <a:noFill/>
-                    </a:lnL>
-                    <a:lnR w="0" cap="flat" cmpd="sng" algn="ctr">
-                      <a:noFill/>
-                    </a:lnR>
-                    <a:lnT w="0" cap="flat" cmpd="sng" algn="ctr">
-                      <a:noFill/>
-                    </a:lnT>
-                    <a:lnB w="12700" cap="flat" cmpd="sng" algn="ctr">
-                      <a:solidFill>
-                        <a:srgbClr val="C8CCD2"/>
-                      </a:solidFill>
-                      <a:prstDash val="solid"/>
-                      <a:round/>
-                      <a:headEnd type="none" w="med" len="med"/>
-                      <a:tailEnd type="none" w="med" len="med"/>
-                    </a:lnB>
-                  </a:tcPr>
-                </a:tc>
-              </a:tr>
-              <a:tr h="658368">
-                <a:tc>
-                  <a:txBody>
-                    <a:bodyPr/>
-                    <a:lstStyle/>
-                    <a:p>
-                      <a:pPr indent="0" marL="0">
-                        <a:buNone/>
-                      </a:pPr>
-                      <a:r>
-                        <a:rPr lang="en-US" sz="1250" dirty="0">
-                          <a:solidFill>
-                            <a:srgbClr val="000000"/>
-                          </a:solidFill>
-                          <a:latin typeface="Microsoft YaHei" pitchFamily="34" charset="0"/>
-                          <a:ea typeface="Microsoft YaHei" pitchFamily="34" charset="-122"/>
-                          <a:cs typeface="Microsoft YaHei" pitchFamily="34" charset="-120"/>
-                        </a:rPr>
-                        <a:t>同一队列髓系未达显著</a:t>
-                      </a:r>
-                      <a:endParaRPr lang="en-US" sz="1250" dirty="0">
-                        <a:latin typeface="Microsoft YaHei" charset="0"/>
-                        <a:ea typeface="Microsoft YaHei" charset="0"/>
-                        <a:cs typeface="Microsoft YaHei" charset="0"/>
-                      </a:endParaRPr>
-                    </a:p>
-                  </a:txBody>
-                  <a:tcPr marL="91440" marR="91440" marT="45720" marB="45720" anchor="ctr">
-                    <a:lnL w="0" cap="flat" cmpd="sng" algn="ctr">
-                      <a:noFill/>
-                    </a:lnL>
-                    <a:lnR w="0" cap="flat" cmpd="sng" algn="ctr">
-                      <a:noFill/>
-                    </a:lnR>
-                    <a:lnT w="0" cap="flat" cmpd="sng" algn="ctr">
-                      <a:noFill/>
-                    </a:lnT>
-                    <a:lnB w="12700" cap="flat" cmpd="sng" algn="ctr">
-                      <a:solidFill>
-                        <a:srgbClr val="C8CCD2"/>
-                      </a:solidFill>
-                      <a:prstDash val="solid"/>
-                      <a:round/>
-                      <a:headEnd type="none" w="med" len="med"/>
-                      <a:tailEnd type="none" w="med" len="med"/>
-                    </a:lnB>
-                  </a:tcPr>
-                </a:tc>
-                <a:tc>
-                  <a:txBody>
-                    <a:bodyPr/>
-                    <a:lstStyle/>
-                    <a:p>
-                      <a:pPr indent="0" marL="0">
-                        <a:buNone/>
-                      </a:pPr>
-                      <a:r>
-                        <a:rPr lang="en-US" sz="1250" dirty="0">
-                          <a:solidFill>
-                            <a:srgbClr val="000000"/>
-                          </a:solidFill>
-                          <a:latin typeface="Microsoft YaHei" pitchFamily="34" charset="0"/>
-                          <a:ea typeface="Microsoft YaHei" pitchFamily="34" charset="-122"/>
-                          <a:cs typeface="Microsoft YaHei" pitchFamily="34" charset="-120"/>
-                        </a:rPr>
-                        <a:t>与原作者一致，其补充表髓系 padj = 0.116</a:t>
-                      </a:r>
-                      <a:endParaRPr lang="en-US" sz="1250" dirty="0">
-                        <a:latin typeface="Microsoft YaHei" charset="0"/>
-                        <a:ea typeface="Microsoft YaHei" charset="0"/>
-                        <a:cs typeface="Microsoft YaHei" charset="0"/>
-                      </a:endParaRPr>
-                    </a:p>
-                  </a:txBody>
-                  <a:tcPr marL="91440" marR="91440" marT="45720" marB="45720" anchor="ctr">
-                    <a:lnL w="0" cap="flat" cmpd="sng" algn="ctr">
-                      <a:noFill/>
-                    </a:lnL>
-                    <a:lnR w="0" cap="flat" cmpd="sng" algn="ctr">
-                      <a:noFill/>
-                    </a:lnR>
-                    <a:lnT w="0" cap="flat" cmpd="sng" algn="ctr">
-                      <a:noFill/>
-                    </a:lnT>
-                    <a:lnB w="12700" cap="flat" cmpd="sng" algn="ctr">
-                      <a:solidFill>
-                        <a:srgbClr val="C8CCD2"/>
-                      </a:solidFill>
-                      <a:prstDash val="solid"/>
-                      <a:round/>
-                      <a:headEnd type="none" w="med" len="med"/>
-                      <a:tailEnd type="none" w="med" len="med"/>
-                    </a:lnB>
-                  </a:tcPr>
-                </a:tc>
-              </a:tr>
-              <a:tr h="658368">
-                <a:tc>
-                  <a:txBody>
-                    <a:bodyPr/>
-                    <a:lstStyle/>
-                    <a:p>
-                      <a:pPr indent="0" marL="0">
-                        <a:buNone/>
-                      </a:pPr>
-                      <a:r>
-                        <a:rPr lang="en-US" sz="1250" dirty="0">
-                          <a:solidFill>
-                            <a:srgbClr val="000000"/>
-                          </a:solidFill>
-                          <a:latin typeface="Microsoft YaHei" pitchFamily="34" charset="0"/>
-                          <a:ea typeface="Microsoft YaHei" pitchFamily="34" charset="-122"/>
-                          <a:cs typeface="Microsoft YaHei" pitchFamily="34" charset="-120"/>
-                        </a:rPr>
-                        <a:t>bulk 白质病灶同向上调</a:t>
-                      </a:r>
-                      <a:endParaRPr lang="en-US" sz="1250" dirty="0">
-                        <a:latin typeface="Microsoft YaHei" charset="0"/>
-                        <a:ea typeface="Microsoft YaHei" charset="0"/>
-                        <a:cs typeface="Microsoft YaHei" charset="0"/>
-                      </a:endParaRPr>
-                    </a:p>
-                  </a:txBody>
-                  <a:tcPr marL="91440" marR="91440" marT="45720" marB="45720" anchor="ctr">
-                    <a:lnL w="0" cap="flat" cmpd="sng" algn="ctr">
-                      <a:noFill/>
-                    </a:lnL>
-                    <a:lnR w="0" cap="flat" cmpd="sng" algn="ctr">
-                      <a:noFill/>
-                    </a:lnR>
-                    <a:lnT w="0" cap="flat" cmpd="sng" algn="ctr">
-                      <a:noFill/>
-                    </a:lnT>
-                    <a:lnB w="12700" cap="flat" cmpd="sng" algn="ctr">
-                      <a:solidFill>
-                        <a:srgbClr val="C8CCD2"/>
-                      </a:solidFill>
-                      <a:prstDash val="solid"/>
-                      <a:round/>
-                      <a:headEnd type="none" w="med" len="med"/>
-                      <a:tailEnd type="none" w="med" len="med"/>
-                    </a:lnB>
-                  </a:tcPr>
-                </a:tc>
-                <a:tc>
-                  <a:txBody>
-                    <a:bodyPr/>
-                    <a:lstStyle/>
-                    <a:p>
-                      <a:pPr indent="0" marL="0">
-                        <a:buNone/>
-                      </a:pPr>
-                      <a:r>
-                        <a:rPr lang="en-US" sz="1250" dirty="0">
-                          <a:solidFill>
-                            <a:srgbClr val="000000"/>
-                          </a:solidFill>
-                          <a:latin typeface="Microsoft YaHei" pitchFamily="34" charset="0"/>
-                          <a:ea typeface="Microsoft YaHei" pitchFamily="34" charset="-122"/>
-                          <a:cs typeface="Microsoft YaHei" pitchFamily="34" charset="-120"/>
-                        </a:rPr>
-                        <a:t>GSE138614 活动病灶 FDR 0.021、慢性活动 FDR 0.007；GSE283092 泡沫样活动病灶 1.79 倍</a:t>
-                      </a:r>
-                      <a:endParaRPr lang="en-US" sz="1250" dirty="0">
-                        <a:latin typeface="Microsoft YaHei" charset="0"/>
-                        <a:ea typeface="Microsoft YaHei" charset="0"/>
-                        <a:cs typeface="Microsoft YaHei" charset="0"/>
-                      </a:endParaRPr>
-                    </a:p>
-                  </a:txBody>
-                  <a:tcPr marL="91440" marR="91440" marT="45720" marB="45720" anchor="ctr">
-                    <a:lnL w="0" cap="flat" cmpd="sng" algn="ctr">
-                      <a:noFill/>
-                    </a:lnL>
-                    <a:lnR w="0" cap="flat" cmpd="sng" algn="ctr">
-                      <a:noFill/>
-                    </a:lnR>
-                    <a:lnT w="0" cap="flat" cmpd="sng" algn="ctr">
-                      <a:noFill/>
-                    </a:lnT>
-                    <a:lnB w="12700" cap="flat" cmpd="sng" algn="ctr">
-                      <a:solidFill>
-                        <a:srgbClr val="C8CCD2"/>
-                      </a:solidFill>
-                      <a:prstDash val="solid"/>
-                      <a:round/>
-                      <a:headEnd type="none" w="med" len="med"/>
-                      <a:tailEnd type="none" w="med" len="med"/>
-                    </a:lnB>
-                  </a:tcPr>
-                </a:tc>
-              </a:tr>
-              <a:tr h="658368">
-                <a:tc>
-                  <a:txBody>
-                    <a:bodyPr/>
-                    <a:lstStyle/>
-                    <a:p>
-                      <a:pPr indent="0" marL="0">
-                        <a:buNone/>
-                      </a:pPr>
-                      <a:r>
-                        <a:rPr lang="en-US" sz="1250" dirty="0">
-                          <a:solidFill>
-                            <a:srgbClr val="000000"/>
-                          </a:solidFill>
-                          <a:latin typeface="Microsoft YaHei" pitchFamily="34" charset="0"/>
-                          <a:ea typeface="Microsoft YaHei" pitchFamily="34" charset="-122"/>
-                          <a:cs typeface="Microsoft YaHei" pitchFamily="34" charset="-120"/>
-                        </a:rPr>
-                        <a:t>皮层组织块的 IFIH1</a:t>
-                      </a:r>
-                      <a:endParaRPr lang="en-US" sz="1250" dirty="0">
-                        <a:latin typeface="Microsoft YaHei" charset="0"/>
-                        <a:ea typeface="Microsoft YaHei" charset="0"/>
-                        <a:cs typeface="Microsoft YaHei" charset="0"/>
-                      </a:endParaRPr>
-                    </a:p>
-                  </a:txBody>
-                  <a:tcPr marL="91440" marR="91440" marT="45720" marB="45720" anchor="ctr">
-                    <a:lnL w="0" cap="flat" cmpd="sng" algn="ctr">
-                      <a:noFill/>
-                    </a:lnL>
-                    <a:lnR w="0" cap="flat" cmpd="sng" algn="ctr">
-                      <a:noFill/>
-                    </a:lnR>
-                    <a:lnT w="0" cap="flat" cmpd="sng" algn="ctr">
-                      <a:noFill/>
-                    </a:lnT>
-                    <a:lnB w="12700" cap="flat" cmpd="sng" algn="ctr">
-                      <a:solidFill>
-                        <a:srgbClr val="C8CCD2"/>
-                      </a:solidFill>
-                      <a:prstDash val="solid"/>
-                      <a:round/>
-                      <a:headEnd type="none" w="med" len="med"/>
-                      <a:tailEnd type="none" w="med" len="med"/>
-                    </a:lnB>
-                  </a:tcPr>
-                </a:tc>
-                <a:tc>
-                  <a:txBody>
-                    <a:bodyPr/>
-                    <a:lstStyle/>
-                    <a:p>
-                      <a:pPr indent="0" marL="0">
-                        <a:buNone/>
-                      </a:pPr>
-                      <a:r>
-                        <a:rPr lang="en-US" sz="1250" dirty="0">
-                          <a:solidFill>
-                            <a:srgbClr val="000000"/>
-                          </a:solidFill>
-                          <a:latin typeface="Microsoft YaHei" pitchFamily="34" charset="0"/>
-                          <a:ea typeface="Microsoft YaHei" pitchFamily="34" charset="-122"/>
-                          <a:cs typeface="Microsoft YaHei" pitchFamily="34" charset="-120"/>
-                        </a:rPr>
-                        <a:t>Schirmer 2019 补充表中 IFIH1 低于其检出阈值，本次为原创测量</a:t>
-                      </a:r>
-                      <a:endParaRPr lang="en-US" sz="1250" dirty="0">
-                        <a:latin typeface="Microsoft YaHei" charset="0"/>
-                        <a:ea typeface="Microsoft YaHei" charset="0"/>
-                        <a:cs typeface="Microsoft YaHei" charset="0"/>
-                      </a:endParaRPr>
-                    </a:p>
-                  </a:txBody>
-                  <a:tcPr marL="91440" marR="91440" marT="45720" marB="45720" anchor="ctr">
-                    <a:lnL w="0" cap="flat" cmpd="sng" algn="ctr">
-                      <a:noFill/>
-                    </a:lnL>
-                    <a:lnR w="0" cap="flat" cmpd="sng" algn="ctr">
-                      <a:noFill/>
-                    </a:lnR>
-                    <a:lnT w="0" cap="flat" cmpd="sng" algn="ctr">
-                      <a:noFill/>
-                    </a:lnT>
-                    <a:lnB w="12700" cap="flat" cmpd="sng" algn="ctr">
-                      <a:solidFill>
-                        <a:srgbClr val="C8CCD2"/>
-                      </a:solidFill>
-                      <a:prstDash val="solid"/>
-                      <a:round/>
-                      <a:headEnd type="none" w="med" len="med"/>
-                      <a:tailEnd type="none" w="med" len="med"/>
-                    </a:lnB>
-                  </a:tcPr>
-                </a:tc>
-              </a:tr>
-              <a:tr h="658368">
-                <a:tc>
-                  <a:txBody>
-                    <a:bodyPr/>
-                    <a:lstStyle/>
-                    <a:p>
-                      <a:pPr indent="0" marL="0">
-                        <a:buNone/>
-                      </a:pPr>
-                      <a:r>
-                        <a:rPr lang="en-US" sz="1250" dirty="0">
-                          <a:solidFill>
-                            <a:srgbClr val="000000"/>
-                          </a:solidFill>
-                          <a:latin typeface="Microsoft YaHei" pitchFamily="34" charset="0"/>
-                          <a:ea typeface="Microsoft YaHei" pitchFamily="34" charset="-122"/>
-                          <a:cs typeface="Microsoft YaHei" pitchFamily="34" charset="-120"/>
-                        </a:rPr>
-                        <a:t>GSE180759 中的 IFIH1</a:t>
-                      </a:r>
-                      <a:endParaRPr lang="en-US" sz="1250" dirty="0">
-                        <a:latin typeface="Microsoft YaHei" charset="0"/>
-                        <a:ea typeface="Microsoft YaHei" charset="0"/>
-                        <a:cs typeface="Microsoft YaHei" charset="0"/>
-                      </a:endParaRPr>
-                    </a:p>
-                  </a:txBody>
-                  <a:tcPr marL="91440" marR="91440" marT="45720" marB="45720" anchor="ctr">
-                    <a:lnL w="0" cap="flat" cmpd="sng" algn="ctr">
-                      <a:noFill/>
-                    </a:lnL>
-                    <a:lnR w="0" cap="flat" cmpd="sng" algn="ctr">
-                      <a:noFill/>
-                    </a:lnR>
-                    <a:lnT w="0" cap="flat" cmpd="sng" algn="ctr">
-                      <a:noFill/>
-                    </a:lnT>
-                    <a:lnB w="12700" cap="flat" cmpd="sng" algn="ctr">
-                      <a:solidFill>
-                        <a:srgbClr val="C8CCD2"/>
-                      </a:solidFill>
-                      <a:prstDash val="solid"/>
-                      <a:round/>
-                      <a:headEnd type="none" w="med" len="med"/>
-                      <a:tailEnd type="none" w="med" len="med"/>
-                    </a:lnB>
-                  </a:tcPr>
-                </a:tc>
-                <a:tc>
-                  <a:txBody>
-                    <a:bodyPr/>
-                    <a:lstStyle/>
-                    <a:p>
-                      <a:pPr indent="0" marL="0">
-                        <a:buNone/>
-                      </a:pPr>
-                      <a:r>
-                        <a:rPr lang="en-US" sz="1250" dirty="0">
-                          <a:solidFill>
-                            <a:srgbClr val="000000"/>
-                          </a:solidFill>
-                          <a:latin typeface="Microsoft YaHei" pitchFamily="34" charset="0"/>
-                          <a:ea typeface="Microsoft YaHei" pitchFamily="34" charset="-122"/>
-                          <a:cs typeface="Microsoft YaHei" pitchFamily="34" charset="-120"/>
-                        </a:rPr>
-                        <a:t>原文 13 个补充表中未出现</a:t>
-                      </a:r>
-                      <a:endParaRPr lang="en-US" sz="1250" dirty="0">
-                        <a:latin typeface="Microsoft YaHei" charset="0"/>
-                        <a:ea typeface="Microsoft YaHei" charset="0"/>
-                        <a:cs typeface="Microsoft YaHei" charset="0"/>
-                      </a:endParaRPr>
-                    </a:p>
-                  </a:txBody>
-                  <a:tcPr marL="91440" marR="91440" marT="45720" marB="45720" anchor="ctr">
-                    <a:lnL w="0" cap="flat" cmpd="sng" algn="ctr">
-                      <a:noFill/>
-                    </a:lnL>
-                    <a:lnR w="0" cap="flat" cmpd="sng" algn="ctr">
-                      <a:noFill/>
-                    </a:lnR>
-                    <a:lnT w="0" cap="flat" cmpd="sng" algn="ctr">
-                      <a:noFill/>
-                    </a:lnT>
-                    <a:lnB w="12700" cap="flat" cmpd="sng" algn="ctr">
-                      <a:solidFill>
-                        <a:srgbClr val="C8CCD2"/>
-                      </a:solidFill>
-                      <a:prstDash val="solid"/>
-                      <a:round/>
-                      <a:headEnd type="none" w="med" len="med"/>
-                      <a:tailEnd type="none" w="med" len="med"/>
-                    </a:lnB>
-                  </a:tcPr>
-                </a:tc>
-              </a:tr>
-              <a:tr h="658368">
-                <a:tc>
-                  <a:txBody>
-                    <a:bodyPr/>
-                    <a:lstStyle/>
-                    <a:p>
-                      <a:pPr indent="0" marL="0">
-                        <a:buNone/>
-                      </a:pPr>
-                      <a:r>
-                        <a:rPr lang="en-US" sz="1250" dirty="0">
-                          <a:solidFill>
-                            <a:srgbClr val="000000"/>
-                          </a:solidFill>
-                          <a:latin typeface="Microsoft YaHei" pitchFamily="34" charset="0"/>
-                          <a:ea typeface="Microsoft YaHei" pitchFamily="34" charset="-122"/>
-                          <a:cs typeface="Microsoft YaHei" pitchFamily="34" charset="-120"/>
-                        </a:rPr>
-                        <a:t>两个区室改变的直接对比</a:t>
-                      </a:r>
-                      <a:endParaRPr lang="en-US" sz="1250" dirty="0">
-                        <a:latin typeface="Microsoft YaHei" charset="0"/>
-                        <a:ea typeface="Microsoft YaHei" charset="0"/>
-                        <a:cs typeface="Microsoft YaHei" charset="0"/>
-                      </a:endParaRPr>
-                    </a:p>
-                  </a:txBody>
-                  <a:tcPr marL="91440" marR="91440" marT="45720" marB="45720" anchor="ctr">
-                    <a:lnL w="0" cap="flat" cmpd="sng" algn="ctr">
-                      <a:noFill/>
-                    </a:lnL>
-                    <a:lnR w="0" cap="flat" cmpd="sng" algn="ctr">
-                      <a:noFill/>
-                    </a:lnR>
-                    <a:lnT w="0" cap="flat" cmpd="sng" algn="ctr">
-                      <a:noFill/>
-                    </a:lnT>
-                    <a:lnB w="12700" cap="flat" cmpd="sng" algn="ctr">
-                      <a:solidFill>
-                        <a:srgbClr val="C8CCD2"/>
-                      </a:solidFill>
-                      <a:prstDash val="solid"/>
-                      <a:round/>
-                      <a:headEnd type="none" w="med" len="med"/>
-                      <a:tailEnd type="none" w="med" len="med"/>
-                    </a:lnB>
-                  </a:tcPr>
-                </a:tc>
-                <a:tc>
-                  <a:txBody>
-                    <a:bodyPr/>
-                    <a:lstStyle/>
-                    <a:p>
-                      <a:pPr indent="0" marL="0">
-                        <a:buNone/>
-                      </a:pPr>
-                      <a:r>
-                        <a:rPr lang="en-US" sz="1250" dirty="0">
-                          <a:solidFill>
-                            <a:srgbClr val="000000"/>
-                          </a:solidFill>
-                          <a:latin typeface="Microsoft YaHei" pitchFamily="34" charset="0"/>
-                          <a:ea typeface="Microsoft YaHei" pitchFamily="34" charset="-122"/>
-                          <a:cs typeface="Microsoft YaHei" pitchFamily="34" charset="-120"/>
-                        </a:rPr>
-                        <a:t>未见任何已发表研究做过</a:t>
-                      </a:r>
-                      <a:endParaRPr lang="en-US" sz="1250" dirty="0">
-                        <a:latin typeface="Microsoft YaHei" charset="0"/>
-                        <a:ea typeface="Microsoft YaHei" charset="0"/>
-                        <a:cs typeface="Microsoft YaHei" charset="0"/>
-                      </a:endParaRPr>
-                    </a:p>
-                  </a:txBody>
-                  <a:tcPr marL="91440" marR="91440" marT="45720" marB="45720" anchor="ctr">
-                    <a:lnL w="0" cap="flat" cmpd="sng" algn="ctr">
-                      <a:noFill/>
-                    </a:lnL>
-                    <a:lnR w="0" cap="flat" cmpd="sng" algn="ctr">
-                      <a:noFill/>
-                    </a:lnR>
-                    <a:lnT w="0" cap="flat" cmpd="sng" algn="ctr">
-                      <a:noFill/>
-                    </a:lnT>
-                    <a:lnB w="12700" cap="flat" cmpd="sng" algn="ctr">
-                      <a:solidFill>
-                        <a:srgbClr val="C8CCD2"/>
-                      </a:solidFill>
-                      <a:prstDash val="solid"/>
-                      <a:round/>
-                      <a:headEnd type="none" w="med" len="med"/>
-                      <a:tailEnd type="none" w="med" len="med"/>
-                    </a:lnB>
-                  </a:tcPr>
-                </a:tc>
-              </a:tr>
-              <a:tr h="658368">
-                <a:tc>
-                  <a:txBody>
-                    <a:bodyPr/>
-                    <a:lstStyle/>
-                    <a:p>
-                      <a:pPr indent="0" marL="0">
-                        <a:buNone/>
-                      </a:pPr>
-                      <a:r>
-                        <a:rPr lang="en-US" sz="1250" dirty="0">
-                          <a:solidFill>
-                            <a:srgbClr val="000000"/>
-                          </a:solidFill>
-                          <a:latin typeface="Microsoft YaHei" pitchFamily="34" charset="0"/>
-                          <a:ea typeface="Microsoft YaHei" pitchFamily="34" charset="-122"/>
-                          <a:cs typeface="Microsoft YaHei" pitchFamily="34" charset="-120"/>
-                        </a:rPr>
-                        <a:t>MDA5 蛋白</a:t>
-                      </a:r>
-                      <a:endParaRPr lang="en-US" sz="1250" dirty="0">
-                        <a:latin typeface="Microsoft YaHei" charset="0"/>
-                        <a:ea typeface="Microsoft YaHei" charset="0"/>
-                        <a:cs typeface="Microsoft YaHei" charset="0"/>
-                      </a:endParaRPr>
-                    </a:p>
-                  </a:txBody>
-                  <a:tcPr marL="91440" marR="91440" marT="45720" marB="45720" anchor="ctr">
-                    <a:lnL w="0" cap="flat" cmpd="sng" algn="ctr">
-                      <a:noFill/>
-                    </a:lnL>
-                    <a:lnR w="0" cap="flat" cmpd="sng" algn="ctr">
-                      <a:noFill/>
-                    </a:lnR>
-                    <a:lnT w="0" cap="flat" cmpd="sng" algn="ctr">
-                      <a:noFill/>
-                    </a:lnT>
-                    <a:lnB w="12700" cap="flat" cmpd="sng" algn="ctr">
-                      <a:solidFill>
-                        <a:srgbClr val="C8CCD2"/>
-                      </a:solidFill>
-                      <a:prstDash val="solid"/>
-                      <a:round/>
-                      <a:headEnd type="none" w="med" len="med"/>
-                      <a:tailEnd type="none" w="med" len="med"/>
-                    </a:lnB>
-                  </a:tcPr>
-                </a:tc>
-                <a:tc>
-                  <a:txBody>
-                    <a:bodyPr/>
-                    <a:lstStyle/>
-                    <a:p>
-                      <a:pPr indent="0" marL="0">
-                        <a:buNone/>
-                      </a:pPr>
-                      <a:r>
-                        <a:rPr lang="en-US" sz="1250" dirty="0">
-                          <a:solidFill>
-                            <a:srgbClr val="000000"/>
-                          </a:solidFill>
-                          <a:latin typeface="Microsoft YaHei" pitchFamily="34" charset="0"/>
-                          <a:ea typeface="Microsoft YaHei" pitchFamily="34" charset="-122"/>
-                          <a:cs typeface="Microsoft YaHei" pitchFamily="34" charset="-120"/>
-                        </a:rPr>
-                        <a:t>人类 MS 脑组织的免疫组化与蛋白质组测量为零篇</a:t>
-                      </a:r>
-                      <a:endParaRPr lang="en-US" sz="1250" dirty="0">
-                        <a:latin typeface="Microsoft YaHei" charset="0"/>
-                        <a:ea typeface="Microsoft YaHei" charset="0"/>
-                        <a:cs typeface="Microsoft YaHei" charset="0"/>
-                      </a:endParaRPr>
-                    </a:p>
-                  </a:txBody>
-                  <a:tcPr marL="91440" marR="91440" marT="45720" marB="45720" anchor="ctr">
-                    <a:lnL w="0" cap="flat" cmpd="sng" algn="ctr">
-                      <a:noFill/>
-                    </a:lnL>
-                    <a:lnR w="0" cap="flat" cmpd="sng" algn="ctr">
-                      <a:noFill/>
-                    </a:lnR>
-                    <a:lnT w="0" cap="flat" cmpd="sng" algn="ctr">
-                      <a:noFill/>
-                    </a:lnT>
-                    <a:lnB w="12700" cap="flat" cmpd="sng" algn="ctr">
-                      <a:solidFill>
-                        <a:srgbClr val="C8CCD2"/>
-                      </a:solidFill>
-                      <a:prstDash val="solid"/>
-                      <a:round/>
-                      <a:headEnd type="none" w="med" len="med"/>
-                      <a:tailEnd type="none" w="med" len="med"/>
-                    </a:lnB>
-                  </a:tcPr>
-                </a:tc>
-              </a:tr>
-            </a:tbl>
-          </a:graphicData>
-        </a:graphic>
-      </p:graphicFrame>
-    </p:spTree>
-  </p:cSld>
-  <p:clrMapOvr>
-    <a:masterClrMapping/>
-  </p:clrMapOvr>
-</p:sld>
-</file>
-
-<file path=ppt/slides/slide12.xml><?xml version="1.0" encoding="utf-8"?>
-<p:sld xmlns:a="http://schemas.openxmlformats.org/drawingml/2006/main" xmlns:r="http://schemas.openxmlformats.org/officeDocument/2006/relationships" xmlns:p="http://schemas.openxmlformats.org/presentationml/2006/main">
-  <p:cSld name="Slide 12">
-    <p:spTree>
-      <p:nvGrpSpPr>
-        <p:cNvPr id="1" name=""/>
-        <p:cNvGrpSpPr/>
-        <p:nvPr/>
-      </p:nvGrpSpPr>
-      <p:grpSpPr>
-        <a:xfrm>
-          <a:off x="0" y="0"/>
-          <a:ext cx="0" cy="0"/>
-          <a:chOff x="0" y="0"/>
-          <a:chExt cx="0" cy="0"/>
-        </a:xfrm>
-      </p:grpSpPr>
-      <p:sp>
-        <p:nvSpPr>
-          <p:cNvPr id="2" name="Text 0"/>
-          <p:cNvSpPr txBox="1"/>
-          <p:nvPr/>
-        </p:nvSpPr>
-        <p:spPr>
-          <a:xfrm>
-            <a:off x="11430000" y="6355080"/>
-            <a:ext cx="457200" cy="274320"/>
-          </a:xfrm>
-          <a:prstGeom prst="rect">
-            <a:avLst/>
-          </a:prstGeom>
-          <a:noFill/>
-          <a:ln/>
-        </p:spPr>
-        <p:txBody>
-          <a:bodyPr wrap="square" lIns="0" tIns="0" rIns="0" bIns="0" rtlCol="0" anchor="ctr"/>
-          <a:lstStyle/>
-          <a:p>
-            <a:pPr algn="r" indent="0" marL="0">
-              <a:buNone/>
-            </a:pPr>
-            <a:r>
-              <a:rPr lang="en-US" sz="1000" dirty="0">
-                <a:solidFill>
-                  <a:srgbClr val="6E6E6E"/>
-                </a:solidFill>
-                <a:latin typeface="Calibri" pitchFamily="34" charset="0"/>
-                <a:ea typeface="Calibri" pitchFamily="34" charset="-122"/>
-                <a:cs typeface="Calibri" pitchFamily="34" charset="-120"/>
-              </a:rPr>
-              <a:t>11</a:t>
-            </a:r>
-            <a:endParaRPr lang="en-US" sz="1000" dirty="0"/>
-          </a:p>
-        </p:txBody>
-      </p:sp>
-      <p:sp>
-        <p:nvSpPr>
-          <p:cNvPr id="3" name="Text 1"/>
-          <p:cNvSpPr txBox="1"/>
-          <p:nvPr/>
-        </p:nvSpPr>
-        <p:spPr>
-          <a:xfrm>
-            <a:off x="548640" y="274320"/>
-            <a:ext cx="11064240" cy="475488"/>
-          </a:xfrm>
-          <a:prstGeom prst="rect">
-            <a:avLst/>
-          </a:prstGeom>
-          <a:noFill/>
-          <a:ln/>
-        </p:spPr>
-        <p:txBody>
-          <a:bodyPr wrap="square" lIns="0" tIns="0" rIns="0" bIns="0" rtlCol="0" anchor="ctr"/>
-          <a:lstStyle/>
-          <a:p>
-            <a:pPr indent="0" marL="0">
-              <a:buNone/>
-            </a:pPr>
-            <a:r>
-              <a:rPr lang="en-US" sz="2500" b="1" dirty="0">
-                <a:solidFill>
-                  <a:srgbClr val="000000"/>
-                </a:solidFill>
-                <a:latin typeface="Microsoft YaHei" pitchFamily="34" charset="0"/>
-                <a:ea typeface="Microsoft YaHei" pitchFamily="34" charset="-122"/>
-                <a:cs typeface="Microsoft YaHei" pitchFamily="34" charset="-120"/>
-              </a:rPr>
-              <a:t>局限</a:t>
-            </a:r>
-            <a:endParaRPr lang="en-US" sz="2500" dirty="0"/>
-          </a:p>
-        </p:txBody>
-      </p:sp>
-      <p:sp>
-        <p:nvSpPr>
-          <p:cNvPr id="4" name="Text 2"/>
-          <p:cNvSpPr txBox="1"/>
-          <p:nvPr/>
-        </p:nvSpPr>
-        <p:spPr>
-          <a:xfrm>
-            <a:off x="548640" y="1005840"/>
-            <a:ext cx="3566160" cy="365760"/>
-          </a:xfrm>
-          <a:prstGeom prst="rect">
-            <a:avLst/>
-          </a:prstGeom>
-          <a:noFill/>
-          <a:ln/>
-        </p:spPr>
-        <p:txBody>
-          <a:bodyPr wrap="square" lIns="0" tIns="0" rIns="0" bIns="0" rtlCol="0" anchor="ctr"/>
-          <a:lstStyle/>
-          <a:p>
-            <a:pPr indent="0" marL="0">
-              <a:buNone/>
-            </a:pPr>
-            <a:r>
-              <a:rPr lang="en-US" sz="1350" b="1" dirty="0">
-                <a:solidFill>
-                  <a:srgbClr val="000000"/>
-                </a:solidFill>
-                <a:latin typeface="Microsoft YaHei" pitchFamily="34" charset="0"/>
-                <a:ea typeface="Microsoft YaHei" pitchFamily="34" charset="-122"/>
-                <a:cs typeface="Microsoft YaHei" pitchFamily="34" charset="-120"/>
-              </a:rPr>
-              <a:t>皮层标本含白质成分</a:t>
-            </a:r>
-            <a:endParaRPr lang="en-US" sz="1350" dirty="0"/>
-          </a:p>
-        </p:txBody>
-      </p:sp>
-      <p:sp>
-        <p:nvSpPr>
-          <p:cNvPr id="5" name="Text 3"/>
-          <p:cNvSpPr txBox="1"/>
-          <p:nvPr/>
-        </p:nvSpPr>
-        <p:spPr>
-          <a:xfrm>
-            <a:off x="4251960" y="1005840"/>
-            <a:ext cx="7406640" cy="566928"/>
-          </a:xfrm>
-          <a:prstGeom prst="rect">
-            <a:avLst/>
-          </a:prstGeom>
-          <a:noFill/>
-          <a:ln/>
-        </p:spPr>
-        <p:txBody>
-          <a:bodyPr wrap="square" lIns="0" tIns="0" rIns="0" bIns="0" rtlCol="0" anchor="ctr"/>
-          <a:lstStyle/>
-          <a:p>
-            <a:pPr indent="0" marL="0">
-              <a:lnSpc>
-                <a:spcPts val="1600"/>
-              </a:lnSpc>
-              <a:buNone/>
-            </a:pPr>
-            <a:r>
-              <a:rPr lang="en-US" sz="1200" dirty="0">
-                <a:solidFill>
-                  <a:srgbClr val="6E6E6E"/>
-                </a:solidFill>
-                <a:latin typeface="Microsoft YaHei" pitchFamily="34" charset="0"/>
-                <a:ea typeface="Microsoft YaHei" pitchFamily="34" charset="-122"/>
-                <a:cs typeface="Microsoft YaHei" pitchFamily="34" charset="-120"/>
-              </a:rPr>
-              <a:t>Schirmer 取材跨越皮层全层并带有其下的皮层下白质，MS 标本取材更深，疾病对比与取材部位混杂。</a:t>
-            </a:r>
-            <a:endParaRPr lang="en-US" sz="1200" dirty="0"/>
-          </a:p>
-        </p:txBody>
-      </p:sp>
-      <p:sp>
-        <p:nvSpPr>
-          <p:cNvPr id="6" name="Text 4"/>
-          <p:cNvSpPr txBox="1"/>
-          <p:nvPr/>
-        </p:nvSpPr>
-        <p:spPr>
-          <a:xfrm>
-            <a:off x="548640" y="1737360"/>
-            <a:ext cx="3566160" cy="365760"/>
-          </a:xfrm>
-          <a:prstGeom prst="rect">
-            <a:avLst/>
-          </a:prstGeom>
-          <a:noFill/>
-          <a:ln/>
-        </p:spPr>
-        <p:txBody>
-          <a:bodyPr wrap="square" lIns="0" tIns="0" rIns="0" bIns="0" rtlCol="0" anchor="ctr"/>
-          <a:lstStyle/>
-          <a:p>
-            <a:pPr indent="0" marL="0">
-              <a:buNone/>
-            </a:pPr>
-            <a:r>
-              <a:rPr lang="en-US" sz="1350" b="1" dirty="0">
-                <a:solidFill>
-                  <a:srgbClr val="000000"/>
-                </a:solidFill>
-                <a:latin typeface="Microsoft YaHei" pitchFamily="34" charset="0"/>
-                <a:ea typeface="Microsoft YaHei" pitchFamily="34" charset="-122"/>
-                <a:cs typeface="Microsoft YaHei" pitchFamily="34" charset="-120"/>
-              </a:rPr>
-              <a:t>区域交互仅两类可估计</a:t>
-            </a:r>
-            <a:endParaRPr lang="en-US" sz="1350" dirty="0"/>
-          </a:p>
-        </p:txBody>
-      </p:sp>
-      <p:sp>
-        <p:nvSpPr>
-          <p:cNvPr id="7" name="Text 5"/>
-          <p:cNvSpPr txBox="1"/>
-          <p:nvPr/>
-        </p:nvSpPr>
-        <p:spPr>
-          <a:xfrm>
-            <a:off x="4251960" y="1737360"/>
-            <a:ext cx="7406640" cy="566928"/>
-          </a:xfrm>
-          <a:prstGeom prst="rect">
-            <a:avLst/>
-          </a:prstGeom>
-          <a:noFill/>
-          <a:ln/>
-        </p:spPr>
-        <p:txBody>
-          <a:bodyPr wrap="square" lIns="0" tIns="0" rIns="0" bIns="0" rtlCol="0" anchor="ctr"/>
-          <a:lstStyle/>
-          <a:p>
-            <a:pPr indent="0" marL="0">
-              <a:lnSpc>
-                <a:spcPts val="1600"/>
-              </a:lnSpc>
-              <a:buNone/>
-            </a:pPr>
-            <a:r>
-              <a:rPr lang="en-US" sz="1200" dirty="0">
-                <a:solidFill>
-                  <a:srgbClr val="6E6E6E"/>
-                </a:solidFill>
-                <a:latin typeface="Microsoft YaHei" pitchFamily="34" charset="0"/>
-                <a:ea typeface="Microsoft YaHei" pitchFamily="34" charset="-122"/>
-                <a:cs typeface="Microsoft YaHei" pitchFamily="34" charset="-120"/>
-              </a:rPr>
-              <a:t>小胶质细胞、神经元、内皮细胞因一侧样本量不足，少突胶质前体细胞因对照组未检出。</a:t>
-            </a:r>
-            <a:endParaRPr lang="en-US" sz="1200" dirty="0"/>
-          </a:p>
-        </p:txBody>
-      </p:sp>
-      <p:sp>
-        <p:nvSpPr>
-          <p:cNvPr id="8" name="Text 6"/>
-          <p:cNvSpPr txBox="1"/>
-          <p:nvPr/>
-        </p:nvSpPr>
-        <p:spPr>
-          <a:xfrm>
-            <a:off x="548640" y="2468880"/>
-            <a:ext cx="3566160" cy="365760"/>
-          </a:xfrm>
-          <a:prstGeom prst="rect">
-            <a:avLst/>
-          </a:prstGeom>
-          <a:noFill/>
-          <a:ln/>
-        </p:spPr>
-        <p:txBody>
-          <a:bodyPr wrap="square" lIns="0" tIns="0" rIns="0" bIns="0" rtlCol="0" anchor="ctr"/>
-          <a:lstStyle/>
-          <a:p>
-            <a:pPr indent="0" marL="0">
-              <a:buNone/>
-            </a:pPr>
-            <a:r>
-              <a:rPr lang="en-US" sz="1350" b="1" dirty="0">
-                <a:solidFill>
-                  <a:srgbClr val="000000"/>
-                </a:solidFill>
-                <a:latin typeface="Microsoft YaHei" pitchFamily="34" charset="0"/>
-                <a:ea typeface="Microsoft YaHei" pitchFamily="34" charset="-122"/>
-                <a:cs typeface="Microsoft YaHei" pitchFamily="34" charset="-120"/>
-              </a:rPr>
-              <a:t>白质结论主要由一个队列支持</a:t>
-            </a:r>
-            <a:endParaRPr lang="en-US" sz="1350" dirty="0"/>
-          </a:p>
-        </p:txBody>
-      </p:sp>
-      <p:sp>
-        <p:nvSpPr>
-          <p:cNvPr id="9" name="Text 7"/>
-          <p:cNvSpPr txBox="1"/>
-          <p:nvPr/>
-        </p:nvSpPr>
-        <p:spPr>
-          <a:xfrm>
-            <a:off x="4251960" y="2468880"/>
-            <a:ext cx="7406640" cy="566928"/>
-          </a:xfrm>
-          <a:prstGeom prst="rect">
-            <a:avLst/>
-          </a:prstGeom>
-          <a:noFill/>
-          <a:ln/>
-        </p:spPr>
-        <p:txBody>
-          <a:bodyPr wrap="square" lIns="0" tIns="0" rIns="0" bIns="0" rtlCol="0" anchor="ctr"/>
-          <a:lstStyle/>
-          <a:p>
-            <a:pPr indent="0" marL="0">
-              <a:lnSpc>
-                <a:spcPts val="1600"/>
-              </a:lnSpc>
-              <a:buNone/>
-            </a:pPr>
-            <a:r>
-              <a:rPr lang="en-US" sz="1200" dirty="0">
-                <a:solidFill>
-                  <a:srgbClr val="6E6E6E"/>
-                </a:solidFill>
-                <a:latin typeface="Microsoft YaHei" pitchFamily="34" charset="0"/>
-                <a:ea typeface="Microsoft YaHei" pitchFamily="34" charset="-122"/>
-                <a:cs typeface="Microsoft YaHei" pitchFamily="34" charset="-120"/>
-              </a:rPr>
-              <a:t>GSE279180 十三例供体，3.5 倍，区间 [1.5, 4.9]；GSE180759 仅三例对照，1.5 倍，区间包含 1。</a:t>
-            </a:r>
-            <a:endParaRPr lang="en-US" sz="1200" dirty="0"/>
-          </a:p>
-        </p:txBody>
-      </p:sp>
-      <p:sp>
-        <p:nvSpPr>
-          <p:cNvPr id="10" name="Text 8"/>
-          <p:cNvSpPr txBox="1"/>
-          <p:nvPr/>
-        </p:nvSpPr>
-        <p:spPr>
-          <a:xfrm>
-            <a:off x="548640" y="3200400"/>
-            <a:ext cx="3566160" cy="365760"/>
-          </a:xfrm>
-          <a:prstGeom prst="rect">
-            <a:avLst/>
-          </a:prstGeom>
-          <a:noFill/>
-          <a:ln/>
-        </p:spPr>
-        <p:txBody>
-          <a:bodyPr wrap="square" lIns="0" tIns="0" rIns="0" bIns="0" rtlCol="0" anchor="ctr"/>
-          <a:lstStyle/>
-          <a:p>
-            <a:pPr indent="0" marL="0">
-              <a:buNone/>
-            </a:pPr>
-            <a:r>
-              <a:rPr lang="en-US" sz="1350" b="1" dirty="0">
-                <a:solidFill>
-                  <a:srgbClr val="000000"/>
-                </a:solidFill>
-                <a:latin typeface="Microsoft YaHei" pitchFamily="34" charset="0"/>
-                <a:ea typeface="Microsoft YaHei" pitchFamily="34" charset="-122"/>
-                <a:cs typeface="Microsoft YaHei" pitchFamily="34" charset="-120"/>
-              </a:rPr>
-              <a:t>测序深度残余影响</a:t>
-            </a:r>
-            <a:endParaRPr lang="en-US" sz="1350" dirty="0"/>
-          </a:p>
-        </p:txBody>
-      </p:sp>
-      <p:sp>
-        <p:nvSpPr>
-          <p:cNvPr id="11" name="Text 9"/>
-          <p:cNvSpPr txBox="1"/>
-          <p:nvPr/>
-        </p:nvSpPr>
-        <p:spPr>
-          <a:xfrm>
-            <a:off x="4251960" y="3200400"/>
-            <a:ext cx="7406640" cy="566928"/>
-          </a:xfrm>
-          <a:prstGeom prst="rect">
-            <a:avLst/>
-          </a:prstGeom>
-          <a:noFill/>
-          <a:ln/>
-        </p:spPr>
-        <p:txBody>
-          <a:bodyPr wrap="square" lIns="0" tIns="0" rIns="0" bIns="0" rtlCol="0" anchor="ctr"/>
-          <a:lstStyle/>
-          <a:p>
-            <a:pPr indent="0" marL="0">
-              <a:lnSpc>
-                <a:spcPts val="1600"/>
-              </a:lnSpc>
-              <a:buNone/>
-            </a:pPr>
-            <a:r>
-              <a:rPr lang="en-US" sz="1200" dirty="0">
-                <a:solidFill>
-                  <a:srgbClr val="6E6E6E"/>
-                </a:solidFill>
-                <a:latin typeface="Microsoft YaHei" pitchFamily="34" charset="0"/>
-                <a:ea typeface="Microsoft YaHei" pitchFamily="34" charset="-122"/>
-                <a:cs typeface="Microsoft YaHei" pitchFamily="34" charset="-120"/>
-              </a:rPr>
-              <a:t>已限定在每核 1500 至 5000 UMI 的共同深度区间内比较，区间内仍存在残余差异。</a:t>
-            </a:r>
-            <a:endParaRPr lang="en-US" sz="1200" dirty="0"/>
-          </a:p>
-        </p:txBody>
-      </p:sp>
-      <p:sp>
-        <p:nvSpPr>
-          <p:cNvPr id="12" name="Text 10"/>
-          <p:cNvSpPr txBox="1"/>
-          <p:nvPr/>
-        </p:nvSpPr>
-        <p:spPr>
-          <a:xfrm>
-            <a:off x="548640" y="3931920"/>
-            <a:ext cx="3566160" cy="365760"/>
-          </a:xfrm>
-          <a:prstGeom prst="rect">
-            <a:avLst/>
-          </a:prstGeom>
-          <a:noFill/>
-          <a:ln/>
-        </p:spPr>
-        <p:txBody>
-          <a:bodyPr wrap="square" lIns="0" tIns="0" rIns="0" bIns="0" rtlCol="0" anchor="ctr"/>
-          <a:lstStyle/>
-          <a:p>
-            <a:pPr indent="0" marL="0">
-              <a:buNone/>
-            </a:pPr>
-            <a:r>
-              <a:rPr lang="en-US" sz="1350" b="1" dirty="0">
-                <a:solidFill>
-                  <a:srgbClr val="000000"/>
-                </a:solidFill>
-                <a:latin typeface="Microsoft YaHei" pitchFamily="34" charset="0"/>
-                <a:ea typeface="Microsoft YaHei" pitchFamily="34" charset="-122"/>
-                <a:cs typeface="Microsoft YaHei" pitchFamily="34" charset="-120"/>
-              </a:rPr>
-              <a:t>GSE180759 存在平台混杂</a:t>
-            </a:r>
-            <a:endParaRPr lang="en-US" sz="1350" dirty="0"/>
-          </a:p>
-        </p:txBody>
-      </p:sp>
-      <p:sp>
-        <p:nvSpPr>
-          <p:cNvPr id="13" name="Text 11"/>
-          <p:cNvSpPr txBox="1"/>
-          <p:nvPr/>
-        </p:nvSpPr>
-        <p:spPr>
-          <a:xfrm>
-            <a:off x="4251960" y="3931920"/>
-            <a:ext cx="7406640" cy="566928"/>
-          </a:xfrm>
-          <a:prstGeom prst="rect">
-            <a:avLst/>
-          </a:prstGeom>
-          <a:noFill/>
-          <a:ln/>
-        </p:spPr>
-        <p:txBody>
-          <a:bodyPr wrap="square" lIns="0" tIns="0" rIns="0" bIns="0" rtlCol="0" anchor="ctr"/>
-          <a:lstStyle/>
-          <a:p>
-            <a:pPr indent="0" marL="0">
-              <a:lnSpc>
-                <a:spcPts val="1600"/>
-              </a:lnSpc>
-              <a:buNone/>
-            </a:pPr>
-            <a:r>
-              <a:rPr lang="en-US" sz="1200" dirty="0">
-                <a:solidFill>
-                  <a:srgbClr val="6E6E6E"/>
-                </a:solidFill>
-                <a:latin typeface="Microsoft YaHei" pitchFamily="34" charset="0"/>
-                <a:ea typeface="Microsoft YaHei" pitchFamily="34" charset="-122"/>
-                <a:cs typeface="Microsoft YaHei" pitchFamily="34" charset="-120"/>
-              </a:rPr>
-              <a:t>病灶周围白质文库全为 NovaSeq，病灶边缘文库全为 HiSeq；图谱已按文库做 Harmony 整合。</a:t>
-            </a:r>
-            <a:endParaRPr lang="en-US" sz="1200" dirty="0"/>
-          </a:p>
-        </p:txBody>
-      </p:sp>
-      <p:sp>
-        <p:nvSpPr>
-          <p:cNvPr id="14" name="Text 12"/>
-          <p:cNvSpPr txBox="1"/>
-          <p:nvPr/>
-        </p:nvSpPr>
-        <p:spPr>
-          <a:xfrm>
-            <a:off x="548640" y="4663440"/>
-            <a:ext cx="3566160" cy="365760"/>
-          </a:xfrm>
-          <a:prstGeom prst="rect">
-            <a:avLst/>
-          </a:prstGeom>
-          <a:noFill/>
-          <a:ln/>
-        </p:spPr>
-        <p:txBody>
-          <a:bodyPr wrap="square" lIns="0" tIns="0" rIns="0" bIns="0" rtlCol="0" anchor="ctr"/>
-          <a:lstStyle/>
-          <a:p>
-            <a:pPr indent="0" marL="0">
-              <a:buNone/>
-            </a:pPr>
-            <a:r>
-              <a:rPr lang="en-US" sz="1350" b="1" dirty="0">
-                <a:solidFill>
-                  <a:srgbClr val="000000"/>
-                </a:solidFill>
-                <a:latin typeface="Microsoft YaHei" pitchFamily="34" charset="0"/>
-                <a:ea typeface="Microsoft YaHei" pitchFamily="34" charset="-122"/>
-                <a:cs typeface="Microsoft YaHei" pitchFamily="34" charset="-120"/>
-              </a:rPr>
-              <a:t>以阳性核比例而非表达量</a:t>
-            </a:r>
-            <a:endParaRPr lang="en-US" sz="1350" dirty="0"/>
-          </a:p>
-        </p:txBody>
-      </p:sp>
-      <p:sp>
-        <p:nvSpPr>
-          <p:cNvPr id="15" name="Text 13"/>
-          <p:cNvSpPr txBox="1"/>
-          <p:nvPr/>
-        </p:nvSpPr>
-        <p:spPr>
-          <a:xfrm>
-            <a:off x="4251960" y="4663440"/>
-            <a:ext cx="7406640" cy="566928"/>
-          </a:xfrm>
-          <a:prstGeom prst="rect">
-            <a:avLst/>
-          </a:prstGeom>
-          <a:noFill/>
-          <a:ln/>
-        </p:spPr>
-        <p:txBody>
-          <a:bodyPr wrap="square" lIns="0" tIns="0" rIns="0" bIns="0" rtlCol="0" anchor="ctr"/>
-          <a:lstStyle/>
-          <a:p>
-            <a:pPr indent="0" marL="0">
-              <a:lnSpc>
-                <a:spcPts val="1600"/>
-              </a:lnSpc>
-              <a:buNone/>
-            </a:pPr>
-            <a:r>
-              <a:rPr lang="en-US" sz="1200" dirty="0">
-                <a:solidFill>
-                  <a:srgbClr val="6E6E6E"/>
-                </a:solidFill>
-                <a:latin typeface="Microsoft YaHei" pitchFamily="34" charset="0"/>
-                <a:ea typeface="Microsoft YaHei" pitchFamily="34" charset="-122"/>
-                <a:cs typeface="Microsoft YaHei" pitchFamily="34" charset="-120"/>
-              </a:rPr>
-              <a:t>Schirmer 仅提供对数归一化矩阵，标度因子不可恢复，跨队列表达量不可比。</a:t>
-            </a:r>
-            <a:endParaRPr lang="en-US" sz="1200" dirty="0"/>
-          </a:p>
-        </p:txBody>
-      </p:sp>
-      <p:sp>
-        <p:nvSpPr>
-          <p:cNvPr id="16" name="Text 14"/>
-          <p:cNvSpPr txBox="1"/>
-          <p:nvPr/>
-        </p:nvSpPr>
-        <p:spPr>
-          <a:xfrm>
-            <a:off x="548640" y="5394960"/>
-            <a:ext cx="3566160" cy="365760"/>
-          </a:xfrm>
-          <a:prstGeom prst="rect">
-            <a:avLst/>
-          </a:prstGeom>
-          <a:noFill/>
-          <a:ln/>
-        </p:spPr>
-        <p:txBody>
-          <a:bodyPr wrap="square" lIns="0" tIns="0" rIns="0" bIns="0" rtlCol="0" anchor="ctr"/>
-          <a:lstStyle/>
-          <a:p>
-            <a:pPr indent="0" marL="0">
-              <a:buNone/>
-            </a:pPr>
-            <a:r>
-              <a:rPr lang="en-US" sz="1350" b="1" dirty="0">
-                <a:solidFill>
-                  <a:srgbClr val="000000"/>
-                </a:solidFill>
-                <a:latin typeface="Microsoft YaHei" pitchFamily="34" charset="0"/>
-                <a:ea typeface="Microsoft YaHei" pitchFamily="34" charset="-122"/>
-                <a:cs typeface="Microsoft YaHei" pitchFamily="34" charset="-120"/>
-              </a:rPr>
-              <a:t>仅限转录本水平</a:t>
-            </a:r>
-            <a:endParaRPr lang="en-US" sz="1350" dirty="0"/>
-          </a:p>
-        </p:txBody>
-      </p:sp>
-      <p:sp>
-        <p:nvSpPr>
-          <p:cNvPr id="17" name="Text 15"/>
-          <p:cNvSpPr txBox="1"/>
-          <p:nvPr/>
-        </p:nvSpPr>
-        <p:spPr>
-          <a:xfrm>
-            <a:off x="4251960" y="5394960"/>
-            <a:ext cx="7406640" cy="566928"/>
-          </a:xfrm>
-          <a:prstGeom prst="rect">
-            <a:avLst/>
-          </a:prstGeom>
-          <a:noFill/>
-          <a:ln/>
-        </p:spPr>
-        <p:txBody>
-          <a:bodyPr wrap="square" lIns="0" tIns="0" rIns="0" bIns="0" rtlCol="0" anchor="ctr"/>
-          <a:lstStyle/>
-          <a:p>
-            <a:pPr indent="0" marL="0">
-              <a:lnSpc>
-                <a:spcPts val="1600"/>
-              </a:lnSpc>
-              <a:buNone/>
-            </a:pPr>
-            <a:r>
-              <a:rPr lang="en-US" sz="1200" dirty="0">
-                <a:solidFill>
-                  <a:srgbClr val="6E6E6E"/>
-                </a:solidFill>
-                <a:latin typeface="Microsoft YaHei" pitchFamily="34" charset="0"/>
-                <a:ea typeface="Microsoft YaHei" pitchFamily="34" charset="-122"/>
-                <a:cs typeface="Microsoft YaHei" pitchFamily="34" charset="-120"/>
-              </a:rPr>
-              <a:t>人类 MS 脑组织尚无 MDA5 蛋白水平的测量。</a:t>
-            </a:r>
-            <a:endParaRPr lang="en-US" sz="1200" dirty="0"/>
-          </a:p>
-        </p:txBody>
-      </p:sp>
-    </p:spTree>
-  </p:cSld>
-  <p:clrMapOvr>
-    <a:masterClrMapping/>
-  </p:clrMapOvr>
-</p:sld>
-</file>
-
 <file path=ppt/slides/slide2.xml><?xml version="1.0" encoding="utf-8"?>
 <p:sld xmlns:a="http://schemas.openxmlformats.org/drawingml/2006/main" xmlns:r="http://schemas.openxmlformats.org/officeDocument/2006/relationships" xmlns:p="http://schemas.openxmlformats.org/presentationml/2006/main">
   <p:cSld name="Slide 2">
@@ -5610,133 +3645,6 @@
                 <a:ea typeface="Microsoft YaHei" pitchFamily="34" charset="-122"/>
                 <a:cs typeface="Microsoft YaHei" pitchFamily="34" charset="-120"/>
               </a:rPr>
-              <a:t>跨研究偏移的稳健性检验</a:t>
-            </a:r>
-            <a:endParaRPr lang="en-US" sz="2500" dirty="0"/>
-          </a:p>
-        </p:txBody>
-      </p:sp>
-      <p:pic>
-        <p:nvPicPr>
-          <p:cNvPr id="4" name="Image 0" descr="/home/user/aaa/results/mda5/figs/figB_null.png">    </p:cNvPr>
-          <p:cNvPicPr>
-            <a:picLocks noChangeAspect="1"/>
-          </p:cNvPicPr>
-          <p:nvPr/>
-        </p:nvPicPr>
-        <p:blipFill>
-          <a:blip r:embed="rId1"/>
-          <a:stretch>
-            <a:fillRect/>
-          </a:stretch>
-        </p:blipFill>
-        <p:spPr>
-          <a:xfrm>
-            <a:off x="963367" y="960120"/>
-            <a:ext cx="10280507" cy="5513832"/>
-          </a:xfrm>
-          <a:prstGeom prst="rect">
-            <a:avLst/>
-          </a:prstGeom>
-        </p:spPr>
-      </p:pic>
-    </p:spTree>
-  </p:cSld>
-  <p:clrMapOvr>
-    <a:masterClrMapping/>
-  </p:clrMapOvr>
-</p:sld>
-</file>
-
-<file path=ppt/slides/slide6.xml><?xml version="1.0" encoding="utf-8"?>
-<p:sld xmlns:a="http://schemas.openxmlformats.org/drawingml/2006/main" xmlns:r="http://schemas.openxmlformats.org/officeDocument/2006/relationships" xmlns:p="http://schemas.openxmlformats.org/presentationml/2006/main">
-  <p:cSld name="Slide 6">
-    <p:spTree>
-      <p:nvGrpSpPr>
-        <p:cNvPr id="1" name=""/>
-        <p:cNvGrpSpPr/>
-        <p:nvPr/>
-      </p:nvGrpSpPr>
-      <p:grpSpPr>
-        <a:xfrm>
-          <a:off x="0" y="0"/>
-          <a:ext cx="0" cy="0"/>
-          <a:chOff x="0" y="0"/>
-          <a:chExt cx="0" cy="0"/>
-        </a:xfrm>
-      </p:grpSpPr>
-      <p:sp>
-        <p:nvSpPr>
-          <p:cNvPr id="2" name="Text 0"/>
-          <p:cNvSpPr txBox="1"/>
-          <p:nvPr/>
-        </p:nvSpPr>
-        <p:spPr>
-          <a:xfrm>
-            <a:off x="11430000" y="6355080"/>
-            <a:ext cx="457200" cy="274320"/>
-          </a:xfrm>
-          <a:prstGeom prst="rect">
-            <a:avLst/>
-          </a:prstGeom>
-          <a:noFill/>
-          <a:ln/>
-        </p:spPr>
-        <p:txBody>
-          <a:bodyPr wrap="square" lIns="0" tIns="0" rIns="0" bIns="0" rtlCol="0" anchor="ctr"/>
-          <a:lstStyle/>
-          <a:p>
-            <a:pPr algn="r" indent="0" marL="0">
-              <a:buNone/>
-            </a:pPr>
-            <a:r>
-              <a:rPr lang="en-US" sz="1000" dirty="0">
-                <a:solidFill>
-                  <a:srgbClr val="6E6E6E"/>
-                </a:solidFill>
-                <a:latin typeface="Calibri" pitchFamily="34" charset="0"/>
-                <a:ea typeface="Calibri" pitchFamily="34" charset="-122"/>
-                <a:cs typeface="Calibri" pitchFamily="34" charset="-120"/>
-              </a:rPr>
-              <a:t>5</a:t>
-            </a:r>
-            <a:endParaRPr lang="en-US" sz="1000" dirty="0"/>
-          </a:p>
-        </p:txBody>
-      </p:sp>
-      <p:sp>
-        <p:nvSpPr>
-          <p:cNvPr id="3" name="Text 1"/>
-          <p:cNvSpPr txBox="1"/>
-          <p:nvPr/>
-        </p:nvSpPr>
-        <p:spPr>
-          <a:xfrm>
-            <a:off x="548640" y="274320"/>
-            <a:ext cx="11064240" cy="475488"/>
-          </a:xfrm>
-          <a:prstGeom prst="rect">
-            <a:avLst/>
-          </a:prstGeom>
-          <a:noFill/>
-          <a:ln/>
-        </p:spPr>
-        <p:txBody>
-          <a:bodyPr wrap="square" lIns="0" tIns="0" rIns="0" bIns="0" rtlCol="0" anchor="ctr"/>
-          <a:lstStyle/>
-          <a:p>
-            <a:pPr indent="0" marL="0">
-              <a:buNone/>
-            </a:pPr>
-            <a:r>
-              <a:rPr lang="en-US" sz="2500" b="1" dirty="0">
-                <a:solidFill>
-                  <a:srgbClr val="000000"/>
-                </a:solidFill>
-                <a:latin typeface="Microsoft YaHei" pitchFamily="34" charset="0"/>
-                <a:ea typeface="Microsoft YaHei" pitchFamily="34" charset="-122"/>
-                <a:cs typeface="Microsoft YaHei" pitchFamily="34" charset="-120"/>
-              </a:rPr>
               <a:t>MS 白质：少突胶质细胞 IFIH1 阳性率升高</a:t>
             </a:r>
             <a:endParaRPr lang="en-US" sz="2500" dirty="0"/>
@@ -5775,9 +3683,9 @@
 </p:sld>
 </file>
 
-<file path=ppt/slides/slide7.xml><?xml version="1.0" encoding="utf-8"?>
+<file path=ppt/slides/slide6.xml><?xml version="1.0" encoding="utf-8"?>
 <p:sld xmlns:a="http://schemas.openxmlformats.org/drawingml/2006/main" xmlns:r="http://schemas.openxmlformats.org/officeDocument/2006/relationships" xmlns:p="http://schemas.openxmlformats.org/presentationml/2006/main">
-  <p:cSld name="Slide 7">
+  <p:cSld name="Slide 6">
     <p:spTree>
       <p:nvGrpSpPr>
         <p:cNvPr id="1" name=""/>
@@ -5825,7 +3733,7 @@
                 <a:ea typeface="Calibri" pitchFamily="34" charset="-122"/>
                 <a:cs typeface="Calibri" pitchFamily="34" charset="-120"/>
               </a:rPr>
-              <a:t>6</a:t>
+              <a:t>5</a:t>
             </a:r>
             <a:endParaRPr lang="en-US" sz="1000" dirty="0"/>
           </a:p>
@@ -5902,9 +3810,9 @@
 </p:sld>
 </file>
 
-<file path=ppt/slides/slide8.xml><?xml version="1.0" encoding="utf-8"?>
+<file path=ppt/slides/slide7.xml><?xml version="1.0" encoding="utf-8"?>
 <p:sld xmlns:a="http://schemas.openxmlformats.org/drawingml/2006/main" xmlns:r="http://schemas.openxmlformats.org/officeDocument/2006/relationships" xmlns:p="http://schemas.openxmlformats.org/presentationml/2006/main">
-  <p:cSld name="Slide 8">
+  <p:cSld name="Slide 7">
     <p:spTree>
       <p:nvGrpSpPr>
         <p:cNvPr id="1" name=""/>
@@ -5952,7 +3860,7 @@
                 <a:ea typeface="Calibri" pitchFamily="34" charset="-122"/>
                 <a:cs typeface="Calibri" pitchFamily="34" charset="-120"/>
               </a:rPr>
-              <a:t>7</a:t>
+              <a:t>6</a:t>
             </a:r>
             <a:endParaRPr lang="en-US" sz="1000" dirty="0"/>
           </a:p>
@@ -6029,9 +3937,9 @@
 </p:sld>
 </file>
 
-<file path=ppt/slides/slide9.xml><?xml version="1.0" encoding="utf-8"?>
+<file path=ppt/slides/slide8.xml><?xml version="1.0" encoding="utf-8"?>
 <p:sld xmlns:a="http://schemas.openxmlformats.org/drawingml/2006/main" xmlns:r="http://schemas.openxmlformats.org/officeDocument/2006/relationships" xmlns:p="http://schemas.openxmlformats.org/presentationml/2006/main">
-  <p:cSld name="Slide 9">
+  <p:cSld name="Slide 8">
     <p:spTree>
       <p:nvGrpSpPr>
         <p:cNvPr id="1" name=""/>
@@ -6079,7 +3987,7 @@
                 <a:ea typeface="Calibri" pitchFamily="34" charset="-122"/>
                 <a:cs typeface="Calibri" pitchFamily="34" charset="-120"/>
               </a:rPr>
-              <a:t>8</a:t>
+              <a:t>7</a:t>
             </a:r>
             <a:endParaRPr lang="en-US" sz="1000" dirty="0"/>
           </a:p>
@@ -6142,6 +4050,133 @@
           <a:xfrm>
             <a:off x="715834" y="960120"/>
             <a:ext cx="10775572" cy="5513832"/>
+          </a:xfrm>
+          <a:prstGeom prst="rect">
+            <a:avLst/>
+          </a:prstGeom>
+        </p:spPr>
+      </p:pic>
+    </p:spTree>
+  </p:cSld>
+  <p:clrMapOvr>
+    <a:masterClrMapping/>
+  </p:clrMapOvr>
+</p:sld>
+</file>
+
+<file path=ppt/slides/slide9.xml><?xml version="1.0" encoding="utf-8"?>
+<p:sld xmlns:a="http://schemas.openxmlformats.org/drawingml/2006/main" xmlns:r="http://schemas.openxmlformats.org/officeDocument/2006/relationships" xmlns:p="http://schemas.openxmlformats.org/presentationml/2006/main">
+  <p:cSld name="Slide 9">
+    <p:spTree>
+      <p:nvGrpSpPr>
+        <p:cNvPr id="1" name=""/>
+        <p:cNvGrpSpPr/>
+        <p:nvPr/>
+      </p:nvGrpSpPr>
+      <p:grpSpPr>
+        <a:xfrm>
+          <a:off x="0" y="0"/>
+          <a:ext cx="0" cy="0"/>
+          <a:chOff x="0" y="0"/>
+          <a:chExt cx="0" cy="0"/>
+        </a:xfrm>
+      </p:grpSpPr>
+      <p:sp>
+        <p:nvSpPr>
+          <p:cNvPr id="2" name="Text 0"/>
+          <p:cNvSpPr txBox="1"/>
+          <p:nvPr/>
+        </p:nvSpPr>
+        <p:spPr>
+          <a:xfrm>
+            <a:off x="11430000" y="6355080"/>
+            <a:ext cx="457200" cy="274320"/>
+          </a:xfrm>
+          <a:prstGeom prst="rect">
+            <a:avLst/>
+          </a:prstGeom>
+          <a:noFill/>
+          <a:ln/>
+        </p:spPr>
+        <p:txBody>
+          <a:bodyPr wrap="square" lIns="0" tIns="0" rIns="0" bIns="0" rtlCol="0" anchor="ctr"/>
+          <a:lstStyle/>
+          <a:p>
+            <a:pPr algn="r" indent="0" marL="0">
+              <a:buNone/>
+            </a:pPr>
+            <a:r>
+              <a:rPr lang="en-US" sz="1000" dirty="0">
+                <a:solidFill>
+                  <a:srgbClr val="6E6E6E"/>
+                </a:solidFill>
+                <a:latin typeface="Calibri" pitchFamily="34" charset="0"/>
+                <a:ea typeface="Calibri" pitchFamily="34" charset="-122"/>
+                <a:cs typeface="Calibri" pitchFamily="34" charset="-120"/>
+              </a:rPr>
+              <a:t>8</a:t>
+            </a:r>
+            <a:endParaRPr lang="en-US" sz="1000" dirty="0"/>
+          </a:p>
+        </p:txBody>
+      </p:sp>
+      <p:sp>
+        <p:nvSpPr>
+          <p:cNvPr id="3" name="Text 1"/>
+          <p:cNvSpPr txBox="1"/>
+          <p:nvPr/>
+        </p:nvSpPr>
+        <p:spPr>
+          <a:xfrm>
+            <a:off x="548640" y="274320"/>
+            <a:ext cx="11064240" cy="475488"/>
+          </a:xfrm>
+          <a:prstGeom prst="rect">
+            <a:avLst/>
+          </a:prstGeom>
+          <a:noFill/>
+          <a:ln/>
+        </p:spPr>
+        <p:txBody>
+          <a:bodyPr wrap="square" lIns="0" tIns="0" rIns="0" bIns="0" rtlCol="0" anchor="ctr"/>
+          <a:lstStyle/>
+          <a:p>
+            <a:pPr indent="0" marL="0">
+              <a:buNone/>
+            </a:pPr>
+            <a:r>
+              <a:rPr lang="en-US" sz="2500" b="1" dirty="0">
+                <a:solidFill>
+                  <a:srgbClr val="000000"/>
+                </a:solidFill>
+                <a:latin typeface="Microsoft YaHei" pitchFamily="34" charset="0"/>
+                <a:ea typeface="Microsoft YaHei" pitchFamily="34" charset="-122"/>
+                <a:cs typeface="Microsoft YaHei" pitchFamily="34" charset="-120"/>
+              </a:rPr>
+              <a:t>白质单核图谱与脱髓鞘病灶分期</a:t>
+            </a:r>
+            <a:endParaRPr lang="en-US" sz="2500" dirty="0"/>
+          </a:p>
+        </p:txBody>
+      </p:sp>
+      <p:pic>
+        <p:nvPicPr>
+          <p:cNvPr id="4" name="Image 0" descr="/home/user/aaa/results/mda5/figs/fig_umap_wm.png">    </p:cNvPr>
+          <p:cNvPicPr>
+            <a:picLocks noChangeAspect="1"/>
+          </p:cNvPicPr>
+          <p:nvPr/>
+        </p:nvPicPr>
+        <p:blipFill>
+          <a:blip r:embed="rId1"/>
+          <a:stretch>
+            <a:fillRect/>
+          </a:stretch>
+        </p:blipFill>
+        <p:spPr>
+          <a:xfrm>
+            <a:off x="411480" y="1067989"/>
+            <a:ext cx="11384280" cy="5298094"/>
           </a:xfrm>
           <a:prstGeom prst="rect">
             <a:avLst/>

--- a/results/mda5/MDA5_IFIH1_人脑与MS.pptx
+++ b/results/mda5/MDA5_IFIH1_人脑与MS.pptx
@@ -13,10 +13,9 @@
     <p:sldId id="261" r:id="rId7"/>
     <p:sldId id="262" r:id="rId8"/>
     <p:sldId id="263" r:id="rId9"/>
-    <p:sldId id="264" r:id="rId10"/>
   </p:sldIdLst>
   <p:notesMasterIdLst>
-    <p:notesMasterId r:id="rId11"/>
+    <p:notesMasterId r:id="rId10"/>
   </p:notesMasterIdLst>
   <p:sldSz cx="12192000" cy="6858000"/>
   <p:notesSz cx="6858000" cy="12192000"/>
@@ -1150,94 +1149,6 @@
             <a:fld id="{F7021451-1387-4CA6-816F-3879F97B5CBC}" type="slidenum">
               <a:rPr lang="en-US"/>
               <a:t>8</a:t>
-            </a:fld>
-            <a:endParaRPr lang="en-US"/>
-          </a:p>
-        </p:txBody>
-      </p:sp>
-    </p:spTree>
-    <p:extLst>
-      <p:ext uri="{BB962C8B-B14F-4D97-AF65-F5344CB8AC3E}">
-        <p14:creationId xmlns:p14="http://schemas.microsoft.com/office/powerpoint/2010/main" val="1024086991"/>
-      </p:ext>
-    </p:extLst>
-  </p:cSld>
-  <p:clrMapOvr>
-    <a:masterClrMapping/>
-  </p:clrMapOvr>
-</p:notes>
-</file>
-
-<file path=ppt/notesSlides/notesSlide9.xml><?xml version="1.0" encoding="utf-8"?>
-<p:notes xmlns:a="http://schemas.openxmlformats.org/drawingml/2006/main" xmlns:r="http://schemas.openxmlformats.org/officeDocument/2006/relationships" xmlns:p="http://schemas.openxmlformats.org/presentationml/2006/main">
-  <p:cSld>
-    <p:spTree>
-      <p:nvGrpSpPr>
-        <p:cNvPr id="1" name=""/>
-        <p:cNvGrpSpPr/>
-        <p:nvPr/>
-      </p:nvGrpSpPr>
-      <p:grpSpPr>
-        <a:xfrm>
-          <a:off x="0" y="0"/>
-          <a:ext cx="0" cy="0"/>
-          <a:chOff x="0" y="0"/>
-          <a:chExt cx="0" cy="0"/>
-        </a:xfrm>
-      </p:grpSpPr>
-      <p:sp>
-        <p:nvSpPr>
-          <p:cNvPr id="2" name="Slide Image Placeholder 1"/>
-          <p:cNvSpPr>
-            <a:spLocks noGrp="1" noRot="1" noChangeAspect="1"/>
-          </p:cNvSpPr>
-          <p:nvPr>
-            <p:ph type="sldImg"/>
-          </p:nvPr>
-        </p:nvSpPr>
-        <p:spPr/>
-      </p:sp>
-      <p:sp>
-        <p:nvSpPr>
-          <p:cNvPr id="3" name="Notes Placeholder 2"/>
-          <p:cNvSpPr>
-            <a:spLocks noGrp="1"/>
-          </p:cNvSpPr>
-          <p:nvPr>
-            <p:ph type="body" idx="1"/>
-          </p:nvPr>
-        </p:nvSpPr>
-        <p:spPr/>
-        <p:txBody>
-          <a:bodyPr/>
-          <a:lstStyle/>
-          <a:p>
-            <a:r>
-              <a:rPr lang="en-US" dirty="0"/>
-              <a:t/>
-            </a:r>
-            <a:endParaRPr lang="en-US" dirty="0"/>
-          </a:p>
-        </p:txBody>
-      </p:sp>
-      <p:sp>
-        <p:nvSpPr>
-          <p:cNvPr id="4" name="Slide Number Placeholder 3"/>
-          <p:cNvSpPr>
-            <a:spLocks noGrp="1"/>
-          </p:cNvSpPr>
-          <p:nvPr>
-            <p:ph type="sldNum" sz="quarter" idx="10"/>
-          </p:nvPr>
-        </p:nvSpPr>
-        <p:spPr/>
-        <p:txBody>
-          <a:bodyPr/>
-          <a:lstStyle/>
-          <a:p>
-            <a:fld id="{F7021451-1387-4CA6-816F-3879F97B5CBC}" type="slidenum">
-              <a:rPr lang="en-US"/>
-              <a:t>9</a:t>
             </a:fld>
             <a:endParaRPr lang="en-US"/>
           </a:p>
@@ -4064,133 +3975,6 @@
 </p:sld>
 </file>
 
-<file path=ppt/slides/slide9.xml><?xml version="1.0" encoding="utf-8"?>
-<p:sld xmlns:a="http://schemas.openxmlformats.org/drawingml/2006/main" xmlns:r="http://schemas.openxmlformats.org/officeDocument/2006/relationships" xmlns:p="http://schemas.openxmlformats.org/presentationml/2006/main">
-  <p:cSld name="Slide 9">
-    <p:spTree>
-      <p:nvGrpSpPr>
-        <p:cNvPr id="1" name=""/>
-        <p:cNvGrpSpPr/>
-        <p:nvPr/>
-      </p:nvGrpSpPr>
-      <p:grpSpPr>
-        <a:xfrm>
-          <a:off x="0" y="0"/>
-          <a:ext cx="0" cy="0"/>
-          <a:chOff x="0" y="0"/>
-          <a:chExt cx="0" cy="0"/>
-        </a:xfrm>
-      </p:grpSpPr>
-      <p:sp>
-        <p:nvSpPr>
-          <p:cNvPr id="2" name="Text 0"/>
-          <p:cNvSpPr txBox="1"/>
-          <p:nvPr/>
-        </p:nvSpPr>
-        <p:spPr>
-          <a:xfrm>
-            <a:off x="11430000" y="6355080"/>
-            <a:ext cx="457200" cy="274320"/>
-          </a:xfrm>
-          <a:prstGeom prst="rect">
-            <a:avLst/>
-          </a:prstGeom>
-          <a:noFill/>
-          <a:ln/>
-        </p:spPr>
-        <p:txBody>
-          <a:bodyPr wrap="square" lIns="0" tIns="0" rIns="0" bIns="0" rtlCol="0" anchor="ctr"/>
-          <a:lstStyle/>
-          <a:p>
-            <a:pPr algn="r" indent="0" marL="0">
-              <a:buNone/>
-            </a:pPr>
-            <a:r>
-              <a:rPr lang="en-US" sz="1000" dirty="0">
-                <a:solidFill>
-                  <a:srgbClr val="6E6E6E"/>
-                </a:solidFill>
-                <a:latin typeface="Calibri" pitchFamily="34" charset="0"/>
-                <a:ea typeface="Calibri" pitchFamily="34" charset="-122"/>
-                <a:cs typeface="Calibri" pitchFamily="34" charset="-120"/>
-              </a:rPr>
-              <a:t>8</a:t>
-            </a:r>
-            <a:endParaRPr lang="en-US" sz="1000" dirty="0"/>
-          </a:p>
-        </p:txBody>
-      </p:sp>
-      <p:sp>
-        <p:nvSpPr>
-          <p:cNvPr id="3" name="Text 1"/>
-          <p:cNvSpPr txBox="1"/>
-          <p:nvPr/>
-        </p:nvSpPr>
-        <p:spPr>
-          <a:xfrm>
-            <a:off x="548640" y="274320"/>
-            <a:ext cx="11064240" cy="475488"/>
-          </a:xfrm>
-          <a:prstGeom prst="rect">
-            <a:avLst/>
-          </a:prstGeom>
-          <a:noFill/>
-          <a:ln/>
-        </p:spPr>
-        <p:txBody>
-          <a:bodyPr wrap="square" lIns="0" tIns="0" rIns="0" bIns="0" rtlCol="0" anchor="ctr"/>
-          <a:lstStyle/>
-          <a:p>
-            <a:pPr indent="0" marL="0">
-              <a:buNone/>
-            </a:pPr>
-            <a:r>
-              <a:rPr lang="en-US" sz="2500" b="1" dirty="0">
-                <a:solidFill>
-                  <a:srgbClr val="000000"/>
-                </a:solidFill>
-                <a:latin typeface="Microsoft YaHei" pitchFamily="34" charset="0"/>
-                <a:ea typeface="Microsoft YaHei" pitchFamily="34" charset="-122"/>
-                <a:cs typeface="Microsoft YaHei" pitchFamily="34" charset="-120"/>
-              </a:rPr>
-              <a:t>白质单核图谱与脱髓鞘病灶分期</a:t>
-            </a:r>
-            <a:endParaRPr lang="en-US" sz="2500" dirty="0"/>
-          </a:p>
-        </p:txBody>
-      </p:sp>
-      <p:pic>
-        <p:nvPicPr>
-          <p:cNvPr id="4" name="Image 0" descr="/home/user/aaa/results/mda5/figs/fig_umap_wm.png">    </p:cNvPr>
-          <p:cNvPicPr>
-            <a:picLocks noChangeAspect="1"/>
-          </p:cNvPicPr>
-          <p:nvPr/>
-        </p:nvPicPr>
-        <p:blipFill>
-          <a:blip r:embed="rId1"/>
-          <a:stretch>
-            <a:fillRect/>
-          </a:stretch>
-        </p:blipFill>
-        <p:spPr>
-          <a:xfrm>
-            <a:off x="411480" y="1067989"/>
-            <a:ext cx="11384280" cy="5298094"/>
-          </a:xfrm>
-          <a:prstGeom prst="rect">
-            <a:avLst/>
-          </a:prstGeom>
-        </p:spPr>
-      </p:pic>
-    </p:spTree>
-  </p:cSld>
-  <p:clrMapOvr>
-    <a:masterClrMapping/>
-  </p:clrMapOvr>
-</p:sld>
-</file>
-
 <file path=ppt/theme/theme1.xml><?xml version="1.0" encoding="utf-8"?>
 <a:theme xmlns:a="http://schemas.openxmlformats.org/drawingml/2006/main" name="Office Theme">
   <a:themeElements>

--- a/results/mda5/MDA5_IFIH1_人脑与MS.pptx
+++ b/results/mda5/MDA5_IFIH1_人脑与MS.pptx
@@ -12,10 +12,9 @@
     <p:sldId id="260" r:id="rId6"/>
     <p:sldId id="261" r:id="rId7"/>
     <p:sldId id="262" r:id="rId8"/>
-    <p:sldId id="263" r:id="rId9"/>
   </p:sldIdLst>
   <p:notesMasterIdLst>
-    <p:notesMasterId r:id="rId10"/>
+    <p:notesMasterId r:id="rId9"/>
   </p:notesMasterIdLst>
   <p:sldSz cx="12192000" cy="6858000"/>
   <p:notesSz cx="6858000" cy="12192000"/>
@@ -1061,94 +1060,6 @@
             <a:fld id="{F7021451-1387-4CA6-816F-3879F97B5CBC}" type="slidenum">
               <a:rPr lang="en-US"/>
               <a:t>7</a:t>
-            </a:fld>
-            <a:endParaRPr lang="en-US"/>
-          </a:p>
-        </p:txBody>
-      </p:sp>
-    </p:spTree>
-    <p:extLst>
-      <p:ext uri="{BB962C8B-B14F-4D97-AF65-F5344CB8AC3E}">
-        <p14:creationId xmlns:p14="http://schemas.microsoft.com/office/powerpoint/2010/main" val="1024086991"/>
-      </p:ext>
-    </p:extLst>
-  </p:cSld>
-  <p:clrMapOvr>
-    <a:masterClrMapping/>
-  </p:clrMapOvr>
-</p:notes>
-</file>
-
-<file path=ppt/notesSlides/notesSlide8.xml><?xml version="1.0" encoding="utf-8"?>
-<p:notes xmlns:a="http://schemas.openxmlformats.org/drawingml/2006/main" xmlns:r="http://schemas.openxmlformats.org/officeDocument/2006/relationships" xmlns:p="http://schemas.openxmlformats.org/presentationml/2006/main">
-  <p:cSld>
-    <p:spTree>
-      <p:nvGrpSpPr>
-        <p:cNvPr id="1" name=""/>
-        <p:cNvGrpSpPr/>
-        <p:nvPr/>
-      </p:nvGrpSpPr>
-      <p:grpSpPr>
-        <a:xfrm>
-          <a:off x="0" y="0"/>
-          <a:ext cx="0" cy="0"/>
-          <a:chOff x="0" y="0"/>
-          <a:chExt cx="0" cy="0"/>
-        </a:xfrm>
-      </p:grpSpPr>
-      <p:sp>
-        <p:nvSpPr>
-          <p:cNvPr id="2" name="Slide Image Placeholder 1"/>
-          <p:cNvSpPr>
-            <a:spLocks noGrp="1" noRot="1" noChangeAspect="1"/>
-          </p:cNvSpPr>
-          <p:nvPr>
-            <p:ph type="sldImg"/>
-          </p:nvPr>
-        </p:nvSpPr>
-        <p:spPr/>
-      </p:sp>
-      <p:sp>
-        <p:nvSpPr>
-          <p:cNvPr id="3" name="Notes Placeholder 2"/>
-          <p:cNvSpPr>
-            <a:spLocks noGrp="1"/>
-          </p:cNvSpPr>
-          <p:nvPr>
-            <p:ph type="body" idx="1"/>
-          </p:nvPr>
-        </p:nvSpPr>
-        <p:spPr/>
-        <p:txBody>
-          <a:bodyPr/>
-          <a:lstStyle/>
-          <a:p>
-            <a:r>
-              <a:rPr lang="en-US" dirty="0"/>
-              <a:t/>
-            </a:r>
-            <a:endParaRPr lang="en-US" dirty="0"/>
-          </a:p>
-        </p:txBody>
-      </p:sp>
-      <p:sp>
-        <p:nvSpPr>
-          <p:cNvPr id="4" name="Slide Number Placeholder 3"/>
-          <p:cNvSpPr>
-            <a:spLocks noGrp="1"/>
-          </p:cNvSpPr>
-          <p:nvPr>
-            <p:ph type="sldNum" sz="quarter" idx="10"/>
-          </p:nvPr>
-        </p:nvSpPr>
-        <p:spPr/>
-        <p:txBody>
-          <a:bodyPr/>
-          <a:lstStyle/>
-          <a:p>
-            <a:fld id="{F7021451-1387-4CA6-816F-3879F97B5CBC}" type="slidenum">
-              <a:rPr lang="en-US"/>
-              <a:t>8</a:t>
             </a:fld>
             <a:endParaRPr lang="en-US"/>
           </a:p>
@@ -3810,7 +3721,7 @@
                 <a:ea typeface="Microsoft YaHei" pitchFamily="34" charset="-122"/>
                 <a:cs typeface="Microsoft YaHei" pitchFamily="34" charset="-120"/>
               </a:rPr>
-              <a:t>两个区域变化幅度之差</a:t>
+              <a:t>白质单核图谱与脱髓鞘病灶分期</a:t>
             </a:r>
             <a:endParaRPr lang="en-US" sz="2500" dirty="0"/>
           </a:p>
@@ -3818,7 +3729,7 @@
       </p:sp>
       <p:pic>
         <p:nvPicPr>
-          <p:cNvPr id="4" name="Image 0" descr="/home/user/aaa/results/mda5/figs/fig_q2_interaction.png">    </p:cNvPr>
+          <p:cNvPr id="4" name="Image 0" descr="/home/user/aaa/results/mda5/figs/fig_umap_wm.png">    </p:cNvPr>
           <p:cNvPicPr>
             <a:picLocks noChangeAspect="1"/>
           </p:cNvPicPr>
@@ -3832,135 +3743,8 @@
         </p:blipFill>
         <p:spPr>
           <a:xfrm>
-            <a:off x="411480" y="1213819"/>
-            <a:ext cx="11384280" cy="5006434"/>
-          </a:xfrm>
-          <a:prstGeom prst="rect">
-            <a:avLst/>
-          </a:prstGeom>
-        </p:spPr>
-      </p:pic>
-    </p:spTree>
-  </p:cSld>
-  <p:clrMapOvr>
-    <a:masterClrMapping/>
-  </p:clrMapOvr>
-</p:sld>
-</file>
-
-<file path=ppt/slides/slide8.xml><?xml version="1.0" encoding="utf-8"?>
-<p:sld xmlns:a="http://schemas.openxmlformats.org/drawingml/2006/main" xmlns:r="http://schemas.openxmlformats.org/officeDocument/2006/relationships" xmlns:p="http://schemas.openxmlformats.org/presentationml/2006/main">
-  <p:cSld name="Slide 8">
-    <p:spTree>
-      <p:nvGrpSpPr>
-        <p:cNvPr id="1" name=""/>
-        <p:cNvGrpSpPr/>
-        <p:nvPr/>
-      </p:nvGrpSpPr>
-      <p:grpSpPr>
-        <a:xfrm>
-          <a:off x="0" y="0"/>
-          <a:ext cx="0" cy="0"/>
-          <a:chOff x="0" y="0"/>
-          <a:chExt cx="0" cy="0"/>
-        </a:xfrm>
-      </p:grpSpPr>
-      <p:sp>
-        <p:nvSpPr>
-          <p:cNvPr id="2" name="Text 0"/>
-          <p:cNvSpPr txBox="1"/>
-          <p:nvPr/>
-        </p:nvSpPr>
-        <p:spPr>
-          <a:xfrm>
-            <a:off x="11430000" y="6355080"/>
-            <a:ext cx="457200" cy="274320"/>
-          </a:xfrm>
-          <a:prstGeom prst="rect">
-            <a:avLst/>
-          </a:prstGeom>
-          <a:noFill/>
-          <a:ln/>
-        </p:spPr>
-        <p:txBody>
-          <a:bodyPr wrap="square" lIns="0" tIns="0" rIns="0" bIns="0" rtlCol="0" anchor="ctr"/>
-          <a:lstStyle/>
-          <a:p>
-            <a:pPr algn="r" indent="0" marL="0">
-              <a:buNone/>
-            </a:pPr>
-            <a:r>
-              <a:rPr lang="en-US" sz="1000" dirty="0">
-                <a:solidFill>
-                  <a:srgbClr val="6E6E6E"/>
-                </a:solidFill>
-                <a:latin typeface="Calibri" pitchFamily="34" charset="0"/>
-                <a:ea typeface="Calibri" pitchFamily="34" charset="-122"/>
-                <a:cs typeface="Calibri" pitchFamily="34" charset="-120"/>
-              </a:rPr>
-              <a:t>7</a:t>
-            </a:r>
-            <a:endParaRPr lang="en-US" sz="1000" dirty="0"/>
-          </a:p>
-        </p:txBody>
-      </p:sp>
-      <p:sp>
-        <p:nvSpPr>
-          <p:cNvPr id="3" name="Text 1"/>
-          <p:cNvSpPr txBox="1"/>
-          <p:nvPr/>
-        </p:nvSpPr>
-        <p:spPr>
-          <a:xfrm>
-            <a:off x="548640" y="274320"/>
-            <a:ext cx="11064240" cy="475488"/>
-          </a:xfrm>
-          <a:prstGeom prst="rect">
-            <a:avLst/>
-          </a:prstGeom>
-          <a:noFill/>
-          <a:ln/>
-        </p:spPr>
-        <p:txBody>
-          <a:bodyPr wrap="square" lIns="0" tIns="0" rIns="0" bIns="0" rtlCol="0" anchor="ctr"/>
-          <a:lstStyle/>
-          <a:p>
-            <a:pPr indent="0" marL="0">
-              <a:buNone/>
-            </a:pPr>
-            <a:r>
-              <a:rPr lang="en-US" sz="2500" b="1" dirty="0">
-                <a:solidFill>
-                  <a:srgbClr val="000000"/>
-                </a:solidFill>
-                <a:latin typeface="Microsoft YaHei" pitchFamily="34" charset="0"/>
-                <a:ea typeface="Microsoft YaHei" pitchFamily="34" charset="-122"/>
-                <a:cs typeface="Microsoft YaHei" pitchFamily="34" charset="-120"/>
-              </a:rPr>
-              <a:t>皮层标本含皮层下白质，MS 取材更深</a:t>
-            </a:r>
-            <a:endParaRPr lang="en-US" sz="2500" dirty="0"/>
-          </a:p>
-        </p:txBody>
-      </p:sp>
-      <p:pic>
-        <p:nvPicPr>
-          <p:cNvPr id="4" name="Image 0" descr="/home/user/aaa/results/mda5/figs/fig_confound.png">    </p:cNvPr>
-          <p:cNvPicPr>
-            <a:picLocks noChangeAspect="1"/>
-          </p:cNvPicPr>
-          <p:nvPr/>
-        </p:nvPicPr>
-        <p:blipFill>
-          <a:blip r:embed="rId1"/>
-          <a:stretch>
-            <a:fillRect/>
-          </a:stretch>
-        </p:blipFill>
-        <p:spPr>
-          <a:xfrm>
-            <a:off x="715834" y="960120"/>
-            <a:ext cx="10775572" cy="5513832"/>
+            <a:off x="411480" y="1067989"/>
+            <a:ext cx="11384280" cy="5298094"/>
           </a:xfrm>
           <a:prstGeom prst="rect">
             <a:avLst/>

--- a/results/mda5/MDA5_IFIH1_人脑与MS.pptx
+++ b/results/mda5/MDA5_IFIH1_人脑与MS.pptx
@@ -3362,8 +3362,8 @@
         </p:blipFill>
         <p:spPr>
           <a:xfrm>
-            <a:off x="841895" y="960120"/>
-            <a:ext cx="10523449" cy="5513832"/>
+            <a:off x="1024677" y="960120"/>
+            <a:ext cx="10157885" cy="5513832"/>
           </a:xfrm>
           <a:prstGeom prst="rect">
             <a:avLst/>
@@ -3489,8 +3489,8 @@
         </p:blipFill>
         <p:spPr>
           <a:xfrm>
-            <a:off x="650310" y="960120"/>
-            <a:ext cx="10906621" cy="5513832"/>
+            <a:off x="870981" y="960120"/>
+            <a:ext cx="10465278" cy="5513832"/>
           </a:xfrm>
           <a:prstGeom prst="rect">
             <a:avLst/>
@@ -3616,8 +3616,8 @@
         </p:blipFill>
         <p:spPr>
           <a:xfrm>
-            <a:off x="1444400" y="960120"/>
-            <a:ext cx="9318439" cy="5513832"/>
+            <a:off x="1604529" y="960120"/>
+            <a:ext cx="8998183" cy="5513832"/>
           </a:xfrm>
           <a:prstGeom prst="rect">
             <a:avLst/>
@@ -3743,8 +3743,8 @@
         </p:blipFill>
         <p:spPr>
           <a:xfrm>
-            <a:off x="411480" y="1067989"/>
-            <a:ext cx="11384280" cy="5298094"/>
+            <a:off x="496361" y="960120"/>
+            <a:ext cx="11214518" cy="5513832"/>
           </a:xfrm>
           <a:prstGeom prst="rect">
             <a:avLst/>

--- a/results/mda5/MDA5_IFIH1_人脑与MS.pptx
+++ b/results/mda5/MDA5_IFIH1_人脑与MS.pptx
@@ -1684,11 +1684,11 @@
             <a:tbl>
               <a:tblPr/>
               <a:tblGrid>
-                <a:gridCol w="3017520"/>
-                <a:gridCol w="2834640"/>
-                <a:gridCol w="1920240"/>
+                <a:gridCol w="2743200"/>
+                <a:gridCol w="3108960"/>
+                <a:gridCol w="2011680"/>
                 <a:gridCol w="1463040"/>
-                <a:gridCol w="1828800"/>
+                <a:gridCol w="1737360"/>
               </a:tblGrid>
               <a:tr h="585216">
                 <a:tc>
@@ -2893,7 +2893,7 @@
                           <a:ea typeface="Microsoft YaHei" pitchFamily="34" charset="-122"/>
                           <a:cs typeface="Microsoft YaHei" pitchFamily="34" charset="-120"/>
                         </a:rPr>
-                        <a:t>GSE118257  Jäkel 2019</a:t>
+                        <a:t>Macnair 2025</a:t>
                       </a:r>
                       <a:endParaRPr lang="en-US" sz="1250" dirty="0">
                         <a:latin typeface="Microsoft YaHei" charset="0"/>
@@ -2940,7 +2940,7 @@
                           <a:ea typeface="Microsoft YaHei" pitchFamily="34" charset="-122"/>
                           <a:cs typeface="Microsoft YaHei" pitchFamily="34" charset="-120"/>
                         </a:rPr>
-                        <a:t>白质</a:t>
+                        <a:t>皮层 + 皮层下白质</a:t>
                       </a:r>
                       <a:endParaRPr lang="en-US" sz="1250" dirty="0">
                         <a:latin typeface="Microsoft YaHei" charset="0"/>
@@ -2987,7 +2987,7 @@
                           <a:ea typeface="Microsoft YaHei" pitchFamily="34" charset="-122"/>
                           <a:cs typeface="Microsoft YaHei" pitchFamily="34" charset="-120"/>
                         </a:rPr>
-                        <a:t>5 对照 + 4 MS</a:t>
+                        <a:t>26 对照 + 54 MS</a:t>
                       </a:r>
                       <a:endParaRPr lang="en-US" sz="1250" dirty="0">
                         <a:latin typeface="Microsoft YaHei" charset="0"/>
@@ -3034,7 +3034,7 @@
                           <a:ea typeface="Microsoft YaHei" pitchFamily="34" charset="-122"/>
                           <a:cs typeface="Microsoft YaHei" pitchFamily="34" charset="-120"/>
                         </a:rPr>
-                        <a:t>17 799</a:t>
+                        <a:t>632 375</a:t>
                       </a:r>
                       <a:endParaRPr lang="en-US" sz="1250" dirty="0">
                         <a:latin typeface="Microsoft YaHei" charset="0"/>
@@ -3081,7 +3081,7 @@
                           <a:ea typeface="Microsoft YaHei" pitchFamily="34" charset="-122"/>
                           <a:cs typeface="Microsoft YaHei" pitchFamily="34" charset="-120"/>
                         </a:rPr>
-                        <a:t>白质，验证</a:t>
+                        <a:t>病灶分期，同一研究内</a:t>
                       </a:r>
                       <a:endParaRPr lang="en-US" sz="1250" dirty="0">
                         <a:latin typeface="Microsoft YaHei" charset="0"/>
@@ -3721,7 +3721,7 @@
                 <a:ea typeface="Microsoft YaHei" pitchFamily="34" charset="-122"/>
                 <a:cs typeface="Microsoft YaHei" pitchFamily="34" charset="-120"/>
               </a:rPr>
-              <a:t>白质单核图谱与脱髓鞘病灶分期</a:t>
+              <a:t>按脱髓鞘病灶分期，每一期与对照比较</a:t>
             </a:r>
             <a:endParaRPr lang="en-US" sz="2500" dirty="0"/>
           </a:p>
@@ -3729,7 +3729,7 @@
       </p:sp>
       <p:pic>
         <p:nvPicPr>
-          <p:cNvPr id="4" name="Image 0" descr="/home/user/aaa/results/mda5/figs/fig_umap_wm.png">    </p:cNvPr>
+          <p:cNvPr id="4" name="Image 0" descr="/home/user/aaa/results/mda5/figs/fig_lesion.png">    </p:cNvPr>
           <p:cNvPicPr>
             <a:picLocks noChangeAspect="1"/>
           </p:cNvPicPr>
@@ -3743,8 +3743,8 @@
         </p:blipFill>
         <p:spPr>
           <a:xfrm>
-            <a:off x="496361" y="960120"/>
-            <a:ext cx="11214518" cy="5513832"/>
+            <a:off x="681975" y="960120"/>
+            <a:ext cx="10843290" cy="5513832"/>
           </a:xfrm>
           <a:prstGeom prst="rect">
             <a:avLst/>

--- a/results/mda5/MDA5_IFIH1_人脑与MS.pptx
+++ b/results/mda5/MDA5_IFIH1_人脑与MS.pptx
@@ -12,9 +12,10 @@
     <p:sldId id="260" r:id="rId6"/>
     <p:sldId id="261" r:id="rId7"/>
     <p:sldId id="262" r:id="rId8"/>
+    <p:sldId id="263" r:id="rId9"/>
   </p:sldIdLst>
   <p:notesMasterIdLst>
-    <p:notesMasterId r:id="rId9"/>
+    <p:notesMasterId r:id="rId10"/>
   </p:notesMasterIdLst>
   <p:sldSz cx="12192000" cy="6858000"/>
   <p:notesSz cx="6858000" cy="12192000"/>
@@ -1060,6 +1061,94 @@
             <a:fld id="{F7021451-1387-4CA6-816F-3879F97B5CBC}" type="slidenum">
               <a:rPr lang="en-US"/>
               <a:t>7</a:t>
+            </a:fld>
+            <a:endParaRPr lang="en-US"/>
+          </a:p>
+        </p:txBody>
+      </p:sp>
+    </p:spTree>
+    <p:extLst>
+      <p:ext uri="{BB962C8B-B14F-4D97-AF65-F5344CB8AC3E}">
+        <p14:creationId xmlns:p14="http://schemas.microsoft.com/office/powerpoint/2010/main" val="1024086991"/>
+      </p:ext>
+    </p:extLst>
+  </p:cSld>
+  <p:clrMapOvr>
+    <a:masterClrMapping/>
+  </p:clrMapOvr>
+</p:notes>
+</file>
+
+<file path=ppt/notesSlides/notesSlide8.xml><?xml version="1.0" encoding="utf-8"?>
+<p:notes xmlns:a="http://schemas.openxmlformats.org/drawingml/2006/main" xmlns:r="http://schemas.openxmlformats.org/officeDocument/2006/relationships" xmlns:p="http://schemas.openxmlformats.org/presentationml/2006/main">
+  <p:cSld>
+    <p:spTree>
+      <p:nvGrpSpPr>
+        <p:cNvPr id="1" name=""/>
+        <p:cNvGrpSpPr/>
+        <p:nvPr/>
+      </p:nvGrpSpPr>
+      <p:grpSpPr>
+        <a:xfrm>
+          <a:off x="0" y="0"/>
+          <a:ext cx="0" cy="0"/>
+          <a:chOff x="0" y="0"/>
+          <a:chExt cx="0" cy="0"/>
+        </a:xfrm>
+      </p:grpSpPr>
+      <p:sp>
+        <p:nvSpPr>
+          <p:cNvPr id="2" name="Slide Image Placeholder 1"/>
+          <p:cNvSpPr>
+            <a:spLocks noGrp="1" noRot="1" noChangeAspect="1"/>
+          </p:cNvSpPr>
+          <p:nvPr>
+            <p:ph type="sldImg"/>
+          </p:nvPr>
+        </p:nvSpPr>
+        <p:spPr/>
+      </p:sp>
+      <p:sp>
+        <p:nvSpPr>
+          <p:cNvPr id="3" name="Notes Placeholder 2"/>
+          <p:cNvSpPr>
+            <a:spLocks noGrp="1"/>
+          </p:cNvSpPr>
+          <p:nvPr>
+            <p:ph type="body" idx="1"/>
+          </p:nvPr>
+        </p:nvSpPr>
+        <p:spPr/>
+        <p:txBody>
+          <a:bodyPr/>
+          <a:lstStyle/>
+          <a:p>
+            <a:r>
+              <a:rPr lang="en-US" dirty="0"/>
+              <a:t/>
+            </a:r>
+            <a:endParaRPr lang="en-US" dirty="0"/>
+          </a:p>
+        </p:txBody>
+      </p:sp>
+      <p:sp>
+        <p:nvSpPr>
+          <p:cNvPr id="4" name="Slide Number Placeholder 3"/>
+          <p:cNvSpPr>
+            <a:spLocks noGrp="1"/>
+          </p:cNvSpPr>
+          <p:nvPr>
+            <p:ph type="sldNum" sz="quarter" idx="10"/>
+          </p:nvPr>
+        </p:nvSpPr>
+        <p:spPr/>
+        <p:txBody>
+          <a:bodyPr/>
+          <a:lstStyle/>
+          <a:p>
+            <a:fld id="{F7021451-1387-4CA6-816F-3879F97B5CBC}" type="slidenum">
+              <a:rPr lang="en-US"/>
+              <a:t>8</a:t>
             </a:fld>
             <a:endParaRPr lang="en-US"/>
           </a:p>
@@ -3721,6 +3810,133 @@
                 <a:ea typeface="Microsoft YaHei" pitchFamily="34" charset="-122"/>
                 <a:cs typeface="Microsoft YaHei" pitchFamily="34" charset="-120"/>
               </a:rPr>
+              <a:t>IFIH1 在白质单核中的分布，按病灶分期</a:t>
+            </a:r>
+            <a:endParaRPr lang="en-US" sz="2500" dirty="0"/>
+          </a:p>
+        </p:txBody>
+      </p:sp>
+      <p:pic>
+        <p:nvPicPr>
+          <p:cNvPr id="4" name="Image 0" descr="/home/user/aaa/results/mda5/figs/fig_umap_wm.png">    </p:cNvPr>
+          <p:cNvPicPr>
+            <a:picLocks noChangeAspect="1"/>
+          </p:cNvPicPr>
+          <p:nvPr/>
+        </p:nvPicPr>
+        <p:blipFill>
+          <a:blip r:embed="rId1"/>
+          <a:stretch>
+            <a:fillRect/>
+          </a:stretch>
+        </p:blipFill>
+        <p:spPr>
+          <a:xfrm>
+            <a:off x="411480" y="1942346"/>
+            <a:ext cx="11384280" cy="3549379"/>
+          </a:xfrm>
+          <a:prstGeom prst="rect">
+            <a:avLst/>
+          </a:prstGeom>
+        </p:spPr>
+      </p:pic>
+    </p:spTree>
+  </p:cSld>
+  <p:clrMapOvr>
+    <a:masterClrMapping/>
+  </p:clrMapOvr>
+</p:sld>
+</file>
+
+<file path=ppt/slides/slide8.xml><?xml version="1.0" encoding="utf-8"?>
+<p:sld xmlns:a="http://schemas.openxmlformats.org/drawingml/2006/main" xmlns:r="http://schemas.openxmlformats.org/officeDocument/2006/relationships" xmlns:p="http://schemas.openxmlformats.org/presentationml/2006/main">
+  <p:cSld name="Slide 8">
+    <p:spTree>
+      <p:nvGrpSpPr>
+        <p:cNvPr id="1" name=""/>
+        <p:cNvGrpSpPr/>
+        <p:nvPr/>
+      </p:nvGrpSpPr>
+      <p:grpSpPr>
+        <a:xfrm>
+          <a:off x="0" y="0"/>
+          <a:ext cx="0" cy="0"/>
+          <a:chOff x="0" y="0"/>
+          <a:chExt cx="0" cy="0"/>
+        </a:xfrm>
+      </p:grpSpPr>
+      <p:sp>
+        <p:nvSpPr>
+          <p:cNvPr id="2" name="Text 0"/>
+          <p:cNvSpPr txBox="1"/>
+          <p:nvPr/>
+        </p:nvSpPr>
+        <p:spPr>
+          <a:xfrm>
+            <a:off x="11430000" y="6355080"/>
+            <a:ext cx="457200" cy="274320"/>
+          </a:xfrm>
+          <a:prstGeom prst="rect">
+            <a:avLst/>
+          </a:prstGeom>
+          <a:noFill/>
+          <a:ln/>
+        </p:spPr>
+        <p:txBody>
+          <a:bodyPr wrap="square" lIns="0" tIns="0" rIns="0" bIns="0" rtlCol="0" anchor="ctr"/>
+          <a:lstStyle/>
+          <a:p>
+            <a:pPr algn="r" indent="0" marL="0">
+              <a:buNone/>
+            </a:pPr>
+            <a:r>
+              <a:rPr lang="en-US" sz="1000" dirty="0">
+                <a:solidFill>
+                  <a:srgbClr val="6E6E6E"/>
+                </a:solidFill>
+                <a:latin typeface="Calibri" pitchFamily="34" charset="0"/>
+                <a:ea typeface="Calibri" pitchFamily="34" charset="-122"/>
+                <a:cs typeface="Calibri" pitchFamily="34" charset="-120"/>
+              </a:rPr>
+              <a:t>7</a:t>
+            </a:r>
+            <a:endParaRPr lang="en-US" sz="1000" dirty="0"/>
+          </a:p>
+        </p:txBody>
+      </p:sp>
+      <p:sp>
+        <p:nvSpPr>
+          <p:cNvPr id="3" name="Text 1"/>
+          <p:cNvSpPr txBox="1"/>
+          <p:nvPr/>
+        </p:nvSpPr>
+        <p:spPr>
+          <a:xfrm>
+            <a:off x="548640" y="274320"/>
+            <a:ext cx="11064240" cy="475488"/>
+          </a:xfrm>
+          <a:prstGeom prst="rect">
+            <a:avLst/>
+          </a:prstGeom>
+          <a:noFill/>
+          <a:ln/>
+        </p:spPr>
+        <p:txBody>
+          <a:bodyPr wrap="square" lIns="0" tIns="0" rIns="0" bIns="0" rtlCol="0" anchor="ctr"/>
+          <a:lstStyle/>
+          <a:p>
+            <a:pPr indent="0" marL="0">
+              <a:buNone/>
+            </a:pPr>
+            <a:r>
+              <a:rPr lang="en-US" sz="2500" b="1" dirty="0">
+                <a:solidFill>
+                  <a:srgbClr val="000000"/>
+                </a:solidFill>
+                <a:latin typeface="Microsoft YaHei" pitchFamily="34" charset="0"/>
+                <a:ea typeface="Microsoft YaHei" pitchFamily="34" charset="-122"/>
+                <a:cs typeface="Microsoft YaHei" pitchFamily="34" charset="-120"/>
+              </a:rPr>
               <a:t>按脱髓鞘病灶分期，每一期与对照比较</a:t>
             </a:r>
             <a:endParaRPr lang="en-US" sz="2500" dirty="0"/>

--- a/results/mda5/MDA5_IFIH1_人脑与MS.pptx
+++ b/results/mda5/MDA5_IFIH1_人脑与MS.pptx
@@ -3832,8 +3832,8 @@
         </p:blipFill>
         <p:spPr>
           <a:xfrm>
-            <a:off x="411480" y="1942346"/>
-            <a:ext cx="11384280" cy="3549379"/>
+            <a:off x="935143" y="960120"/>
+            <a:ext cx="10336955" cy="5513832"/>
           </a:xfrm>
           <a:prstGeom prst="rect">
             <a:avLst/>

--- a/results/mda5/MDA5_IFIH1_人脑与MS.pptx
+++ b/results/mda5/MDA5_IFIH1_人脑与MS.pptx
@@ -3324,8 +3324,8 @@
         </p:blipFill>
         <p:spPr>
           <a:xfrm>
-            <a:off x="411480" y="1560792"/>
-            <a:ext cx="11384280" cy="4312488"/>
+            <a:off x="411480" y="1418793"/>
+            <a:ext cx="11384280" cy="4596485"/>
           </a:xfrm>
           <a:prstGeom prst="rect">
             <a:avLst/>
@@ -3451,8 +3451,8 @@
         </p:blipFill>
         <p:spPr>
           <a:xfrm>
-            <a:off x="1024677" y="960120"/>
-            <a:ext cx="10157885" cy="5513832"/>
+            <a:off x="1365895" y="960120"/>
+            <a:ext cx="9475451" cy="5513832"/>
           </a:xfrm>
           <a:prstGeom prst="rect">
             <a:avLst/>
@@ -3578,8 +3578,8 @@
         </p:blipFill>
         <p:spPr>
           <a:xfrm>
-            <a:off x="870981" y="960120"/>
-            <a:ext cx="10465278" cy="5513832"/>
+            <a:off x="1114092" y="960120"/>
+            <a:ext cx="9979056" cy="5513832"/>
           </a:xfrm>
           <a:prstGeom prst="rect">
             <a:avLst/>
@@ -3705,8 +3705,8 @@
         </p:blipFill>
         <p:spPr>
           <a:xfrm>
-            <a:off x="1604529" y="960120"/>
-            <a:ext cx="8998183" cy="5513832"/>
+            <a:off x="1716080" y="960120"/>
+            <a:ext cx="8775080" cy="5513832"/>
           </a:xfrm>
           <a:prstGeom prst="rect">
             <a:avLst/>
@@ -3832,8 +3832,8 @@
         </p:blipFill>
         <p:spPr>
           <a:xfrm>
-            <a:off x="935143" y="960120"/>
-            <a:ext cx="10336955" cy="5513832"/>
+            <a:off x="814806" y="960120"/>
+            <a:ext cx="10577628" cy="5513832"/>
           </a:xfrm>
           <a:prstGeom prst="rect">
             <a:avLst/>
@@ -3959,8 +3959,8 @@
         </p:blipFill>
         <p:spPr>
           <a:xfrm>
-            <a:off x="681975" y="960120"/>
-            <a:ext cx="10843290" cy="5513832"/>
+            <a:off x="411546" y="960120"/>
+            <a:ext cx="11384147" cy="5513832"/>
           </a:xfrm>
           <a:prstGeom prst="rect">
             <a:avLst/>
